--- a/presentation/ContextAI_Evaluation.pptx
+++ b/presentation/ContextAI_Evaluation.pptx
@@ -17,20 +17,6 @@
     <p:sldId id="265" r:id="rId16"/>
     <p:sldId id="266" r:id="rId17"/>
     <p:sldId id="267" r:id="rId18"/>
-    <p:sldId id="268" r:id="rId19"/>
-    <p:sldId id="269" r:id="rId20"/>
-    <p:sldId id="270" r:id="rId21"/>
-    <p:sldId id="271" r:id="rId22"/>
-    <p:sldId id="272" r:id="rId23"/>
-    <p:sldId id="273" r:id="rId24"/>
-    <p:sldId id="274" r:id="rId25"/>
-    <p:sldId id="275" r:id="rId26"/>
-    <p:sldId id="276" r:id="rId27"/>
-    <p:sldId id="277" r:id="rId28"/>
-    <p:sldId id="278" r:id="rId29"/>
-    <p:sldId id="279" r:id="rId30"/>
-    <p:sldId id="280" r:id="rId31"/>
-    <p:sldId id="281" r:id="rId32"/>
   </p:sldIdLst>
   <p:sldSz cx="12191695" cy="6858000" type="screen4x3"/>
   <p:notesSz cx="6858000" cy="9144000"/>
@@ -3129,7 +3115,7 @@
         </p:nvSpPr>
         <p:spPr>
           <a:xfrm>
-            <a:off x="914400" y="1737360"/>
+            <a:off x="914400" y="1234440"/>
             <a:ext cx="10332720" cy="1737360"/>
           </a:xfrm>
           <a:prstGeom prst="rect">
@@ -3145,11 +3131,11 @@
           <a:p>
             <a:pPr algn="ctr">
               <a:lnSpc>
-                <a:spcPct val="115000"/>
+                <a:spcPct val="112000"/>
               </a:lnSpc>
             </a:pPr>
             <a:r>
-              <a:rPr sz="4000" b="1" i="0">
+              <a:rPr sz="3800" b="1" i="0">
                 <a:solidFill>
                   <a:srgbClr val="FFFFFF"/>
                 </a:solidFill>
@@ -3161,11 +3147,11 @@
           <a:p>
             <a:pPr algn="ctr">
               <a:lnSpc>
-                <a:spcPct val="115000"/>
+                <a:spcPct val="112000"/>
               </a:lnSpc>
             </a:pPr>
             <a:r>
-              <a:rPr sz="4000" b="1" i="0">
+              <a:rPr sz="3800" b="1" i="0">
                 <a:solidFill>
                   <a:srgbClr val="FFFFFF"/>
                 </a:solidFill>
@@ -3184,7 +3170,7 @@
         </p:nvSpPr>
         <p:spPr>
           <a:xfrm>
-            <a:off x="0" y="3794760"/>
+            <a:off x="0" y="3246120"/>
             <a:ext cx="12191695" cy="54864"/>
           </a:xfrm>
           <a:prstGeom prst="rect">
@@ -3227,8 +3213,8 @@
         </p:nvSpPr>
         <p:spPr>
           <a:xfrm>
-            <a:off x="1371600" y="4023360"/>
-            <a:ext cx="9418320" cy="548640"/>
+            <a:off x="1371600" y="3474720"/>
+            <a:ext cx="9418320" cy="502920"/>
           </a:xfrm>
           <a:prstGeom prst="rect">
             <a:avLst/>
@@ -3243,30 +3229,228 @@
           <a:p>
             <a:pPr algn="ctr">
               <a:lnSpc>
-                <a:spcPct val="115000"/>
+                <a:spcPct val="112000"/>
               </a:lnSpc>
             </a:pPr>
             <a:r>
-              <a:rPr sz="1900" b="0" i="1">
+              <a:rPr sz="1800" b="0" i="1">
                 <a:solidFill>
                   <a:srgbClr val="94A3B8"/>
                 </a:solidFill>
                 <a:latin typeface="Calibri"/>
               </a:rPr>
-              <a:t>Putting ContextAI's code-graph tool to the test with a real AI coding agent</a:t>
-            </a:r>
-          </a:p>
-        </p:txBody>
-      </p:sp>
-      <p:sp>
-        <p:nvSpPr>
-          <p:cNvPr id="5" name="TextBox 4"/>
+              <a:t>The whole project, in one deck: three repos, one pipeline, one real answer</a:t>
+            </a:r>
+          </a:p>
+        </p:txBody>
+      </p:sp>
+      <p:sp>
+        <p:nvSpPr>
+          <p:cNvPr id="5" name="Rectangle 4"/>
+          <p:cNvSpPr/>
+          <p:nvPr/>
+        </p:nvSpPr>
+        <p:spPr>
+          <a:xfrm>
+            <a:off x="1386687" y="4206240"/>
+            <a:ext cx="2926080" cy="914400"/>
+          </a:xfrm>
+          <a:prstGeom prst="rect">
+            <a:avLst/>
+          </a:prstGeom>
+          <a:solidFill>
+            <a:srgbClr val="24243E"/>
+          </a:solidFill>
+          <a:ln w="22225">
+            <a:solidFill>
+              <a:srgbClr val="2CA02C"/>
+            </a:solidFill>
+          </a:ln>
+        </p:spPr>
+        <p:style>
+          <a:lnRef idx="1">
+            <a:schemeClr val="accent1"/>
+          </a:lnRef>
+          <a:fillRef idx="3">
+            <a:schemeClr val="accent1"/>
+          </a:fillRef>
+          <a:effectRef idx="2">
+            <a:schemeClr val="accent1"/>
+          </a:effectRef>
+          <a:fontRef idx="minor">
+            <a:schemeClr val="lt1"/>
+          </a:fontRef>
+        </p:style>
+        <p:txBody>
+          <a:bodyPr rtlCol="0" anchor="ctr" wrap="square"/>
+          <a:lstStyle/>
+          <a:p>
+            <a:pPr algn="ctr"/>
+            <a:r>
+              <a:rPr sz="1600" b="1">
+                <a:solidFill>
+                  <a:srgbClr val="FFFFFF"/>
+                </a:solidFill>
+                <a:latin typeface="Calibri"/>
+              </a:rPr>
+              <a:t>ContextAI</a:t>
+            </a:r>
+          </a:p>
+          <a:p>
+            <a:pPr algn="ctr"/>
+            <a:r>
+              <a:rPr sz="1150" i="1">
+                <a:solidFill>
+                  <a:srgbClr val="2CA02C"/>
+                </a:solidFill>
+                <a:latin typeface="Calibri"/>
+              </a:rPr>
+              <a:t>code-graph engine</a:t>
+            </a:r>
+          </a:p>
+        </p:txBody>
+      </p:sp>
+      <p:sp>
+        <p:nvSpPr>
+          <p:cNvPr id="6" name="Rectangle 5"/>
+          <p:cNvSpPr/>
+          <p:nvPr/>
+        </p:nvSpPr>
+        <p:spPr>
+          <a:xfrm>
+            <a:off x="4632807" y="4206240"/>
+            <a:ext cx="2926080" cy="914400"/>
+          </a:xfrm>
+          <a:prstGeom prst="rect">
+            <a:avLst/>
+          </a:prstGeom>
+          <a:solidFill>
+            <a:srgbClr val="24243E"/>
+          </a:solidFill>
+          <a:ln w="22225">
+            <a:solidFill>
+              <a:srgbClr val="2563EB"/>
+            </a:solidFill>
+          </a:ln>
+        </p:spPr>
+        <p:style>
+          <a:lnRef idx="1">
+            <a:schemeClr val="accent1"/>
+          </a:lnRef>
+          <a:fillRef idx="3">
+            <a:schemeClr val="accent1"/>
+          </a:fillRef>
+          <a:effectRef idx="2">
+            <a:schemeClr val="accent1"/>
+          </a:effectRef>
+          <a:fontRef idx="minor">
+            <a:schemeClr val="lt1"/>
+          </a:fontRef>
+        </p:style>
+        <p:txBody>
+          <a:bodyPr rtlCol="0" anchor="ctr" wrap="square"/>
+          <a:lstStyle/>
+          <a:p>
+            <a:pPr algn="ctr"/>
+            <a:r>
+              <a:rPr sz="1600" b="1">
+                <a:solidFill>
+                  <a:srgbClr val="FFFFFF"/>
+                </a:solidFill>
+                <a:latin typeface="Calibri"/>
+              </a:rPr>
+              <a:t>ConnectContext</a:t>
+            </a:r>
+          </a:p>
+          <a:p>
+            <a:pPr algn="ctr"/>
+            <a:r>
+              <a:rPr sz="1150" i="1">
+                <a:solidFill>
+                  <a:srgbClr val="2563EB"/>
+                </a:solidFill>
+                <a:latin typeface="Calibri"/>
+              </a:rPr>
+              <a:t>MCP bridge</a:t>
+            </a:r>
+          </a:p>
+        </p:txBody>
+      </p:sp>
+      <p:sp>
+        <p:nvSpPr>
+          <p:cNvPr id="7" name="Rectangle 6"/>
+          <p:cNvSpPr/>
+          <p:nvPr/>
+        </p:nvSpPr>
+        <p:spPr>
+          <a:xfrm>
+            <a:off x="7878927" y="4206240"/>
+            <a:ext cx="2926080" cy="914400"/>
+          </a:xfrm>
+          <a:prstGeom prst="rect">
+            <a:avLst/>
+          </a:prstGeom>
+          <a:solidFill>
+            <a:srgbClr val="24243E"/>
+          </a:solidFill>
+          <a:ln w="22225">
+            <a:solidFill>
+              <a:srgbClr val="D97706"/>
+            </a:solidFill>
+          </a:ln>
+        </p:spPr>
+        <p:style>
+          <a:lnRef idx="1">
+            <a:schemeClr val="accent1"/>
+          </a:lnRef>
+          <a:fillRef idx="3">
+            <a:schemeClr val="accent1"/>
+          </a:fillRef>
+          <a:effectRef idx="2">
+            <a:schemeClr val="accent1"/>
+          </a:effectRef>
+          <a:fontRef idx="minor">
+            <a:schemeClr val="lt1"/>
+          </a:fontRef>
+        </p:style>
+        <p:txBody>
+          <a:bodyPr rtlCol="0" anchor="ctr" wrap="square"/>
+          <a:lstStyle/>
+          <a:p>
+            <a:pPr algn="ctr"/>
+            <a:r>
+              <a:rPr sz="1600" b="1">
+                <a:solidFill>
+                  <a:srgbClr val="FFFFFF"/>
+                </a:solidFill>
+                <a:latin typeface="Calibri"/>
+              </a:rPr>
+              <a:t>Test_context</a:t>
+            </a:r>
+          </a:p>
+          <a:p>
+            <a:pPr algn="ctr"/>
+            <a:r>
+              <a:rPr sz="1150" i="1">
+                <a:solidFill>
+                  <a:srgbClr val="D97706"/>
+                </a:solidFill>
+                <a:latin typeface="Calibri"/>
+              </a:rPr>
+              <a:t>the evaluation</a:t>
+            </a:r>
+          </a:p>
+        </p:txBody>
+      </p:sp>
+      <p:sp>
+        <p:nvSpPr>
+          <p:cNvPr id="8" name="TextBox 7"/>
           <p:cNvSpPr txBox="1"/>
           <p:nvPr/>
         </p:nvSpPr>
         <p:spPr>
           <a:xfrm>
-            <a:off x="1371600" y="5943600"/>
+            <a:off x="1371600" y="5623560"/>
             <a:ext cx="9418320" cy="457200"/>
           </a:xfrm>
           <a:prstGeom prst="rect">
@@ -3282,7 +3466,7 @@
           <a:p>
             <a:pPr algn="ctr">
               <a:lnSpc>
-                <a:spcPct val="115000"/>
+                <a:spcPct val="112000"/>
               </a:lnSpc>
             </a:pPr>
             <a:r>
@@ -3292,7 +3476,7 @@
                 </a:solidFill>
                 <a:latin typeface="Calibri"/>
               </a:rPr>
-              <a:t>A hands-on evaluation — 48 real questions, 4 real codebases, 288 AI runs</a:t>
+              <a:t>48 real questions · 4 real codebases · 288 real AI runs</a:t>
             </a:r>
           </a:p>
         </p:txBody>
@@ -3331,8 +3515,8 @@
         </p:nvSpPr>
         <p:spPr>
           <a:xfrm>
-            <a:off x="502920" y="384048"/>
-            <a:ext cx="11155680" cy="822960"/>
+            <a:off x="502920" y="292608"/>
+            <a:ext cx="11155680" cy="685800"/>
           </a:xfrm>
           <a:prstGeom prst="rect">
             <a:avLst/>
@@ -3347,17 +3531,17 @@
           <a:p>
             <a:pPr algn="l">
               <a:lnSpc>
-                <a:spcPct val="115000"/>
+                <a:spcPct val="112000"/>
               </a:lnSpc>
             </a:pPr>
             <a:r>
-              <a:rPr sz="3200" b="1" i="0">
+              <a:rPr sz="2900" b="1" i="0">
                 <a:solidFill>
                   <a:srgbClr val="1A1A2E"/>
                 </a:solidFill>
                 <a:latin typeface="Calibri"/>
               </a:rPr>
-              <a:t>How we connected the map to the AI</a:t>
+              <a:t>Why didn't it help more?</a:t>
             </a:r>
           </a:p>
         </p:txBody>
@@ -3370,14 +3554,14 @@
         </p:nvSpPr>
         <p:spPr>
           <a:xfrm>
-            <a:off x="502920" y="1170432"/>
+            <a:off x="502920" y="950976"/>
             <a:ext cx="2011680" cy="50800"/>
           </a:xfrm>
           <a:prstGeom prst="rect">
             <a:avLst/>
           </a:prstGeom>
           <a:solidFill>
-            <a:srgbClr val="2CA02C"/>
+            <a:srgbClr val="2563EB"/>
           </a:solidFill>
           <a:ln>
             <a:noFill/>
@@ -3406,30 +3590,45 @@
           </a:p>
         </p:txBody>
       </p:sp>
-      <p:pic>
-        <p:nvPicPr>
-          <p:cNvPr id="4" name="Picture 3" descr="mcp_connection.png"/>
-          <p:cNvPicPr>
-            <a:picLocks noChangeAspect="1"/>
-          </p:cNvPicPr>
+      <p:sp>
+        <p:nvSpPr>
+          <p:cNvPr id="4" name="TextBox 3"/>
+          <p:cNvSpPr txBox="1"/>
           <p:nvPr/>
-        </p:nvPicPr>
-        <p:blipFill>
-          <a:blip r:embed="rId2"/>
-          <a:stretch>
-            <a:fillRect/>
-          </a:stretch>
-        </p:blipFill>
-        <p:spPr>
-          <a:xfrm>
-            <a:off x="1830472" y="1691640"/>
-            <a:ext cx="8500576" cy="4754880"/>
-          </a:xfrm>
-          <a:prstGeom prst="rect">
-            <a:avLst/>
-          </a:prstGeom>
-        </p:spPr>
-      </p:pic>
+        </p:nvSpPr>
+        <p:spPr>
+          <a:xfrm>
+            <a:off x="548640" y="1645920"/>
+            <a:ext cx="5394960" cy="457200"/>
+          </a:xfrm>
+          <a:prstGeom prst="rect">
+            <a:avLst/>
+          </a:prstGeom>
+          <a:noFill/>
+        </p:spPr>
+        <p:txBody>
+          <a:bodyPr wrap="square" anchor="t">
+            <a:spAutoFit/>
+          </a:bodyPr>
+          <a:lstStyle/>
+          <a:p>
+            <a:pPr algn="l">
+              <a:lnSpc>
+                <a:spcPct val="112000"/>
+              </a:lnSpc>
+            </a:pPr>
+            <a:r>
+              <a:rPr sz="1800" b="1" i="0">
+                <a:solidFill>
+                  <a:srgbClr val="2563EB"/>
+                </a:solidFill>
+                <a:latin typeface="Calibri"/>
+              </a:rPr>
+              <a:t>1. The referee was sometimes wrong</a:t>
+            </a:r>
+          </a:p>
+        </p:txBody>
+      </p:sp>
       <p:sp>
         <p:nvSpPr>
           <p:cNvPr id="5" name="TextBox 4"/>
@@ -3438,8 +3637,115 @@
         </p:nvSpPr>
         <p:spPr>
           <a:xfrm>
-            <a:off x="502920" y="6473952"/>
-            <a:ext cx="8229600" cy="320040"/>
+            <a:off x="548640" y="2148840"/>
+            <a:ext cx="5394960" cy="2926080"/>
+          </a:xfrm>
+          <a:prstGeom prst="rect">
+            <a:avLst/>
+          </a:prstGeom>
+          <a:noFill/>
+        </p:spPr>
+        <p:txBody>
+          <a:bodyPr wrap="square">
+            <a:spAutoFit/>
+          </a:bodyPr>
+          <a:lstStyle/>
+          <a:p>
+            <a:pPr>
+              <a:lnSpc>
+                <a:spcPct val="105000"/>
+              </a:lnSpc>
+              <a:spcAft>
+                <a:spcPts val="1000"/>
+              </a:spcAft>
+            </a:pPr>
+            <a:r>
+              <a:rPr sz="1450" b="1">
+                <a:solidFill>
+                  <a:srgbClr val="2CA02C"/>
+                </a:solidFill>
+                <a:latin typeface="Calibri"/>
+              </a:rPr>
+              <a:t>▸  </a:t>
+            </a:r>
+            <a:r>
+              <a:rPr sz="1450">
+                <a:solidFill>
+                  <a:srgbClr val="333333"/>
+                </a:solidFill>
+                <a:latin typeface="Calibri"/>
+              </a:rPr>
+              <a:t>We hand-checked one “loss” for the map: the AI called a buffer “thread-local” and the judge marked it wrong.</a:t>
+            </a:r>
+          </a:p>
+          <a:p>
+            <a:pPr>
+              <a:lnSpc>
+                <a:spcPct val="105000"/>
+              </a:lnSpc>
+              <a:spcAft>
+                <a:spcPts val="1000"/>
+              </a:spcAft>
+            </a:pPr>
+            <a:r>
+              <a:rPr sz="1450" b="1">
+                <a:solidFill>
+                  <a:srgbClr val="2CA02C"/>
+                </a:solidFill>
+                <a:latin typeface="Calibri"/>
+              </a:rPr>
+              <a:t>▸  </a:t>
+            </a:r>
+            <a:r>
+              <a:rPr sz="1450">
+                <a:solidFill>
+                  <a:srgbClr val="333333"/>
+                </a:solidFill>
+                <a:latin typeface="Calibri"/>
+              </a:rPr>
+              <a:t>Rich's actual source confirms the AI was right — the judge made the mistake.</a:t>
+            </a:r>
+          </a:p>
+          <a:p>
+            <a:pPr>
+              <a:lnSpc>
+                <a:spcPct val="105000"/>
+              </a:lnSpc>
+              <a:spcAft>
+                <a:spcPts val="1000"/>
+              </a:spcAft>
+            </a:pPr>
+            <a:r>
+              <a:rPr sz="1450" b="1">
+                <a:solidFill>
+                  <a:srgbClr val="2CA02C"/>
+                </a:solidFill>
+                <a:latin typeface="Calibri"/>
+              </a:rPr>
+              <a:t>▸  </a:t>
+            </a:r>
+            <a:r>
+              <a:rPr sz="1450">
+                <a:solidFill>
+                  <a:srgbClr val="333333"/>
+                </a:solidFill>
+                <a:latin typeface="Calibri"/>
+              </a:rPr>
+              <a:t>With 58/144 judged queries already ties, the true gap is likely smaller than the raw 45.1% vs. 54.9% split suggests.</a:t>
+            </a:r>
+          </a:p>
+        </p:txBody>
+      </p:sp>
+      <p:sp>
+        <p:nvSpPr>
+          <p:cNvPr id="6" name="TextBox 5"/>
+          <p:cNvSpPr txBox="1"/>
+          <p:nvPr/>
+        </p:nvSpPr>
+        <p:spPr>
+          <a:xfrm>
+            <a:off x="6309360" y="1645920"/>
+            <a:ext cx="5349240" cy="457200"/>
           </a:xfrm>
           <a:prstGeom prst="rect">
             <a:avLst/>
@@ -3454,17 +3760,217 @@
           <a:p>
             <a:pPr algn="l">
               <a:lnSpc>
-                <a:spcPct val="115000"/>
+                <a:spcPct val="112000"/>
               </a:lnSpc>
             </a:pPr>
             <a:r>
-              <a:rPr sz="1050" b="0" i="0">
+              <a:rPr sz="1800" b="1" i="0">
+                <a:solidFill>
+                  <a:srgbClr val="D97706"/>
+                </a:solidFill>
+                <a:latin typeface="Calibri"/>
+              </a:rPr>
+              <a:t>2. Trusting the map too much</a:t>
+            </a:r>
+          </a:p>
+        </p:txBody>
+      </p:sp>
+      <p:sp>
+        <p:nvSpPr>
+          <p:cNvPr id="7" name="TextBox 6"/>
+          <p:cNvSpPr txBox="1"/>
+          <p:nvPr/>
+        </p:nvSpPr>
+        <p:spPr>
+          <a:xfrm>
+            <a:off x="6309360" y="2148840"/>
+            <a:ext cx="5349240" cy="2926080"/>
+          </a:xfrm>
+          <a:prstGeom prst="rect">
+            <a:avLst/>
+          </a:prstGeom>
+          <a:noFill/>
+        </p:spPr>
+        <p:txBody>
+          <a:bodyPr wrap="square">
+            <a:spAutoFit/>
+          </a:bodyPr>
+          <a:lstStyle/>
+          <a:p>
+            <a:pPr>
+              <a:lnSpc>
+                <a:spcPct val="105000"/>
+              </a:lnSpc>
+              <a:spcAft>
+                <a:spcPts val="1000"/>
+              </a:spcAft>
+            </a:pPr>
+            <a:r>
+              <a:rPr sz="1450" b="1">
+                <a:solidFill>
+                  <a:srgbClr val="2CA02C"/>
+                </a:solidFill>
+                <a:latin typeface="Calibri"/>
+              </a:rPr>
+              <a:t>▸  </a:t>
+            </a:r>
+            <a:r>
+              <a:rPr sz="1450">
+                <a:solidFill>
+                  <a:srgbClr val="333333"/>
+                </a:solidFill>
+                <a:latin typeface="Calibri"/>
+              </a:rPr>
+              <a:t>The map is honest about its own gaps — list_gaps flags exactly what static analysis couldn't resolve.</a:t>
+            </a:r>
+          </a:p>
+          <a:p>
+            <a:pPr>
+              <a:lnSpc>
+                <a:spcPct val="105000"/>
+              </a:lnSpc>
+              <a:spcAft>
+                <a:spcPts val="1000"/>
+              </a:spcAft>
+            </a:pPr>
+            <a:r>
+              <a:rPr sz="1450" b="1">
+                <a:solidFill>
+                  <a:srgbClr val="2CA02C"/>
+                </a:solidFill>
+                <a:latin typeface="Calibri"/>
+              </a:rPr>
+              <a:t>▸  </a:t>
+            </a:r>
+            <a:r>
+              <a:rPr sz="1450">
+                <a:solidFill>
+                  <a:srgbClr val="333333"/>
+                </a:solidFill>
+                <a:latin typeface="Calibri"/>
+              </a:rPr>
+              <a:t>But when the AI treated the map's answer as complete instead of double-checking, it sometimes missed real connections a plain search would catch.</a:t>
+            </a:r>
+          </a:p>
+          <a:p>
+            <a:pPr>
+              <a:lnSpc>
+                <a:spcPct val="105000"/>
+              </a:lnSpc>
+              <a:spcAft>
+                <a:spcPts val="1000"/>
+              </a:spcAft>
+            </a:pPr>
+            <a:r>
+              <a:rPr sz="1450" b="1">
+                <a:solidFill>
+                  <a:srgbClr val="2CA02C"/>
+                </a:solidFill>
+                <a:latin typeface="Calibri"/>
+              </a:rPr>
+              <a:t>▸  </a:t>
+            </a:r>
+            <a:r>
+              <a:rPr sz="1450">
+                <a:solidFill>
+                  <a:srgbClr val="333333"/>
+                </a:solidFill>
+                <a:latin typeface="Calibri"/>
+              </a:rPr>
+              <a:t>Signature: when one arm's answer was a strict subset of the other's, it was the map-assisted arm 19 times out of 20.</a:t>
+            </a:r>
+          </a:p>
+        </p:txBody>
+      </p:sp>
+      <p:sp>
+        <p:nvSpPr>
+          <p:cNvPr id="8" name="Rectangle 7"/>
+          <p:cNvSpPr/>
+          <p:nvPr/>
+        </p:nvSpPr>
+        <p:spPr>
+          <a:xfrm>
+            <a:off x="1188720" y="5257800"/>
+            <a:ext cx="9784080" cy="1051560"/>
+          </a:xfrm>
+          <a:prstGeom prst="rect">
+            <a:avLst/>
+          </a:prstGeom>
+          <a:solidFill>
+            <a:srgbClr val="F7F8FA"/>
+          </a:solidFill>
+          <a:ln w="31750">
+            <a:solidFill>
+              <a:srgbClr val="2CA02C"/>
+            </a:solidFill>
+          </a:ln>
+        </p:spPr>
+        <p:style>
+          <a:lnRef idx="1">
+            <a:schemeClr val="accent1"/>
+          </a:lnRef>
+          <a:fillRef idx="3">
+            <a:schemeClr val="accent1"/>
+          </a:fillRef>
+          <a:effectRef idx="2">
+            <a:schemeClr val="accent1"/>
+          </a:effectRef>
+          <a:fontRef idx="minor">
+            <a:schemeClr val="lt1"/>
+          </a:fontRef>
+        </p:style>
+        <p:txBody>
+          <a:bodyPr rtlCol="0" anchor="ctr" wrap="square"/>
+          <a:lstStyle/>
+          <a:p>
+            <a:pPr algn="ctr"/>
+            <a:r>
+              <a:rPr sz="1550" b="1">
+                <a:solidFill>
+                  <a:srgbClr val="1A1A2E"/>
+                </a:solidFill>
+                <a:latin typeface="Calibri"/>
+              </a:rPr>
+              <a:t>Bottom line: giving today's agent an extra map tool didn't clearly make it better — it used the tool eagerly, but that didn't translate into better answers.</a:t>
+            </a:r>
+          </a:p>
+        </p:txBody>
+      </p:sp>
+      <p:sp>
+        <p:nvSpPr>
+          <p:cNvPr id="9" name="TextBox 8"/>
+          <p:cNvSpPr txBox="1"/>
+          <p:nvPr/>
+        </p:nvSpPr>
+        <p:spPr>
+          <a:xfrm>
+            <a:off x="502920" y="6510528"/>
+            <a:ext cx="8229600" cy="292608"/>
+          </a:xfrm>
+          <a:prstGeom prst="rect">
+            <a:avLst/>
+          </a:prstGeom>
+          <a:noFill/>
+        </p:spPr>
+        <p:txBody>
+          <a:bodyPr wrap="square" anchor="t">
+            <a:spAutoFit/>
+          </a:bodyPr>
+          <a:lstStyle/>
+          <a:p>
+            <a:pPr algn="l">
+              <a:lnSpc>
+                <a:spcPct val="112000"/>
+              </a:lnSpc>
+            </a:pPr>
+            <a:r>
+              <a:rPr sz="1000" b="0" i="0">
                 <a:solidFill>
                   <a:srgbClr val="AAAAAA"/>
                 </a:solidFill>
                 <a:latin typeface="Calibri"/>
               </a:rPr>
-              <a:t>Part 2 — What We Built</a:t>
+              <a:t>Part 5 — Why, and What's Next</a:t>
             </a:r>
           </a:p>
         </p:txBody>
@@ -3483,7 +3989,7 @@
     <p:bg>
       <p:bgPr>
         <a:solidFill>
-          <a:srgbClr val="FFFFFF"/>
+          <a:srgbClr val="1A1A2E"/>
         </a:solidFill>
         <a:effectLst/>
       </p:bgPr>
@@ -3503,8 +4009,8 @@
         </p:nvSpPr>
         <p:spPr>
           <a:xfrm>
-            <a:off x="502920" y="384048"/>
-            <a:ext cx="11155680" cy="822960"/>
+            <a:off x="548640" y="365760"/>
+            <a:ext cx="10515600" cy="594360"/>
           </a:xfrm>
           <a:prstGeom prst="rect">
             <a:avLst/>
@@ -3519,17 +4025,17 @@
           <a:p>
             <a:pPr algn="l">
               <a:lnSpc>
-                <a:spcPct val="115000"/>
+                <a:spcPct val="112000"/>
               </a:lnSpc>
             </a:pPr>
             <a:r>
-              <a:rPr sz="3200" b="1" i="0">
-                <a:solidFill>
-                  <a:srgbClr val="1A1A2E"/>
-                </a:solidFill>
-                <a:latin typeface="Calibri"/>
-              </a:rPr>
-              <a:t>Two real hiccups along the way</a:t>
+              <a:rPr sz="2500" b="1" i="0">
+                <a:solidFill>
+                  <a:srgbClr val="FFFFFF"/>
+                </a:solidFill>
+                <a:latin typeface="Calibri"/>
+              </a:rPr>
+              <a:t>A personal note, and what this means going forward</a:t>
             </a:r>
           </a:p>
         </p:txBody>
@@ -3542,7 +4048,7 @@
         </p:nvSpPr>
         <p:spPr>
           <a:xfrm>
-            <a:off x="502920" y="1170432"/>
+            <a:off x="548640" y="1005840"/>
             <a:ext cx="2011680" cy="50800"/>
           </a:xfrm>
           <a:prstGeom prst="rect">
@@ -3586,8 +4092,8 @@
         </p:nvSpPr>
         <p:spPr>
           <a:xfrm>
-            <a:off x="640080" y="1737360"/>
-            <a:ext cx="5212080" cy="457200"/>
+            <a:off x="548640" y="1280160"/>
+            <a:ext cx="10881360" cy="1600200"/>
           </a:xfrm>
           <a:prstGeom prst="rect">
             <a:avLst/>
@@ -3602,17 +4108,17 @@
           <a:p>
             <a:pPr algn="l">
               <a:lnSpc>
-                <a:spcPct val="115000"/>
+                <a:spcPct val="112000"/>
               </a:lnSpc>
             </a:pPr>
             <a:r>
-              <a:rPr sz="2000" b="1" i="0">
-                <a:solidFill>
-                  <a:srgbClr val="D97706"/>
-                </a:solidFill>
-                <a:latin typeface="Calibri"/>
-              </a:rPr>
-              <a:t>🐛  A hidden naming clash</a:t>
+              <a:rPr sz="1550" b="0" i="0">
+                <a:solidFill>
+                  <a:srgbClr val="DDDDE5"/>
+                </a:solidFill>
+                <a:latin typeface="Calibri"/>
+              </a:rPr>
+              <a:t>When this problem first came up a few months ago, it felt urgent: AI models couldn't hold a big codebase “in their head,” so a pre-built map felt essential. In just those few months, AI models have gotten dramatically better at holding and reasoning over more code at once — that original problem has largely shrunk on its own, just from base models improving.</a:t>
             </a:r>
           </a:p>
         </p:txBody>
@@ -3625,8 +4131,8 @@
         </p:nvSpPr>
         <p:spPr>
           <a:xfrm>
-            <a:off x="640080" y="2286000"/>
-            <a:ext cx="5212080" cy="3474720"/>
+            <a:off x="548640" y="3063240"/>
+            <a:ext cx="10881360" cy="457200"/>
           </a:xfrm>
           <a:prstGeom prst="rect">
             <a:avLst/>
@@ -3641,63 +4147,17 @@
           <a:p>
             <a:pPr algn="l">
               <a:lnSpc>
-                <a:spcPct val="115000"/>
+                <a:spcPct val="112000"/>
               </a:lnSpc>
             </a:pPr>
             <a:r>
-              <a:rPr sz="1600" b="0" i="0">
-                <a:solidFill>
-                  <a:srgbClr val="333333"/>
-                </a:solidFill>
-                <a:latin typeface="Calibri"/>
-              </a:rPr>
-              <a:t>One of the test projects (Flask) happens to have a file named the same as a core Python building block.</a:t>
-            </a:r>
-          </a:p>
-          <a:p>
-            <a:pPr algn="l">
-              <a:lnSpc>
-                <a:spcPct val="115000"/>
-              </a:lnSpc>
-            </a:pPr>
-          </a:p>
-          <a:p>
-            <a:pPr algn="l">
-              <a:lnSpc>
-                <a:spcPct val="115000"/>
-              </a:lnSpc>
-            </a:pPr>
-            <a:r>
-              <a:rPr sz="1600" b="0" i="0">
-                <a:solidFill>
-                  <a:srgbClr val="333333"/>
-                </a:solidFill>
-                <a:latin typeface="Calibri"/>
-              </a:rPr>
-              <a:t>That silently confused the map-building tool and crashed it — a subtle bug that only shows up on that one project.</a:t>
-            </a:r>
-          </a:p>
-          <a:p>
-            <a:pPr algn="l">
-              <a:lnSpc>
-                <a:spcPct val="115000"/>
-              </a:lnSpc>
-            </a:pPr>
-          </a:p>
-          <a:p>
-            <a:pPr algn="l">
-              <a:lnSpc>
-                <a:spcPct val="115000"/>
-              </a:lnSpc>
-            </a:pPr>
-            <a:r>
-              <a:rPr sz="1600" b="0" i="0">
-                <a:solidFill>
-                  <a:srgbClr val="333333"/>
-                </a:solidFill>
-                <a:latin typeface="Calibri"/>
-              </a:rPr>
-              <a:t>We tracked it down and fixed it by keeping the map-builder in its own safe folder, away from the project it's mapping.</a:t>
+              <a:rPr sz="1600" b="1" i="0">
+                <a:solidFill>
+                  <a:srgbClr val="2CA02C"/>
+                </a:solidFill>
+                <a:latin typeface="Calibri"/>
+              </a:rPr>
+              <a:t>What this means going forward:</a:t>
             </a:r>
           </a:p>
         </p:txBody>
@@ -3710,8 +4170,143 @@
         </p:nvSpPr>
         <p:spPr>
           <a:xfrm>
-            <a:off x="6309360" y="1737360"/>
-            <a:ext cx="5212080" cy="457200"/>
+            <a:off x="548640" y="3566160"/>
+            <a:ext cx="10881360" cy="2651760"/>
+          </a:xfrm>
+          <a:prstGeom prst="rect">
+            <a:avLst/>
+          </a:prstGeom>
+          <a:noFill/>
+        </p:spPr>
+        <p:txBody>
+          <a:bodyPr wrap="square">
+            <a:spAutoFit/>
+          </a:bodyPr>
+          <a:lstStyle/>
+          <a:p>
+            <a:pPr>
+              <a:lnSpc>
+                <a:spcPct val="105000"/>
+              </a:lnSpc>
+              <a:spcAft>
+                <a:spcPts val="900"/>
+              </a:spcAft>
+            </a:pPr>
+            <a:r>
+              <a:rPr sz="1450" b="1">
+                <a:solidFill>
+                  <a:srgbClr val="2CA02C"/>
+                </a:solidFill>
+                <a:latin typeface="Calibri"/>
+              </a:rPr>
+              <a:t>▸  </a:t>
+            </a:r>
+            <a:r>
+              <a:rPr sz="1450">
+                <a:solidFill>
+                  <a:srgbClr val="DDDDE5"/>
+                </a:solidFill>
+                <a:latin typeface="Calibri"/>
+              </a:rPr>
+              <a:t>Tools like ContextAI/ConnectContext still have a place — but the bar for “worth adding” keeps rising as base models improve.</a:t>
+            </a:r>
+          </a:p>
+          <a:p>
+            <a:pPr>
+              <a:lnSpc>
+                <a:spcPct val="105000"/>
+              </a:lnSpc>
+              <a:spcAft>
+                <a:spcPts val="900"/>
+              </a:spcAft>
+            </a:pPr>
+            <a:r>
+              <a:rPr sz="1450" b="1">
+                <a:solidFill>
+                  <a:srgbClr val="2CA02C"/>
+                </a:solidFill>
+                <a:latin typeface="Calibri"/>
+              </a:rPr>
+              <a:t>▸  </a:t>
+            </a:r>
+            <a:r>
+              <a:rPr sz="1450">
+                <a:solidFill>
+                  <a:srgbClr val="DDDDE5"/>
+                </a:solidFill>
+                <a:latin typeface="Calibri"/>
+              </a:rPr>
+              <a:t>The AI should be nudged to double-check the map's answer, not trust it outright — especially for “list everything” questions.</a:t>
+            </a:r>
+          </a:p>
+          <a:p>
+            <a:pPr>
+              <a:lnSpc>
+                <a:spcPct val="105000"/>
+              </a:lnSpc>
+              <a:spcAft>
+                <a:spcPts val="900"/>
+              </a:spcAft>
+            </a:pPr>
+            <a:r>
+              <a:rPr sz="1450" b="1">
+                <a:solidFill>
+                  <a:srgbClr val="2CA02C"/>
+                </a:solidFill>
+                <a:latin typeface="Calibri"/>
+              </a:rPr>
+              <a:t>▸  </a:t>
+            </a:r>
+            <a:r>
+              <a:rPr sz="1450">
+                <a:solidFill>
+                  <a:srgbClr val="DDDDE5"/>
+                </a:solidFill>
+                <a:latin typeface="Calibri"/>
+              </a:rPr>
+              <a:t>The token/reading cost of an extra tool is real (~1.7x more per question here) and should be weighed against the unclear benefit.</a:t>
+            </a:r>
+          </a:p>
+          <a:p>
+            <a:pPr>
+              <a:lnSpc>
+                <a:spcPct val="105000"/>
+              </a:lnSpc>
+              <a:spcAft>
+                <a:spcPts val="900"/>
+              </a:spcAft>
+            </a:pPr>
+            <a:r>
+              <a:rPr sz="1450" b="1">
+                <a:solidFill>
+                  <a:srgbClr val="2CA02C"/>
+                </a:solidFill>
+                <a:latin typeface="Calibri"/>
+              </a:rPr>
+              <a:t>▸  </a:t>
+            </a:r>
+            <a:r>
+              <a:rPr sz="1450">
+                <a:solidFill>
+                  <a:srgbClr val="DDDDE5"/>
+                </a:solidFill>
+                <a:latin typeface="Calibri"/>
+              </a:rPr>
+              <a:t>Worth re-running periodically across all three repos as both the models and the graph/MCP tooling keep evolving.</a:t>
+            </a:r>
+          </a:p>
+        </p:txBody>
+      </p:sp>
+      <p:sp>
+        <p:nvSpPr>
+          <p:cNvPr id="7" name="TextBox 6"/>
+          <p:cNvSpPr txBox="1"/>
+          <p:nvPr/>
+        </p:nvSpPr>
+        <p:spPr>
+          <a:xfrm>
+            <a:off x="502920" y="6510528"/>
+            <a:ext cx="8229600" cy="292608"/>
           </a:xfrm>
           <a:prstGeom prst="rect">
             <a:avLst/>
@@ -3726,118 +4321,17 @@
           <a:p>
             <a:pPr algn="l">
               <a:lnSpc>
-                <a:spcPct val="115000"/>
+                <a:spcPct val="112000"/>
               </a:lnSpc>
             </a:pPr>
             <a:r>
-              <a:rPr sz="2000" b="1" i="0">
-                <a:solidFill>
-                  <a:srgbClr val="D97706"/>
-                </a:solidFill>
-                <a:latin typeface="Calibri"/>
-              </a:rPr>
-              <a:t>⏱️  A permissions limitation</a:t>
-            </a:r>
-          </a:p>
-        </p:txBody>
-      </p:sp>
-      <p:sp>
-        <p:nvSpPr>
-          <p:cNvPr id="7" name="TextBox 6"/>
-          <p:cNvSpPr txBox="1"/>
-          <p:nvPr/>
-        </p:nvSpPr>
-        <p:spPr>
-          <a:xfrm>
-            <a:off x="6309360" y="2286000"/>
-            <a:ext cx="5212080" cy="3474720"/>
-          </a:xfrm>
-          <a:prstGeom prst="rect">
-            <a:avLst/>
-          </a:prstGeom>
-          <a:noFill/>
-        </p:spPr>
-        <p:txBody>
-          <a:bodyPr wrap="square" anchor="t">
-            <a:spAutoFit/>
-          </a:bodyPr>
-          <a:lstStyle/>
-          <a:p>
-            <a:pPr algn="l">
-              <a:lnSpc>
-                <a:spcPct val="115000"/>
-              </a:lnSpc>
-            </a:pPr>
-            <a:r>
-              <a:rPr sz="1600" b="0" i="0">
-                <a:solidFill>
-                  <a:srgbClr val="333333"/>
-                </a:solidFill>
-                <a:latin typeface="Calibri"/>
-              </a:rPr>
-              <a:t>When run unattended (no human watching), the AI tool we used wouldn't let the map get used at all — it kept waiting for a permission click that could never come.</a:t>
-            </a:r>
-          </a:p>
-          <a:p>
-            <a:pPr algn="l">
-              <a:lnSpc>
-                <a:spcPct val="115000"/>
-              </a:lnSpc>
-            </a:pPr>
-          </a:p>
-          <a:p>
-            <a:pPr algn="l">
-              <a:lnSpc>
-                <a:spcPct val="115000"/>
-              </a:lnSpc>
-            </a:pPr>
-            <a:r>
-              <a:rPr sz="1600" b="0" i="0">
-                <a:solidFill>
-                  <a:srgbClr val="333333"/>
-                </a:solidFill>
-                <a:latin typeface="Calibri"/>
-              </a:rPr>
-              <a:t>We found the setting to safely allow it to run unattended, and applied the exact same setting to both modes — so the comparison stayed fair.</a:t>
-            </a:r>
-          </a:p>
-        </p:txBody>
-      </p:sp>
-      <p:sp>
-        <p:nvSpPr>
-          <p:cNvPr id="8" name="TextBox 7"/>
-          <p:cNvSpPr txBox="1"/>
-          <p:nvPr/>
-        </p:nvSpPr>
-        <p:spPr>
-          <a:xfrm>
-            <a:off x="502920" y="6473952"/>
-            <a:ext cx="8229600" cy="320040"/>
-          </a:xfrm>
-          <a:prstGeom prst="rect">
-            <a:avLst/>
-          </a:prstGeom>
-          <a:noFill/>
-        </p:spPr>
-        <p:txBody>
-          <a:bodyPr wrap="square" anchor="t">
-            <a:spAutoFit/>
-          </a:bodyPr>
-          <a:lstStyle/>
-          <a:p>
-            <a:pPr algn="l">
-              <a:lnSpc>
-                <a:spcPct val="115000"/>
-              </a:lnSpc>
-            </a:pPr>
-            <a:r>
-              <a:rPr sz="1050" b="0" i="0">
+              <a:rPr sz="1000" b="0" i="0">
                 <a:solidFill>
                   <a:srgbClr val="AAAAAA"/>
                 </a:solidFill>
                 <a:latin typeface="Calibri"/>
               </a:rPr>
-              <a:t>Part 2 — What We Built</a:t>
+              <a:t>Part 5 — Why, and What's Next</a:t>
             </a:r>
           </a:p>
         </p:txBody>
@@ -3876,8 +4370,8 @@
         </p:nvSpPr>
         <p:spPr>
           <a:xfrm>
-            <a:off x="914400" y="2194560"/>
-            <a:ext cx="1828800" cy="1280160"/>
+            <a:off x="914400" y="2331720"/>
+            <a:ext cx="10332720" cy="914400"/>
           </a:xfrm>
           <a:prstGeom prst="rect">
             <a:avLst/>
@@ -3890,33 +4384,76 @@
           </a:bodyPr>
           <a:lstStyle/>
           <a:p>
-            <a:pPr algn="l">
+            <a:pPr algn="ctr">
               <a:lnSpc>
-                <a:spcPct val="115000"/>
+                <a:spcPct val="112000"/>
               </a:lnSpc>
             </a:pPr>
             <a:r>
-              <a:rPr sz="9000" b="1" i="0">
-                <a:solidFill>
-                  <a:srgbClr val="2CA02C"/>
-                </a:solidFill>
-                <a:latin typeface="Calibri"/>
-              </a:rPr>
-              <a:t>3</a:t>
-            </a:r>
-          </a:p>
-        </p:txBody>
-      </p:sp>
-      <p:sp>
-        <p:nvSpPr>
-          <p:cNvPr id="3" name="TextBox 2"/>
+              <a:rPr sz="4200" b="1" i="0">
+                <a:solidFill>
+                  <a:srgbClr val="FFFFFF"/>
+                </a:solidFill>
+                <a:latin typeface="Calibri"/>
+              </a:rPr>
+              <a:t>Thank you</a:t>
+            </a:r>
+          </a:p>
+        </p:txBody>
+      </p:sp>
+      <p:sp>
+        <p:nvSpPr>
+          <p:cNvPr id="3" name="Rectangle 2"/>
+          <p:cNvSpPr/>
+          <p:nvPr/>
+        </p:nvSpPr>
+        <p:spPr>
+          <a:xfrm>
+            <a:off x="5029200" y="3246120"/>
+            <a:ext cx="2103120" cy="54864"/>
+          </a:xfrm>
+          <a:prstGeom prst="rect">
+            <a:avLst/>
+          </a:prstGeom>
+          <a:solidFill>
+            <a:srgbClr val="2CA02C"/>
+          </a:solidFill>
+          <a:ln>
+            <a:noFill/>
+          </a:ln>
+        </p:spPr>
+        <p:style>
+          <a:lnRef idx="1">
+            <a:schemeClr val="accent1"/>
+          </a:lnRef>
+          <a:fillRef idx="3">
+            <a:schemeClr val="accent1"/>
+          </a:fillRef>
+          <a:effectRef idx="2">
+            <a:schemeClr val="accent1"/>
+          </a:effectRef>
+          <a:fontRef idx="minor">
+            <a:schemeClr val="lt1"/>
+          </a:fontRef>
+        </p:style>
+        <p:txBody>
+          <a:bodyPr rtlCol="0" anchor="ctr"/>
+          <a:lstStyle/>
+          <a:p>
+            <a:pPr algn="ctr"/>
+          </a:p>
+        </p:txBody>
+      </p:sp>
+      <p:sp>
+        <p:nvSpPr>
+          <p:cNvPr id="4" name="TextBox 3"/>
           <p:cNvSpPr txBox="1"/>
           <p:nvPr/>
         </p:nvSpPr>
         <p:spPr>
           <a:xfrm>
-            <a:off x="3017520" y="2514600"/>
-            <a:ext cx="8229600" cy="914400"/>
+            <a:off x="914400" y="3520440"/>
+            <a:ext cx="10332720" cy="1280160"/>
           </a:xfrm>
           <a:prstGeom prst="rect">
             <a:avLst/>
@@ -3929,33 +4466,65 @@
           </a:bodyPr>
           <a:lstStyle/>
           <a:p>
-            <a:pPr algn="l">
+            <a:pPr algn="ctr">
               <a:lnSpc>
-                <a:spcPct val="115000"/>
+                <a:spcPct val="130000"/>
               </a:lnSpc>
             </a:pPr>
             <a:r>
-              <a:rPr sz="3400" b="1" i="0">
-                <a:solidFill>
-                  <a:srgbClr val="FFFFFF"/>
-                </a:solidFill>
-                <a:latin typeface="Calibri"/>
-              </a:rPr>
-              <a:t>Testing</a:t>
-            </a:r>
-          </a:p>
-        </p:txBody>
-      </p:sp>
-      <p:sp>
-        <p:nvSpPr>
-          <p:cNvPr id="4" name="TextBox 3"/>
+              <a:rPr sz="1500" b="0" i="1">
+                <a:solidFill>
+                  <a:srgbClr val="94A3B8"/>
+                </a:solidFill>
+                <a:latin typeface="Calibri"/>
+              </a:rPr>
+              <a:t>github.com/shobhit0521/ContextAI</a:t>
+            </a:r>
+          </a:p>
+          <a:p>
+            <a:pPr algn="ctr">
+              <a:lnSpc>
+                <a:spcPct val="130000"/>
+              </a:lnSpc>
+            </a:pPr>
+            <a:r>
+              <a:rPr sz="1500" b="0" i="1">
+                <a:solidFill>
+                  <a:srgbClr val="94A3B8"/>
+                </a:solidFill>
+                <a:latin typeface="Calibri"/>
+              </a:rPr>
+              <a:t>github.com/shobhit0521/ConnectContext</a:t>
+            </a:r>
+          </a:p>
+          <a:p>
+            <a:pPr algn="ctr">
+              <a:lnSpc>
+                <a:spcPct val="130000"/>
+              </a:lnSpc>
+            </a:pPr>
+            <a:r>
+              <a:rPr sz="1500" b="0" i="1">
+                <a:solidFill>
+                  <a:srgbClr val="94A3B8"/>
+                </a:solidFill>
+                <a:latin typeface="Calibri"/>
+              </a:rPr>
+              <a:t>github.com/shobhit0521/Test_context</a:t>
+            </a:r>
+          </a:p>
+        </p:txBody>
+      </p:sp>
+      <p:sp>
+        <p:nvSpPr>
+          <p:cNvPr id="5" name="TextBox 4"/>
           <p:cNvSpPr txBox="1"/>
           <p:nvPr/>
         </p:nvSpPr>
         <p:spPr>
           <a:xfrm>
-            <a:off x="3017520" y="3429000"/>
-            <a:ext cx="8229600" cy="914400"/>
+            <a:off x="914400" y="4892040"/>
+            <a:ext cx="10332720" cy="457200"/>
           </a:xfrm>
           <a:prstGeom prst="rect">
             <a:avLst/>
@@ -3968,19 +4537,19 @@
           </a:bodyPr>
           <a:lstStyle/>
           <a:p>
-            <a:pPr algn="l">
+            <a:pPr algn="ctr">
               <a:lnSpc>
-                <a:spcPct val="115000"/>
+                <a:spcPct val="112000"/>
               </a:lnSpc>
             </a:pPr>
             <a:r>
-              <a:rPr sz="1700" b="0" i="1">
-                <a:solidFill>
-                  <a:srgbClr val="94A3B8"/>
-                </a:solidFill>
-                <a:latin typeface="Calibri"/>
-              </a:rPr>
-              <a:t>How we ran and graded it</a:t>
+              <a:rPr sz="1300" b="0" i="0">
+                <a:solidFill>
+                  <a:srgbClr val="888899"/>
+                </a:solidFill>
+                <a:latin typeface="Calibri"/>
+              </a:rPr>
+              <a:t>Full write-up, charts, and raw data: eval/report/REPORT.md</a:t>
             </a:r>
           </a:p>
         </p:txBody>
@@ -3993,7 +4562,7 @@
 </p:sld>
 </file>
 
-<file path=ppt/slides/slide13.xml><?xml version="1.0" encoding="utf-8"?>
+<file path=ppt/slides/slide2.xml><?xml version="1.0" encoding="utf-8"?>
 <p:sld xmlns:a="http://schemas.openxmlformats.org/drawingml/2006/main" xmlns:p="http://schemas.openxmlformats.org/presentationml/2006/main" xmlns:r="http://schemas.openxmlformats.org/officeDocument/2006/relationships">
   <p:cSld>
     <p:bg>
@@ -4019,8 +4588,8 @@
         </p:nvSpPr>
         <p:spPr>
           <a:xfrm>
-            <a:off x="502920" y="384048"/>
-            <a:ext cx="11155680" cy="822960"/>
+            <a:off x="502920" y="292608"/>
+            <a:ext cx="11155680" cy="685800"/>
           </a:xfrm>
           <a:prstGeom prst="rect">
             <a:avLst/>
@@ -4035,17 +4604,17 @@
           <a:p>
             <a:pPr algn="l">
               <a:lnSpc>
-                <a:spcPct val="115000"/>
+                <a:spcPct val="112000"/>
               </a:lnSpc>
             </a:pPr>
             <a:r>
-              <a:rPr sz="3200" b="1" i="0">
+              <a:rPr sz="2900" b="1" i="0">
                 <a:solidFill>
                   <a:srgbClr val="1A1A2E"/>
                 </a:solidFill>
                 <a:latin typeface="Calibri"/>
               </a:rPr>
-              <a:t>How the test was run, end to end</a:t>
+              <a:t>The problem, the idea, and the question we tested</a:t>
             </a:r>
           </a:p>
         </p:txBody>
@@ -4058,7 +4627,7 @@
         </p:nvSpPr>
         <p:spPr>
           <a:xfrm>
-            <a:off x="502920" y="1170432"/>
+            <a:off x="502920" y="950976"/>
             <a:ext cx="2011680" cy="50800"/>
           </a:xfrm>
           <a:prstGeom prst="rect">
@@ -4094,40 +4663,16 @@
           </a:p>
         </p:txBody>
       </p:sp>
-      <p:pic>
-        <p:nvPicPr>
-          <p:cNvPr id="4" name="Picture 3" descr="pipeline.png"/>
-          <p:cNvPicPr>
-            <a:picLocks noChangeAspect="1"/>
-          </p:cNvPicPr>
-          <p:nvPr/>
-        </p:nvPicPr>
-        <p:blipFill>
-          <a:blip r:embed="rId2"/>
-          <a:stretch>
-            <a:fillRect/>
-          </a:stretch>
-        </p:blipFill>
-        <p:spPr>
-          <a:xfrm>
-            <a:off x="1830472" y="1691640"/>
-            <a:ext cx="8500576" cy="4754880"/>
-          </a:xfrm>
-          <a:prstGeom prst="rect">
-            <a:avLst/>
-          </a:prstGeom>
-        </p:spPr>
-      </p:pic>
-      <p:sp>
-        <p:nvSpPr>
-          <p:cNvPr id="5" name="TextBox 4"/>
+      <p:sp>
+        <p:nvSpPr>
+          <p:cNvPr id="4" name="TextBox 3"/>
           <p:cNvSpPr txBox="1"/>
           <p:nvPr/>
         </p:nvSpPr>
         <p:spPr>
           <a:xfrm>
-            <a:off x="502920" y="6473952"/>
-            <a:ext cx="8229600" cy="320040"/>
+            <a:off x="502920" y="1691640"/>
+            <a:ext cx="5852160" cy="2743200"/>
           </a:xfrm>
           <a:prstGeom prst="rect">
             <a:avLst/>
@@ -4135,114 +4680,118 @@
           <a:noFill/>
         </p:spPr>
         <p:txBody>
-          <a:bodyPr wrap="square" anchor="t">
+          <a:bodyPr wrap="square">
             <a:spAutoFit/>
           </a:bodyPr>
           <a:lstStyle/>
           <a:p>
-            <a:pPr algn="l">
+            <a:pPr>
               <a:lnSpc>
-                <a:spcPct val="115000"/>
+                <a:spcPct val="105000"/>
               </a:lnSpc>
+              <a:spcAft>
+                <a:spcPts val="1000"/>
+              </a:spcAft>
             </a:pPr>
             <a:r>
-              <a:rPr sz="1050" b="0" i="0">
-                <a:solidFill>
-                  <a:srgbClr val="AAAAAA"/>
-                </a:solidFill>
-                <a:latin typeface="Calibri"/>
-              </a:rPr>
-              <a:t>Part 3 — Testing</a:t>
-            </a:r>
-          </a:p>
-        </p:txBody>
-      </p:sp>
-    </p:spTree>
-  </p:cSld>
-  <p:clrMapOvr>
-    <a:masterClrMapping/>
-  </p:clrMapOvr>
-</p:sld>
-</file>
-
-<file path=ppt/slides/slide14.xml><?xml version="1.0" encoding="utf-8"?>
-<p:sld xmlns:a="http://schemas.openxmlformats.org/drawingml/2006/main" xmlns:p="http://schemas.openxmlformats.org/presentationml/2006/main" xmlns:r="http://schemas.openxmlformats.org/officeDocument/2006/relationships">
-  <p:cSld>
-    <p:bg>
-      <p:bgPr>
-        <a:solidFill>
-          <a:srgbClr val="FFFFFF"/>
-        </a:solidFill>
-        <a:effectLst/>
-      </p:bgPr>
-    </p:bg>
-    <p:spTree>
-      <p:nvGrpSpPr>
-        <p:cNvPr id="1" name=""/>
-        <p:cNvGrpSpPr/>
-        <p:nvPr/>
-      </p:nvGrpSpPr>
-      <p:grpSpPr/>
-      <p:sp>
-        <p:nvSpPr>
-          <p:cNvPr id="2" name="TextBox 1"/>
-          <p:cNvSpPr txBox="1"/>
-          <p:nvPr/>
-        </p:nvSpPr>
-        <p:spPr>
-          <a:xfrm>
-            <a:off x="502920" y="384048"/>
-            <a:ext cx="11155680" cy="822960"/>
-          </a:xfrm>
-          <a:prstGeom prst="rect">
-            <a:avLst/>
-          </a:prstGeom>
-          <a:noFill/>
-        </p:spPr>
-        <p:txBody>
-          <a:bodyPr wrap="square" anchor="t">
-            <a:spAutoFit/>
-          </a:bodyPr>
-          <a:lstStyle/>
-          <a:p>
-            <a:pPr algn="l">
+              <a:rPr sz="1550" b="1">
+                <a:solidFill>
+                  <a:srgbClr val="2CA02C"/>
+                </a:solidFill>
+                <a:latin typeface="Calibri"/>
+              </a:rPr>
+              <a:t>▸  </a:t>
+            </a:r>
+            <a:r>
+              <a:rPr sz="1550">
+                <a:solidFill>
+                  <a:srgbClr val="333333"/>
+                </a:solidFill>
+                <a:latin typeface="Calibri"/>
+              </a:rPr>
+              <a:t>Real codebases are huge. Asking an AI “who calls this?” normally means it greps and opens files one at a time — slow, and easy to miss something in a file never opened.</a:t>
+            </a:r>
+          </a:p>
+          <a:p>
+            <a:pPr>
               <a:lnSpc>
-                <a:spcPct val="115000"/>
+                <a:spcPct val="105000"/>
               </a:lnSpc>
+              <a:spcAft>
+                <a:spcPts val="1000"/>
+              </a:spcAft>
             </a:pPr>
             <a:r>
-              <a:rPr sz="3200" b="1" i="0">
-                <a:solidFill>
-                  <a:srgbClr val="1A1A2E"/>
-                </a:solidFill>
-                <a:latin typeface="Calibri"/>
-              </a:rPr>
-              <a:t>How we graded the answers</a:t>
-            </a:r>
-          </a:p>
-        </p:txBody>
-      </p:sp>
-      <p:sp>
-        <p:nvSpPr>
-          <p:cNvPr id="3" name="Rectangle 2"/>
+              <a:rPr sz="1550" b="1">
+                <a:solidFill>
+                  <a:srgbClr val="2CA02C"/>
+                </a:solidFill>
+                <a:latin typeface="Calibri"/>
+              </a:rPr>
+              <a:t>▸  </a:t>
+            </a:r>
+            <a:r>
+              <a:rPr sz="1550">
+                <a:solidFill>
+                  <a:srgbClr val="333333"/>
+                </a:solidFill>
+                <a:latin typeface="Calibri"/>
+              </a:rPr>
+              <a:t>The idea: pre-build a “map” of the codebase — every function, every connection — once, and hand it to the AI as an extra tool instead of making it re-derive that structure every time.</a:t>
+            </a:r>
+          </a:p>
+          <a:p>
+            <a:pPr>
+              <a:lnSpc>
+                <a:spcPct val="105000"/>
+              </a:lnSpc>
+              <a:spcAft>
+                <a:spcPts val="1000"/>
+              </a:spcAft>
+            </a:pPr>
+            <a:r>
+              <a:rPr sz="1550" b="1">
+                <a:solidFill>
+                  <a:srgbClr val="2CA02C"/>
+                </a:solidFill>
+                <a:latin typeface="Calibri"/>
+              </a:rPr>
+              <a:t>▸  </a:t>
+            </a:r>
+            <a:r>
+              <a:rPr sz="1550">
+                <a:solidFill>
+                  <a:srgbClr val="333333"/>
+                </a:solidFill>
+                <a:latin typeface="Calibri"/>
+              </a:rPr>
+              <a:t>That map-building idea is exactly what ContextAI + ConnectContext (the first two repos below) set out to build.</a:t>
+            </a:r>
+          </a:p>
+        </p:txBody>
+      </p:sp>
+      <p:sp>
+        <p:nvSpPr>
+          <p:cNvPr id="5" name="Rectangle 4"/>
           <p:cNvSpPr/>
           <p:nvPr/>
         </p:nvSpPr>
         <p:spPr>
           <a:xfrm>
-            <a:off x="502920" y="1170432"/>
-            <a:ext cx="2011680" cy="50800"/>
+            <a:off x="502920" y="4617720"/>
+            <a:ext cx="5852160" cy="1417320"/>
           </a:xfrm>
           <a:prstGeom prst="rect">
             <a:avLst/>
           </a:prstGeom>
           <a:solidFill>
-            <a:srgbClr val="2CA02C"/>
+            <a:srgbClr val="F7F8FA"/>
           </a:solidFill>
-          <a:ln>
-            <a:noFill/>
+          <a:ln w="31750">
+            <a:solidFill>
+              <a:srgbClr val="2CA02C"/>
+            </a:solidFill>
           </a:ln>
-          <a:effectLst/>
         </p:spPr>
         <p:style>
           <a:lnRef idx="1">
@@ -4259,16 +4808,25 @@
           </a:fontRef>
         </p:style>
         <p:txBody>
-          <a:bodyPr rtlCol="0" anchor="ctr"/>
+          <a:bodyPr rtlCol="0" anchor="ctr" wrap="square"/>
           <a:lstStyle/>
           <a:p>
             <a:pPr algn="ctr"/>
+            <a:r>
+              <a:rPr sz="1650" b="1">
+                <a:solidFill>
+                  <a:srgbClr val="1A1A2E"/>
+                </a:solidFill>
+                <a:latin typeface="Calibri"/>
+              </a:rPr>
+              <a:t>“Does a real AI coding agent answer code questions better with the map — vs. its normal tools alone?”</a:t>
+            </a:r>
           </a:p>
         </p:txBody>
       </p:sp>
       <p:pic>
         <p:nvPicPr>
-          <p:cNvPr id="4" name="Picture 3" descr="grading.png"/>
+          <p:cNvPr id="6" name="Picture 5" descr="search_vs_map.png"/>
           <p:cNvPicPr>
             <a:picLocks noChangeAspect="1"/>
           </p:cNvPicPr>
@@ -4282,8 +4840,8 @@
         </p:blipFill>
         <p:spPr>
           <a:xfrm>
-            <a:off x="1830472" y="1691640"/>
-            <a:ext cx="8500576" cy="4754880"/>
+            <a:off x="6537960" y="2476920"/>
+            <a:ext cx="5120640" cy="2864279"/>
           </a:xfrm>
           <a:prstGeom prst="rect">
             <a:avLst/>
@@ -4292,14 +4850,14 @@
       </p:pic>
       <p:sp>
         <p:nvSpPr>
-          <p:cNvPr id="5" name="TextBox 4"/>
+          <p:cNvPr id="7" name="TextBox 6"/>
           <p:cNvSpPr txBox="1"/>
           <p:nvPr/>
         </p:nvSpPr>
         <p:spPr>
           <a:xfrm>
-            <a:off x="502920" y="6473952"/>
-            <a:ext cx="8229600" cy="320040"/>
+            <a:off x="502920" y="6510528"/>
+            <a:ext cx="8229600" cy="292608"/>
           </a:xfrm>
           <a:prstGeom prst="rect">
             <a:avLst/>
@@ -4314,2749 +4872,18 @@
           <a:p>
             <a:pPr algn="l">
               <a:lnSpc>
-                <a:spcPct val="115000"/>
+                <a:spcPct val="112000"/>
               </a:lnSpc>
             </a:pPr>
             <a:r>
-              <a:rPr sz="1050" b="0" i="0">
+              <a:rPr sz="1000" b="0" i="0">
                 <a:solidFill>
                   <a:srgbClr val="AAAAAA"/>
                 </a:solidFill>
                 <a:latin typeface="Calibri"/>
               </a:rPr>
-              <a:t>Part 3 — Testing</a:t>
-            </a:r>
-          </a:p>
-        </p:txBody>
-      </p:sp>
-    </p:spTree>
-  </p:cSld>
-  <p:clrMapOvr>
-    <a:masterClrMapping/>
-  </p:clrMapOvr>
-</p:sld>
-</file>
-
-<file path=ppt/slides/slide15.xml><?xml version="1.0" encoding="utf-8"?>
-<p:sld xmlns:a="http://schemas.openxmlformats.org/drawingml/2006/main" xmlns:p="http://schemas.openxmlformats.org/presentationml/2006/main" xmlns:r="http://schemas.openxmlformats.org/officeDocument/2006/relationships">
-  <p:cSld>
-    <p:bg>
-      <p:bgPr>
-        <a:solidFill>
-          <a:srgbClr val="1A1A2E"/>
-        </a:solidFill>
-        <a:effectLst/>
-      </p:bgPr>
-    </p:bg>
-    <p:spTree>
-      <p:nvGrpSpPr>
-        <p:cNvPr id="1" name=""/>
-        <p:cNvGrpSpPr/>
-        <p:nvPr/>
-      </p:nvGrpSpPr>
-      <p:grpSpPr/>
-      <p:sp>
-        <p:nvSpPr>
-          <p:cNvPr id="2" name="TextBox 1"/>
-          <p:cNvSpPr txBox="1"/>
-          <p:nvPr/>
-        </p:nvSpPr>
-        <p:spPr>
-          <a:xfrm>
-            <a:off x="914400" y="2194560"/>
-            <a:ext cx="1828800" cy="1280160"/>
-          </a:xfrm>
-          <a:prstGeom prst="rect">
-            <a:avLst/>
-          </a:prstGeom>
-          <a:noFill/>
-        </p:spPr>
-        <p:txBody>
-          <a:bodyPr wrap="square" anchor="t">
-            <a:spAutoFit/>
-          </a:bodyPr>
-          <a:lstStyle/>
-          <a:p>
-            <a:pPr algn="l">
-              <a:lnSpc>
-                <a:spcPct val="115000"/>
-              </a:lnSpc>
-            </a:pPr>
-            <a:r>
-              <a:rPr sz="9000" b="1" i="0">
-                <a:solidFill>
-                  <a:srgbClr val="2CA02C"/>
-                </a:solidFill>
-                <a:latin typeface="Calibri"/>
-              </a:rPr>
-              <a:t>4</a:t>
-            </a:r>
-          </a:p>
-        </p:txBody>
-      </p:sp>
-      <p:sp>
-        <p:nvSpPr>
-          <p:cNvPr id="3" name="TextBox 2"/>
-          <p:cNvSpPr txBox="1"/>
-          <p:nvPr/>
-        </p:nvSpPr>
-        <p:spPr>
-          <a:xfrm>
-            <a:off x="3017520" y="2514600"/>
-            <a:ext cx="8229600" cy="914400"/>
-          </a:xfrm>
-          <a:prstGeom prst="rect">
-            <a:avLst/>
-          </a:prstGeom>
-          <a:noFill/>
-        </p:spPr>
-        <p:txBody>
-          <a:bodyPr wrap="square" anchor="t">
-            <a:spAutoFit/>
-          </a:bodyPr>
-          <a:lstStyle/>
-          <a:p>
-            <a:pPr algn="l">
-              <a:lnSpc>
-                <a:spcPct val="115000"/>
-              </a:lnSpc>
-            </a:pPr>
-            <a:r>
-              <a:rPr sz="3400" b="1" i="0">
-                <a:solidFill>
-                  <a:srgbClr val="FFFFFF"/>
-                </a:solidFill>
-                <a:latin typeface="Calibri"/>
-              </a:rPr>
-              <a:t>Results</a:t>
-            </a:r>
-          </a:p>
-        </p:txBody>
-      </p:sp>
-      <p:sp>
-        <p:nvSpPr>
-          <p:cNvPr id="4" name="TextBox 3"/>
-          <p:cNvSpPr txBox="1"/>
-          <p:nvPr/>
-        </p:nvSpPr>
-        <p:spPr>
-          <a:xfrm>
-            <a:off x="3017520" y="3429000"/>
-            <a:ext cx="8229600" cy="914400"/>
-          </a:xfrm>
-          <a:prstGeom prst="rect">
-            <a:avLst/>
-          </a:prstGeom>
-          <a:noFill/>
-        </p:spPr>
-        <p:txBody>
-          <a:bodyPr wrap="square" anchor="t">
-            <a:spAutoFit/>
-          </a:bodyPr>
-          <a:lstStyle/>
-          <a:p>
-            <a:pPr algn="l">
-              <a:lnSpc>
-                <a:spcPct val="115000"/>
-              </a:lnSpc>
-            </a:pPr>
-            <a:r>
-              <a:rPr sz="1700" b="0" i="1">
-                <a:solidFill>
-                  <a:srgbClr val="94A3B8"/>
-                </a:solidFill>
-                <a:latin typeface="Calibri"/>
-              </a:rPr>
-              <a:t>What actually happened</a:t>
-            </a:r>
-          </a:p>
-        </p:txBody>
-      </p:sp>
-    </p:spTree>
-  </p:cSld>
-  <p:clrMapOvr>
-    <a:masterClrMapping/>
-  </p:clrMapOvr>
-</p:sld>
-</file>
-
-<file path=ppt/slides/slide16.xml><?xml version="1.0" encoding="utf-8"?>
-<p:sld xmlns:a="http://schemas.openxmlformats.org/drawingml/2006/main" xmlns:p="http://schemas.openxmlformats.org/presentationml/2006/main" xmlns:r="http://schemas.openxmlformats.org/officeDocument/2006/relationships">
-  <p:cSld>
-    <p:bg>
-      <p:bgPr>
-        <a:solidFill>
-          <a:srgbClr val="FFFFFF"/>
-        </a:solidFill>
-        <a:effectLst/>
-      </p:bgPr>
-    </p:bg>
-    <p:spTree>
-      <p:nvGrpSpPr>
-        <p:cNvPr id="1" name=""/>
-        <p:cNvGrpSpPr/>
-        <p:nvPr/>
-      </p:nvGrpSpPr>
-      <p:grpSpPr/>
-      <p:sp>
-        <p:nvSpPr>
-          <p:cNvPr id="2" name="TextBox 1"/>
-          <p:cNvSpPr txBox="1"/>
-          <p:nvPr/>
-        </p:nvSpPr>
-        <p:spPr>
-          <a:xfrm>
-            <a:off x="502920" y="384048"/>
-            <a:ext cx="11155680" cy="822960"/>
-          </a:xfrm>
-          <a:prstGeom prst="rect">
-            <a:avLst/>
-          </a:prstGeom>
-          <a:noFill/>
-        </p:spPr>
-        <p:txBody>
-          <a:bodyPr wrap="square" anchor="t">
-            <a:spAutoFit/>
-          </a:bodyPr>
-          <a:lstStyle/>
-          <a:p>
-            <a:pPr algn="l">
-              <a:lnSpc>
-                <a:spcPct val="115000"/>
-              </a:lnSpc>
-            </a:pPr>
-            <a:r>
-              <a:rPr sz="3200" b="1" i="0">
-                <a:solidFill>
-                  <a:srgbClr val="1A1A2E"/>
-                </a:solidFill>
-                <a:latin typeface="Calibri"/>
-              </a:rPr>
-              <a:t>The headline result</a:t>
-            </a:r>
-          </a:p>
-        </p:txBody>
-      </p:sp>
-      <p:sp>
-        <p:nvSpPr>
-          <p:cNvPr id="3" name="Rectangle 2"/>
-          <p:cNvSpPr/>
-          <p:nvPr/>
-        </p:nvSpPr>
-        <p:spPr>
-          <a:xfrm>
-            <a:off x="502920" y="1170432"/>
-            <a:ext cx="2011680" cy="50800"/>
-          </a:xfrm>
-          <a:prstGeom prst="rect">
-            <a:avLst/>
-          </a:prstGeom>
-          <a:solidFill>
-            <a:srgbClr val="2CA02C"/>
-          </a:solidFill>
-          <a:ln>
-            <a:noFill/>
-          </a:ln>
-          <a:effectLst/>
-        </p:spPr>
-        <p:style>
-          <a:lnRef idx="1">
-            <a:schemeClr val="accent1"/>
-          </a:lnRef>
-          <a:fillRef idx="3">
-            <a:schemeClr val="accent1"/>
-          </a:fillRef>
-          <a:effectRef idx="2">
-            <a:schemeClr val="accent1"/>
-          </a:effectRef>
-          <a:fontRef idx="minor">
-            <a:schemeClr val="lt1"/>
-          </a:fontRef>
-        </p:style>
-        <p:txBody>
-          <a:bodyPr rtlCol="0" anchor="ctr"/>
-          <a:lstStyle/>
-          <a:p>
-            <a:pPr algn="ctr"/>
-          </a:p>
-        </p:txBody>
-      </p:sp>
-      <p:pic>
-        <p:nvPicPr>
-          <p:cNvPr id="4" name="Picture 3" descr="chart_headline.png"/>
-          <p:cNvPicPr>
-            <a:picLocks noChangeAspect="1"/>
-          </p:cNvPicPr>
-          <p:nvPr/>
-        </p:nvPicPr>
-        <p:blipFill>
-          <a:blip r:embed="rId2"/>
-          <a:stretch>
-            <a:fillRect/>
-          </a:stretch>
-        </p:blipFill>
-        <p:spPr>
-          <a:xfrm>
-            <a:off x="548640" y="1807587"/>
-            <a:ext cx="6949440" cy="4340105"/>
-          </a:xfrm>
-          <a:prstGeom prst="rect">
-            <a:avLst/>
-          </a:prstGeom>
-        </p:spPr>
-      </p:pic>
-      <p:sp>
-        <p:nvSpPr>
-          <p:cNvPr id="5" name="TextBox 4"/>
-          <p:cNvSpPr txBox="1"/>
-          <p:nvPr/>
-        </p:nvSpPr>
-        <p:spPr>
-          <a:xfrm>
-            <a:off x="7772400" y="2103120"/>
-            <a:ext cx="3931920" cy="914400"/>
-          </a:xfrm>
-          <a:prstGeom prst="rect">
-            <a:avLst/>
-          </a:prstGeom>
-          <a:noFill/>
-        </p:spPr>
-        <p:txBody>
-          <a:bodyPr wrap="square" anchor="t">
-            <a:spAutoFit/>
-          </a:bodyPr>
-          <a:lstStyle/>
-          <a:p>
-            <a:pPr algn="l">
-              <a:lnSpc>
-                <a:spcPct val="115000"/>
-              </a:lnSpc>
-            </a:pPr>
-            <a:r>
-              <a:rPr sz="2400" b="1" i="0">
-                <a:solidFill>
-                  <a:srgbClr val="1A1A2E"/>
-                </a:solidFill>
-                <a:latin typeface="Calibri"/>
-              </a:rPr>
-              <a:t>Roughly a coin flip.</a:t>
-            </a:r>
-          </a:p>
-        </p:txBody>
-      </p:sp>
-      <p:sp>
-        <p:nvSpPr>
-          <p:cNvPr id="6" name="TextBox 5"/>
-          <p:cNvSpPr txBox="1"/>
-          <p:nvPr/>
-        </p:nvSpPr>
-        <p:spPr>
-          <a:xfrm>
-            <a:off x="7772400" y="2926080"/>
-            <a:ext cx="3931920" cy="3200400"/>
-          </a:xfrm>
-          <a:prstGeom prst="rect">
-            <a:avLst/>
-          </a:prstGeom>
-          <a:noFill/>
-        </p:spPr>
-        <p:txBody>
-          <a:bodyPr wrap="square">
-            <a:spAutoFit/>
-          </a:bodyPr>
-          <a:lstStyle/>
-          <a:p>
-            <a:pPr>
-              <a:lnSpc>
-                <a:spcPct val="112000"/>
-              </a:lnSpc>
-              <a:spcAft>
-                <a:spcPts val="1000"/>
-              </a:spcAft>
-            </a:pPr>
-            <a:r>
-              <a:rPr sz="1550" b="1">
-                <a:solidFill>
-                  <a:srgbClr val="2CA02C"/>
-                </a:solidFill>
-                <a:latin typeface="Calibri"/>
-              </a:rPr>
-              <a:t>▸  </a:t>
-            </a:r>
-            <a:r>
-              <a:rPr sz="1550">
-                <a:solidFill>
-                  <a:srgbClr val="333333"/>
-                </a:solidFill>
-                <a:latin typeface="Calibri"/>
-              </a:rPr>
-              <a:t>No clear overall winner.</a:t>
-            </a:r>
-          </a:p>
-          <a:p>
-            <a:pPr>
-              <a:lnSpc>
-                <a:spcPct val="112000"/>
-              </a:lnSpc>
-              <a:spcAft>
-                <a:spcPts val="1000"/>
-              </a:spcAft>
-            </a:pPr>
-            <a:r>
-              <a:rPr sz="1550" b="1">
-                <a:solidFill>
-                  <a:srgbClr val="2CA02C"/>
-                </a:solidFill>
-                <a:latin typeface="Calibri"/>
-              </a:rPr>
-              <a:t>▸  </a:t>
-            </a:r>
-            <a:r>
-              <a:rPr sz="1550">
-                <a:solidFill>
-                  <a:srgbClr val="333333"/>
-                </a:solidFill>
-                <a:latin typeface="Calibri"/>
-              </a:rPr>
-              <a:t>The map-assisted answers were preferred slightly less often than the plain answers.</a:t>
-            </a:r>
-          </a:p>
-          <a:p>
-            <a:pPr>
-              <a:lnSpc>
-                <a:spcPct val="112000"/>
-              </a:lnSpc>
-              <a:spcAft>
-                <a:spcPts val="1000"/>
-              </a:spcAft>
-            </a:pPr>
-            <a:r>
-              <a:rPr sz="1550" b="1">
-                <a:solidFill>
-                  <a:srgbClr val="2CA02C"/>
-                </a:solidFill>
-                <a:latin typeface="Calibri"/>
-              </a:rPr>
-              <a:t>▸  </a:t>
-            </a:r>
-            <a:r>
-              <a:rPr sz="1550">
-                <a:solidFill>
-                  <a:srgbClr val="333333"/>
-                </a:solidFill>
-                <a:latin typeface="Calibri"/>
-              </a:rPr>
-              <a:t>288 total AI runs. Zero crashes.</a:t>
-            </a:r>
-          </a:p>
-        </p:txBody>
-      </p:sp>
-      <p:sp>
-        <p:nvSpPr>
-          <p:cNvPr id="7" name="TextBox 6"/>
-          <p:cNvSpPr txBox="1"/>
-          <p:nvPr/>
-        </p:nvSpPr>
-        <p:spPr>
-          <a:xfrm>
-            <a:off x="502920" y="6473952"/>
-            <a:ext cx="8229600" cy="320040"/>
-          </a:xfrm>
-          <a:prstGeom prst="rect">
-            <a:avLst/>
-          </a:prstGeom>
-          <a:noFill/>
-        </p:spPr>
-        <p:txBody>
-          <a:bodyPr wrap="square" anchor="t">
-            <a:spAutoFit/>
-          </a:bodyPr>
-          <a:lstStyle/>
-          <a:p>
-            <a:pPr algn="l">
-              <a:lnSpc>
-                <a:spcPct val="115000"/>
-              </a:lnSpc>
-            </a:pPr>
-            <a:r>
-              <a:rPr sz="1050" b="0" i="0">
-                <a:solidFill>
-                  <a:srgbClr val="AAAAAA"/>
-                </a:solidFill>
-                <a:latin typeface="Calibri"/>
-              </a:rPr>
-              <a:t>Part 4 — Results</a:t>
-            </a:r>
-          </a:p>
-        </p:txBody>
-      </p:sp>
-    </p:spTree>
-  </p:cSld>
-  <p:clrMapOvr>
-    <a:masterClrMapping/>
-  </p:clrMapOvr>
-</p:sld>
-</file>
-
-<file path=ppt/slides/slide17.xml><?xml version="1.0" encoding="utf-8"?>
-<p:sld xmlns:a="http://schemas.openxmlformats.org/drawingml/2006/main" xmlns:p="http://schemas.openxmlformats.org/presentationml/2006/main" xmlns:r="http://schemas.openxmlformats.org/officeDocument/2006/relationships">
-  <p:cSld>
-    <p:bg>
-      <p:bgPr>
-        <a:solidFill>
-          <a:srgbClr val="FFFFFF"/>
-        </a:solidFill>
-        <a:effectLst/>
-      </p:bgPr>
-    </p:bg>
-    <p:spTree>
-      <p:nvGrpSpPr>
-        <p:cNvPr id="1" name=""/>
-        <p:cNvGrpSpPr/>
-        <p:nvPr/>
-      </p:nvGrpSpPr>
-      <p:grpSpPr/>
-      <p:sp>
-        <p:nvSpPr>
-          <p:cNvPr id="2" name="TextBox 1"/>
-          <p:cNvSpPr txBox="1"/>
-          <p:nvPr/>
-        </p:nvSpPr>
-        <p:spPr>
-          <a:xfrm>
-            <a:off x="502920" y="384048"/>
-            <a:ext cx="11155680" cy="822960"/>
-          </a:xfrm>
-          <a:prstGeom prst="rect">
-            <a:avLst/>
-          </a:prstGeom>
-          <a:noFill/>
-        </p:spPr>
-        <p:txBody>
-          <a:bodyPr wrap="square" anchor="t">
-            <a:spAutoFit/>
-          </a:bodyPr>
-          <a:lstStyle/>
-          <a:p>
-            <a:pPr algn="l">
-              <a:lnSpc>
-                <a:spcPct val="115000"/>
-              </a:lnSpc>
-            </a:pPr>
-            <a:r>
-              <a:rPr sz="3200" b="1" i="0">
-                <a:solidFill>
-                  <a:srgbClr val="1A1A2E"/>
-                </a:solidFill>
-                <a:latin typeface="Calibri"/>
-              </a:rPr>
-              <a:t>Not one project favored the map</a:t>
-            </a:r>
-          </a:p>
-        </p:txBody>
-      </p:sp>
-      <p:sp>
-        <p:nvSpPr>
-          <p:cNvPr id="3" name="Rectangle 2"/>
-          <p:cNvSpPr/>
-          <p:nvPr/>
-        </p:nvSpPr>
-        <p:spPr>
-          <a:xfrm>
-            <a:off x="502920" y="1170432"/>
-            <a:ext cx="2011680" cy="50800"/>
-          </a:xfrm>
-          <a:prstGeom prst="rect">
-            <a:avLst/>
-          </a:prstGeom>
-          <a:solidFill>
-            <a:srgbClr val="2CA02C"/>
-          </a:solidFill>
-          <a:ln>
-            <a:noFill/>
-          </a:ln>
-          <a:effectLst/>
-        </p:spPr>
-        <p:style>
-          <a:lnRef idx="1">
-            <a:schemeClr val="accent1"/>
-          </a:lnRef>
-          <a:fillRef idx="3">
-            <a:schemeClr val="accent1"/>
-          </a:fillRef>
-          <a:effectRef idx="2">
-            <a:schemeClr val="accent1"/>
-          </a:effectRef>
-          <a:fontRef idx="minor">
-            <a:schemeClr val="lt1"/>
-          </a:fontRef>
-        </p:style>
-        <p:txBody>
-          <a:bodyPr rtlCol="0" anchor="ctr"/>
-          <a:lstStyle/>
-          <a:p>
-            <a:pPr algn="ctr"/>
-          </a:p>
-        </p:txBody>
-      </p:sp>
-      <p:pic>
-        <p:nvPicPr>
-          <p:cNvPr id="4" name="Picture 3" descr="chart_by_project.png"/>
-          <p:cNvPicPr>
-            <a:picLocks noChangeAspect="1"/>
-          </p:cNvPicPr>
-          <p:nvPr/>
-        </p:nvPicPr>
-        <p:blipFill>
-          <a:blip r:embed="rId2"/>
-          <a:stretch>
-            <a:fillRect/>
-          </a:stretch>
-        </p:blipFill>
-        <p:spPr>
-          <a:xfrm>
-            <a:off x="1691362" y="1600200"/>
-            <a:ext cx="8778795" cy="4663440"/>
-          </a:xfrm>
-          <a:prstGeom prst="rect">
-            <a:avLst/>
-          </a:prstGeom>
-        </p:spPr>
-      </p:pic>
-      <p:sp>
-        <p:nvSpPr>
-          <p:cNvPr id="5" name="TextBox 4"/>
-          <p:cNvSpPr txBox="1"/>
-          <p:nvPr/>
-        </p:nvSpPr>
-        <p:spPr>
-          <a:xfrm>
-            <a:off x="502920" y="6473952"/>
-            <a:ext cx="8229600" cy="320040"/>
-          </a:xfrm>
-          <a:prstGeom prst="rect">
-            <a:avLst/>
-          </a:prstGeom>
-          <a:noFill/>
-        </p:spPr>
-        <p:txBody>
-          <a:bodyPr wrap="square" anchor="t">
-            <a:spAutoFit/>
-          </a:bodyPr>
-          <a:lstStyle/>
-          <a:p>
-            <a:pPr algn="l">
-              <a:lnSpc>
-                <a:spcPct val="115000"/>
-              </a:lnSpc>
-            </a:pPr>
-            <a:r>
-              <a:rPr sz="1050" b="0" i="0">
-                <a:solidFill>
-                  <a:srgbClr val="AAAAAA"/>
-                </a:solidFill>
-                <a:latin typeface="Calibri"/>
-              </a:rPr>
-              <a:t>Part 4 — Results</a:t>
-            </a:r>
-          </a:p>
-        </p:txBody>
-      </p:sp>
-    </p:spTree>
-  </p:cSld>
-  <p:clrMapOvr>
-    <a:masterClrMapping/>
-  </p:clrMapOvr>
-</p:sld>
-</file>
-
-<file path=ppt/slides/slide18.xml><?xml version="1.0" encoding="utf-8"?>
-<p:sld xmlns:a="http://schemas.openxmlformats.org/drawingml/2006/main" xmlns:p="http://schemas.openxmlformats.org/presentationml/2006/main" xmlns:r="http://schemas.openxmlformats.org/officeDocument/2006/relationships">
-  <p:cSld>
-    <p:bg>
-      <p:bgPr>
-        <a:solidFill>
-          <a:srgbClr val="FFFFFF"/>
-        </a:solidFill>
-        <a:effectLst/>
-      </p:bgPr>
-    </p:bg>
-    <p:spTree>
-      <p:nvGrpSpPr>
-        <p:cNvPr id="1" name=""/>
-        <p:cNvGrpSpPr/>
-        <p:nvPr/>
-      </p:nvGrpSpPr>
-      <p:grpSpPr/>
-      <p:sp>
-        <p:nvSpPr>
-          <p:cNvPr id="2" name="TextBox 1"/>
-          <p:cNvSpPr txBox="1"/>
-          <p:nvPr/>
-        </p:nvSpPr>
-        <p:spPr>
-          <a:xfrm>
-            <a:off x="502920" y="384048"/>
-            <a:ext cx="11155680" cy="822960"/>
-          </a:xfrm>
-          <a:prstGeom prst="rect">
-            <a:avLst/>
-          </a:prstGeom>
-          <a:noFill/>
-        </p:spPr>
-        <p:txBody>
-          <a:bodyPr wrap="square" anchor="t">
-            <a:spAutoFit/>
-          </a:bodyPr>
-          <a:lstStyle/>
-          <a:p>
-            <a:pPr algn="l">
-              <a:lnSpc>
-                <a:spcPct val="115000"/>
-              </a:lnSpc>
-            </a:pPr>
-            <a:r>
-              <a:rPr sz="3200" b="1" i="0">
-                <a:solidFill>
-                  <a:srgbClr val="1A1A2E"/>
-                </a:solidFill>
-                <a:latin typeface="Calibri"/>
-              </a:rPr>
-              <a:t>The map wasn't free</a:t>
-            </a:r>
-          </a:p>
-        </p:txBody>
-      </p:sp>
-      <p:sp>
-        <p:nvSpPr>
-          <p:cNvPr id="3" name="Rectangle 2"/>
-          <p:cNvSpPr/>
-          <p:nvPr/>
-        </p:nvSpPr>
-        <p:spPr>
-          <a:xfrm>
-            <a:off x="502920" y="1170432"/>
-            <a:ext cx="2011680" cy="50800"/>
-          </a:xfrm>
-          <a:prstGeom prst="rect">
-            <a:avLst/>
-          </a:prstGeom>
-          <a:solidFill>
-            <a:srgbClr val="D97706"/>
-          </a:solidFill>
-          <a:ln>
-            <a:noFill/>
-          </a:ln>
-          <a:effectLst/>
-        </p:spPr>
-        <p:style>
-          <a:lnRef idx="1">
-            <a:schemeClr val="accent1"/>
-          </a:lnRef>
-          <a:fillRef idx="3">
-            <a:schemeClr val="accent1"/>
-          </a:fillRef>
-          <a:effectRef idx="2">
-            <a:schemeClr val="accent1"/>
-          </a:effectRef>
-          <a:fontRef idx="minor">
-            <a:schemeClr val="lt1"/>
-          </a:fontRef>
-        </p:style>
-        <p:txBody>
-          <a:bodyPr rtlCol="0" anchor="ctr"/>
-          <a:lstStyle/>
-          <a:p>
-            <a:pPr algn="ctr"/>
-          </a:p>
-        </p:txBody>
-      </p:sp>
-      <p:pic>
-        <p:nvPicPr>
-          <p:cNvPr id="4" name="Picture 3" descr="chart_cost.png"/>
-          <p:cNvPicPr>
-            <a:picLocks noChangeAspect="1"/>
-          </p:cNvPicPr>
-          <p:nvPr/>
-        </p:nvPicPr>
-        <p:blipFill>
-          <a:blip r:embed="rId2"/>
-          <a:stretch>
-            <a:fillRect/>
-          </a:stretch>
-        </p:blipFill>
-        <p:spPr>
-          <a:xfrm>
-            <a:off x="1627595" y="1600200"/>
-            <a:ext cx="8906330" cy="4206240"/>
-          </a:xfrm>
-          <a:prstGeom prst="rect">
-            <a:avLst/>
-          </a:prstGeom>
-        </p:spPr>
-      </p:pic>
-      <p:sp>
-        <p:nvSpPr>
-          <p:cNvPr id="5" name="TextBox 4"/>
-          <p:cNvSpPr txBox="1"/>
-          <p:nvPr/>
-        </p:nvSpPr>
-        <p:spPr>
-          <a:xfrm>
-            <a:off x="822960" y="5943600"/>
-            <a:ext cx="10515600" cy="640080"/>
-          </a:xfrm>
-          <a:prstGeom prst="rect">
-            <a:avLst/>
-          </a:prstGeom>
-          <a:noFill/>
-        </p:spPr>
-        <p:txBody>
-          <a:bodyPr wrap="square" anchor="t">
-            <a:spAutoFit/>
-          </a:bodyPr>
-          <a:lstStyle/>
-          <a:p>
-            <a:pPr algn="ctr">
-              <a:lnSpc>
-                <a:spcPct val="115000"/>
-              </a:lnSpc>
-            </a:pPr>
-            <a:r>
-              <a:rPr sz="1550" b="0" i="1">
-                <a:solidFill>
-                  <a:srgbClr val="666666"/>
-                </a:solidFill>
-                <a:latin typeface="Calibri"/>
-              </a:rPr>
-              <a:t>Same number of steps, but the AI had to “read” about 70% more material per question when the map was available.</a:t>
-            </a:r>
-          </a:p>
-        </p:txBody>
-      </p:sp>
-      <p:sp>
-        <p:nvSpPr>
-          <p:cNvPr id="6" name="TextBox 5"/>
-          <p:cNvSpPr txBox="1"/>
-          <p:nvPr/>
-        </p:nvSpPr>
-        <p:spPr>
-          <a:xfrm>
-            <a:off x="502920" y="6473952"/>
-            <a:ext cx="8229600" cy="320040"/>
-          </a:xfrm>
-          <a:prstGeom prst="rect">
-            <a:avLst/>
-          </a:prstGeom>
-          <a:noFill/>
-        </p:spPr>
-        <p:txBody>
-          <a:bodyPr wrap="square" anchor="t">
-            <a:spAutoFit/>
-          </a:bodyPr>
-          <a:lstStyle/>
-          <a:p>
-            <a:pPr algn="l">
-              <a:lnSpc>
-                <a:spcPct val="115000"/>
-              </a:lnSpc>
-            </a:pPr>
-            <a:r>
-              <a:rPr sz="1050" b="0" i="0">
-                <a:solidFill>
-                  <a:srgbClr val="AAAAAA"/>
-                </a:solidFill>
-                <a:latin typeface="Calibri"/>
-              </a:rPr>
-              <a:t>Part 4 — Results</a:t>
-            </a:r>
-          </a:p>
-        </p:txBody>
-      </p:sp>
-    </p:spTree>
-  </p:cSld>
-  <p:clrMapOvr>
-    <a:masterClrMapping/>
-  </p:clrMapOvr>
-</p:sld>
-</file>
-
-<file path=ppt/slides/slide19.xml><?xml version="1.0" encoding="utf-8"?>
-<p:sld xmlns:a="http://schemas.openxmlformats.org/drawingml/2006/main" xmlns:p="http://schemas.openxmlformats.org/presentationml/2006/main" xmlns:r="http://schemas.openxmlformats.org/officeDocument/2006/relationships">
-  <p:cSld>
-    <p:bg>
-      <p:bgPr>
-        <a:solidFill>
-          <a:srgbClr val="1A1A2E"/>
-        </a:solidFill>
-        <a:effectLst/>
-      </p:bgPr>
-    </p:bg>
-    <p:spTree>
-      <p:nvGrpSpPr>
-        <p:cNvPr id="1" name=""/>
-        <p:cNvGrpSpPr/>
-        <p:nvPr/>
-      </p:nvGrpSpPr>
-      <p:grpSpPr/>
-      <p:sp>
-        <p:nvSpPr>
-          <p:cNvPr id="2" name="TextBox 1"/>
-          <p:cNvSpPr txBox="1"/>
-          <p:nvPr/>
-        </p:nvSpPr>
-        <p:spPr>
-          <a:xfrm>
-            <a:off x="914400" y="2194560"/>
-            <a:ext cx="1828800" cy="1280160"/>
-          </a:xfrm>
-          <a:prstGeom prst="rect">
-            <a:avLst/>
-          </a:prstGeom>
-          <a:noFill/>
-        </p:spPr>
-        <p:txBody>
-          <a:bodyPr wrap="square" anchor="t">
-            <a:spAutoFit/>
-          </a:bodyPr>
-          <a:lstStyle/>
-          <a:p>
-            <a:pPr algn="l">
-              <a:lnSpc>
-                <a:spcPct val="115000"/>
-              </a:lnSpc>
-            </a:pPr>
-            <a:r>
-              <a:rPr sz="9000" b="1" i="0">
-                <a:solidFill>
-                  <a:srgbClr val="2CA02C"/>
-                </a:solidFill>
-                <a:latin typeface="Calibri"/>
-              </a:rPr>
-              <a:t>5</a:t>
-            </a:r>
-          </a:p>
-        </p:txBody>
-      </p:sp>
-      <p:sp>
-        <p:nvSpPr>
-          <p:cNvPr id="3" name="TextBox 2"/>
-          <p:cNvSpPr txBox="1"/>
-          <p:nvPr/>
-        </p:nvSpPr>
-        <p:spPr>
-          <a:xfrm>
-            <a:off x="3017520" y="2514600"/>
-            <a:ext cx="8229600" cy="914400"/>
-          </a:xfrm>
-          <a:prstGeom prst="rect">
-            <a:avLst/>
-          </a:prstGeom>
-          <a:noFill/>
-        </p:spPr>
-        <p:txBody>
-          <a:bodyPr wrap="square" anchor="t">
-            <a:spAutoFit/>
-          </a:bodyPr>
-          <a:lstStyle/>
-          <a:p>
-            <a:pPr algn="l">
-              <a:lnSpc>
-                <a:spcPct val="115000"/>
-              </a:lnSpc>
-            </a:pPr>
-            <a:r>
-              <a:rPr sz="3400" b="1" i="0">
-                <a:solidFill>
-                  <a:srgbClr val="FFFFFF"/>
-                </a:solidFill>
-                <a:latin typeface="Calibri"/>
-              </a:rPr>
-              <a:t>Why</a:t>
-            </a:r>
-          </a:p>
-        </p:txBody>
-      </p:sp>
-      <p:sp>
-        <p:nvSpPr>
-          <p:cNvPr id="4" name="TextBox 3"/>
-          <p:cNvSpPr txBox="1"/>
-          <p:nvPr/>
-        </p:nvSpPr>
-        <p:spPr>
-          <a:xfrm>
-            <a:off x="3017520" y="3429000"/>
-            <a:ext cx="8229600" cy="914400"/>
-          </a:xfrm>
-          <a:prstGeom prst="rect">
-            <a:avLst/>
-          </a:prstGeom>
-          <a:noFill/>
-        </p:spPr>
-        <p:txBody>
-          <a:bodyPr wrap="square" anchor="t">
-            <a:spAutoFit/>
-          </a:bodyPr>
-          <a:lstStyle/>
-          <a:p>
-            <a:pPr algn="l">
-              <a:lnSpc>
-                <a:spcPct val="115000"/>
-              </a:lnSpc>
-            </a:pPr>
-            <a:r>
-              <a:rPr sz="1700" b="0" i="1">
-                <a:solidFill>
-                  <a:srgbClr val="94A3B8"/>
-                </a:solidFill>
-                <a:latin typeface="Calibri"/>
-              </a:rPr>
-              <a:t>Why the results look this way</a:t>
-            </a:r>
-          </a:p>
-        </p:txBody>
-      </p:sp>
-    </p:spTree>
-  </p:cSld>
-  <p:clrMapOvr>
-    <a:masterClrMapping/>
-  </p:clrMapOvr>
-</p:sld>
-</file>
-
-<file path=ppt/slides/slide2.xml><?xml version="1.0" encoding="utf-8"?>
-<p:sld xmlns:a="http://schemas.openxmlformats.org/drawingml/2006/main" xmlns:p="http://schemas.openxmlformats.org/presentationml/2006/main" xmlns:r="http://schemas.openxmlformats.org/officeDocument/2006/relationships">
-  <p:cSld>
-    <p:bg>
-      <p:bgPr>
-        <a:solidFill>
-          <a:srgbClr val="1A1A2E"/>
-        </a:solidFill>
-        <a:effectLst/>
-      </p:bgPr>
-    </p:bg>
-    <p:spTree>
-      <p:nvGrpSpPr>
-        <p:cNvPr id="1" name=""/>
-        <p:cNvGrpSpPr/>
-        <p:nvPr/>
-      </p:nvGrpSpPr>
-      <p:grpSpPr/>
-      <p:sp>
-        <p:nvSpPr>
-          <p:cNvPr id="2" name="TextBox 1"/>
-          <p:cNvSpPr txBox="1"/>
-          <p:nvPr/>
-        </p:nvSpPr>
-        <p:spPr>
-          <a:xfrm>
-            <a:off x="914400" y="2194560"/>
-            <a:ext cx="1828800" cy="1280160"/>
-          </a:xfrm>
-          <a:prstGeom prst="rect">
-            <a:avLst/>
-          </a:prstGeom>
-          <a:noFill/>
-        </p:spPr>
-        <p:txBody>
-          <a:bodyPr wrap="square" anchor="t">
-            <a:spAutoFit/>
-          </a:bodyPr>
-          <a:lstStyle/>
-          <a:p>
-            <a:pPr algn="l">
-              <a:lnSpc>
-                <a:spcPct val="115000"/>
-              </a:lnSpc>
-            </a:pPr>
-            <a:r>
-              <a:rPr sz="9000" b="1" i="0">
-                <a:solidFill>
-                  <a:srgbClr val="2CA02C"/>
-                </a:solidFill>
-                <a:latin typeface="Calibri"/>
-              </a:rPr>
-              <a:t>1</a:t>
-            </a:r>
-          </a:p>
-        </p:txBody>
-      </p:sp>
-      <p:sp>
-        <p:nvSpPr>
-          <p:cNvPr id="3" name="TextBox 2"/>
-          <p:cNvSpPr txBox="1"/>
-          <p:nvPr/>
-        </p:nvSpPr>
-        <p:spPr>
-          <a:xfrm>
-            <a:off x="3017520" y="2514600"/>
-            <a:ext cx="8229600" cy="914400"/>
-          </a:xfrm>
-          <a:prstGeom prst="rect">
-            <a:avLst/>
-          </a:prstGeom>
-          <a:noFill/>
-        </p:spPr>
-        <p:txBody>
-          <a:bodyPr wrap="square" anchor="t">
-            <a:spAutoFit/>
-          </a:bodyPr>
-          <a:lstStyle/>
-          <a:p>
-            <a:pPr algn="l">
-              <a:lnSpc>
-                <a:spcPct val="115000"/>
-              </a:lnSpc>
-            </a:pPr>
-            <a:r>
-              <a:rPr sz="3400" b="1" i="0">
-                <a:solidFill>
-                  <a:srgbClr val="FFFFFF"/>
-                </a:solidFill>
-                <a:latin typeface="Calibri"/>
-              </a:rPr>
-              <a:t>The Idea</a:t>
-            </a:r>
-          </a:p>
-        </p:txBody>
-      </p:sp>
-      <p:sp>
-        <p:nvSpPr>
-          <p:cNvPr id="4" name="TextBox 3"/>
-          <p:cNvSpPr txBox="1"/>
-          <p:nvPr/>
-        </p:nvSpPr>
-        <p:spPr>
-          <a:xfrm>
-            <a:off x="3017520" y="3429000"/>
-            <a:ext cx="8229600" cy="914400"/>
-          </a:xfrm>
-          <a:prstGeom prst="rect">
-            <a:avLst/>
-          </a:prstGeom>
-          <a:noFill/>
-        </p:spPr>
-        <p:txBody>
-          <a:bodyPr wrap="square" anchor="t">
-            <a:spAutoFit/>
-          </a:bodyPr>
-          <a:lstStyle/>
-          <a:p>
-            <a:pPr algn="l">
-              <a:lnSpc>
-                <a:spcPct val="115000"/>
-              </a:lnSpc>
-            </a:pPr>
-            <a:r>
-              <a:rPr sz="1700" b="0" i="1">
-                <a:solidFill>
-                  <a:srgbClr val="94A3B8"/>
-                </a:solidFill>
-                <a:latin typeface="Calibri"/>
-              </a:rPr>
-              <a:t>What problem were we trying to solve?</a:t>
-            </a:r>
-          </a:p>
-        </p:txBody>
-      </p:sp>
-    </p:spTree>
-  </p:cSld>
-  <p:clrMapOvr>
-    <a:masterClrMapping/>
-  </p:clrMapOvr>
-</p:sld>
-</file>
-
-<file path=ppt/slides/slide20.xml><?xml version="1.0" encoding="utf-8"?>
-<p:sld xmlns:a="http://schemas.openxmlformats.org/drawingml/2006/main" xmlns:p="http://schemas.openxmlformats.org/presentationml/2006/main" xmlns:r="http://schemas.openxmlformats.org/officeDocument/2006/relationships">
-  <p:cSld>
-    <p:bg>
-      <p:bgPr>
-        <a:solidFill>
-          <a:srgbClr val="FFFFFF"/>
-        </a:solidFill>
-        <a:effectLst/>
-      </p:bgPr>
-    </p:bg>
-    <p:spTree>
-      <p:nvGrpSpPr>
-        <p:cNvPr id="1" name=""/>
-        <p:cNvGrpSpPr/>
-        <p:nvPr/>
-      </p:nvGrpSpPr>
-      <p:grpSpPr/>
-      <p:sp>
-        <p:nvSpPr>
-          <p:cNvPr id="2" name="TextBox 1"/>
-          <p:cNvSpPr txBox="1"/>
-          <p:nvPr/>
-        </p:nvSpPr>
-        <p:spPr>
-          <a:xfrm>
-            <a:off x="502920" y="384048"/>
-            <a:ext cx="11155680" cy="822960"/>
-          </a:xfrm>
-          <a:prstGeom prst="rect">
-            <a:avLst/>
-          </a:prstGeom>
-          <a:noFill/>
-        </p:spPr>
-        <p:txBody>
-          <a:bodyPr wrap="square" anchor="t">
-            <a:spAutoFit/>
-          </a:bodyPr>
-          <a:lstStyle/>
-          <a:p>
-            <a:pPr algn="l">
-              <a:lnSpc>
-                <a:spcPct val="115000"/>
-              </a:lnSpc>
-            </a:pPr>
-            <a:r>
-              <a:rPr sz="3200" b="1" i="0">
-                <a:solidFill>
-                  <a:srgbClr val="1A1A2E"/>
-                </a:solidFill>
-                <a:latin typeface="Calibri"/>
-              </a:rPr>
-              <a:t>Why didn't it help more? Reason #1</a:t>
-            </a:r>
-          </a:p>
-        </p:txBody>
-      </p:sp>
-      <p:sp>
-        <p:nvSpPr>
-          <p:cNvPr id="3" name="Rectangle 2"/>
-          <p:cNvSpPr/>
-          <p:nvPr/>
-        </p:nvSpPr>
-        <p:spPr>
-          <a:xfrm>
-            <a:off x="502920" y="1170432"/>
-            <a:ext cx="2011680" cy="50800"/>
-          </a:xfrm>
-          <a:prstGeom prst="rect">
-            <a:avLst/>
-          </a:prstGeom>
-          <a:solidFill>
-            <a:srgbClr val="2563EB"/>
-          </a:solidFill>
-          <a:ln>
-            <a:noFill/>
-          </a:ln>
-          <a:effectLst/>
-        </p:spPr>
-        <p:style>
-          <a:lnRef idx="1">
-            <a:schemeClr val="accent1"/>
-          </a:lnRef>
-          <a:fillRef idx="3">
-            <a:schemeClr val="accent1"/>
-          </a:fillRef>
-          <a:effectRef idx="2">
-            <a:schemeClr val="accent1"/>
-          </a:effectRef>
-          <a:fontRef idx="minor">
-            <a:schemeClr val="lt1"/>
-          </a:fontRef>
-        </p:style>
-        <p:txBody>
-          <a:bodyPr rtlCol="0" anchor="ctr"/>
-          <a:lstStyle/>
-          <a:p>
-            <a:pPr algn="ctr"/>
-          </a:p>
-        </p:txBody>
-      </p:sp>
-      <p:sp>
-        <p:nvSpPr>
-          <p:cNvPr id="4" name="TextBox 3"/>
-          <p:cNvSpPr txBox="1"/>
-          <p:nvPr/>
-        </p:nvSpPr>
-        <p:spPr>
-          <a:xfrm>
-            <a:off x="640080" y="1737360"/>
-            <a:ext cx="10789920" cy="548640"/>
-          </a:xfrm>
-          <a:prstGeom prst="rect">
-            <a:avLst/>
-          </a:prstGeom>
-          <a:noFill/>
-        </p:spPr>
-        <p:txBody>
-          <a:bodyPr wrap="square" anchor="t">
-            <a:spAutoFit/>
-          </a:bodyPr>
-          <a:lstStyle/>
-          <a:p>
-            <a:pPr algn="l">
-              <a:lnSpc>
-                <a:spcPct val="115000"/>
-              </a:lnSpc>
-            </a:pPr>
-            <a:r>
-              <a:rPr sz="2100" b="1" i="0">
-                <a:solidFill>
-                  <a:srgbClr val="2563EB"/>
-                </a:solidFill>
-                <a:latin typeface="Calibri"/>
-              </a:rPr>
-              <a:t>Sometimes, the referee itself got it wrong.</a:t>
-            </a:r>
-          </a:p>
-        </p:txBody>
-      </p:sp>
-      <p:sp>
-        <p:nvSpPr>
-          <p:cNvPr id="5" name="TextBox 4"/>
-          <p:cNvSpPr txBox="1"/>
-          <p:nvPr/>
-        </p:nvSpPr>
-        <p:spPr>
-          <a:xfrm>
-            <a:off x="640080" y="2468880"/>
-            <a:ext cx="10789920" cy="3291840"/>
-          </a:xfrm>
-          <a:prstGeom prst="rect">
-            <a:avLst/>
-          </a:prstGeom>
-          <a:noFill/>
-        </p:spPr>
-        <p:txBody>
-          <a:bodyPr wrap="square" anchor="t">
-            <a:spAutoFit/>
-          </a:bodyPr>
-          <a:lstStyle/>
-          <a:p>
-            <a:pPr algn="l">
-              <a:lnSpc>
-                <a:spcPct val="115000"/>
-              </a:lnSpc>
-            </a:pPr>
-            <a:r>
-              <a:rPr sz="1800" b="0" i="0">
-                <a:solidFill>
-                  <a:srgbClr val="333333"/>
-                </a:solidFill>
-                <a:latin typeface="Calibri"/>
-              </a:rPr>
-              <a:t>We double-checked one “loss” by hand: the map-assisted answer said a certain piece of memory was “shared per-thread” — and the AI judge marked this wrong.</a:t>
-            </a:r>
-          </a:p>
-          <a:p>
-            <a:pPr algn="l">
-              <a:lnSpc>
-                <a:spcPct val="115000"/>
-              </a:lnSpc>
-            </a:pPr>
-          </a:p>
-          <a:p>
-            <a:pPr algn="l">
-              <a:lnSpc>
-                <a:spcPct val="115000"/>
-              </a:lnSpc>
-            </a:pPr>
-            <a:r>
-              <a:rPr sz="1800" b="0" i="0">
-                <a:solidFill>
-                  <a:srgbClr val="333333"/>
-                </a:solidFill>
-                <a:latin typeface="Calibri"/>
-              </a:rPr>
-              <a:t>We went and read the actual source code ourselves. The map-assisted answer was correct. The judge made the mistake, not the AI being tested.</a:t>
-            </a:r>
-          </a:p>
-          <a:p>
-            <a:pPr algn="l">
-              <a:lnSpc>
-                <a:spcPct val="115000"/>
-              </a:lnSpc>
-            </a:pPr>
-          </a:p>
-          <a:p>
-            <a:pPr algn="l">
-              <a:lnSpc>
-                <a:spcPct val="115000"/>
-              </a:lnSpc>
-            </a:pPr>
-            <a:r>
-              <a:rPr sz="1800" b="0" i="0">
-                <a:solidFill>
-                  <a:srgbClr val="333333"/>
-                </a:solidFill>
-                <a:latin typeface="Calibri"/>
-              </a:rPr>
-              <a:t>This tells us the true gap between the two modes is probably even smaller than our headline number suggests — some of the “losses” aren't real losses.</a:t>
-            </a:r>
-          </a:p>
-        </p:txBody>
-      </p:sp>
-      <p:sp>
-        <p:nvSpPr>
-          <p:cNvPr id="6" name="TextBox 5"/>
-          <p:cNvSpPr txBox="1"/>
-          <p:nvPr/>
-        </p:nvSpPr>
-        <p:spPr>
-          <a:xfrm>
-            <a:off x="502920" y="6473952"/>
-            <a:ext cx="8229600" cy="320040"/>
-          </a:xfrm>
-          <a:prstGeom prst="rect">
-            <a:avLst/>
-          </a:prstGeom>
-          <a:noFill/>
-        </p:spPr>
-        <p:txBody>
-          <a:bodyPr wrap="square" anchor="t">
-            <a:spAutoFit/>
-          </a:bodyPr>
-          <a:lstStyle/>
-          <a:p>
-            <a:pPr algn="l">
-              <a:lnSpc>
-                <a:spcPct val="115000"/>
-              </a:lnSpc>
-            </a:pPr>
-            <a:r>
-              <a:rPr sz="1050" b="0" i="0">
-                <a:solidFill>
-                  <a:srgbClr val="AAAAAA"/>
-                </a:solidFill>
-                <a:latin typeface="Calibri"/>
-              </a:rPr>
-              <a:t>Part 5 — Why the Results Look This Way</a:t>
-            </a:r>
-          </a:p>
-        </p:txBody>
-      </p:sp>
-    </p:spTree>
-  </p:cSld>
-  <p:clrMapOvr>
-    <a:masterClrMapping/>
-  </p:clrMapOvr>
-</p:sld>
-</file>
-
-<file path=ppt/slides/slide21.xml><?xml version="1.0" encoding="utf-8"?>
-<p:sld xmlns:a="http://schemas.openxmlformats.org/drawingml/2006/main" xmlns:p="http://schemas.openxmlformats.org/presentationml/2006/main" xmlns:r="http://schemas.openxmlformats.org/officeDocument/2006/relationships">
-  <p:cSld>
-    <p:bg>
-      <p:bgPr>
-        <a:solidFill>
-          <a:srgbClr val="FFFFFF"/>
-        </a:solidFill>
-        <a:effectLst/>
-      </p:bgPr>
-    </p:bg>
-    <p:spTree>
-      <p:nvGrpSpPr>
-        <p:cNvPr id="1" name=""/>
-        <p:cNvGrpSpPr/>
-        <p:nvPr/>
-      </p:nvGrpSpPr>
-      <p:grpSpPr/>
-      <p:sp>
-        <p:nvSpPr>
-          <p:cNvPr id="2" name="TextBox 1"/>
-          <p:cNvSpPr txBox="1"/>
-          <p:nvPr/>
-        </p:nvSpPr>
-        <p:spPr>
-          <a:xfrm>
-            <a:off x="502920" y="384048"/>
-            <a:ext cx="11155680" cy="822960"/>
-          </a:xfrm>
-          <a:prstGeom prst="rect">
-            <a:avLst/>
-          </a:prstGeom>
-          <a:noFill/>
-        </p:spPr>
-        <p:txBody>
-          <a:bodyPr wrap="square" anchor="t">
-            <a:spAutoFit/>
-          </a:bodyPr>
-          <a:lstStyle/>
-          <a:p>
-            <a:pPr algn="l">
-              <a:lnSpc>
-                <a:spcPct val="115000"/>
-              </a:lnSpc>
-            </a:pPr>
-            <a:r>
-              <a:rPr sz="3200" b="1" i="0">
-                <a:solidFill>
-                  <a:srgbClr val="1A1A2E"/>
-                </a:solidFill>
-                <a:latin typeface="Calibri"/>
-              </a:rPr>
-              <a:t>Why didn't it help more? Reason #2</a:t>
-            </a:r>
-          </a:p>
-        </p:txBody>
-      </p:sp>
-      <p:sp>
-        <p:nvSpPr>
-          <p:cNvPr id="3" name="Rectangle 2"/>
-          <p:cNvSpPr/>
-          <p:nvPr/>
-        </p:nvSpPr>
-        <p:spPr>
-          <a:xfrm>
-            <a:off x="502920" y="1170432"/>
-            <a:ext cx="2011680" cy="50800"/>
-          </a:xfrm>
-          <a:prstGeom prst="rect">
-            <a:avLst/>
-          </a:prstGeom>
-          <a:solidFill>
-            <a:srgbClr val="D97706"/>
-          </a:solidFill>
-          <a:ln>
-            <a:noFill/>
-          </a:ln>
-          <a:effectLst/>
-        </p:spPr>
-        <p:style>
-          <a:lnRef idx="1">
-            <a:schemeClr val="accent1"/>
-          </a:lnRef>
-          <a:fillRef idx="3">
-            <a:schemeClr val="accent1"/>
-          </a:fillRef>
-          <a:effectRef idx="2">
-            <a:schemeClr val="accent1"/>
-          </a:effectRef>
-          <a:fontRef idx="minor">
-            <a:schemeClr val="lt1"/>
-          </a:fontRef>
-        </p:style>
-        <p:txBody>
-          <a:bodyPr rtlCol="0" anchor="ctr"/>
-          <a:lstStyle/>
-          <a:p>
-            <a:pPr algn="ctr"/>
-          </a:p>
-        </p:txBody>
-      </p:sp>
-      <p:pic>
-        <p:nvPicPr>
-          <p:cNvPr id="4" name="Picture 3" descr="chart_recall_gap.png"/>
-          <p:cNvPicPr>
-            <a:picLocks noChangeAspect="1"/>
-          </p:cNvPicPr>
-          <p:nvPr/>
-        </p:nvPicPr>
-        <p:blipFill>
-          <a:blip r:embed="rId2"/>
-          <a:stretch>
-            <a:fillRect/>
-          </a:stretch>
-        </p:blipFill>
-        <p:spPr>
-          <a:xfrm>
-            <a:off x="548640" y="1859877"/>
-            <a:ext cx="6766560" cy="3961206"/>
-          </a:xfrm>
-          <a:prstGeom prst="rect">
-            <a:avLst/>
-          </a:prstGeom>
-        </p:spPr>
-      </p:pic>
-      <p:sp>
-        <p:nvSpPr>
-          <p:cNvPr id="5" name="TextBox 4"/>
-          <p:cNvSpPr txBox="1"/>
-          <p:nvPr/>
-        </p:nvSpPr>
-        <p:spPr>
-          <a:xfrm>
-            <a:off x="7589520" y="1920240"/>
-            <a:ext cx="4114800" cy="914400"/>
-          </a:xfrm>
-          <a:prstGeom prst="rect">
-            <a:avLst/>
-          </a:prstGeom>
-          <a:noFill/>
-        </p:spPr>
-        <p:txBody>
-          <a:bodyPr wrap="square" anchor="t">
-            <a:spAutoFit/>
-          </a:bodyPr>
-          <a:lstStyle/>
-          <a:p>
-            <a:pPr algn="l">
-              <a:lnSpc>
-                <a:spcPct val="115000"/>
-              </a:lnSpc>
-            </a:pPr>
-            <a:r>
-              <a:rPr sz="2300" b="1" i="0">
-                <a:solidFill>
-                  <a:srgbClr val="D97706"/>
-                </a:solidFill>
-                <a:latin typeface="Calibri"/>
-              </a:rPr>
-              <a:t>Trusting the map</a:t>
-            </a:r>
-          </a:p>
-          <a:p>
-            <a:pPr algn="l">
-              <a:lnSpc>
-                <a:spcPct val="115000"/>
-              </a:lnSpc>
-            </a:pPr>
-            <a:r>
-              <a:rPr sz="2300" b="1" i="0">
-                <a:solidFill>
-                  <a:srgbClr val="D97706"/>
-                </a:solidFill>
-                <a:latin typeface="Calibri"/>
-              </a:rPr>
-              <a:t>too much.</a:t>
-            </a:r>
-          </a:p>
-        </p:txBody>
-      </p:sp>
-      <p:sp>
-        <p:nvSpPr>
-          <p:cNvPr id="6" name="TextBox 5"/>
-          <p:cNvSpPr txBox="1"/>
-          <p:nvPr/>
-        </p:nvSpPr>
-        <p:spPr>
-          <a:xfrm>
-            <a:off x="7589520" y="2926080"/>
-            <a:ext cx="4114800" cy="3291840"/>
-          </a:xfrm>
-          <a:prstGeom prst="rect">
-            <a:avLst/>
-          </a:prstGeom>
-          <a:noFill/>
-        </p:spPr>
-        <p:txBody>
-          <a:bodyPr wrap="square" anchor="t">
-            <a:spAutoFit/>
-          </a:bodyPr>
-          <a:lstStyle/>
-          <a:p>
-            <a:pPr algn="l">
-              <a:lnSpc>
-                <a:spcPct val="115000"/>
-              </a:lnSpc>
-            </a:pPr>
-            <a:r>
-              <a:rPr sz="1550" b="0" i="0">
-                <a:solidFill>
-                  <a:srgbClr val="333333"/>
-                </a:solidFill>
-                <a:latin typeface="Calibri"/>
-              </a:rPr>
-              <a:t>The map is honest about gaps in itself — it even flags things it couldn't fully resolve.</a:t>
-            </a:r>
-          </a:p>
-          <a:p>
-            <a:pPr algn="l">
-              <a:lnSpc>
-                <a:spcPct val="115000"/>
-              </a:lnSpc>
-            </a:pPr>
-          </a:p>
-          <a:p>
-            <a:pPr algn="l">
-              <a:lnSpc>
-                <a:spcPct val="115000"/>
-              </a:lnSpc>
-            </a:pPr>
-            <a:r>
-              <a:rPr sz="1550" b="0" i="0">
-                <a:solidFill>
-                  <a:srgbClr val="333333"/>
-                </a:solidFill>
-                <a:latin typeface="Calibri"/>
-              </a:rPr>
-              <a:t>But when the AI trusted the map's answer as “complete” instead of double-checking, it sometimes missed real connections that a plain text search would have caught.</a:t>
-            </a:r>
-          </a:p>
-        </p:txBody>
-      </p:sp>
-      <p:sp>
-        <p:nvSpPr>
-          <p:cNvPr id="7" name="TextBox 6"/>
-          <p:cNvSpPr txBox="1"/>
-          <p:nvPr/>
-        </p:nvSpPr>
-        <p:spPr>
-          <a:xfrm>
-            <a:off x="502920" y="6473952"/>
-            <a:ext cx="8229600" cy="320040"/>
-          </a:xfrm>
-          <a:prstGeom prst="rect">
-            <a:avLst/>
-          </a:prstGeom>
-          <a:noFill/>
-        </p:spPr>
-        <p:txBody>
-          <a:bodyPr wrap="square" anchor="t">
-            <a:spAutoFit/>
-          </a:bodyPr>
-          <a:lstStyle/>
-          <a:p>
-            <a:pPr algn="l">
-              <a:lnSpc>
-                <a:spcPct val="115000"/>
-              </a:lnSpc>
-            </a:pPr>
-            <a:r>
-              <a:rPr sz="1050" b="0" i="0">
-                <a:solidFill>
-                  <a:srgbClr val="AAAAAA"/>
-                </a:solidFill>
-                <a:latin typeface="Calibri"/>
-              </a:rPr>
-              <a:t>Part 5 — Why the Results Look This Way</a:t>
-            </a:r>
-          </a:p>
-        </p:txBody>
-      </p:sp>
-    </p:spTree>
-  </p:cSld>
-  <p:clrMapOvr>
-    <a:masterClrMapping/>
-  </p:clrMapOvr>
-</p:sld>
-</file>
-
-<file path=ppt/slides/slide22.xml><?xml version="1.0" encoding="utf-8"?>
-<p:sld xmlns:a="http://schemas.openxmlformats.org/drawingml/2006/main" xmlns:p="http://schemas.openxmlformats.org/presentationml/2006/main" xmlns:r="http://schemas.openxmlformats.org/officeDocument/2006/relationships">
-  <p:cSld>
-    <p:bg>
-      <p:bgPr>
-        <a:solidFill>
-          <a:srgbClr val="FFFFFF"/>
-        </a:solidFill>
-        <a:effectLst/>
-      </p:bgPr>
-    </p:bg>
-    <p:spTree>
-      <p:nvGrpSpPr>
-        <p:cNvPr id="1" name=""/>
-        <p:cNvGrpSpPr/>
-        <p:nvPr/>
-      </p:nvGrpSpPr>
-      <p:grpSpPr/>
-      <p:sp>
-        <p:nvSpPr>
-          <p:cNvPr id="2" name="TextBox 1"/>
-          <p:cNvSpPr txBox="1"/>
-          <p:nvPr/>
-        </p:nvSpPr>
-        <p:spPr>
-          <a:xfrm>
-            <a:off x="502920" y="384048"/>
-            <a:ext cx="11155680" cy="822960"/>
-          </a:xfrm>
-          <a:prstGeom prst="rect">
-            <a:avLst/>
-          </a:prstGeom>
-          <a:noFill/>
-        </p:spPr>
-        <p:txBody>
-          <a:bodyPr wrap="square" anchor="t">
-            <a:spAutoFit/>
-          </a:bodyPr>
-          <a:lstStyle/>
-          <a:p>
-            <a:pPr algn="l">
-              <a:lnSpc>
-                <a:spcPct val="115000"/>
-              </a:lnSpc>
-            </a:pPr>
-            <a:r>
-              <a:rPr sz="3200" b="1" i="0">
-                <a:solidFill>
-                  <a:srgbClr val="1A1A2E"/>
-                </a:solidFill>
-                <a:latin typeface="Calibri"/>
-              </a:rPr>
-              <a:t>Bottom line, in one sentence</a:t>
-            </a:r>
-          </a:p>
-        </p:txBody>
-      </p:sp>
-      <p:sp>
-        <p:nvSpPr>
-          <p:cNvPr id="3" name="Rectangle 2"/>
-          <p:cNvSpPr/>
-          <p:nvPr/>
-        </p:nvSpPr>
-        <p:spPr>
-          <a:xfrm>
-            <a:off x="502920" y="1170432"/>
-            <a:ext cx="2011680" cy="50800"/>
-          </a:xfrm>
-          <a:prstGeom prst="rect">
-            <a:avLst/>
-          </a:prstGeom>
-          <a:solidFill>
-            <a:srgbClr val="2CA02C"/>
-          </a:solidFill>
-          <a:ln>
-            <a:noFill/>
-          </a:ln>
-          <a:effectLst/>
-        </p:spPr>
-        <p:style>
-          <a:lnRef idx="1">
-            <a:schemeClr val="accent1"/>
-          </a:lnRef>
-          <a:fillRef idx="3">
-            <a:schemeClr val="accent1"/>
-          </a:fillRef>
-          <a:effectRef idx="2">
-            <a:schemeClr val="accent1"/>
-          </a:effectRef>
-          <a:fontRef idx="minor">
-            <a:schemeClr val="lt1"/>
-          </a:fontRef>
-        </p:style>
-        <p:txBody>
-          <a:bodyPr rtlCol="0" anchor="ctr"/>
-          <a:lstStyle/>
-          <a:p>
-            <a:pPr algn="ctr"/>
-          </a:p>
-        </p:txBody>
-      </p:sp>
-      <p:sp>
-        <p:nvSpPr>
-          <p:cNvPr id="4" name="Rectangle 3"/>
-          <p:cNvSpPr/>
-          <p:nvPr/>
-        </p:nvSpPr>
-        <p:spPr>
-          <a:xfrm>
-            <a:off x="822960" y="2286000"/>
-            <a:ext cx="10515600" cy="2468880"/>
-          </a:xfrm>
-          <a:prstGeom prst="rect">
-            <a:avLst/>
-          </a:prstGeom>
-          <a:solidFill>
-            <a:srgbClr val="EEF6EE"/>
-          </a:solidFill>
-          <a:ln w="31750">
-            <a:solidFill>
-              <a:srgbClr val="2CA02C"/>
-            </a:solidFill>
-          </a:ln>
-        </p:spPr>
-        <p:style>
-          <a:lnRef idx="1">
-            <a:schemeClr val="accent1"/>
-          </a:lnRef>
-          <a:fillRef idx="3">
-            <a:schemeClr val="accent1"/>
-          </a:fillRef>
-          <a:effectRef idx="2">
-            <a:schemeClr val="accent1"/>
-          </a:effectRef>
-          <a:fontRef idx="minor">
-            <a:schemeClr val="lt1"/>
-          </a:fontRef>
-        </p:style>
-        <p:txBody>
-          <a:bodyPr rtlCol="0" anchor="ctr" wrap="square"/>
-          <a:lstStyle/>
-          <a:p>
-            <a:pPr algn="ctr"/>
-            <a:r>
-              <a:rPr sz="2400" b="1">
-                <a:solidFill>
-                  <a:srgbClr val="1A1A2E"/>
-                </a:solidFill>
-                <a:latin typeface="Calibri"/>
-              </a:rPr>
-              <a:t>Giving today's AI coding agent an extra “code map” tool didn't clearly make it better at understanding code — it used the tool eagerly, but that didn't translate into better answers.</a:t>
-            </a:r>
-          </a:p>
-        </p:txBody>
-      </p:sp>
-      <p:sp>
-        <p:nvSpPr>
-          <p:cNvPr id="5" name="TextBox 4"/>
-          <p:cNvSpPr txBox="1"/>
-          <p:nvPr/>
-        </p:nvSpPr>
-        <p:spPr>
-          <a:xfrm>
-            <a:off x="502920" y="6473952"/>
-            <a:ext cx="8229600" cy="320040"/>
-          </a:xfrm>
-          <a:prstGeom prst="rect">
-            <a:avLst/>
-          </a:prstGeom>
-          <a:noFill/>
-        </p:spPr>
-        <p:txBody>
-          <a:bodyPr wrap="square" anchor="t">
-            <a:spAutoFit/>
-          </a:bodyPr>
-          <a:lstStyle/>
-          <a:p>
-            <a:pPr algn="l">
-              <a:lnSpc>
-                <a:spcPct val="115000"/>
-              </a:lnSpc>
-            </a:pPr>
-            <a:r>
-              <a:rPr sz="1050" b="0" i="0">
-                <a:solidFill>
-                  <a:srgbClr val="AAAAAA"/>
-                </a:solidFill>
-                <a:latin typeface="Calibri"/>
-              </a:rPr>
-              <a:t>Part 5 — Why the Results Look This Way</a:t>
-            </a:r>
-          </a:p>
-        </p:txBody>
-      </p:sp>
-    </p:spTree>
-  </p:cSld>
-  <p:clrMapOvr>
-    <a:masterClrMapping/>
-  </p:clrMapOvr>
-</p:sld>
-</file>
-
-<file path=ppt/slides/slide23.xml><?xml version="1.0" encoding="utf-8"?>
-<p:sld xmlns:a="http://schemas.openxmlformats.org/drawingml/2006/main" xmlns:p="http://schemas.openxmlformats.org/presentationml/2006/main" xmlns:r="http://schemas.openxmlformats.org/officeDocument/2006/relationships">
-  <p:cSld>
-    <p:bg>
-      <p:bgPr>
-        <a:solidFill>
-          <a:srgbClr val="1A1A2E"/>
-        </a:solidFill>
-        <a:effectLst/>
-      </p:bgPr>
-    </p:bg>
-    <p:spTree>
-      <p:nvGrpSpPr>
-        <p:cNvPr id="1" name=""/>
-        <p:cNvGrpSpPr/>
-        <p:nvPr/>
-      </p:nvGrpSpPr>
-      <p:grpSpPr/>
-      <p:sp>
-        <p:nvSpPr>
-          <p:cNvPr id="2" name="TextBox 1"/>
-          <p:cNvSpPr txBox="1"/>
-          <p:nvPr/>
-        </p:nvSpPr>
-        <p:spPr>
-          <a:xfrm>
-            <a:off x="914400" y="2194560"/>
-            <a:ext cx="1828800" cy="1280160"/>
-          </a:xfrm>
-          <a:prstGeom prst="rect">
-            <a:avLst/>
-          </a:prstGeom>
-          <a:noFill/>
-        </p:spPr>
-        <p:txBody>
-          <a:bodyPr wrap="square" anchor="t">
-            <a:spAutoFit/>
-          </a:bodyPr>
-          <a:lstStyle/>
-          <a:p>
-            <a:pPr algn="l">
-              <a:lnSpc>
-                <a:spcPct val="115000"/>
-              </a:lnSpc>
-            </a:pPr>
-            <a:r>
-              <a:rPr sz="9000" b="1" i="0">
-                <a:solidFill>
-                  <a:srgbClr val="2CA02C"/>
-                </a:solidFill>
-                <a:latin typeface="Calibri"/>
-              </a:rPr>
-              <a:t>6</a:t>
-            </a:r>
-          </a:p>
-        </p:txBody>
-      </p:sp>
-      <p:sp>
-        <p:nvSpPr>
-          <p:cNvPr id="3" name="TextBox 2"/>
-          <p:cNvSpPr txBox="1"/>
-          <p:nvPr/>
-        </p:nvSpPr>
-        <p:spPr>
-          <a:xfrm>
-            <a:off x="3017520" y="2514600"/>
-            <a:ext cx="8229600" cy="914400"/>
-          </a:xfrm>
-          <a:prstGeom prst="rect">
-            <a:avLst/>
-          </a:prstGeom>
-          <a:noFill/>
-        </p:spPr>
-        <p:txBody>
-          <a:bodyPr wrap="square" anchor="t">
-            <a:spAutoFit/>
-          </a:bodyPr>
-          <a:lstStyle/>
-          <a:p>
-            <a:pPr algn="l">
-              <a:lnSpc>
-                <a:spcPct val="115000"/>
-              </a:lnSpc>
-            </a:pPr>
-            <a:r>
-              <a:rPr sz="3400" b="1" i="0">
-                <a:solidFill>
-                  <a:srgbClr val="FFFFFF"/>
-                </a:solidFill>
-                <a:latin typeface="Calibri"/>
-              </a:rPr>
-              <a:t>Reflection</a:t>
-            </a:r>
-          </a:p>
-        </p:txBody>
-      </p:sp>
-      <p:sp>
-        <p:nvSpPr>
-          <p:cNvPr id="4" name="TextBox 3"/>
-          <p:cNvSpPr txBox="1"/>
-          <p:nvPr/>
-        </p:nvSpPr>
-        <p:spPr>
-          <a:xfrm>
-            <a:off x="3017520" y="3429000"/>
-            <a:ext cx="8229600" cy="914400"/>
-          </a:xfrm>
-          <a:prstGeom prst="rect">
-            <a:avLst/>
-          </a:prstGeom>
-          <a:noFill/>
-        </p:spPr>
-        <p:txBody>
-          <a:bodyPr wrap="square" anchor="t">
-            <a:spAutoFit/>
-          </a:bodyPr>
-          <a:lstStyle/>
-          <a:p>
-            <a:pPr algn="l">
-              <a:lnSpc>
-                <a:spcPct val="115000"/>
-              </a:lnSpc>
-            </a:pPr>
-            <a:r>
-              <a:rPr sz="1700" b="0" i="1">
-                <a:solidFill>
-                  <a:srgbClr val="94A3B8"/>
-                </a:solidFill>
-                <a:latin typeface="Calibri"/>
-              </a:rPr>
-              <a:t>Four months later</a:t>
-            </a:r>
-          </a:p>
-        </p:txBody>
-      </p:sp>
-    </p:spTree>
-  </p:cSld>
-  <p:clrMapOvr>
-    <a:masterClrMapping/>
-  </p:clrMapOvr>
-</p:sld>
-</file>
-
-<file path=ppt/slides/slide24.xml><?xml version="1.0" encoding="utf-8"?>
-<p:sld xmlns:a="http://schemas.openxmlformats.org/drawingml/2006/main" xmlns:p="http://schemas.openxmlformats.org/presentationml/2006/main" xmlns:r="http://schemas.openxmlformats.org/officeDocument/2006/relationships">
-  <p:cSld>
-    <p:bg>
-      <p:bgPr>
-        <a:solidFill>
-          <a:srgbClr val="1A1A2E"/>
-        </a:solidFill>
-        <a:effectLst/>
-      </p:bgPr>
-    </p:bg>
-    <p:spTree>
-      <p:nvGrpSpPr>
-        <p:cNvPr id="1" name=""/>
-        <p:cNvGrpSpPr/>
-        <p:nvPr/>
-      </p:nvGrpSpPr>
-      <p:grpSpPr/>
-      <p:sp>
-        <p:nvSpPr>
-          <p:cNvPr id="2" name="TextBox 1"/>
-          <p:cNvSpPr txBox="1"/>
-          <p:nvPr/>
-        </p:nvSpPr>
-        <p:spPr>
-          <a:xfrm>
-            <a:off x="822960" y="502920"/>
-            <a:ext cx="10515600" cy="822960"/>
-          </a:xfrm>
-          <a:prstGeom prst="rect">
-            <a:avLst/>
-          </a:prstGeom>
-          <a:noFill/>
-        </p:spPr>
-        <p:txBody>
-          <a:bodyPr wrap="square" anchor="t">
-            <a:spAutoFit/>
-          </a:bodyPr>
-          <a:lstStyle/>
-          <a:p>
-            <a:pPr algn="l">
-              <a:lnSpc>
-                <a:spcPct val="115000"/>
-              </a:lnSpc>
-            </a:pPr>
-            <a:r>
-              <a:rPr sz="3000" b="1" i="0">
-                <a:solidFill>
-                  <a:srgbClr val="FFFFFF"/>
-                </a:solidFill>
-                <a:latin typeface="Calibri"/>
-              </a:rPr>
-              <a:t>A personal note, 4 months later</a:t>
-            </a:r>
-          </a:p>
-        </p:txBody>
-      </p:sp>
-      <p:sp>
-        <p:nvSpPr>
-          <p:cNvPr id="3" name="Rectangle 2"/>
-          <p:cNvSpPr/>
-          <p:nvPr/>
-        </p:nvSpPr>
-        <p:spPr>
-          <a:xfrm>
-            <a:off x="502920" y="1280160"/>
-            <a:ext cx="2011680" cy="50800"/>
-          </a:xfrm>
-          <a:prstGeom prst="rect">
-            <a:avLst/>
-          </a:prstGeom>
-          <a:solidFill>
-            <a:srgbClr val="D97706"/>
-          </a:solidFill>
-          <a:ln>
-            <a:noFill/>
-          </a:ln>
-          <a:effectLst/>
-        </p:spPr>
-        <p:style>
-          <a:lnRef idx="1">
-            <a:schemeClr val="accent1"/>
-          </a:lnRef>
-          <a:fillRef idx="3">
-            <a:schemeClr val="accent1"/>
-          </a:fillRef>
-          <a:effectRef idx="2">
-            <a:schemeClr val="accent1"/>
-          </a:effectRef>
-          <a:fontRef idx="minor">
-            <a:schemeClr val="lt1"/>
-          </a:fontRef>
-        </p:style>
-        <p:txBody>
-          <a:bodyPr rtlCol="0" anchor="ctr"/>
-          <a:lstStyle/>
-          <a:p>
-            <a:pPr algn="ctr"/>
-          </a:p>
-        </p:txBody>
-      </p:sp>
-      <p:sp>
-        <p:nvSpPr>
-          <p:cNvPr id="4" name="TextBox 3"/>
-          <p:cNvSpPr txBox="1"/>
-          <p:nvPr/>
-        </p:nvSpPr>
-        <p:spPr>
-          <a:xfrm>
-            <a:off x="822960" y="1691640"/>
-            <a:ext cx="10515600" cy="1463040"/>
-          </a:xfrm>
-          <a:prstGeom prst="rect">
-            <a:avLst/>
-          </a:prstGeom>
-          <a:noFill/>
-        </p:spPr>
-        <p:txBody>
-          <a:bodyPr wrap="square" anchor="t">
-            <a:spAutoFit/>
-          </a:bodyPr>
-          <a:lstStyle/>
-          <a:p>
-            <a:pPr algn="l">
-              <a:lnSpc>
-                <a:spcPct val="115000"/>
-              </a:lnSpc>
-            </a:pPr>
-            <a:r>
-              <a:rPr sz="1900" b="0" i="0">
-                <a:solidFill>
-                  <a:srgbClr val="DDDDE5"/>
-                </a:solidFill>
-                <a:latin typeface="Calibri"/>
-              </a:rPr>
-              <a:t>When this problem first came up about 4 months ago, it felt urgent: AI models couldn't hold a big codebase “in their head,” so a pre-built map felt essential.</a:t>
-            </a:r>
-          </a:p>
-        </p:txBody>
-      </p:sp>
-      <p:sp>
-        <p:nvSpPr>
-          <p:cNvPr id="5" name="TextBox 4"/>
-          <p:cNvSpPr txBox="1"/>
-          <p:nvPr/>
-        </p:nvSpPr>
-        <p:spPr>
-          <a:xfrm>
-            <a:off x="822960" y="3246120"/>
-            <a:ext cx="10515600" cy="1737360"/>
-          </a:xfrm>
-          <a:prstGeom prst="rect">
-            <a:avLst/>
-          </a:prstGeom>
-          <a:noFill/>
-        </p:spPr>
-        <p:txBody>
-          <a:bodyPr wrap="square" anchor="t">
-            <a:spAutoFit/>
-          </a:bodyPr>
-          <a:lstStyle/>
-          <a:p>
-            <a:pPr algn="l">
-              <a:lnSpc>
-                <a:spcPct val="115000"/>
-              </a:lnSpc>
-            </a:pPr>
-            <a:r>
-              <a:rPr sz="1900" b="0" i="0">
-                <a:solidFill>
-                  <a:srgbClr val="DDDDE5"/>
-                </a:solidFill>
-                <a:latin typeface="Calibri"/>
-              </a:rPr>
-              <a:t>In just those few months, AI models have gotten dramatically better at holding and reasoning over much more code at once, and simply gotten smarter overall. That original problem — the one this tool was built to solve — has largely shrunk on its own, just from the base AI models improving.</a:t>
-            </a:r>
-          </a:p>
-        </p:txBody>
-      </p:sp>
-      <p:sp>
-        <p:nvSpPr>
-          <p:cNvPr id="6" name="TextBox 5"/>
-          <p:cNvSpPr txBox="1"/>
-          <p:nvPr/>
-        </p:nvSpPr>
-        <p:spPr>
-          <a:xfrm>
-            <a:off x="822960" y="5257800"/>
-            <a:ext cx="10515600" cy="1097280"/>
-          </a:xfrm>
-          <a:prstGeom prst="rect">
-            <a:avLst/>
-          </a:prstGeom>
-          <a:noFill/>
-        </p:spPr>
-        <p:txBody>
-          <a:bodyPr wrap="square" anchor="t">
-            <a:spAutoFit/>
-          </a:bodyPr>
-          <a:lstStyle/>
-          <a:p>
-            <a:pPr algn="l">
-              <a:lnSpc>
-                <a:spcPct val="115000"/>
-              </a:lnSpc>
-            </a:pPr>
-            <a:r>
-              <a:rPr sz="1800" b="1" i="0">
-                <a:solidFill>
-                  <a:srgbClr val="2CA02C"/>
-                </a:solidFill>
-                <a:latin typeface="Calibri"/>
-              </a:rPr>
-              <a:t>Our results fit that story: a modern, capable AI agent with just its ordinary tools already does a solid job — the extra map no longer clears as high a bar as it once would have.</a:t>
-            </a:r>
-          </a:p>
-        </p:txBody>
-      </p:sp>
-      <p:sp>
-        <p:nvSpPr>
-          <p:cNvPr id="7" name="TextBox 6"/>
-          <p:cNvSpPr txBox="1"/>
-          <p:nvPr/>
-        </p:nvSpPr>
-        <p:spPr>
-          <a:xfrm>
-            <a:off x="502920" y="6473952"/>
-            <a:ext cx="8229600" cy="320040"/>
-          </a:xfrm>
-          <a:prstGeom prst="rect">
-            <a:avLst/>
-          </a:prstGeom>
-          <a:noFill/>
-        </p:spPr>
-        <p:txBody>
-          <a:bodyPr wrap="square" anchor="t">
-            <a:spAutoFit/>
-          </a:bodyPr>
-          <a:lstStyle/>
-          <a:p>
-            <a:pPr algn="l">
-              <a:lnSpc>
-                <a:spcPct val="115000"/>
-              </a:lnSpc>
-            </a:pPr>
-            <a:r>
-              <a:rPr sz="1050" b="0" i="0">
-                <a:solidFill>
-                  <a:srgbClr val="AAAAAA"/>
-                </a:solidFill>
-                <a:latin typeface="Calibri"/>
-              </a:rPr>
-              <a:t>Part 6 — Reflection</a:t>
-            </a:r>
-          </a:p>
-        </p:txBody>
-      </p:sp>
-    </p:spTree>
-  </p:cSld>
-  <p:clrMapOvr>
-    <a:masterClrMapping/>
-  </p:clrMapOvr>
-</p:sld>
-</file>
-
-<file path=ppt/slides/slide25.xml><?xml version="1.0" encoding="utf-8"?>
-<p:sld xmlns:a="http://schemas.openxmlformats.org/drawingml/2006/main" xmlns:p="http://schemas.openxmlformats.org/presentationml/2006/main" xmlns:r="http://schemas.openxmlformats.org/officeDocument/2006/relationships">
-  <p:cSld>
-    <p:bg>
-      <p:bgPr>
-        <a:solidFill>
-          <a:srgbClr val="FFFFFF"/>
-        </a:solidFill>
-        <a:effectLst/>
-      </p:bgPr>
-    </p:bg>
-    <p:spTree>
-      <p:nvGrpSpPr>
-        <p:cNvPr id="1" name=""/>
-        <p:cNvGrpSpPr/>
-        <p:nvPr/>
-      </p:nvGrpSpPr>
-      <p:grpSpPr/>
-      <p:sp>
-        <p:nvSpPr>
-          <p:cNvPr id="2" name="TextBox 1"/>
-          <p:cNvSpPr txBox="1"/>
-          <p:nvPr/>
-        </p:nvSpPr>
-        <p:spPr>
-          <a:xfrm>
-            <a:off x="502920" y="384048"/>
-            <a:ext cx="11155680" cy="822960"/>
-          </a:xfrm>
-          <a:prstGeom prst="rect">
-            <a:avLst/>
-          </a:prstGeom>
-          <a:noFill/>
-        </p:spPr>
-        <p:txBody>
-          <a:bodyPr wrap="square" anchor="t">
-            <a:spAutoFit/>
-          </a:bodyPr>
-          <a:lstStyle/>
-          <a:p>
-            <a:pPr algn="l">
-              <a:lnSpc>
-                <a:spcPct val="115000"/>
-              </a:lnSpc>
-            </a:pPr>
-            <a:r>
-              <a:rPr sz="3200" b="1" i="0">
-                <a:solidFill>
-                  <a:srgbClr val="1A1A2E"/>
-                </a:solidFill>
-                <a:latin typeface="Calibri"/>
-              </a:rPr>
-              <a:t>What this means going forward</a:t>
-            </a:r>
-          </a:p>
-        </p:txBody>
-      </p:sp>
-      <p:sp>
-        <p:nvSpPr>
-          <p:cNvPr id="3" name="Rectangle 2"/>
-          <p:cNvSpPr/>
-          <p:nvPr/>
-        </p:nvSpPr>
-        <p:spPr>
-          <a:xfrm>
-            <a:off x="502920" y="1170432"/>
-            <a:ext cx="2011680" cy="50800"/>
-          </a:xfrm>
-          <a:prstGeom prst="rect">
-            <a:avLst/>
-          </a:prstGeom>
-          <a:solidFill>
-            <a:srgbClr val="2CA02C"/>
-          </a:solidFill>
-          <a:ln>
-            <a:noFill/>
-          </a:ln>
-          <a:effectLst/>
-        </p:spPr>
-        <p:style>
-          <a:lnRef idx="1">
-            <a:schemeClr val="accent1"/>
-          </a:lnRef>
-          <a:fillRef idx="3">
-            <a:schemeClr val="accent1"/>
-          </a:fillRef>
-          <a:effectRef idx="2">
-            <a:schemeClr val="accent1"/>
-          </a:effectRef>
-          <a:fontRef idx="minor">
-            <a:schemeClr val="lt1"/>
-          </a:fontRef>
-        </p:style>
-        <p:txBody>
-          <a:bodyPr rtlCol="0" anchor="ctr"/>
-          <a:lstStyle/>
-          <a:p>
-            <a:pPr algn="ctr"/>
-          </a:p>
-        </p:txBody>
-      </p:sp>
-      <p:sp>
-        <p:nvSpPr>
-          <p:cNvPr id="4" name="TextBox 3"/>
-          <p:cNvSpPr txBox="1"/>
-          <p:nvPr/>
-        </p:nvSpPr>
-        <p:spPr>
-          <a:xfrm>
-            <a:off x="640080" y="1828800"/>
-            <a:ext cx="10972800" cy="4206240"/>
-          </a:xfrm>
-          <a:prstGeom prst="rect">
-            <a:avLst/>
-          </a:prstGeom>
-          <a:noFill/>
-        </p:spPr>
-        <p:txBody>
-          <a:bodyPr wrap="square">
-            <a:spAutoFit/>
-          </a:bodyPr>
-          <a:lstStyle/>
-          <a:p>
-            <a:pPr>
-              <a:lnSpc>
-                <a:spcPct val="112000"/>
-              </a:lnSpc>
-              <a:spcAft>
-                <a:spcPts val="1600"/>
-              </a:spcAft>
-            </a:pPr>
-            <a:r>
-              <a:rPr sz="1950" b="1">
-                <a:solidFill>
-                  <a:srgbClr val="2CA02C"/>
-                </a:solidFill>
-                <a:latin typeface="Calibri"/>
-              </a:rPr>
-              <a:t>▸  </a:t>
-            </a:r>
-            <a:r>
-              <a:rPr sz="1950">
-                <a:solidFill>
-                  <a:srgbClr val="333333"/>
-                </a:solidFill>
-                <a:latin typeface="Calibri"/>
-              </a:rPr>
-              <a:t>Tools like this still have a place — but the bar for “worth adding” keeps rising as base AI models improve.</a:t>
-            </a:r>
-          </a:p>
-          <a:p>
-            <a:pPr>
-              <a:lnSpc>
-                <a:spcPct val="112000"/>
-              </a:lnSpc>
-              <a:spcAft>
-                <a:spcPts val="1600"/>
-              </a:spcAft>
-            </a:pPr>
-            <a:r>
-              <a:rPr sz="1950" b="1">
-                <a:solidFill>
-                  <a:srgbClr val="2CA02C"/>
-                </a:solidFill>
-                <a:latin typeface="Calibri"/>
-              </a:rPr>
-              <a:t>▸  </a:t>
-            </a:r>
-            <a:r>
-              <a:rPr sz="1950">
-                <a:solidFill>
-                  <a:srgbClr val="333333"/>
-                </a:solidFill>
-                <a:latin typeface="Calibri"/>
-              </a:rPr>
-              <a:t>If a tool like this is used, the AI should be encouraged to double-check the map's answer, not just trust it outright — especially for “list everything” style questions.</a:t>
-            </a:r>
-          </a:p>
-          <a:p>
-            <a:pPr>
-              <a:lnSpc>
-                <a:spcPct val="112000"/>
-              </a:lnSpc>
-              <a:spcAft>
-                <a:spcPts val="1600"/>
-              </a:spcAft>
-            </a:pPr>
-            <a:r>
-              <a:rPr sz="1950" b="1">
-                <a:solidFill>
-                  <a:srgbClr val="2CA02C"/>
-                </a:solidFill>
-                <a:latin typeface="Calibri"/>
-              </a:rPr>
-              <a:t>▸  </a:t>
-            </a:r>
-            <a:r>
-              <a:rPr sz="1950">
-                <a:solidFill>
-                  <a:srgbClr val="333333"/>
-                </a:solidFill>
-                <a:latin typeface="Calibri"/>
-              </a:rPr>
-              <a:t>The token/reading cost of using extra tools is real and should be weighed against the (currently unclear) benefit.</a:t>
-            </a:r>
-          </a:p>
-          <a:p>
-            <a:pPr>
-              <a:lnSpc>
-                <a:spcPct val="112000"/>
-              </a:lnSpc>
-              <a:spcAft>
-                <a:spcPts val="1600"/>
-              </a:spcAft>
-            </a:pPr>
-            <a:r>
-              <a:rPr sz="1950" b="1">
-                <a:solidFill>
-                  <a:srgbClr val="2CA02C"/>
-                </a:solidFill>
-                <a:latin typeface="Calibri"/>
-              </a:rPr>
-              <a:t>▸  </a:t>
-            </a:r>
-            <a:r>
-              <a:rPr sz="1950">
-                <a:solidFill>
-                  <a:srgbClr val="333333"/>
-                </a:solidFill>
-                <a:latin typeface="Calibri"/>
-              </a:rPr>
-              <a:t>This kind of test is worth re-running periodically — as models keep improving, the answer to “does this tool help” can keep changing.</a:t>
-            </a:r>
-          </a:p>
-        </p:txBody>
-      </p:sp>
-      <p:sp>
-        <p:nvSpPr>
-          <p:cNvPr id="5" name="TextBox 4"/>
-          <p:cNvSpPr txBox="1"/>
-          <p:nvPr/>
-        </p:nvSpPr>
-        <p:spPr>
-          <a:xfrm>
-            <a:off x="502920" y="6473952"/>
-            <a:ext cx="8229600" cy="320040"/>
-          </a:xfrm>
-          <a:prstGeom prst="rect">
-            <a:avLst/>
-          </a:prstGeom>
-          <a:noFill/>
-        </p:spPr>
-        <p:txBody>
-          <a:bodyPr wrap="square" anchor="t">
-            <a:spAutoFit/>
-          </a:bodyPr>
-          <a:lstStyle/>
-          <a:p>
-            <a:pPr algn="l">
-              <a:lnSpc>
-                <a:spcPct val="115000"/>
-              </a:lnSpc>
-            </a:pPr>
-            <a:r>
-              <a:rPr sz="1050" b="0" i="0">
-                <a:solidFill>
-                  <a:srgbClr val="AAAAAA"/>
-                </a:solidFill>
-                <a:latin typeface="Calibri"/>
-              </a:rPr>
-              <a:t>Part 6 — Reflection</a:t>
-            </a:r>
-          </a:p>
-        </p:txBody>
-      </p:sp>
-    </p:spTree>
-  </p:cSld>
-  <p:clrMapOvr>
-    <a:masterClrMapping/>
-  </p:clrMapOvr>
-</p:sld>
-</file>
-
-<file path=ppt/slides/slide26.xml><?xml version="1.0" encoding="utf-8"?>
-<p:sld xmlns:a="http://schemas.openxmlformats.org/drawingml/2006/main" xmlns:p="http://schemas.openxmlformats.org/presentationml/2006/main" xmlns:r="http://schemas.openxmlformats.org/officeDocument/2006/relationships">
-  <p:cSld>
-    <p:bg>
-      <p:bgPr>
-        <a:solidFill>
-          <a:srgbClr val="1A1A2E"/>
-        </a:solidFill>
-        <a:effectLst/>
-      </p:bgPr>
-    </p:bg>
-    <p:spTree>
-      <p:nvGrpSpPr>
-        <p:cNvPr id="1" name=""/>
-        <p:cNvGrpSpPr/>
-        <p:nvPr/>
-      </p:nvGrpSpPr>
-      <p:grpSpPr/>
-      <p:sp>
-        <p:nvSpPr>
-          <p:cNvPr id="2" name="TextBox 1"/>
-          <p:cNvSpPr txBox="1"/>
-          <p:nvPr/>
-        </p:nvSpPr>
-        <p:spPr>
-          <a:xfrm>
-            <a:off x="914400" y="2743200"/>
-            <a:ext cx="10332720" cy="914400"/>
-          </a:xfrm>
-          <a:prstGeom prst="rect">
-            <a:avLst/>
-          </a:prstGeom>
-          <a:noFill/>
-        </p:spPr>
-        <p:txBody>
-          <a:bodyPr wrap="square" anchor="t">
-            <a:spAutoFit/>
-          </a:bodyPr>
-          <a:lstStyle/>
-          <a:p>
-            <a:pPr algn="ctr">
-              <a:lnSpc>
-                <a:spcPct val="115000"/>
-              </a:lnSpc>
-            </a:pPr>
-            <a:r>
-              <a:rPr sz="4400" b="1" i="0">
-                <a:solidFill>
-                  <a:srgbClr val="FFFFFF"/>
-                </a:solidFill>
-                <a:latin typeface="Calibri"/>
-              </a:rPr>
-              <a:t>Thank you</a:t>
-            </a:r>
-          </a:p>
-        </p:txBody>
-      </p:sp>
-      <p:sp>
-        <p:nvSpPr>
-          <p:cNvPr id="3" name="TextBox 2"/>
-          <p:cNvSpPr txBox="1"/>
-          <p:nvPr/>
-        </p:nvSpPr>
-        <p:spPr>
-          <a:xfrm>
-            <a:off x="914400" y="3657600"/>
-            <a:ext cx="10332720" cy="548640"/>
-          </a:xfrm>
-          <a:prstGeom prst="rect">
-            <a:avLst/>
-          </a:prstGeom>
-          <a:noFill/>
-        </p:spPr>
-        <p:txBody>
-          <a:bodyPr wrap="square" anchor="t">
-            <a:spAutoFit/>
-          </a:bodyPr>
-          <a:lstStyle/>
-          <a:p>
-            <a:pPr algn="ctr">
-              <a:lnSpc>
-                <a:spcPct val="115000"/>
-              </a:lnSpc>
-            </a:pPr>
-            <a:r>
-              <a:rPr sz="1600" b="0" i="1">
-                <a:solidFill>
-                  <a:srgbClr val="94A3B8"/>
-                </a:solidFill>
-                <a:latin typeface="Calibri"/>
-              </a:rPr>
-              <a:t>Full write-up, charts, and raw data: eval/report/REPORT.md</a:t>
-            </a:r>
-          </a:p>
-        </p:txBody>
-      </p:sp>
-      <p:sp>
-        <p:nvSpPr>
-          <p:cNvPr id="4" name="Rectangle 3"/>
-          <p:cNvSpPr/>
-          <p:nvPr/>
-        </p:nvSpPr>
-        <p:spPr>
-          <a:xfrm>
-            <a:off x="5029200" y="2377440"/>
-            <a:ext cx="2103120" cy="54864"/>
-          </a:xfrm>
-          <a:prstGeom prst="rect">
-            <a:avLst/>
-          </a:prstGeom>
-          <a:solidFill>
-            <a:srgbClr val="2CA02C"/>
-          </a:solidFill>
-          <a:ln>
-            <a:noFill/>
-          </a:ln>
-        </p:spPr>
-        <p:style>
-          <a:lnRef idx="1">
-            <a:schemeClr val="accent1"/>
-          </a:lnRef>
-          <a:fillRef idx="3">
-            <a:schemeClr val="accent1"/>
-          </a:fillRef>
-          <a:effectRef idx="2">
-            <a:schemeClr val="accent1"/>
-          </a:effectRef>
-          <a:fontRef idx="minor">
-            <a:schemeClr val="lt1"/>
-          </a:fontRef>
-        </p:style>
-        <p:txBody>
-          <a:bodyPr rtlCol="0" anchor="ctr"/>
-          <a:lstStyle/>
-          <a:p>
-            <a:pPr algn="ctr"/>
+              <a:t>Part 1 — The Idea</a:t>
+            </a:r>
           </a:p>
         </p:txBody>
       </p:sp>
@@ -7094,8 +4921,8 @@
         </p:nvSpPr>
         <p:spPr>
           <a:xfrm>
-            <a:off x="502920" y="384048"/>
-            <a:ext cx="11155680" cy="822960"/>
+            <a:off x="502920" y="292608"/>
+            <a:ext cx="11155680" cy="685800"/>
           </a:xfrm>
           <a:prstGeom prst="rect">
             <a:avLst/>
@@ -7110,17 +4937,17 @@
           <a:p>
             <a:pPr algn="l">
               <a:lnSpc>
-                <a:spcPct val="115000"/>
+                <a:spcPct val="112000"/>
               </a:lnSpc>
             </a:pPr>
             <a:r>
-              <a:rPr sz="3200" b="1" i="0">
+              <a:rPr sz="2900" b="1" i="0">
                 <a:solidFill>
                   <a:srgbClr val="1A1A2E"/>
                 </a:solidFill>
                 <a:latin typeface="Calibri"/>
               </a:rPr>
-              <a:t>The everyday problem</a:t>
+              <a:t>The whole project spans three repos</a:t>
             </a:r>
           </a:p>
         </p:txBody>
@@ -7133,14 +4960,14 @@
         </p:nvSpPr>
         <p:spPr>
           <a:xfrm>
-            <a:off x="502920" y="1170432"/>
+            <a:off x="502920" y="950976"/>
             <a:ext cx="2011680" cy="50800"/>
           </a:xfrm>
           <a:prstGeom prst="rect">
             <a:avLst/>
           </a:prstGeom>
           <a:solidFill>
-            <a:srgbClr val="2CA02C"/>
+            <a:srgbClr val="2563EB"/>
           </a:solidFill>
           <a:ln>
             <a:noFill/>
@@ -7169,155 +4996,9 @@
           </a:p>
         </p:txBody>
       </p:sp>
-      <p:sp>
-        <p:nvSpPr>
-          <p:cNvPr id="4" name="TextBox 3"/>
-          <p:cNvSpPr txBox="1"/>
-          <p:nvPr/>
-        </p:nvSpPr>
-        <p:spPr>
-          <a:xfrm>
-            <a:off x="502920" y="1298448"/>
-            <a:ext cx="11155680" cy="457200"/>
-          </a:xfrm>
-          <a:prstGeom prst="rect">
-            <a:avLst/>
-          </a:prstGeom>
-          <a:noFill/>
-        </p:spPr>
-        <p:txBody>
-          <a:bodyPr wrap="square" anchor="t">
-            <a:spAutoFit/>
-          </a:bodyPr>
-          <a:lstStyle/>
-          <a:p>
-            <a:pPr algn="l">
-              <a:lnSpc>
-                <a:spcPct val="115000"/>
-              </a:lnSpc>
-            </a:pPr>
-            <a:r>
-              <a:rPr sz="1550" b="0" i="1">
-                <a:solidFill>
-                  <a:srgbClr val="666666"/>
-                </a:solidFill>
-                <a:latin typeface="Calibri"/>
-              </a:rPr>
-              <a:t>Why understanding a big codebase is hard</a:t>
-            </a:r>
-          </a:p>
-        </p:txBody>
-      </p:sp>
-      <p:sp>
-        <p:nvSpPr>
-          <p:cNvPr id="5" name="TextBox 4"/>
-          <p:cNvSpPr txBox="1"/>
-          <p:nvPr/>
-        </p:nvSpPr>
-        <p:spPr>
-          <a:xfrm>
-            <a:off x="640080" y="1828800"/>
-            <a:ext cx="5852160" cy="4114800"/>
-          </a:xfrm>
-          <a:prstGeom prst="rect">
-            <a:avLst/>
-          </a:prstGeom>
-          <a:noFill/>
-        </p:spPr>
-        <p:txBody>
-          <a:bodyPr wrap="square">
-            <a:spAutoFit/>
-          </a:bodyPr>
-          <a:lstStyle/>
-          <a:p>
-            <a:pPr>
-              <a:lnSpc>
-                <a:spcPct val="112000"/>
-              </a:lnSpc>
-              <a:spcAft>
-                <a:spcPts val="1000"/>
-              </a:spcAft>
-            </a:pPr>
-            <a:r>
-              <a:rPr sz="1850" b="1">
-                <a:solidFill>
-                  <a:srgbClr val="2CA02C"/>
-                </a:solidFill>
-                <a:latin typeface="Calibri"/>
-              </a:rPr>
-              <a:t>▸  </a:t>
-            </a:r>
-            <a:r>
-              <a:rPr sz="1850">
-                <a:solidFill>
-                  <a:srgbClr val="333333"/>
-                </a:solidFill>
-                <a:latin typeface="Calibri"/>
-              </a:rPr>
-              <a:t>Real software projects are huge — tens of thousands of lines, spread across hundreds of files.</a:t>
-            </a:r>
-          </a:p>
-          <a:p>
-            <a:pPr>
-              <a:lnSpc>
-                <a:spcPct val="112000"/>
-              </a:lnSpc>
-              <a:spcAft>
-                <a:spcPts val="1000"/>
-              </a:spcAft>
-            </a:pPr>
-            <a:r>
-              <a:rPr sz="1850" b="1">
-                <a:solidFill>
-                  <a:srgbClr val="2CA02C"/>
-                </a:solidFill>
-                <a:latin typeface="Calibri"/>
-              </a:rPr>
-              <a:t>▸  </a:t>
-            </a:r>
-            <a:r>
-              <a:rPr sz="1850">
-                <a:solidFill>
-                  <a:srgbClr val="333333"/>
-                </a:solidFill>
-                <a:latin typeface="Calibri"/>
-              </a:rPr>
-              <a:t>When you ask an AI assistant a question like “who calls this function?”, it usually has to search for text and open files one at a time — like a very fast game of Ctrl+F.</a:t>
-            </a:r>
-          </a:p>
-          <a:p>
-            <a:pPr>
-              <a:lnSpc>
-                <a:spcPct val="112000"/>
-              </a:lnSpc>
-              <a:spcAft>
-                <a:spcPts val="1000"/>
-              </a:spcAft>
-            </a:pPr>
-            <a:r>
-              <a:rPr sz="1850" b="1">
-                <a:solidFill>
-                  <a:srgbClr val="2CA02C"/>
-                </a:solidFill>
-                <a:latin typeface="Calibri"/>
-              </a:rPr>
-              <a:t>▸  </a:t>
-            </a:r>
-            <a:r>
-              <a:rPr sz="1850">
-                <a:solidFill>
-                  <a:srgbClr val="333333"/>
-                </a:solidFill>
-                <a:latin typeface="Calibri"/>
-              </a:rPr>
-              <a:t>That works, but it's slow, and it's easy to miss something hiding in a file that never got opened.</a:t>
-            </a:r>
-          </a:p>
-        </p:txBody>
-      </p:sp>
       <p:pic>
         <p:nvPicPr>
-          <p:cNvPr id="6" name="Picture 5" descr="search_vs_map.png"/>
+          <p:cNvPr id="4" name="Picture 3" descr="three_repos.png"/>
           <p:cNvPicPr>
             <a:picLocks noChangeAspect="1"/>
           </p:cNvPicPr>
@@ -7331,8 +5012,8 @@
         </p:blipFill>
         <p:spPr>
           <a:xfrm>
-            <a:off x="6537960" y="2545500"/>
-            <a:ext cx="5120640" cy="2864279"/>
+            <a:off x="1871340" y="1600200"/>
+            <a:ext cx="8418840" cy="4709160"/>
           </a:xfrm>
           <a:prstGeom prst="rect">
             <a:avLst/>
@@ -7341,14 +5022,14 @@
       </p:pic>
       <p:sp>
         <p:nvSpPr>
-          <p:cNvPr id="7" name="TextBox 6"/>
+          <p:cNvPr id="5" name="TextBox 4"/>
           <p:cNvSpPr txBox="1"/>
           <p:nvPr/>
         </p:nvSpPr>
         <p:spPr>
           <a:xfrm>
-            <a:off x="502920" y="6473952"/>
-            <a:ext cx="8229600" cy="320040"/>
+            <a:off x="502920" y="6510528"/>
+            <a:ext cx="8229600" cy="292608"/>
           </a:xfrm>
           <a:prstGeom prst="rect">
             <a:avLst/>
@@ -7363,17 +5044,17 @@
           <a:p>
             <a:pPr algn="l">
               <a:lnSpc>
-                <a:spcPct val="115000"/>
+                <a:spcPct val="112000"/>
               </a:lnSpc>
             </a:pPr>
             <a:r>
-              <a:rPr sz="1050" b="0" i="0">
+              <a:rPr sz="1000" b="0" i="0">
                 <a:solidFill>
                   <a:srgbClr val="AAAAAA"/>
                 </a:solidFill>
                 <a:latin typeface="Calibri"/>
               </a:rPr>
-              <a:t>Part 1 — The Idea</a:t>
+              <a:t>Part 2 — The Whole Project</a:t>
             </a:r>
           </a:p>
         </p:txBody>
@@ -7412,8 +5093,8 @@
         </p:nvSpPr>
         <p:spPr>
           <a:xfrm>
-            <a:off x="502920" y="384048"/>
-            <a:ext cx="11155680" cy="822960"/>
+            <a:off x="502920" y="292608"/>
+            <a:ext cx="11155680" cy="292608"/>
           </a:xfrm>
           <a:prstGeom prst="rect">
             <a:avLst/>
@@ -7428,30 +5109,69 @@
           <a:p>
             <a:pPr algn="l">
               <a:lnSpc>
-                <a:spcPct val="115000"/>
+                <a:spcPct val="112000"/>
               </a:lnSpc>
             </a:pPr>
             <a:r>
-              <a:rPr sz="3200" b="1" i="0">
+              <a:rPr sz="1300" b="1" i="0">
+                <a:solidFill>
+                  <a:srgbClr val="2CA02C"/>
+                </a:solidFill>
+                <a:latin typeface="Calibri"/>
+              </a:rPr>
+              <a:t>github.com/shobhit0521/ContextAI</a:t>
+            </a:r>
+          </a:p>
+        </p:txBody>
+      </p:sp>
+      <p:sp>
+        <p:nvSpPr>
+          <p:cNvPr id="3" name="TextBox 2"/>
+          <p:cNvSpPr txBox="1"/>
+          <p:nvPr/>
+        </p:nvSpPr>
+        <p:spPr>
+          <a:xfrm>
+            <a:off x="502920" y="566928"/>
+            <a:ext cx="11155680" cy="685800"/>
+          </a:xfrm>
+          <a:prstGeom prst="rect">
+            <a:avLst/>
+          </a:prstGeom>
+          <a:noFill/>
+        </p:spPr>
+        <p:txBody>
+          <a:bodyPr wrap="square" anchor="t">
+            <a:spAutoFit/>
+          </a:bodyPr>
+          <a:lstStyle/>
+          <a:p>
+            <a:pPr algn="l">
+              <a:lnSpc>
+                <a:spcPct val="112000"/>
+              </a:lnSpc>
+            </a:pPr>
+            <a:r>
+              <a:rPr sz="2900" b="1" i="0">
                 <a:solidFill>
                   <a:srgbClr val="1A1A2E"/>
                 </a:solidFill>
                 <a:latin typeface="Calibri"/>
               </a:rPr>
-              <a:t>The idea: give the AI a map first</a:t>
-            </a:r>
-          </a:p>
-        </p:txBody>
-      </p:sp>
-      <p:sp>
-        <p:nvSpPr>
-          <p:cNvPr id="3" name="Rectangle 2"/>
+              <a:t>Repo 1 — ContextAI: the code-graph engine</a:t>
+            </a:r>
+          </a:p>
+        </p:txBody>
+      </p:sp>
+      <p:sp>
+        <p:nvSpPr>
+          <p:cNvPr id="4" name="Rectangle 3"/>
           <p:cNvSpPr/>
           <p:nvPr/>
         </p:nvSpPr>
         <p:spPr>
           <a:xfrm>
-            <a:off x="502920" y="1170432"/>
+            <a:off x="502920" y="1225296"/>
             <a:ext cx="2011680" cy="50800"/>
           </a:xfrm>
           <a:prstGeom prst="rect">
@@ -7487,16 +5207,40 @@
           </a:p>
         </p:txBody>
       </p:sp>
-      <p:sp>
-        <p:nvSpPr>
-          <p:cNvPr id="4" name="TextBox 3"/>
+      <p:pic>
+        <p:nvPicPr>
+          <p:cNvPr id="5" name="Picture 4" descr="contextai_arch.png"/>
+          <p:cNvPicPr>
+            <a:picLocks noChangeAspect="1"/>
+          </p:cNvPicPr>
+          <p:nvPr/>
+        </p:nvPicPr>
+        <p:blipFill>
+          <a:blip r:embed="rId2"/>
+          <a:stretch>
+            <a:fillRect/>
+          </a:stretch>
+        </p:blipFill>
+        <p:spPr>
+          <a:xfrm>
+            <a:off x="1961326" y="1554480"/>
+            <a:ext cx="8238867" cy="4800600"/>
+          </a:xfrm>
+          <a:prstGeom prst="rect">
+            <a:avLst/>
+          </a:prstGeom>
+        </p:spPr>
+      </p:pic>
+      <p:sp>
+        <p:nvSpPr>
+          <p:cNvPr id="6" name="TextBox 5"/>
           <p:cNvSpPr txBox="1"/>
           <p:nvPr/>
         </p:nvSpPr>
         <p:spPr>
           <a:xfrm>
-            <a:off x="640080" y="1828800"/>
-            <a:ext cx="10789920" cy="1188720"/>
+            <a:off x="502920" y="6510528"/>
+            <a:ext cx="8229600" cy="292608"/>
           </a:xfrm>
           <a:prstGeom prst="rect">
             <a:avLst/>
@@ -7511,118 +5255,17 @@
           <a:p>
             <a:pPr algn="l">
               <a:lnSpc>
-                <a:spcPct val="115000"/>
+                <a:spcPct val="112000"/>
               </a:lnSpc>
             </a:pPr>
             <a:r>
-              <a:rPr sz="2400" b="1" i="0">
-                <a:solidFill>
-                  <a:srgbClr val="1A1A2E"/>
-                </a:solidFill>
-                <a:latin typeface="Calibri"/>
-              </a:rPr>
-              <a:t>What if, instead of re-reading the whole codebase every time, the AI could look up a pre-built “map” that already shows which functions connect to which?</a:t>
-            </a:r>
-          </a:p>
-        </p:txBody>
-      </p:sp>
-      <p:sp>
-        <p:nvSpPr>
-          <p:cNvPr id="5" name="TextBox 4"/>
-          <p:cNvSpPr txBox="1"/>
-          <p:nvPr/>
-        </p:nvSpPr>
-        <p:spPr>
-          <a:xfrm>
-            <a:off x="640080" y="3749039"/>
-            <a:ext cx="10515600" cy="2011680"/>
-          </a:xfrm>
-          <a:prstGeom prst="rect">
-            <a:avLst/>
-          </a:prstGeom>
-          <a:noFill/>
-        </p:spPr>
-        <p:txBody>
-          <a:bodyPr wrap="square" anchor="t">
-            <a:spAutoFit/>
-          </a:bodyPr>
-          <a:lstStyle/>
-          <a:p>
-            <a:pPr algn="l">
-              <a:lnSpc>
-                <a:spcPct val="115000"/>
-              </a:lnSpc>
-            </a:pPr>
-            <a:r>
-              <a:rPr sz="1850" b="0" i="0">
-                <a:solidFill>
-                  <a:srgbClr val="333333"/>
-                </a:solidFill>
-                <a:latin typeface="Calibri"/>
-              </a:rPr>
-              <a:t>That's what ContextAI's code-graph tool promises to do.</a:t>
-            </a:r>
-          </a:p>
-          <a:p>
-            <a:pPr algn="l">
-              <a:lnSpc>
-                <a:spcPct val="115000"/>
-              </a:lnSpc>
-            </a:pPr>
-          </a:p>
-          <a:p>
-            <a:pPr algn="l">
-              <a:lnSpc>
-                <a:spcPct val="115000"/>
-              </a:lnSpc>
-            </a:pPr>
-            <a:r>
-              <a:rPr sz="1850" b="0" i="0">
-                <a:solidFill>
-                  <a:srgbClr val="333333"/>
-                </a:solidFill>
-                <a:latin typeface="Calibri"/>
-              </a:rPr>
-              <a:t>This is exactly the kind of tool people believed, a few months ago, that AI coding assistants would badly need — codebases are big, and AI “attention” was limited. We built a rigorous, real-world test to find out if it actually helps.</a:t>
-            </a:r>
-          </a:p>
-        </p:txBody>
-      </p:sp>
-      <p:sp>
-        <p:nvSpPr>
-          <p:cNvPr id="6" name="TextBox 5"/>
-          <p:cNvSpPr txBox="1"/>
-          <p:nvPr/>
-        </p:nvSpPr>
-        <p:spPr>
-          <a:xfrm>
-            <a:off x="502920" y="6473952"/>
-            <a:ext cx="8229600" cy="320040"/>
-          </a:xfrm>
-          <a:prstGeom prst="rect">
-            <a:avLst/>
-          </a:prstGeom>
-          <a:noFill/>
-        </p:spPr>
-        <p:txBody>
-          <a:bodyPr wrap="square" anchor="t">
-            <a:spAutoFit/>
-          </a:bodyPr>
-          <a:lstStyle/>
-          <a:p>
-            <a:pPr algn="l">
-              <a:lnSpc>
-                <a:spcPct val="115000"/>
-              </a:lnSpc>
-            </a:pPr>
-            <a:r>
-              <a:rPr sz="1050" b="0" i="0">
+              <a:rPr sz="1000" b="0" i="0">
                 <a:solidFill>
                   <a:srgbClr val="AAAAAA"/>
                 </a:solidFill>
                 <a:latin typeface="Calibri"/>
               </a:rPr>
-              <a:t>Part 1 — The Idea</a:t>
+              <a:t>Part 2 — The Whole Project</a:t>
             </a:r>
           </a:p>
         </p:txBody>
@@ -7661,8 +5304,8 @@
         </p:nvSpPr>
         <p:spPr>
           <a:xfrm>
-            <a:off x="502920" y="384048"/>
-            <a:ext cx="11155680" cy="822960"/>
+            <a:off x="502920" y="292608"/>
+            <a:ext cx="11155680" cy="292608"/>
           </a:xfrm>
           <a:prstGeom prst="rect">
             <a:avLst/>
@@ -7677,37 +5320,76 @@
           <a:p>
             <a:pPr algn="l">
               <a:lnSpc>
-                <a:spcPct val="115000"/>
+                <a:spcPct val="112000"/>
               </a:lnSpc>
             </a:pPr>
             <a:r>
-              <a:rPr sz="3200" b="1" i="0">
+              <a:rPr sz="1300" b="1" i="0">
+                <a:solidFill>
+                  <a:srgbClr val="2563EB"/>
+                </a:solidFill>
+                <a:latin typeface="Calibri"/>
+              </a:rPr>
+              <a:t>github.com/shobhit0521/ConnectContext · pypi.org/project/contextai-mcp</a:t>
+            </a:r>
+          </a:p>
+        </p:txBody>
+      </p:sp>
+      <p:sp>
+        <p:nvSpPr>
+          <p:cNvPr id="3" name="TextBox 2"/>
+          <p:cNvSpPr txBox="1"/>
+          <p:nvPr/>
+        </p:nvSpPr>
+        <p:spPr>
+          <a:xfrm>
+            <a:off x="502920" y="566928"/>
+            <a:ext cx="11155680" cy="685800"/>
+          </a:xfrm>
+          <a:prstGeom prst="rect">
+            <a:avLst/>
+          </a:prstGeom>
+          <a:noFill/>
+        </p:spPr>
+        <p:txBody>
+          <a:bodyPr wrap="square" anchor="t">
+            <a:spAutoFit/>
+          </a:bodyPr>
+          <a:lstStyle/>
+          <a:p>
+            <a:pPr algn="l">
+              <a:lnSpc>
+                <a:spcPct val="112000"/>
+              </a:lnSpc>
+            </a:pPr>
+            <a:r>
+              <a:rPr sz="2900" b="1" i="0">
                 <a:solidFill>
                   <a:srgbClr val="1A1A2E"/>
                 </a:solidFill>
                 <a:latin typeface="Calibri"/>
               </a:rPr>
-              <a:t>What is a “code graph,” really?</a:t>
-            </a:r>
-          </a:p>
-        </p:txBody>
-      </p:sp>
-      <p:sp>
-        <p:nvSpPr>
-          <p:cNvPr id="3" name="Rectangle 2"/>
+              <a:t>Repo 2 — ConnectContext: the MCP bridge</a:t>
+            </a:r>
+          </a:p>
+        </p:txBody>
+      </p:sp>
+      <p:sp>
+        <p:nvSpPr>
+          <p:cNvPr id="4" name="Rectangle 3"/>
           <p:cNvSpPr/>
           <p:nvPr/>
         </p:nvSpPr>
         <p:spPr>
           <a:xfrm>
-            <a:off x="502920" y="1170432"/>
+            <a:off x="502920" y="1225296"/>
             <a:ext cx="2011680" cy="50800"/>
           </a:xfrm>
           <a:prstGeom prst="rect">
             <a:avLst/>
           </a:prstGeom>
           <a:solidFill>
-            <a:srgbClr val="2CA02C"/>
+            <a:srgbClr val="2563EB"/>
           </a:solidFill>
           <a:ln>
             <a:noFill/>
@@ -7736,48 +5418,9 @@
           </a:p>
         </p:txBody>
       </p:sp>
-      <p:sp>
-        <p:nvSpPr>
-          <p:cNvPr id="4" name="TextBox 3"/>
-          <p:cNvSpPr txBox="1"/>
-          <p:nvPr/>
-        </p:nvSpPr>
-        <p:spPr>
-          <a:xfrm>
-            <a:off x="640080" y="1691640"/>
-            <a:ext cx="10881360" cy="1371600"/>
-          </a:xfrm>
-          <a:prstGeom prst="rect">
-            <a:avLst/>
-          </a:prstGeom>
-          <a:noFill/>
-        </p:spPr>
-        <p:txBody>
-          <a:bodyPr wrap="square" anchor="t">
-            <a:spAutoFit/>
-          </a:bodyPr>
-          <a:lstStyle/>
-          <a:p>
-            <a:pPr algn="l">
-              <a:lnSpc>
-                <a:spcPct val="115000"/>
-              </a:lnSpc>
-            </a:pPr>
-            <a:r>
-              <a:rPr sz="1900" b="0" i="1">
-                <a:solidFill>
-                  <a:srgbClr val="1A1A2E"/>
-                </a:solidFill>
-                <a:latin typeface="Calibri"/>
-              </a:rPr>
-              <a:t>Think of it like a subway map for your code. Instead of a list of station names, it shows every station (function) and every line connecting them (which function calls which) — so you can trace a route instantly.</a:t>
-            </a:r>
-          </a:p>
-        </p:txBody>
-      </p:sp>
       <p:pic>
         <p:nvPicPr>
-          <p:cNvPr id="5" name="Picture 4" descr="graph_capabilities.png"/>
+          <p:cNvPr id="5" name="Picture 4" descr="connectcontext_tools.png"/>
           <p:cNvPicPr>
             <a:picLocks noChangeAspect="1"/>
           </p:cNvPicPr>
@@ -7791,8 +5434,8 @@
         </p:blipFill>
         <p:spPr>
           <a:xfrm>
-            <a:off x="2893044" y="2880360"/>
-            <a:ext cx="6375432" cy="3566160"/>
+            <a:off x="1748735" y="1554480"/>
+            <a:ext cx="8664049" cy="4846320"/>
           </a:xfrm>
           <a:prstGeom prst="rect">
             <a:avLst/>
@@ -7807,8 +5450,8 @@
         </p:nvSpPr>
         <p:spPr>
           <a:xfrm>
-            <a:off x="502920" y="6473952"/>
-            <a:ext cx="8229600" cy="320040"/>
+            <a:off x="502920" y="6510528"/>
+            <a:ext cx="8229600" cy="292608"/>
           </a:xfrm>
           <a:prstGeom prst="rect">
             <a:avLst/>
@@ -7823,17 +5466,17 @@
           <a:p>
             <a:pPr algn="l">
               <a:lnSpc>
-                <a:spcPct val="115000"/>
+                <a:spcPct val="112000"/>
               </a:lnSpc>
             </a:pPr>
             <a:r>
-              <a:rPr sz="1050" b="0" i="0">
+              <a:rPr sz="1000" b="0" i="0">
                 <a:solidFill>
                   <a:srgbClr val="AAAAAA"/>
                 </a:solidFill>
                 <a:latin typeface="Calibri"/>
               </a:rPr>
-              <a:t>Part 1 — The Idea</a:t>
+              <a:t>Part 2 — The Whole Project</a:t>
             </a:r>
           </a:p>
         </p:txBody>
@@ -7872,8 +5515,8 @@
         </p:nvSpPr>
         <p:spPr>
           <a:xfrm>
-            <a:off x="502920" y="384048"/>
-            <a:ext cx="11155680" cy="822960"/>
+            <a:off x="502920" y="292608"/>
+            <a:ext cx="11155680" cy="292608"/>
           </a:xfrm>
           <a:prstGeom prst="rect">
             <a:avLst/>
@@ -7888,37 +5531,76 @@
           <a:p>
             <a:pPr algn="l">
               <a:lnSpc>
-                <a:spcPct val="115000"/>
+                <a:spcPct val="112000"/>
               </a:lnSpc>
             </a:pPr>
             <a:r>
-              <a:rPr sz="3200" b="1" i="0">
+              <a:rPr sz="1300" b="1" i="0">
+                <a:solidFill>
+                  <a:srgbClr val="D97706"/>
+                </a:solidFill>
+                <a:latin typeface="Calibri"/>
+              </a:rPr>
+              <a:t>github.com/shobhit0521/Test_context (this repo)</a:t>
+            </a:r>
+          </a:p>
+        </p:txBody>
+      </p:sp>
+      <p:sp>
+        <p:nvSpPr>
+          <p:cNvPr id="3" name="TextBox 2"/>
+          <p:cNvSpPr txBox="1"/>
+          <p:nvPr/>
+        </p:nvSpPr>
+        <p:spPr>
+          <a:xfrm>
+            <a:off x="502920" y="566928"/>
+            <a:ext cx="11155680" cy="685800"/>
+          </a:xfrm>
+          <a:prstGeom prst="rect">
+            <a:avLst/>
+          </a:prstGeom>
+          <a:noFill/>
+        </p:spPr>
+        <p:txBody>
+          <a:bodyPr wrap="square" anchor="t">
+            <a:spAutoFit/>
+          </a:bodyPr>
+          <a:lstStyle/>
+          <a:p>
+            <a:pPr algn="l">
+              <a:lnSpc>
+                <a:spcPct val="112000"/>
+              </a:lnSpc>
+            </a:pPr>
+            <a:r>
+              <a:rPr sz="2900" b="1" i="0">
                 <a:solidFill>
                   <a:srgbClr val="1A1A2E"/>
                 </a:solidFill>
                 <a:latin typeface="Calibri"/>
               </a:rPr>
-              <a:t>The question we set out to answer</a:t>
-            </a:r>
-          </a:p>
-        </p:txBody>
-      </p:sp>
-      <p:sp>
-        <p:nvSpPr>
-          <p:cNvPr id="3" name="Rectangle 2"/>
+              <a:t>Repo 3 — Test_context: how we evaluated it</a:t>
+            </a:r>
+          </a:p>
+        </p:txBody>
+      </p:sp>
+      <p:sp>
+        <p:nvSpPr>
+          <p:cNvPr id="4" name="Rectangle 3"/>
           <p:cNvSpPr/>
           <p:nvPr/>
         </p:nvSpPr>
         <p:spPr>
           <a:xfrm>
-            <a:off x="502920" y="1170432"/>
+            <a:off x="502920" y="1225296"/>
             <a:ext cx="2011680" cy="50800"/>
           </a:xfrm>
           <a:prstGeom prst="rect">
             <a:avLst/>
           </a:prstGeom>
           <a:solidFill>
-            <a:srgbClr val="2CA02C"/>
+            <a:srgbClr val="D97706"/>
           </a:solidFill>
           <a:ln>
             <a:noFill/>
@@ -7947,28 +5629,155 @@
           </a:p>
         </p:txBody>
       </p:sp>
-      <p:sp>
-        <p:nvSpPr>
-          <p:cNvPr id="4" name="Rectangle 3"/>
+      <p:pic>
+        <p:nvPicPr>
+          <p:cNvPr id="5" name="Picture 4" descr="methodology.png"/>
+          <p:cNvPicPr>
+            <a:picLocks noChangeAspect="1"/>
+          </p:cNvPicPr>
+          <p:nvPr/>
+        </p:nvPicPr>
+        <p:blipFill>
+          <a:blip r:embed="rId2"/>
+          <a:stretch>
+            <a:fillRect/>
+          </a:stretch>
+        </p:blipFill>
+        <p:spPr>
+          <a:xfrm>
+            <a:off x="1748735" y="1554480"/>
+            <a:ext cx="8664049" cy="4846320"/>
+          </a:xfrm>
+          <a:prstGeom prst="rect">
+            <a:avLst/>
+          </a:prstGeom>
+        </p:spPr>
+      </p:pic>
+      <p:sp>
+        <p:nvSpPr>
+          <p:cNvPr id="6" name="TextBox 5"/>
+          <p:cNvSpPr txBox="1"/>
+          <p:nvPr/>
+        </p:nvSpPr>
+        <p:spPr>
+          <a:xfrm>
+            <a:off x="502920" y="6510528"/>
+            <a:ext cx="8229600" cy="292608"/>
+          </a:xfrm>
+          <a:prstGeom prst="rect">
+            <a:avLst/>
+          </a:prstGeom>
+          <a:noFill/>
+        </p:spPr>
+        <p:txBody>
+          <a:bodyPr wrap="square" anchor="t">
+            <a:spAutoFit/>
+          </a:bodyPr>
+          <a:lstStyle/>
+          <a:p>
+            <a:pPr algn="l">
+              <a:lnSpc>
+                <a:spcPct val="112000"/>
+              </a:lnSpc>
+            </a:pPr>
+            <a:r>
+              <a:rPr sz="1000" b="0" i="0">
+                <a:solidFill>
+                  <a:srgbClr val="AAAAAA"/>
+                </a:solidFill>
+                <a:latin typeface="Calibri"/>
+              </a:rPr>
+              <a:t>Part 3 — Testing It For Real</a:t>
+            </a:r>
+          </a:p>
+        </p:txBody>
+      </p:sp>
+    </p:spTree>
+  </p:cSld>
+  <p:clrMapOvr>
+    <a:masterClrMapping/>
+  </p:clrMapOvr>
+</p:sld>
+</file>
+
+<file path=ppt/slides/slide7.xml><?xml version="1.0" encoding="utf-8"?>
+<p:sld xmlns:a="http://schemas.openxmlformats.org/drawingml/2006/main" xmlns:p="http://schemas.openxmlformats.org/presentationml/2006/main" xmlns:r="http://schemas.openxmlformats.org/officeDocument/2006/relationships">
+  <p:cSld>
+    <p:bg>
+      <p:bgPr>
+        <a:solidFill>
+          <a:srgbClr val="FFFFFF"/>
+        </a:solidFill>
+        <a:effectLst/>
+      </p:bgPr>
+    </p:bg>
+    <p:spTree>
+      <p:nvGrpSpPr>
+        <p:cNvPr id="1" name=""/>
+        <p:cNvGrpSpPr/>
+        <p:nvPr/>
+      </p:nvGrpSpPr>
+      <p:grpSpPr/>
+      <p:sp>
+        <p:nvSpPr>
+          <p:cNvPr id="2" name="TextBox 1"/>
+          <p:cNvSpPr txBox="1"/>
+          <p:nvPr/>
+        </p:nvSpPr>
+        <p:spPr>
+          <a:xfrm>
+            <a:off x="502920" y="292608"/>
+            <a:ext cx="11155680" cy="685800"/>
+          </a:xfrm>
+          <a:prstGeom prst="rect">
+            <a:avLst/>
+          </a:prstGeom>
+          <a:noFill/>
+        </p:spPr>
+        <p:txBody>
+          <a:bodyPr wrap="square" anchor="t">
+            <a:spAutoFit/>
+          </a:bodyPr>
+          <a:lstStyle/>
+          <a:p>
+            <a:pPr algn="l">
+              <a:lnSpc>
+                <a:spcPct val="112000"/>
+              </a:lnSpc>
+            </a:pPr>
+            <a:r>
+              <a:rPr sz="2900" b="1" i="0">
+                <a:solidFill>
+                  <a:srgbClr val="1A1A2E"/>
+                </a:solidFill>
+                <a:latin typeface="Calibri"/>
+              </a:rPr>
+              <a:t>Two real engineering hiccups, across two repos</a:t>
+            </a:r>
+          </a:p>
+        </p:txBody>
+      </p:sp>
+      <p:sp>
+        <p:nvSpPr>
+          <p:cNvPr id="3" name="Rectangle 2"/>
           <p:cNvSpPr/>
           <p:nvPr/>
         </p:nvSpPr>
         <p:spPr>
           <a:xfrm>
-            <a:off x="1188720" y="2286000"/>
-            <a:ext cx="9784080" cy="2377440"/>
+            <a:off x="502920" y="950976"/>
+            <a:ext cx="2011680" cy="50800"/>
           </a:xfrm>
           <a:prstGeom prst="rect">
             <a:avLst/>
           </a:prstGeom>
           <a:solidFill>
-            <a:srgbClr val="F7F8FA"/>
+            <a:srgbClr val="D97706"/>
           </a:solidFill>
-          <a:ln w="31750">
-            <a:solidFill>
-              <a:srgbClr val="2CA02C"/>
-            </a:solidFill>
+          <a:ln>
+            <a:noFill/>
           </a:ln>
+          <a:effectLst/>
         </p:spPr>
         <p:style>
           <a:lnRef idx="1">
@@ -7985,18 +5794,48 @@
           </a:fontRef>
         </p:style>
         <p:txBody>
-          <a:bodyPr rtlCol="0" anchor="ctr" wrap="square"/>
+          <a:bodyPr rtlCol="0" anchor="ctr"/>
           <a:lstStyle/>
           <a:p>
             <a:pPr algn="ctr"/>
-            <a:r>
-              <a:rPr sz="2500" b="1">
-                <a:solidFill>
-                  <a:srgbClr val="1A1A2E"/>
-                </a:solidFill>
-                <a:latin typeface="Calibri"/>
-              </a:rPr>
-              <a:t>“Does a real AI coding assistant answer code questions better when it also has ContextAI's map — compared to using only its normal tools?”</a:t>
+          </a:p>
+        </p:txBody>
+      </p:sp>
+      <p:sp>
+        <p:nvSpPr>
+          <p:cNvPr id="4" name="TextBox 3"/>
+          <p:cNvSpPr txBox="1"/>
+          <p:nvPr/>
+        </p:nvSpPr>
+        <p:spPr>
+          <a:xfrm>
+            <a:off x="548640" y="1691640"/>
+            <a:ext cx="5349240" cy="457200"/>
+          </a:xfrm>
+          <a:prstGeom prst="rect">
+            <a:avLst/>
+          </a:prstGeom>
+          <a:noFill/>
+        </p:spPr>
+        <p:txBody>
+          <a:bodyPr wrap="square" anchor="t">
+            <a:spAutoFit/>
+          </a:bodyPr>
+          <a:lstStyle/>
+          <a:p>
+            <a:pPr algn="l">
+              <a:lnSpc>
+                <a:spcPct val="112000"/>
+              </a:lnSpc>
+            </a:pPr>
+            <a:r>
+              <a:rPr sz="1750" b="1" i="0">
+                <a:solidFill>
+                  <a:srgbClr val="D97706"/>
+                </a:solidFill>
+                <a:latin typeface="Calibri"/>
+              </a:rPr>
+              <a:t>🐛  ConnectContext × ContextAI: a hidden naming clash</a:t>
             </a:r>
           </a:p>
         </p:txBody>
@@ -8009,8 +5848,143 @@
         </p:nvSpPr>
         <p:spPr>
           <a:xfrm>
-            <a:off x="1188720" y="5029200"/>
-            <a:ext cx="9784080" cy="914400"/>
+            <a:off x="548640" y="2194560"/>
+            <a:ext cx="5349240" cy="3657600"/>
+          </a:xfrm>
+          <a:prstGeom prst="rect">
+            <a:avLst/>
+          </a:prstGeom>
+          <a:noFill/>
+        </p:spPr>
+        <p:txBody>
+          <a:bodyPr wrap="square">
+            <a:spAutoFit/>
+          </a:bodyPr>
+          <a:lstStyle/>
+          <a:p>
+            <a:pPr>
+              <a:lnSpc>
+                <a:spcPct val="105000"/>
+              </a:lnSpc>
+              <a:spcAft>
+                <a:spcPts val="900"/>
+              </a:spcAft>
+            </a:pPr>
+            <a:r>
+              <a:rPr sz="1450" b="1">
+                <a:solidFill>
+                  <a:srgbClr val="2CA02C"/>
+                </a:solidFill>
+                <a:latin typeface="Calibri"/>
+              </a:rPr>
+              <a:t>▸  </a:t>
+            </a:r>
+            <a:r>
+              <a:rPr sz="1450">
+                <a:solidFill>
+                  <a:srgbClr val="333333"/>
+                </a:solidFill>
+                <a:latin typeface="Calibri"/>
+              </a:rPr>
+              <a:t>ConnectContext launches as “python -m contextai_mcp,” which adds the current directory to Python's import path.</a:t>
+            </a:r>
+          </a:p>
+          <a:p>
+            <a:pPr>
+              <a:lnSpc>
+                <a:spcPct val="105000"/>
+              </a:lnSpc>
+              <a:spcAft>
+                <a:spcPts val="900"/>
+              </a:spcAft>
+            </a:pPr>
+            <a:r>
+              <a:rPr sz="1450" b="1">
+                <a:solidFill>
+                  <a:srgbClr val="2CA02C"/>
+                </a:solidFill>
+                <a:latin typeface="Calibri"/>
+              </a:rPr>
+              <a:t>▸  </a:t>
+            </a:r>
+            <a:r>
+              <a:rPr sz="1450">
+                <a:solidFill>
+                  <a:srgbClr val="333333"/>
+                </a:solidFill>
+                <a:latin typeface="Calibri"/>
+              </a:rPr>
+              <a:t>One target project (Flask) ships its own file named typing.py — same name as the Python stdlib module.</a:t>
+            </a:r>
+          </a:p>
+          <a:p>
+            <a:pPr>
+              <a:lnSpc>
+                <a:spcPct val="105000"/>
+              </a:lnSpc>
+              <a:spcAft>
+                <a:spcPts val="900"/>
+              </a:spcAft>
+            </a:pPr>
+            <a:r>
+              <a:rPr sz="1450" b="1">
+                <a:solidFill>
+                  <a:srgbClr val="2CA02C"/>
+                </a:solidFill>
+                <a:latin typeface="Calibri"/>
+              </a:rPr>
+              <a:t>▸  </a:t>
+            </a:r>
+            <a:r>
+              <a:rPr sz="1450">
+                <a:solidFill>
+                  <a:srgbClr val="333333"/>
+                </a:solidFill>
+                <a:latin typeface="Calibri"/>
+              </a:rPr>
+              <a:t>Run with cwd inside Flask's source tree, that silently hijacked the real typing import and crashed the server on startup.</a:t>
+            </a:r>
+          </a:p>
+          <a:p>
+            <a:pPr>
+              <a:lnSpc>
+                <a:spcPct val="105000"/>
+              </a:lnSpc>
+              <a:spcAft>
+                <a:spcPts val="900"/>
+              </a:spcAft>
+            </a:pPr>
+            <a:r>
+              <a:rPr sz="1450" b="1">
+                <a:solidFill>
+                  <a:srgbClr val="2CA02C"/>
+                </a:solidFill>
+                <a:latin typeface="Calibri"/>
+              </a:rPr>
+              <a:t>▸  </a:t>
+            </a:r>
+            <a:r>
+              <a:rPr sz="1450">
+                <a:solidFill>
+                  <a:srgbClr val="333333"/>
+                </a:solidFill>
+                <a:latin typeface="Calibri"/>
+              </a:rPr>
+              <a:t>Fixed by pinning ConnectContext's own cwd to a safe folder, away from whatever project it's mapping.</a:t>
+            </a:r>
+          </a:p>
+        </p:txBody>
+      </p:sp>
+      <p:sp>
+        <p:nvSpPr>
+          <p:cNvPr id="6" name="TextBox 5"/>
+          <p:cNvSpPr txBox="1"/>
+          <p:nvPr/>
+        </p:nvSpPr>
+        <p:spPr>
+          <a:xfrm>
+            <a:off x="6309360" y="1691640"/>
+            <a:ext cx="5349240" cy="457200"/>
           </a:xfrm>
           <a:prstGeom prst="rect">
             <a:avLst/>
@@ -8023,33 +5997,168 @@
           </a:bodyPr>
           <a:lstStyle/>
           <a:p>
-            <a:pPr algn="ctr">
+            <a:pPr algn="l">
               <a:lnSpc>
-                <a:spcPct val="115000"/>
+                <a:spcPct val="112000"/>
               </a:lnSpc>
             </a:pPr>
             <a:r>
-              <a:rPr sz="1700" b="0" i="1">
-                <a:solidFill>
-                  <a:srgbClr val="666666"/>
-                </a:solidFill>
-                <a:latin typeface="Calibri"/>
-              </a:rPr>
-              <a:t>We answered this with real runs of a real AI agent — not a guess.</a:t>
-            </a:r>
-          </a:p>
-        </p:txBody>
-      </p:sp>
-      <p:sp>
-        <p:nvSpPr>
-          <p:cNvPr id="6" name="TextBox 5"/>
+              <a:rPr sz="1750" b="1" i="0">
+                <a:solidFill>
+                  <a:srgbClr val="D97706"/>
+                </a:solidFill>
+                <a:latin typeface="Calibri"/>
+              </a:rPr>
+              <a:t>⏱️  Test_context × Codex: a permissions limitation</a:t>
+            </a:r>
+          </a:p>
+        </p:txBody>
+      </p:sp>
+      <p:sp>
+        <p:nvSpPr>
+          <p:cNvPr id="7" name="TextBox 6"/>
           <p:cNvSpPr txBox="1"/>
           <p:nvPr/>
         </p:nvSpPr>
         <p:spPr>
           <a:xfrm>
-            <a:off x="502920" y="6473952"/>
-            <a:ext cx="8229600" cy="320040"/>
+            <a:off x="6309360" y="2194560"/>
+            <a:ext cx="5349240" cy="3657600"/>
+          </a:xfrm>
+          <a:prstGeom prst="rect">
+            <a:avLst/>
+          </a:prstGeom>
+          <a:noFill/>
+        </p:spPr>
+        <p:txBody>
+          <a:bodyPr wrap="square">
+            <a:spAutoFit/>
+          </a:bodyPr>
+          <a:lstStyle/>
+          <a:p>
+            <a:pPr>
+              <a:lnSpc>
+                <a:spcPct val="105000"/>
+              </a:lnSpc>
+              <a:spcAft>
+                <a:spcPts val="900"/>
+              </a:spcAft>
+            </a:pPr>
+            <a:r>
+              <a:rPr sz="1450" b="1">
+                <a:solidFill>
+                  <a:srgbClr val="2CA02C"/>
+                </a:solidFill>
+                <a:latin typeface="Calibri"/>
+              </a:rPr>
+              <a:t>▸  </a:t>
+            </a:r>
+            <a:r>
+              <a:rPr sz="1450">
+                <a:solidFill>
+                  <a:srgbClr val="333333"/>
+                </a:solidFill>
+                <a:latin typeface="Calibri"/>
+              </a:rPr>
+              <a:t>Codex's unattended mode auto-cancels MCP tool-call approvals instead of granting them — a known open Codex CLI issue.</a:t>
+            </a:r>
+          </a:p>
+          <a:p>
+            <a:pPr>
+              <a:lnSpc>
+                <a:spcPct val="105000"/>
+              </a:lnSpc>
+              <a:spcAft>
+                <a:spcPts val="900"/>
+              </a:spcAft>
+            </a:pPr>
+            <a:r>
+              <a:rPr sz="1450" b="1">
+                <a:solidFill>
+                  <a:srgbClr val="2CA02C"/>
+                </a:solidFill>
+                <a:latin typeface="Calibri"/>
+              </a:rPr>
+              <a:t>▸  </a:t>
+            </a:r>
+            <a:r>
+              <a:rPr sz="1450">
+                <a:solidFill>
+                  <a:srgbClr val="333333"/>
+                </a:solidFill>
+                <a:latin typeface="Calibri"/>
+              </a:rPr>
+              <a:t>Left as default, Arm B could never actually call ConnectContext's tools when run unattended.</a:t>
+            </a:r>
+          </a:p>
+          <a:p>
+            <a:pPr>
+              <a:lnSpc>
+                <a:spcPct val="105000"/>
+              </a:lnSpc>
+              <a:spcAft>
+                <a:spcPts val="900"/>
+              </a:spcAft>
+            </a:pPr>
+            <a:r>
+              <a:rPr sz="1450" b="1">
+                <a:solidFill>
+                  <a:srgbClr val="2CA02C"/>
+                </a:solidFill>
+                <a:latin typeface="Calibri"/>
+              </a:rPr>
+              <a:t>▸  </a:t>
+            </a:r>
+            <a:r>
+              <a:rPr sz="1450">
+                <a:solidFill>
+                  <a:srgbClr val="333333"/>
+                </a:solidFill>
+                <a:latin typeface="Calibri"/>
+              </a:rPr>
+              <a:t>Fixed with a bypass flag — applied identically to both Arm A and Arm B, so tool availability is the only difference, not sandboxing.</a:t>
+            </a:r>
+          </a:p>
+          <a:p>
+            <a:pPr>
+              <a:lnSpc>
+                <a:spcPct val="105000"/>
+              </a:lnSpc>
+              <a:spcAft>
+                <a:spcPts val="900"/>
+              </a:spcAft>
+            </a:pPr>
+            <a:r>
+              <a:rPr sz="1450" b="1">
+                <a:solidFill>
+                  <a:srgbClr val="2CA02C"/>
+                </a:solidFill>
+                <a:latin typeface="Calibri"/>
+              </a:rPr>
+              <a:t>▸  </a:t>
+            </a:r>
+            <a:r>
+              <a:rPr sz="1450">
+                <a:solidFill>
+                  <a:srgbClr val="333333"/>
+                </a:solidFill>
+                <a:latin typeface="Calibri"/>
+              </a:rPr>
+              <a:t>Both hiccups were root-caused and fixed by tracing through all three repos, not just the one that failed.</a:t>
+            </a:r>
+          </a:p>
+        </p:txBody>
+      </p:sp>
+      <p:sp>
+        <p:nvSpPr>
+          <p:cNvPr id="8" name="TextBox 7"/>
+          <p:cNvSpPr txBox="1"/>
+          <p:nvPr/>
+        </p:nvSpPr>
+        <p:spPr>
+          <a:xfrm>
+            <a:off x="502920" y="6510528"/>
+            <a:ext cx="8229600" cy="292608"/>
           </a:xfrm>
           <a:prstGeom prst="rect">
             <a:avLst/>
@@ -8064,160 +6173,17 @@
           <a:p>
             <a:pPr algn="l">
               <a:lnSpc>
-                <a:spcPct val="115000"/>
+                <a:spcPct val="112000"/>
               </a:lnSpc>
             </a:pPr>
             <a:r>
-              <a:rPr sz="1050" b="0" i="0">
+              <a:rPr sz="1000" b="0" i="0">
                 <a:solidFill>
                   <a:srgbClr val="AAAAAA"/>
                 </a:solidFill>
                 <a:latin typeface="Calibri"/>
               </a:rPr>
-              <a:t>Part 1 — The Idea</a:t>
-            </a:r>
-          </a:p>
-        </p:txBody>
-      </p:sp>
-    </p:spTree>
-  </p:cSld>
-  <p:clrMapOvr>
-    <a:masterClrMapping/>
-  </p:clrMapOvr>
-</p:sld>
-</file>
-
-<file path=ppt/slides/slide7.xml><?xml version="1.0" encoding="utf-8"?>
-<p:sld xmlns:a="http://schemas.openxmlformats.org/drawingml/2006/main" xmlns:p="http://schemas.openxmlformats.org/presentationml/2006/main" xmlns:r="http://schemas.openxmlformats.org/officeDocument/2006/relationships">
-  <p:cSld>
-    <p:bg>
-      <p:bgPr>
-        <a:solidFill>
-          <a:srgbClr val="1A1A2E"/>
-        </a:solidFill>
-        <a:effectLst/>
-      </p:bgPr>
-    </p:bg>
-    <p:spTree>
-      <p:nvGrpSpPr>
-        <p:cNvPr id="1" name=""/>
-        <p:cNvGrpSpPr/>
-        <p:nvPr/>
-      </p:nvGrpSpPr>
-      <p:grpSpPr/>
-      <p:sp>
-        <p:nvSpPr>
-          <p:cNvPr id="2" name="TextBox 1"/>
-          <p:cNvSpPr txBox="1"/>
-          <p:nvPr/>
-        </p:nvSpPr>
-        <p:spPr>
-          <a:xfrm>
-            <a:off x="914400" y="2194560"/>
-            <a:ext cx="1828800" cy="1280160"/>
-          </a:xfrm>
-          <a:prstGeom prst="rect">
-            <a:avLst/>
-          </a:prstGeom>
-          <a:noFill/>
-        </p:spPr>
-        <p:txBody>
-          <a:bodyPr wrap="square" anchor="t">
-            <a:spAutoFit/>
-          </a:bodyPr>
-          <a:lstStyle/>
-          <a:p>
-            <a:pPr algn="l">
-              <a:lnSpc>
-                <a:spcPct val="115000"/>
-              </a:lnSpc>
-            </a:pPr>
-            <a:r>
-              <a:rPr sz="9000" b="1" i="0">
-                <a:solidFill>
-                  <a:srgbClr val="2CA02C"/>
-                </a:solidFill>
-                <a:latin typeface="Calibri"/>
-              </a:rPr>
-              <a:t>2</a:t>
-            </a:r>
-          </a:p>
-        </p:txBody>
-      </p:sp>
-      <p:sp>
-        <p:nvSpPr>
-          <p:cNvPr id="3" name="TextBox 2"/>
-          <p:cNvSpPr txBox="1"/>
-          <p:nvPr/>
-        </p:nvSpPr>
-        <p:spPr>
-          <a:xfrm>
-            <a:off x="3017520" y="2514600"/>
-            <a:ext cx="8229600" cy="914400"/>
-          </a:xfrm>
-          <a:prstGeom prst="rect">
-            <a:avLst/>
-          </a:prstGeom>
-          <a:noFill/>
-        </p:spPr>
-        <p:txBody>
-          <a:bodyPr wrap="square" anchor="t">
-            <a:spAutoFit/>
-          </a:bodyPr>
-          <a:lstStyle/>
-          <a:p>
-            <a:pPr algn="l">
-              <a:lnSpc>
-                <a:spcPct val="115000"/>
-              </a:lnSpc>
-            </a:pPr>
-            <a:r>
-              <a:rPr sz="3400" b="1" i="0">
-                <a:solidFill>
-                  <a:srgbClr val="FFFFFF"/>
-                </a:solidFill>
-                <a:latin typeface="Calibri"/>
-              </a:rPr>
-              <a:t>What We Built</a:t>
-            </a:r>
-          </a:p>
-        </p:txBody>
-      </p:sp>
-      <p:sp>
-        <p:nvSpPr>
-          <p:cNvPr id="4" name="TextBox 3"/>
-          <p:cNvSpPr txBox="1"/>
-          <p:nvPr/>
-        </p:nvSpPr>
-        <p:spPr>
-          <a:xfrm>
-            <a:off x="3017520" y="3429000"/>
-            <a:ext cx="8229600" cy="914400"/>
-          </a:xfrm>
-          <a:prstGeom prst="rect">
-            <a:avLst/>
-          </a:prstGeom>
-          <a:noFill/>
-        </p:spPr>
-        <p:txBody>
-          <a:bodyPr wrap="square" anchor="t">
-            <a:spAutoFit/>
-          </a:bodyPr>
-          <a:lstStyle/>
-          <a:p>
-            <a:pPr algn="l">
-              <a:lnSpc>
-                <a:spcPct val="115000"/>
-              </a:lnSpc>
-            </a:pPr>
-            <a:r>
-              <a:rPr sz="1700" b="0" i="1">
-                <a:solidFill>
-                  <a:srgbClr val="94A3B8"/>
-                </a:solidFill>
-                <a:latin typeface="Calibri"/>
-              </a:rPr>
-              <a:t>Reproducing a real, fair test</a:t>
+              <a:t>Part 3 — Testing It For Real</a:t>
             </a:r>
           </a:p>
         </p:txBody>
@@ -8256,8 +6222,8 @@
         </p:nvSpPr>
         <p:spPr>
           <a:xfrm>
-            <a:off x="502920" y="384048"/>
-            <a:ext cx="11155680" cy="822960"/>
+            <a:off x="502920" y="292608"/>
+            <a:ext cx="11155680" cy="685800"/>
           </a:xfrm>
           <a:prstGeom prst="rect">
             <a:avLst/>
@@ -8272,17 +6238,17 @@
           <a:p>
             <a:pPr algn="l">
               <a:lnSpc>
-                <a:spcPct val="115000"/>
+                <a:spcPct val="112000"/>
               </a:lnSpc>
             </a:pPr>
             <a:r>
-              <a:rPr sz="3200" b="1" i="0">
+              <a:rPr sz="2900" b="1" i="0">
                 <a:solidFill>
                   <a:srgbClr val="1A1A2E"/>
                 </a:solidFill>
                 <a:latin typeface="Calibri"/>
               </a:rPr>
-              <a:t>What we actually built &amp; reproduced</a:t>
+              <a:t>The headline result: roughly a coin flip</a:t>
             </a:r>
           </a:p>
         </p:txBody>
@@ -8295,7 +6261,7 @@
         </p:nvSpPr>
         <p:spPr>
           <a:xfrm>
-            <a:off x="502920" y="1170432"/>
+            <a:off x="502920" y="950976"/>
             <a:ext cx="2011680" cy="50800"/>
           </a:xfrm>
           <a:prstGeom prst="rect">
@@ -8331,16 +6297,64 @@
           </a:p>
         </p:txBody>
       </p:sp>
-      <p:sp>
-        <p:nvSpPr>
-          <p:cNvPr id="4" name="TextBox 3"/>
+      <p:pic>
+        <p:nvPicPr>
+          <p:cNvPr id="4" name="Picture 3" descr="chart_headline.png"/>
+          <p:cNvPicPr>
+            <a:picLocks noChangeAspect="1"/>
+          </p:cNvPicPr>
+          <p:nvPr/>
+        </p:nvPicPr>
+        <p:blipFill>
+          <a:blip r:embed="rId2"/>
+          <a:stretch>
+            <a:fillRect/>
+          </a:stretch>
+        </p:blipFill>
+        <p:spPr>
+          <a:xfrm>
+            <a:off x="365760" y="1824494"/>
+            <a:ext cx="5943600" cy="3711932"/>
+          </a:xfrm>
+          <a:prstGeom prst="rect">
+            <a:avLst/>
+          </a:prstGeom>
+        </p:spPr>
+      </p:pic>
+      <p:pic>
+        <p:nvPicPr>
+          <p:cNvPr id="5" name="Picture 4" descr="chart_by_project.png"/>
+          <p:cNvPicPr>
+            <a:picLocks noChangeAspect="1"/>
+          </p:cNvPicPr>
+          <p:nvPr/>
+        </p:nvPicPr>
+        <p:blipFill>
+          <a:blip r:embed="rId3"/>
+          <a:stretch>
+            <a:fillRect/>
+          </a:stretch>
+        </p:blipFill>
+        <p:spPr>
+          <a:xfrm>
+            <a:off x="6355080" y="2198940"/>
+            <a:ext cx="5577840" cy="2963039"/>
+          </a:xfrm>
+          <a:prstGeom prst="rect">
+            <a:avLst/>
+          </a:prstGeom>
+        </p:spPr>
+      </p:pic>
+      <p:sp>
+        <p:nvSpPr>
+          <p:cNvPr id="6" name="TextBox 5"/>
           <p:cNvSpPr txBox="1"/>
           <p:nvPr/>
         </p:nvSpPr>
         <p:spPr>
           <a:xfrm>
-            <a:off x="640080" y="1828800"/>
-            <a:ext cx="10972800" cy="4114800"/>
+            <a:off x="502920" y="5852160"/>
+            <a:ext cx="11155680" cy="594360"/>
           </a:xfrm>
           <a:prstGeom prst="rect">
             <a:avLst/>
@@ -8348,187 +6362,63 @@
           <a:noFill/>
         </p:spPr>
         <p:txBody>
-          <a:bodyPr wrap="square">
+          <a:bodyPr wrap="square" anchor="t">
             <a:spAutoFit/>
           </a:bodyPr>
           <a:lstStyle/>
           <a:p>
-            <a:pPr>
+            <a:pPr algn="ctr">
               <a:lnSpc>
                 <a:spcPct val="112000"/>
               </a:lnSpc>
-              <a:spcAft>
-                <a:spcPts val="1400"/>
-              </a:spcAft>
             </a:pPr>
             <a:r>
-              <a:rPr sz="1950" b="1">
-                <a:solidFill>
-                  <a:srgbClr val="2CA02C"/>
-                </a:solidFill>
-                <a:latin typeface="Calibri"/>
-              </a:rPr>
-              <a:t>▸  </a:t>
-            </a:r>
-            <a:r>
-              <a:rPr sz="1950">
-                <a:solidFill>
-                  <a:srgbClr val="333333"/>
-                </a:solidFill>
-                <a:latin typeface="Calibri"/>
-              </a:rPr>
-              <a:t>4 real, well-known open-source projects (Flask, Click, HTTPX, Rich) — the same code real developers use every day, 9,000 to 26,000 lines each.</a:t>
-            </a:r>
-          </a:p>
-          <a:p>
-            <a:pPr>
+              <a:rPr sz="1350" b="0" i="1">
+                <a:solidFill>
+                  <a:srgbClr val="666666"/>
+                </a:solidFill>
+                <a:latin typeface="Calibri"/>
+              </a:rPr>
+              <a:t>288 total AI runs, zero crashes. No project favored the map — not even Rich, the largest/most complex codebase tested.</a:t>
+            </a:r>
+          </a:p>
+        </p:txBody>
+      </p:sp>
+      <p:sp>
+        <p:nvSpPr>
+          <p:cNvPr id="7" name="TextBox 6"/>
+          <p:cNvSpPr txBox="1"/>
+          <p:nvPr/>
+        </p:nvSpPr>
+        <p:spPr>
+          <a:xfrm>
+            <a:off x="502920" y="6510528"/>
+            <a:ext cx="8229600" cy="292608"/>
+          </a:xfrm>
+          <a:prstGeom prst="rect">
+            <a:avLst/>
+          </a:prstGeom>
+          <a:noFill/>
+        </p:spPr>
+        <p:txBody>
+          <a:bodyPr wrap="square" anchor="t">
+            <a:spAutoFit/>
+          </a:bodyPr>
+          <a:lstStyle/>
+          <a:p>
+            <a:pPr algn="l">
               <a:lnSpc>
                 <a:spcPct val="112000"/>
               </a:lnSpc>
-              <a:spcAft>
-                <a:spcPts val="1400"/>
-              </a:spcAft>
             </a:pPr>
             <a:r>
-              <a:rPr sz="1950" b="1">
-                <a:solidFill>
-                  <a:srgbClr val="2CA02C"/>
-                </a:solidFill>
-                <a:latin typeface="Calibri"/>
-              </a:rPr>
-              <a:t>▸  </a:t>
-            </a:r>
-            <a:r>
-              <a:rPr sz="1950">
-                <a:solidFill>
-                  <a:srgbClr val="333333"/>
-                </a:solidFill>
-                <a:latin typeface="Calibri"/>
-              </a:rPr>
-              <a:t>48 hand-written, realistic questions about that code (“who calls this,” “what breaks if I change this,” “trace this request end-to-end,” and more).</a:t>
-            </a:r>
-          </a:p>
-          <a:p>
-            <a:pPr>
-              <a:lnSpc>
-                <a:spcPct val="112000"/>
-              </a:lnSpc>
-              <a:spcAft>
-                <a:spcPts val="1400"/>
-              </a:spcAft>
-            </a:pPr>
-            <a:r>
-              <a:rPr sz="1950" b="1">
-                <a:solidFill>
-                  <a:srgbClr val="2CA02C"/>
-                </a:solidFill>
-                <a:latin typeface="Calibri"/>
-              </a:rPr>
-              <a:t>▸  </a:t>
-            </a:r>
-            <a:r>
-              <a:rPr sz="1950">
-                <a:solidFill>
-                  <a:srgbClr val="333333"/>
-                </a:solidFill>
-                <a:latin typeface="Calibri"/>
-              </a:rPr>
-              <a:t>A real AI coding agent (OpenAI's Codex) to answer them — not a toy stand-in.</a:t>
-            </a:r>
-          </a:p>
-          <a:p>
-            <a:pPr>
-              <a:lnSpc>
-                <a:spcPct val="112000"/>
-              </a:lnSpc>
-              <a:spcAft>
-                <a:spcPts val="1400"/>
-              </a:spcAft>
-            </a:pPr>
-            <a:r>
-              <a:rPr sz="1950" b="1">
-                <a:solidFill>
-                  <a:srgbClr val="2CA02C"/>
-                </a:solidFill>
-                <a:latin typeface="Calibri"/>
-              </a:rPr>
-              <a:t>▸  </a:t>
-            </a:r>
-            <a:r>
-              <a:rPr sz="1950">
-                <a:solidFill>
-                  <a:srgbClr val="333333"/>
-                </a:solidFill>
-                <a:latin typeface="Calibri"/>
-              </a:rPr>
-              <a:t>The actual ContextAI code-map tool, connected the same way a real developer would connect it — as a plug-in tool for the AI, not hard-wired into our test scripts.</a:t>
-            </a:r>
-          </a:p>
-          <a:p>
-            <a:pPr>
-              <a:lnSpc>
-                <a:spcPct val="112000"/>
-              </a:lnSpc>
-              <a:spcAft>
-                <a:spcPts val="1400"/>
-              </a:spcAft>
-            </a:pPr>
-            <a:r>
-              <a:rPr sz="1950" b="1">
-                <a:solidFill>
-                  <a:srgbClr val="2CA02C"/>
-                </a:solidFill>
-                <a:latin typeface="Calibri"/>
-              </a:rPr>
-              <a:t>▸  </a:t>
-            </a:r>
-            <a:r>
-              <a:rPr sz="1950">
-                <a:solidFill>
-                  <a:srgbClr val="333333"/>
-                </a:solidFill>
-                <a:latin typeface="Calibri"/>
-              </a:rPr>
-              <a:t>An automatic scoring system, so results are measured, not eyeballed.</a:t>
-            </a:r>
-          </a:p>
-        </p:txBody>
-      </p:sp>
-      <p:sp>
-        <p:nvSpPr>
-          <p:cNvPr id="5" name="TextBox 4"/>
-          <p:cNvSpPr txBox="1"/>
-          <p:nvPr/>
-        </p:nvSpPr>
-        <p:spPr>
-          <a:xfrm>
-            <a:off x="502920" y="6473952"/>
-            <a:ext cx="8229600" cy="320040"/>
-          </a:xfrm>
-          <a:prstGeom prst="rect">
-            <a:avLst/>
-          </a:prstGeom>
-          <a:noFill/>
-        </p:spPr>
-        <p:txBody>
-          <a:bodyPr wrap="square" anchor="t">
-            <a:spAutoFit/>
-          </a:bodyPr>
-          <a:lstStyle/>
-          <a:p>
-            <a:pPr algn="l">
-              <a:lnSpc>
-                <a:spcPct val="115000"/>
-              </a:lnSpc>
-            </a:pPr>
-            <a:r>
-              <a:rPr sz="1050" b="0" i="0">
+              <a:rPr sz="1000" b="0" i="0">
                 <a:solidFill>
                   <a:srgbClr val="AAAAAA"/>
                 </a:solidFill>
                 <a:latin typeface="Calibri"/>
               </a:rPr>
-              <a:t>Part 2 — What We Built</a:t>
+              <a:t>Part 4 — Results</a:t>
             </a:r>
           </a:p>
         </p:txBody>
@@ -8567,8 +6457,8 @@
         </p:nvSpPr>
         <p:spPr>
           <a:xfrm>
-            <a:off x="502920" y="384048"/>
-            <a:ext cx="11155680" cy="822960"/>
+            <a:off x="502920" y="292608"/>
+            <a:ext cx="11155680" cy="685800"/>
           </a:xfrm>
           <a:prstGeom prst="rect">
             <a:avLst/>
@@ -8583,17 +6473,17 @@
           <a:p>
             <a:pPr algn="l">
               <a:lnSpc>
-                <a:spcPct val="115000"/>
+                <a:spcPct val="112000"/>
               </a:lnSpc>
             </a:pPr>
             <a:r>
-              <a:rPr sz="3200" b="1" i="0">
+              <a:rPr sz="2900" b="1" i="0">
                 <a:solidFill>
                   <a:srgbClr val="1A1A2E"/>
                 </a:solidFill>
                 <a:latin typeface="Calibri"/>
               </a:rPr>
-              <a:t>Two modes, one fair comparison</a:t>
+              <a:t>The map wasn't free — and wasn't more accurate either</a:t>
             </a:r>
           </a:p>
         </p:txBody>
@@ -8606,14 +6496,14 @@
         </p:nvSpPr>
         <p:spPr>
           <a:xfrm>
-            <a:off x="502920" y="1170432"/>
+            <a:off x="502920" y="950976"/>
             <a:ext cx="2011680" cy="50800"/>
           </a:xfrm>
           <a:prstGeom prst="rect">
             <a:avLst/>
           </a:prstGeom>
           <a:solidFill>
-            <a:srgbClr val="2CA02C"/>
+            <a:srgbClr val="D97706"/>
           </a:solidFill>
           <a:ln>
             <a:noFill/>
@@ -8644,7 +6534,7 @@
       </p:sp>
       <p:pic>
         <p:nvPicPr>
-          <p:cNvPr id="4" name="Picture 3" descr="two_modes.png"/>
+          <p:cNvPr id="4" name="Picture 3" descr="chart_cost.png"/>
           <p:cNvPicPr>
             <a:picLocks noChangeAspect="1"/>
           </p:cNvPicPr>
@@ -8658,24 +6548,48 @@
         </p:blipFill>
         <p:spPr>
           <a:xfrm>
-            <a:off x="1830472" y="1691640"/>
-            <a:ext cx="8500576" cy="4754880"/>
+            <a:off x="365760" y="2299812"/>
+            <a:ext cx="5943600" cy="2807015"/>
           </a:xfrm>
           <a:prstGeom prst="rect">
             <a:avLst/>
           </a:prstGeom>
         </p:spPr>
       </p:pic>
-      <p:sp>
-        <p:nvSpPr>
-          <p:cNvPr id="5" name="TextBox 4"/>
+      <p:pic>
+        <p:nvPicPr>
+          <p:cNvPr id="5" name="Picture 4" descr="chart_recall_gap.png"/>
+          <p:cNvPicPr>
+            <a:picLocks noChangeAspect="1"/>
+          </p:cNvPicPr>
+          <p:nvPr/>
+        </p:nvPicPr>
+        <p:blipFill>
+          <a:blip r:embed="rId3"/>
+          <a:stretch>
+            <a:fillRect/>
+          </a:stretch>
+        </p:blipFill>
+        <p:spPr>
+          <a:xfrm>
+            <a:off x="6355080" y="2070660"/>
+            <a:ext cx="5577840" cy="3265319"/>
+          </a:xfrm>
+          <a:prstGeom prst="rect">
+            <a:avLst/>
+          </a:prstGeom>
+        </p:spPr>
+      </p:pic>
+      <p:sp>
+        <p:nvSpPr>
+          <p:cNvPr id="6" name="TextBox 5"/>
           <p:cNvSpPr txBox="1"/>
           <p:nvPr/>
         </p:nvSpPr>
         <p:spPr>
           <a:xfrm>
-            <a:off x="502920" y="6473952"/>
-            <a:ext cx="8229600" cy="320040"/>
+            <a:off x="502920" y="5897880"/>
+            <a:ext cx="11155680" cy="548640"/>
           </a:xfrm>
           <a:prstGeom prst="rect">
             <a:avLst/>
@@ -8688,19 +6602,58 @@
           </a:bodyPr>
           <a:lstStyle/>
           <a:p>
+            <a:pPr algn="ctr">
+              <a:lnSpc>
+                <a:spcPct val="112000"/>
+              </a:lnSpc>
+            </a:pPr>
+            <a:r>
+              <a:rPr sz="1350" b="0" i="1">
+                <a:solidFill>
+                  <a:srgbClr val="666666"/>
+                </a:solidFill>
+                <a:latin typeface="Calibri"/>
+              </a:rPr>
+              <a:t>Objective F1 was a near-tie too: 0.740 (no map) vs. 0.745 (with map) across 87 checkable answers.</a:t>
+            </a:r>
+          </a:p>
+        </p:txBody>
+      </p:sp>
+      <p:sp>
+        <p:nvSpPr>
+          <p:cNvPr id="7" name="TextBox 6"/>
+          <p:cNvSpPr txBox="1"/>
+          <p:nvPr/>
+        </p:nvSpPr>
+        <p:spPr>
+          <a:xfrm>
+            <a:off x="502920" y="6510528"/>
+            <a:ext cx="8229600" cy="292608"/>
+          </a:xfrm>
+          <a:prstGeom prst="rect">
+            <a:avLst/>
+          </a:prstGeom>
+          <a:noFill/>
+        </p:spPr>
+        <p:txBody>
+          <a:bodyPr wrap="square" anchor="t">
+            <a:spAutoFit/>
+          </a:bodyPr>
+          <a:lstStyle/>
+          <a:p>
             <a:pPr algn="l">
               <a:lnSpc>
-                <a:spcPct val="115000"/>
+                <a:spcPct val="112000"/>
               </a:lnSpc>
             </a:pPr>
             <a:r>
-              <a:rPr sz="1050" b="0" i="0">
+              <a:rPr sz="1000" b="0" i="0">
                 <a:solidFill>
                   <a:srgbClr val="AAAAAA"/>
                 </a:solidFill>
                 <a:latin typeface="Calibri"/>
               </a:rPr>
-              <a:t>Part 2 — What We Built</a:t>
+              <a:t>Part 4 — Results</a:t>
             </a:r>
           </a:p>
         </p:txBody>

--- a/presentation/ContextAI_Evaluation.pptx
+++ b/presentation/ContextAI_Evaluation.pptx
@@ -18,19 +18,6 @@
     <p:sldId id="266" r:id="rId17"/>
     <p:sldId id="267" r:id="rId18"/>
     <p:sldId id="268" r:id="rId19"/>
-    <p:sldId id="269" r:id="rId20"/>
-    <p:sldId id="270" r:id="rId21"/>
-    <p:sldId id="271" r:id="rId22"/>
-    <p:sldId id="272" r:id="rId23"/>
-    <p:sldId id="273" r:id="rId24"/>
-    <p:sldId id="274" r:id="rId25"/>
-    <p:sldId id="275" r:id="rId26"/>
-    <p:sldId id="276" r:id="rId27"/>
-    <p:sldId id="277" r:id="rId28"/>
-    <p:sldId id="278" r:id="rId29"/>
-    <p:sldId id="279" r:id="rId30"/>
-    <p:sldId id="280" r:id="rId31"/>
-    <p:sldId id="281" r:id="rId32"/>
   </p:sldIdLst>
   <p:sldSz cx="12191695" cy="6858000" type="screen4x3"/>
   <p:notesSz cx="6858000" cy="9144000"/>
@@ -3145,7 +3132,7 @@
           <a:p>
             <a:pPr algn="ctr">
               <a:lnSpc>
-                <a:spcPct val="115000"/>
+                <a:spcPct val="112000"/>
               </a:lnSpc>
             </a:pPr>
             <a:r>
@@ -3161,7 +3148,7 @@
           <a:p>
             <a:pPr algn="ctr">
               <a:lnSpc>
-                <a:spcPct val="115000"/>
+                <a:spcPct val="112000"/>
               </a:lnSpc>
             </a:pPr>
             <a:r>
@@ -3243,7 +3230,7 @@
           <a:p>
             <a:pPr algn="ctr">
               <a:lnSpc>
-                <a:spcPct val="115000"/>
+                <a:spcPct val="112000"/>
               </a:lnSpc>
             </a:pPr>
             <a:r>
@@ -3253,7 +3240,7 @@
                 </a:solidFill>
                 <a:latin typeface="Calibri"/>
               </a:rPr>
-              <a:t>Putting ContextAI's code-graph tool to the test with a real AI coding agent</a:t>
+              <a:t>ContextAI + ConnectContext, put to the test with a real AI coding agent</a:t>
             </a:r>
           </a:p>
         </p:txBody>
@@ -3282,7 +3269,7 @@
           <a:p>
             <a:pPr algn="ctr">
               <a:lnSpc>
-                <a:spcPct val="115000"/>
+                <a:spcPct val="112000"/>
               </a:lnSpc>
             </a:pPr>
             <a:r>
@@ -3292,7 +3279,7 @@
                 </a:solidFill>
                 <a:latin typeface="Calibri"/>
               </a:rPr>
-              <a:t>A hands-on evaluation — 48 real questions, 4 real codebases, 288 AI runs</a:t>
+              <a:t>A hands-on evaluation across 3 connected projects — 48 real questions, 288 AI runs</a:t>
             </a:r>
           </a:p>
         </p:txBody>
@@ -3331,8 +3318,8 @@
         </p:nvSpPr>
         <p:spPr>
           <a:xfrm>
-            <a:off x="502920" y="384048"/>
-            <a:ext cx="11155680" cy="822960"/>
+            <a:off x="502920" y="274320"/>
+            <a:ext cx="9875520" cy="640080"/>
           </a:xfrm>
           <a:prstGeom prst="rect">
             <a:avLst/>
@@ -3347,17 +3334,17 @@
           <a:p>
             <a:pPr algn="l">
               <a:lnSpc>
-                <a:spcPct val="115000"/>
+                <a:spcPct val="112000"/>
               </a:lnSpc>
             </a:pPr>
             <a:r>
-              <a:rPr sz="3200" b="1" i="0">
+              <a:rPr sz="2800" b="1" i="0">
                 <a:solidFill>
                   <a:srgbClr val="1A1A2E"/>
                 </a:solidFill>
                 <a:latin typeface="Calibri"/>
               </a:rPr>
-              <a:t>How we connected the map to the AI</a:t>
+              <a:t>The map wasn't free</a:t>
             </a:r>
           </a:p>
         </p:txBody>
@@ -3370,14 +3357,14 @@
         </p:nvSpPr>
         <p:spPr>
           <a:xfrm>
-            <a:off x="502920" y="1170432"/>
+            <a:off x="502920" y="896112"/>
             <a:ext cx="2011680" cy="50800"/>
           </a:xfrm>
           <a:prstGeom prst="rect">
             <a:avLst/>
           </a:prstGeom>
           <a:solidFill>
-            <a:srgbClr val="2CA02C"/>
+            <a:srgbClr val="D97706"/>
           </a:solidFill>
           <a:ln>
             <a:noFill/>
@@ -3406,9 +3393,62 @@
           </a:p>
         </p:txBody>
       </p:sp>
+      <p:sp>
+        <p:nvSpPr>
+          <p:cNvPr id="4" name="Rectangle 3"/>
+          <p:cNvSpPr/>
+          <p:nvPr/>
+        </p:nvSpPr>
+        <p:spPr>
+          <a:xfrm>
+            <a:off x="9818828" y="384048"/>
+            <a:ext cx="1915667" cy="365760"/>
+          </a:xfrm>
+          <a:prstGeom prst="rect">
+            <a:avLst/>
+          </a:prstGeom>
+          <a:solidFill>
+            <a:srgbClr val="D97706"/>
+          </a:solidFill>
+          <a:ln>
+            <a:noFill/>
+          </a:ln>
+          <a:effectLst/>
+        </p:spPr>
+        <p:style>
+          <a:lnRef idx="1">
+            <a:schemeClr val="accent1"/>
+          </a:lnRef>
+          <a:fillRef idx="3">
+            <a:schemeClr val="accent1"/>
+          </a:fillRef>
+          <a:effectRef idx="2">
+            <a:schemeClr val="accent1"/>
+          </a:effectRef>
+          <a:fontRef idx="minor">
+            <a:schemeClr val="lt1"/>
+          </a:fontRef>
+        </p:style>
+        <p:txBody>
+          <a:bodyPr rtlCol="0" anchor="ctr" wrap="none" lIns="0" rIns="0" tIns="0" bIns="0"/>
+          <a:lstStyle/>
+          <a:p>
+            <a:pPr algn="ctr"/>
+            <a:r>
+              <a:rPr sz="1100" b="1">
+                <a:solidFill>
+                  <a:srgbClr val="FFFFFF"/>
+                </a:solidFill>
+                <a:latin typeface="Calibri"/>
+              </a:rPr>
+              <a:t>4 · RESULTS</a:t>
+            </a:r>
+          </a:p>
+        </p:txBody>
+      </p:sp>
       <p:pic>
         <p:nvPicPr>
-          <p:cNvPr id="4" name="Picture 3" descr="mcp_connection.png"/>
+          <p:cNvPr id="5" name="Picture 4" descr="chart_cost.png"/>
           <p:cNvPicPr>
             <a:picLocks noChangeAspect="1"/>
           </p:cNvPicPr>
@@ -3422,8 +3462,8 @@
         </p:blipFill>
         <p:spPr>
           <a:xfrm>
-            <a:off x="1830472" y="1691640"/>
-            <a:ext cx="8500576" cy="4754880"/>
+            <a:off x="1724403" y="1463040"/>
+            <a:ext cx="8712714" cy="4114799"/>
           </a:xfrm>
           <a:prstGeom prst="rect">
             <a:avLst/>
@@ -3432,14 +3472,14 @@
       </p:pic>
       <p:sp>
         <p:nvSpPr>
-          <p:cNvPr id="5" name="TextBox 4"/>
+          <p:cNvPr id="6" name="TextBox 5"/>
           <p:cNvSpPr txBox="1"/>
           <p:nvPr/>
         </p:nvSpPr>
         <p:spPr>
           <a:xfrm>
-            <a:off x="502920" y="6473952"/>
-            <a:ext cx="8229600" cy="320040"/>
+            <a:off x="1005840" y="5806440"/>
+            <a:ext cx="10149840" cy="640080"/>
           </a:xfrm>
           <a:prstGeom prst="rect">
             <a:avLst/>
@@ -3452,19 +3492,19 @@
           </a:bodyPr>
           <a:lstStyle/>
           <a:p>
-            <a:pPr algn="l">
+            <a:pPr algn="ctr">
               <a:lnSpc>
-                <a:spcPct val="115000"/>
+                <a:spcPct val="112000"/>
               </a:lnSpc>
             </a:pPr>
             <a:r>
-              <a:rPr sz="1050" b="0" i="0">
-                <a:solidFill>
-                  <a:srgbClr val="AAAAAA"/>
+              <a:rPr sz="1500" b="0" i="1">
+                <a:solidFill>
+                  <a:srgbClr val="666666"/>
                 </a:solidFill>
                 <a:latin typeface="Calibri"/>
               </a:rPr>
-              <a:t>Part 2 — What We Built</a:t>
+              <a:t>Same number of steps, but ~70% more material “read” per question when the map was available.</a:t>
             </a:r>
           </a:p>
         </p:txBody>
@@ -3503,8 +3543,8 @@
         </p:nvSpPr>
         <p:spPr>
           <a:xfrm>
-            <a:off x="502920" y="384048"/>
-            <a:ext cx="11155680" cy="822960"/>
+            <a:off x="502920" y="274320"/>
+            <a:ext cx="9875520" cy="640080"/>
           </a:xfrm>
           <a:prstGeom prst="rect">
             <a:avLst/>
@@ -3519,17 +3559,17 @@
           <a:p>
             <a:pPr algn="l">
               <a:lnSpc>
-                <a:spcPct val="115000"/>
+                <a:spcPct val="112000"/>
               </a:lnSpc>
             </a:pPr>
             <a:r>
-              <a:rPr sz="3200" b="1" i="0">
+              <a:rPr sz="2600" b="1" i="0">
                 <a:solidFill>
                   <a:srgbClr val="1A1A2E"/>
                 </a:solidFill>
                 <a:latin typeface="Calibri"/>
               </a:rPr>
-              <a:t>Two real hiccups along the way</a:t>
+              <a:t>Why didn't it help more? Two real reasons</a:t>
             </a:r>
           </a:p>
         </p:txBody>
@@ -3542,14 +3582,14 @@
         </p:nvSpPr>
         <p:spPr>
           <a:xfrm>
-            <a:off x="502920" y="1170432"/>
+            <a:off x="502920" y="896112"/>
             <a:ext cx="2011680" cy="50800"/>
           </a:xfrm>
           <a:prstGeom prst="rect">
             <a:avLst/>
           </a:prstGeom>
           <a:solidFill>
-            <a:srgbClr val="D97706"/>
+            <a:srgbClr val="9333EA"/>
           </a:solidFill>
           <a:ln>
             <a:noFill/>
@@ -3580,14 +3620,67 @@
       </p:sp>
       <p:sp>
         <p:nvSpPr>
-          <p:cNvPr id="4" name="TextBox 3"/>
+          <p:cNvPr id="4" name="Rectangle 3"/>
+          <p:cNvSpPr/>
+          <p:nvPr/>
+        </p:nvSpPr>
+        <p:spPr>
+          <a:xfrm>
+            <a:off x="10349179" y="384048"/>
+            <a:ext cx="1385316" cy="365760"/>
+          </a:xfrm>
+          <a:prstGeom prst="rect">
+            <a:avLst/>
+          </a:prstGeom>
+          <a:solidFill>
+            <a:srgbClr val="9333EA"/>
+          </a:solidFill>
+          <a:ln>
+            <a:noFill/>
+          </a:ln>
+          <a:effectLst/>
+        </p:spPr>
+        <p:style>
+          <a:lnRef idx="1">
+            <a:schemeClr val="accent1"/>
+          </a:lnRef>
+          <a:fillRef idx="3">
+            <a:schemeClr val="accent1"/>
+          </a:fillRef>
+          <a:effectRef idx="2">
+            <a:schemeClr val="accent1"/>
+          </a:effectRef>
+          <a:fontRef idx="minor">
+            <a:schemeClr val="lt1"/>
+          </a:fontRef>
+        </p:style>
+        <p:txBody>
+          <a:bodyPr rtlCol="0" anchor="ctr" wrap="none" lIns="0" rIns="0" tIns="0" bIns="0"/>
+          <a:lstStyle/>
+          <a:p>
+            <a:pPr algn="ctr"/>
+            <a:r>
+              <a:rPr sz="1100" b="1">
+                <a:solidFill>
+                  <a:srgbClr val="FFFFFF"/>
+                </a:solidFill>
+                <a:latin typeface="Calibri"/>
+              </a:rPr>
+              <a:t>5 · WHY</a:t>
+            </a:r>
+          </a:p>
+        </p:txBody>
+      </p:sp>
+      <p:sp>
+        <p:nvSpPr>
+          <p:cNvPr id="5" name="TextBox 4"/>
           <p:cNvSpPr txBox="1"/>
           <p:nvPr/>
         </p:nvSpPr>
         <p:spPr>
           <a:xfrm>
-            <a:off x="640080" y="1737360"/>
-            <a:ext cx="5212080" cy="457200"/>
+            <a:off x="502920" y="1463040"/>
+            <a:ext cx="5486400" cy="365760"/>
           </a:xfrm>
           <a:prstGeom prst="rect">
             <a:avLst/>
@@ -3602,31 +3695,31 @@
           <a:p>
             <a:pPr algn="l">
               <a:lnSpc>
-                <a:spcPct val="115000"/>
+                <a:spcPct val="112000"/>
               </a:lnSpc>
             </a:pPr>
             <a:r>
-              <a:rPr sz="2000" b="1" i="0">
-                <a:solidFill>
-                  <a:srgbClr val="D97706"/>
+              <a:rPr sz="1600" b="1" i="0">
+                <a:solidFill>
+                  <a:srgbClr val="2563EB"/>
                 </a:solidFill>
                 <a:latin typeface="Calibri"/>
               </a:rPr>
-              <a:t>🐛  A hidden naming clash</a:t>
-            </a:r>
-          </a:p>
-        </p:txBody>
-      </p:sp>
-      <p:sp>
-        <p:nvSpPr>
-          <p:cNvPr id="5" name="TextBox 4"/>
+              <a:t>1. The referee itself was sometimes wrong</a:t>
+            </a:r>
+          </a:p>
+        </p:txBody>
+      </p:sp>
+      <p:sp>
+        <p:nvSpPr>
+          <p:cNvPr id="6" name="TextBox 5"/>
           <p:cNvSpPr txBox="1"/>
           <p:nvPr/>
         </p:nvSpPr>
         <p:spPr>
           <a:xfrm>
-            <a:off x="640080" y="2286000"/>
-            <a:ext cx="5212080" cy="3474720"/>
+            <a:off x="502920" y="1874519"/>
+            <a:ext cx="5486400" cy="1737360"/>
           </a:xfrm>
           <a:prstGeom prst="rect">
             <a:avLst/>
@@ -3641,77 +3734,31 @@
           <a:p>
             <a:pPr algn="l">
               <a:lnSpc>
-                <a:spcPct val="115000"/>
+                <a:spcPct val="112000"/>
               </a:lnSpc>
             </a:pPr>
             <a:r>
-              <a:rPr sz="1600" b="0" i="0">
+              <a:rPr sz="1350" b="0" i="0">
                 <a:solidFill>
                   <a:srgbClr val="333333"/>
                 </a:solidFill>
                 <a:latin typeface="Calibri"/>
               </a:rPr>
-              <a:t>One of the test projects (Flask) happens to have a file named the same as a core Python building block.</a:t>
-            </a:r>
-          </a:p>
-          <a:p>
-            <a:pPr algn="l">
-              <a:lnSpc>
-                <a:spcPct val="115000"/>
-              </a:lnSpc>
-            </a:pPr>
-          </a:p>
-          <a:p>
-            <a:pPr algn="l">
-              <a:lnSpc>
-                <a:spcPct val="115000"/>
-              </a:lnSpc>
-            </a:pPr>
-            <a:r>
-              <a:rPr sz="1600" b="0" i="0">
-                <a:solidFill>
-                  <a:srgbClr val="333333"/>
-                </a:solidFill>
-                <a:latin typeface="Calibri"/>
-              </a:rPr>
-              <a:t>That silently confused the map-building tool and crashed it — a subtle bug that only shows up on that one project.</a:t>
-            </a:r>
-          </a:p>
-          <a:p>
-            <a:pPr algn="l">
-              <a:lnSpc>
-                <a:spcPct val="115000"/>
-              </a:lnSpc>
-            </a:pPr>
-          </a:p>
-          <a:p>
-            <a:pPr algn="l">
-              <a:lnSpc>
-                <a:spcPct val="115000"/>
-              </a:lnSpc>
-            </a:pPr>
-            <a:r>
-              <a:rPr sz="1600" b="0" i="0">
-                <a:solidFill>
-                  <a:srgbClr val="333333"/>
-                </a:solidFill>
-                <a:latin typeface="Calibri"/>
-              </a:rPr>
-              <a:t>We tracked it down and fixed it by keeping the map-builder in its own safe folder, away from the project it's mapping.</a:t>
-            </a:r>
-          </a:p>
-        </p:txBody>
-      </p:sp>
-      <p:sp>
-        <p:nvSpPr>
-          <p:cNvPr id="6" name="TextBox 5"/>
+              <a:t>We hand-checked one “loss”: the map-assisted answer was actually correct (verified against the real source code) — the AI judge simply made a mistake. The true gap is probably smaller than the headline number suggests.</a:t>
+            </a:r>
+          </a:p>
+        </p:txBody>
+      </p:sp>
+      <p:sp>
+        <p:nvSpPr>
+          <p:cNvPr id="7" name="TextBox 6"/>
           <p:cNvSpPr txBox="1"/>
           <p:nvPr/>
         </p:nvSpPr>
         <p:spPr>
           <a:xfrm>
-            <a:off x="6309360" y="1737360"/>
-            <a:ext cx="5212080" cy="457200"/>
+            <a:off x="6263640" y="1463040"/>
+            <a:ext cx="5486400" cy="365760"/>
           </a:xfrm>
           <a:prstGeom prst="rect">
             <a:avLst/>
@@ -3726,118 +3773,95 @@
           <a:p>
             <a:pPr algn="l">
               <a:lnSpc>
-                <a:spcPct val="115000"/>
+                <a:spcPct val="112000"/>
               </a:lnSpc>
             </a:pPr>
             <a:r>
-              <a:rPr sz="2000" b="1" i="0">
+              <a:rPr sz="1600" b="1" i="0">
                 <a:solidFill>
                   <a:srgbClr val="D97706"/>
                 </a:solidFill>
                 <a:latin typeface="Calibri"/>
               </a:rPr>
-              <a:t>⏱️  A permissions limitation</a:t>
-            </a:r>
-          </a:p>
-        </p:txBody>
-      </p:sp>
-      <p:sp>
-        <p:nvSpPr>
-          <p:cNvPr id="7" name="TextBox 6"/>
-          <p:cNvSpPr txBox="1"/>
-          <p:nvPr/>
-        </p:nvSpPr>
-        <p:spPr>
-          <a:xfrm>
-            <a:off x="6309360" y="2286000"/>
-            <a:ext cx="5212080" cy="3474720"/>
-          </a:xfrm>
-          <a:prstGeom prst="rect">
-            <a:avLst/>
-          </a:prstGeom>
-          <a:noFill/>
-        </p:spPr>
-        <p:txBody>
-          <a:bodyPr wrap="square" anchor="t">
-            <a:spAutoFit/>
-          </a:bodyPr>
-          <a:lstStyle/>
-          <a:p>
-            <a:pPr algn="l">
-              <a:lnSpc>
-                <a:spcPct val="115000"/>
-              </a:lnSpc>
-            </a:pPr>
-            <a:r>
-              <a:rPr sz="1600" b="0" i="0">
-                <a:solidFill>
-                  <a:srgbClr val="333333"/>
+              <a:t>2. Trusting the map too much</a:t>
+            </a:r>
+          </a:p>
+        </p:txBody>
+      </p:sp>
+      <p:pic>
+        <p:nvPicPr>
+          <p:cNvPr id="8" name="Picture 7" descr="chart_recall_gap.png"/>
+          <p:cNvPicPr>
+            <a:picLocks noChangeAspect="1"/>
+          </p:cNvPicPr>
+          <p:nvPr/>
+        </p:nvPicPr>
+        <p:blipFill>
+          <a:blip r:embed="rId2"/>
+          <a:stretch>
+            <a:fillRect/>
+          </a:stretch>
+        </p:blipFill>
+        <p:spPr>
+          <a:xfrm>
+            <a:off x="6546715" y="1874519"/>
+            <a:ext cx="4920250" cy="2880360"/>
+          </a:xfrm>
+          <a:prstGeom prst="rect">
+            <a:avLst/>
+          </a:prstGeom>
+        </p:spPr>
+      </p:pic>
+      <p:sp>
+        <p:nvSpPr>
+          <p:cNvPr id="9" name="Rectangle 8"/>
+          <p:cNvSpPr/>
+          <p:nvPr/>
+        </p:nvSpPr>
+        <p:spPr>
+          <a:xfrm>
+            <a:off x="502920" y="5029200"/>
+            <a:ext cx="11247120" cy="1417320"/>
+          </a:xfrm>
+          <a:prstGeom prst="rect">
+            <a:avLst/>
+          </a:prstGeom>
+          <a:solidFill>
+            <a:srgbClr val="F3ECFB"/>
+          </a:solidFill>
+          <a:ln w="28575">
+            <a:solidFill>
+              <a:srgbClr val="9333EA"/>
+            </a:solidFill>
+          </a:ln>
+        </p:spPr>
+        <p:style>
+          <a:lnRef idx="1">
+            <a:schemeClr val="accent1"/>
+          </a:lnRef>
+          <a:fillRef idx="3">
+            <a:schemeClr val="accent1"/>
+          </a:fillRef>
+          <a:effectRef idx="2">
+            <a:schemeClr val="accent1"/>
+          </a:effectRef>
+          <a:fontRef idx="minor">
+            <a:schemeClr val="lt1"/>
+          </a:fontRef>
+        </p:style>
+        <p:txBody>
+          <a:bodyPr rtlCol="0" anchor="ctr" wrap="square"/>
+          <a:lstStyle/>
+          <a:p>
+            <a:pPr algn="ctr"/>
+            <a:r>
+              <a:rPr sz="1700" b="1">
+                <a:solidFill>
+                  <a:srgbClr val="1A1A2E"/>
                 </a:solidFill>
                 <a:latin typeface="Calibri"/>
               </a:rPr>
-              <a:t>When run unattended (no human watching), the AI tool we used wouldn't let the map get used at all — it kept waiting for a permission click that could never come.</a:t>
-            </a:r>
-          </a:p>
-          <a:p>
-            <a:pPr algn="l">
-              <a:lnSpc>
-                <a:spcPct val="115000"/>
-              </a:lnSpc>
-            </a:pPr>
-          </a:p>
-          <a:p>
-            <a:pPr algn="l">
-              <a:lnSpc>
-                <a:spcPct val="115000"/>
-              </a:lnSpc>
-            </a:pPr>
-            <a:r>
-              <a:rPr sz="1600" b="0" i="0">
-                <a:solidFill>
-                  <a:srgbClr val="333333"/>
-                </a:solidFill>
-                <a:latin typeface="Calibri"/>
-              </a:rPr>
-              <a:t>We found the setting to safely allow it to run unattended, and applied the exact same setting to both modes — so the comparison stayed fair.</a:t>
-            </a:r>
-          </a:p>
-        </p:txBody>
-      </p:sp>
-      <p:sp>
-        <p:nvSpPr>
-          <p:cNvPr id="8" name="TextBox 7"/>
-          <p:cNvSpPr txBox="1"/>
-          <p:nvPr/>
-        </p:nvSpPr>
-        <p:spPr>
-          <a:xfrm>
-            <a:off x="502920" y="6473952"/>
-            <a:ext cx="8229600" cy="320040"/>
-          </a:xfrm>
-          <a:prstGeom prst="rect">
-            <a:avLst/>
-          </a:prstGeom>
-          <a:noFill/>
-        </p:spPr>
-        <p:txBody>
-          <a:bodyPr wrap="square" anchor="t">
-            <a:spAutoFit/>
-          </a:bodyPr>
-          <a:lstStyle/>
-          <a:p>
-            <a:pPr algn="l">
-              <a:lnSpc>
-                <a:spcPct val="115000"/>
-              </a:lnSpc>
-            </a:pPr>
-            <a:r>
-              <a:rPr sz="1050" b="0" i="0">
-                <a:solidFill>
-                  <a:srgbClr val="AAAAAA"/>
-                </a:solidFill>
-                <a:latin typeface="Calibri"/>
-              </a:rPr>
-              <a:t>Part 2 — What We Built</a:t>
+              <a:t>Bottom line: the extra map didn't clearly make the AI better at understanding code — it used the tool eagerly, but that didn't translate into better answers.</a:t>
             </a:r>
           </a:p>
         </p:txBody>
@@ -3876,8 +3900,8 @@
         </p:nvSpPr>
         <p:spPr>
           <a:xfrm>
-            <a:off x="914400" y="2194560"/>
-            <a:ext cx="1828800" cy="1280160"/>
+            <a:off x="822960" y="457200"/>
+            <a:ext cx="10515600" cy="731520"/>
           </a:xfrm>
           <a:prstGeom prst="rect">
             <a:avLst/>
@@ -3892,31 +3916,75 @@
           <a:p>
             <a:pPr algn="l">
               <a:lnSpc>
-                <a:spcPct val="115000"/>
+                <a:spcPct val="112000"/>
               </a:lnSpc>
             </a:pPr>
             <a:r>
-              <a:rPr sz="9000" b="1" i="0">
-                <a:solidFill>
-                  <a:srgbClr val="2CA02C"/>
+              <a:rPr sz="2800" b="1" i="0">
+                <a:solidFill>
+                  <a:srgbClr val="FFFFFF"/>
                 </a:solidFill>
                 <a:latin typeface="Calibri"/>
               </a:rPr>
-              <a:t>3</a:t>
-            </a:r>
-          </a:p>
-        </p:txBody>
-      </p:sp>
-      <p:sp>
-        <p:nvSpPr>
-          <p:cNvPr id="3" name="TextBox 2"/>
+              <a:t>A personal note, 4 months later</a:t>
+            </a:r>
+          </a:p>
+        </p:txBody>
+      </p:sp>
+      <p:sp>
+        <p:nvSpPr>
+          <p:cNvPr id="3" name="Rectangle 2"/>
+          <p:cNvSpPr/>
+          <p:nvPr/>
+        </p:nvSpPr>
+        <p:spPr>
+          <a:xfrm>
+            <a:off x="822960" y="1170432"/>
+            <a:ext cx="2011680" cy="50800"/>
+          </a:xfrm>
+          <a:prstGeom prst="rect">
+            <a:avLst/>
+          </a:prstGeom>
+          <a:solidFill>
+            <a:srgbClr val="D97706"/>
+          </a:solidFill>
+          <a:ln>
+            <a:noFill/>
+          </a:ln>
+          <a:effectLst/>
+        </p:spPr>
+        <p:style>
+          <a:lnRef idx="1">
+            <a:schemeClr val="accent1"/>
+          </a:lnRef>
+          <a:fillRef idx="3">
+            <a:schemeClr val="accent1"/>
+          </a:fillRef>
+          <a:effectRef idx="2">
+            <a:schemeClr val="accent1"/>
+          </a:effectRef>
+          <a:fontRef idx="minor">
+            <a:schemeClr val="lt1"/>
+          </a:fontRef>
+        </p:style>
+        <p:txBody>
+          <a:bodyPr rtlCol="0" anchor="ctr"/>
+          <a:lstStyle/>
+          <a:p>
+            <a:pPr algn="ctr"/>
+          </a:p>
+        </p:txBody>
+      </p:sp>
+      <p:sp>
+        <p:nvSpPr>
+          <p:cNvPr id="4" name="TextBox 3"/>
           <p:cNvSpPr txBox="1"/>
           <p:nvPr/>
         </p:nvSpPr>
         <p:spPr>
           <a:xfrm>
-            <a:off x="3017520" y="2514600"/>
-            <a:ext cx="8229600" cy="914400"/>
+            <a:off x="822960" y="1554480"/>
+            <a:ext cx="10515600" cy="1371600"/>
           </a:xfrm>
           <a:prstGeom prst="rect">
             <a:avLst/>
@@ -3931,31 +3999,31 @@
           <a:p>
             <a:pPr algn="l">
               <a:lnSpc>
-                <a:spcPct val="115000"/>
+                <a:spcPct val="112000"/>
               </a:lnSpc>
             </a:pPr>
             <a:r>
-              <a:rPr sz="3400" b="1" i="0">
-                <a:solidFill>
-                  <a:srgbClr val="FFFFFF"/>
+              <a:rPr sz="1800" b="0" i="0">
+                <a:solidFill>
+                  <a:srgbClr val="DDDDE5"/>
                 </a:solidFill>
                 <a:latin typeface="Calibri"/>
               </a:rPr>
-              <a:t>Testing</a:t>
-            </a:r>
-          </a:p>
-        </p:txBody>
-      </p:sp>
-      <p:sp>
-        <p:nvSpPr>
-          <p:cNvPr id="4" name="TextBox 3"/>
+              <a:t>When this problem first came up about 4 months ago, it felt urgent: AI models couldn't hold a big codebase “in their head,” so a pre-built map felt essential.</a:t>
+            </a:r>
+          </a:p>
+        </p:txBody>
+      </p:sp>
+      <p:sp>
+        <p:nvSpPr>
+          <p:cNvPr id="5" name="TextBox 4"/>
           <p:cNvSpPr txBox="1"/>
           <p:nvPr/>
         </p:nvSpPr>
         <p:spPr>
           <a:xfrm>
-            <a:off x="3017520" y="3429000"/>
-            <a:ext cx="8229600" cy="914400"/>
+            <a:off x="822960" y="3017520"/>
+            <a:ext cx="10515600" cy="1737360"/>
           </a:xfrm>
           <a:prstGeom prst="rect">
             <a:avLst/>
@@ -3970,17 +4038,71 @@
           <a:p>
             <a:pPr algn="l">
               <a:lnSpc>
-                <a:spcPct val="115000"/>
+                <a:spcPct val="112000"/>
               </a:lnSpc>
             </a:pPr>
             <a:r>
-              <a:rPr sz="1700" b="0" i="1">
-                <a:solidFill>
-                  <a:srgbClr val="94A3B8"/>
+              <a:rPr sz="1800" b="0" i="0">
+                <a:solidFill>
+                  <a:srgbClr val="DDDDE5"/>
                 </a:solidFill>
                 <a:latin typeface="Calibri"/>
               </a:rPr>
-              <a:t>How we ran and graded it</a:t>
+              <a:t>In just those few months, AI models have gotten dramatically better at holding and reasoning over much more code at once, and simply gotten smarter overall. That original problem — the one this tool was built to solve — has largely shrunk on its own, just from the base AI models improving.</a:t>
+            </a:r>
+          </a:p>
+        </p:txBody>
+      </p:sp>
+      <p:sp>
+        <p:nvSpPr>
+          <p:cNvPr id="6" name="Rectangle 5"/>
+          <p:cNvSpPr/>
+          <p:nvPr/>
+        </p:nvSpPr>
+        <p:spPr>
+          <a:xfrm>
+            <a:off x="822960" y="4892040"/>
+            <a:ext cx="10515600" cy="1371600"/>
+          </a:xfrm>
+          <a:prstGeom prst="rect">
+            <a:avLst/>
+          </a:prstGeom>
+          <a:solidFill>
+            <a:srgbClr val="22332A"/>
+          </a:solidFill>
+          <a:ln w="28575">
+            <a:solidFill>
+              <a:srgbClr val="2CA02C"/>
+            </a:solidFill>
+          </a:ln>
+        </p:spPr>
+        <p:style>
+          <a:lnRef idx="1">
+            <a:schemeClr val="accent1"/>
+          </a:lnRef>
+          <a:fillRef idx="3">
+            <a:schemeClr val="accent1"/>
+          </a:fillRef>
+          <a:effectRef idx="2">
+            <a:schemeClr val="accent1"/>
+          </a:effectRef>
+          <a:fontRef idx="minor">
+            <a:schemeClr val="lt1"/>
+          </a:fontRef>
+        </p:style>
+        <p:txBody>
+          <a:bodyPr rtlCol="0" anchor="ctr" wrap="square"/>
+          <a:lstStyle/>
+          <a:p>
+            <a:pPr algn="ctr"/>
+            <a:r>
+              <a:rPr sz="1800" b="1">
+                <a:solidFill>
+                  <a:srgbClr val="2CA02C"/>
+                </a:solidFill>
+                <a:latin typeface="Calibri"/>
+              </a:rPr>
+              <a:t>Our results fit that story: a modern, capable AI agent with just its ordinary tools already does a solid job — the extra map no longer clears as high a bar as it once would have.</a:t>
             </a:r>
           </a:p>
         </p:txBody>
@@ -4019,8 +4141,8 @@
         </p:nvSpPr>
         <p:spPr>
           <a:xfrm>
-            <a:off x="502920" y="384048"/>
-            <a:ext cx="11155680" cy="822960"/>
+            <a:off x="502920" y="274320"/>
+            <a:ext cx="9875520" cy="640080"/>
           </a:xfrm>
           <a:prstGeom prst="rect">
             <a:avLst/>
@@ -4035,17 +4157,17 @@
           <a:p>
             <a:pPr algn="l">
               <a:lnSpc>
-                <a:spcPct val="115000"/>
+                <a:spcPct val="112000"/>
               </a:lnSpc>
             </a:pPr>
             <a:r>
-              <a:rPr sz="3200" b="1" i="0">
+              <a:rPr sz="2800" b="1" i="0">
                 <a:solidFill>
                   <a:srgbClr val="1A1A2E"/>
                 </a:solidFill>
                 <a:latin typeface="Calibri"/>
               </a:rPr>
-              <a:t>How the test was run, end to end</a:t>
+              <a:t>What this means going forward</a:t>
             </a:r>
           </a:p>
         </p:txBody>
@@ -4058,7 +4180,7 @@
         </p:nvSpPr>
         <p:spPr>
           <a:xfrm>
-            <a:off x="502920" y="1170432"/>
+            <a:off x="502920" y="896112"/>
             <a:ext cx="2011680" cy="50800"/>
           </a:xfrm>
           <a:prstGeom prst="rect">
@@ -4094,30 +4216,59 @@
           </a:p>
         </p:txBody>
       </p:sp>
-      <p:pic>
-        <p:nvPicPr>
-          <p:cNvPr id="4" name="Picture 3" descr="pipeline.png"/>
-          <p:cNvPicPr>
-            <a:picLocks noChangeAspect="1"/>
-          </p:cNvPicPr>
-          <p:nvPr/>
-        </p:nvPicPr>
-        <p:blipFill>
-          <a:blip r:embed="rId2"/>
-          <a:stretch>
-            <a:fillRect/>
-          </a:stretch>
-        </p:blipFill>
-        <p:spPr>
-          <a:xfrm>
-            <a:off x="1830472" y="1691640"/>
-            <a:ext cx="8500576" cy="4754880"/>
-          </a:xfrm>
-          <a:prstGeom prst="rect">
-            <a:avLst/>
-          </a:prstGeom>
-        </p:spPr>
-      </p:pic>
+      <p:sp>
+        <p:nvSpPr>
+          <p:cNvPr id="4" name="Rectangle 3"/>
+          <p:cNvSpPr/>
+          <p:nvPr/>
+        </p:nvSpPr>
+        <p:spPr>
+          <a:xfrm>
+            <a:off x="9421063" y="384048"/>
+            <a:ext cx="2313432" cy="365760"/>
+          </a:xfrm>
+          <a:prstGeom prst="rect">
+            <a:avLst/>
+          </a:prstGeom>
+          <a:solidFill>
+            <a:srgbClr val="2CA02C"/>
+          </a:solidFill>
+          <a:ln>
+            <a:noFill/>
+          </a:ln>
+          <a:effectLst/>
+        </p:spPr>
+        <p:style>
+          <a:lnRef idx="1">
+            <a:schemeClr val="accent1"/>
+          </a:lnRef>
+          <a:fillRef idx="3">
+            <a:schemeClr val="accent1"/>
+          </a:fillRef>
+          <a:effectRef idx="2">
+            <a:schemeClr val="accent1"/>
+          </a:effectRef>
+          <a:fontRef idx="minor">
+            <a:schemeClr val="lt1"/>
+          </a:fontRef>
+        </p:style>
+        <p:txBody>
+          <a:bodyPr rtlCol="0" anchor="ctr" wrap="none" lIns="0" rIns="0" tIns="0" bIns="0"/>
+          <a:lstStyle/>
+          <a:p>
+            <a:pPr algn="ctr"/>
+            <a:r>
+              <a:rPr sz="1100" b="1">
+                <a:solidFill>
+                  <a:srgbClr val="FFFFFF"/>
+                </a:solidFill>
+                <a:latin typeface="Calibri"/>
+              </a:rPr>
+              <a:t>6 · REFLECTION</a:t>
+            </a:r>
+          </a:p>
+        </p:txBody>
+      </p:sp>
       <p:sp>
         <p:nvSpPr>
           <p:cNvPr id="5" name="TextBox 4"/>
@@ -4126,8 +4277,186 @@
         </p:nvSpPr>
         <p:spPr>
           <a:xfrm>
-            <a:off x="502920" y="6473952"/>
-            <a:ext cx="8229600" cy="320040"/>
+            <a:off x="502920" y="1554480"/>
+            <a:ext cx="11247120" cy="3383280"/>
+          </a:xfrm>
+          <a:prstGeom prst="rect">
+            <a:avLst/>
+          </a:prstGeom>
+          <a:noFill/>
+        </p:spPr>
+        <p:txBody>
+          <a:bodyPr wrap="square">
+            <a:spAutoFit/>
+          </a:bodyPr>
+          <a:lstStyle/>
+          <a:p>
+            <a:pPr>
+              <a:lnSpc>
+                <a:spcPct val="108000"/>
+              </a:lnSpc>
+              <a:spcAft>
+                <a:spcPts val="1200"/>
+              </a:spcAft>
+            </a:pPr>
+            <a:r>
+              <a:rPr sz="1700" b="1">
+                <a:solidFill>
+                  <a:srgbClr val="2CA02C"/>
+                </a:solidFill>
+                <a:latin typeface="Calibri"/>
+              </a:rPr>
+              <a:t>▸  </a:t>
+            </a:r>
+            <a:r>
+              <a:rPr sz="1700">
+                <a:solidFill>
+                  <a:srgbClr val="333333"/>
+                </a:solidFill>
+                <a:latin typeface="Calibri"/>
+              </a:rPr>
+              <a:t>Tools like this still have a place — but the bar for “worth adding” keeps rising as base AI models improve.</a:t>
+            </a:r>
+          </a:p>
+          <a:p>
+            <a:pPr>
+              <a:lnSpc>
+                <a:spcPct val="108000"/>
+              </a:lnSpc>
+              <a:spcAft>
+                <a:spcPts val="1200"/>
+              </a:spcAft>
+            </a:pPr>
+            <a:r>
+              <a:rPr sz="1700" b="1">
+                <a:solidFill>
+                  <a:srgbClr val="2CA02C"/>
+                </a:solidFill>
+                <a:latin typeface="Calibri"/>
+              </a:rPr>
+              <a:t>▸  </a:t>
+            </a:r>
+            <a:r>
+              <a:rPr sz="1700">
+                <a:solidFill>
+                  <a:srgbClr val="333333"/>
+                </a:solidFill>
+                <a:latin typeface="Calibri"/>
+              </a:rPr>
+              <a:t>The AI should be encouraged to double-check the map's answer, not just trust it outright — especially for “list everything” style questions.</a:t>
+            </a:r>
+          </a:p>
+          <a:p>
+            <a:pPr>
+              <a:lnSpc>
+                <a:spcPct val="108000"/>
+              </a:lnSpc>
+              <a:spcAft>
+                <a:spcPts val="1200"/>
+              </a:spcAft>
+            </a:pPr>
+            <a:r>
+              <a:rPr sz="1700" b="1">
+                <a:solidFill>
+                  <a:srgbClr val="2CA02C"/>
+                </a:solidFill>
+                <a:latin typeface="Calibri"/>
+              </a:rPr>
+              <a:t>▸  </a:t>
+            </a:r>
+            <a:r>
+              <a:rPr sz="1700">
+                <a:solidFill>
+                  <a:srgbClr val="333333"/>
+                </a:solidFill>
+                <a:latin typeface="Calibri"/>
+              </a:rPr>
+              <a:t>The token/reading cost of extra tools is real and should be weighed against the (currently unclear) benefit.</a:t>
+            </a:r>
+          </a:p>
+          <a:p>
+            <a:pPr>
+              <a:lnSpc>
+                <a:spcPct val="108000"/>
+              </a:lnSpc>
+              <a:spcAft>
+                <a:spcPts val="1200"/>
+              </a:spcAft>
+            </a:pPr>
+            <a:r>
+              <a:rPr sz="1700" b="1">
+                <a:solidFill>
+                  <a:srgbClr val="2CA02C"/>
+                </a:solidFill>
+                <a:latin typeface="Calibri"/>
+              </a:rPr>
+              <a:t>▸  </a:t>
+            </a:r>
+            <a:r>
+              <a:rPr sz="1700">
+                <a:solidFill>
+                  <a:srgbClr val="333333"/>
+                </a:solidFill>
+                <a:latin typeface="Calibri"/>
+              </a:rPr>
+              <a:t>Worth re-running periodically — as models keep improving, the answer to “does this tool help” can keep changing.</a:t>
+            </a:r>
+          </a:p>
+        </p:txBody>
+      </p:sp>
+      <p:sp>
+        <p:nvSpPr>
+          <p:cNvPr id="6" name="Rectangle 5"/>
+          <p:cNvSpPr/>
+          <p:nvPr/>
+        </p:nvSpPr>
+        <p:spPr>
+          <a:xfrm>
+            <a:off x="502920" y="5532120"/>
+            <a:ext cx="11247120" cy="18288"/>
+          </a:xfrm>
+          <a:prstGeom prst="rect">
+            <a:avLst/>
+          </a:prstGeom>
+          <a:solidFill>
+            <a:srgbClr val="E5E7EB"/>
+          </a:solidFill>
+          <a:ln>
+            <a:noFill/>
+          </a:ln>
+        </p:spPr>
+        <p:style>
+          <a:lnRef idx="1">
+            <a:schemeClr val="accent1"/>
+          </a:lnRef>
+          <a:fillRef idx="3">
+            <a:schemeClr val="accent1"/>
+          </a:fillRef>
+          <a:effectRef idx="2">
+            <a:schemeClr val="accent1"/>
+          </a:effectRef>
+          <a:fontRef idx="minor">
+            <a:schemeClr val="lt1"/>
+          </a:fontRef>
+        </p:style>
+        <p:txBody>
+          <a:bodyPr rtlCol="0" anchor="ctr"/>
+          <a:lstStyle/>
+          <a:p>
+            <a:pPr algn="ctr"/>
+          </a:p>
+        </p:txBody>
+      </p:sp>
+      <p:sp>
+        <p:nvSpPr>
+          <p:cNvPr id="7" name="TextBox 6"/>
+          <p:cNvSpPr txBox="1"/>
+          <p:nvPr/>
+        </p:nvSpPr>
+        <p:spPr>
+          <a:xfrm>
+            <a:off x="502920" y="5760720"/>
+            <a:ext cx="11247120" cy="640080"/>
           </a:xfrm>
           <a:prstGeom prst="rect">
             <a:avLst/>
@@ -4140,19 +4469,19 @@
           </a:bodyPr>
           <a:lstStyle/>
           <a:p>
-            <a:pPr algn="l">
+            <a:pPr algn="ctr">
               <a:lnSpc>
-                <a:spcPct val="115000"/>
+                <a:spcPct val="112000"/>
               </a:lnSpc>
             </a:pPr>
             <a:r>
-              <a:rPr sz="1050" b="0" i="0">
-                <a:solidFill>
-                  <a:srgbClr val="AAAAAA"/>
+              <a:rPr sz="1600" b="1" i="0">
+                <a:solidFill>
+                  <a:srgbClr val="1A1A2E"/>
                 </a:solidFill>
                 <a:latin typeface="Calibri"/>
               </a:rPr>
-              <a:t>Part 3 — Testing</a:t>
+              <a:t>Thank you — full write-up, charts &amp; raw data: eval/report/REPORT.md</a:t>
             </a:r>
           </a:p>
         </p:txBody>
@@ -4165,7 +4494,7 @@
 </p:sld>
 </file>
 
-<file path=ppt/slides/slide14.xml><?xml version="1.0" encoding="utf-8"?>
+<file path=ppt/slides/slide2.xml><?xml version="1.0" encoding="utf-8"?>
 <p:sld xmlns:a="http://schemas.openxmlformats.org/drawingml/2006/main" xmlns:p="http://schemas.openxmlformats.org/presentationml/2006/main" xmlns:r="http://schemas.openxmlformats.org/officeDocument/2006/relationships">
   <p:cSld>
     <p:bg>
@@ -4191,8 +4520,8 @@
         </p:nvSpPr>
         <p:spPr>
           <a:xfrm>
-            <a:off x="502920" y="384048"/>
-            <a:ext cx="11155680" cy="822960"/>
+            <a:off x="502920" y="274320"/>
+            <a:ext cx="9875520" cy="640080"/>
           </a:xfrm>
           <a:prstGeom prst="rect">
             <a:avLst/>
@@ -4207,17 +4536,17 @@
           <a:p>
             <a:pPr algn="l">
               <a:lnSpc>
-                <a:spcPct val="115000"/>
+                <a:spcPct val="112000"/>
               </a:lnSpc>
             </a:pPr>
             <a:r>
-              <a:rPr sz="3200" b="1" i="0">
+              <a:rPr sz="2800" b="1" i="0">
                 <a:solidFill>
                   <a:srgbClr val="1A1A2E"/>
                 </a:solidFill>
                 <a:latin typeface="Calibri"/>
               </a:rPr>
-              <a:t>How we graded the answers</a:t>
+              <a:t>The everyday problem — and the idea</a:t>
             </a:r>
           </a:p>
         </p:txBody>
@@ -4230,7 +4559,7 @@
         </p:nvSpPr>
         <p:spPr>
           <a:xfrm>
-            <a:off x="502920" y="1170432"/>
+            <a:off x="502920" y="896112"/>
             <a:ext cx="2011680" cy="50800"/>
           </a:xfrm>
           <a:prstGeom prst="rect">
@@ -4266,9 +4595,101 @@
           </a:p>
         </p:txBody>
       </p:sp>
+      <p:sp>
+        <p:nvSpPr>
+          <p:cNvPr id="4" name="TextBox 3"/>
+          <p:cNvSpPr txBox="1"/>
+          <p:nvPr/>
+        </p:nvSpPr>
+        <p:spPr>
+          <a:xfrm>
+            <a:off x="502920" y="987552"/>
+            <a:ext cx="10058400" cy="365760"/>
+          </a:xfrm>
+          <a:prstGeom prst="rect">
+            <a:avLst/>
+          </a:prstGeom>
+          <a:noFill/>
+        </p:spPr>
+        <p:txBody>
+          <a:bodyPr wrap="square" anchor="t">
+            <a:spAutoFit/>
+          </a:bodyPr>
+          <a:lstStyle/>
+          <a:p>
+            <a:pPr algn="l">
+              <a:lnSpc>
+                <a:spcPct val="112000"/>
+              </a:lnSpc>
+            </a:pPr>
+            <a:r>
+              <a:rPr sz="1350" b="0" i="1">
+                <a:solidFill>
+                  <a:srgbClr val="666666"/>
+                </a:solidFill>
+                <a:latin typeface="Calibri"/>
+              </a:rPr>
+              <a:t>Why understanding a big codebase is hard, and what if the AI had a map first?</a:t>
+            </a:r>
+          </a:p>
+        </p:txBody>
+      </p:sp>
+      <p:sp>
+        <p:nvSpPr>
+          <p:cNvPr id="5" name="Rectangle 4"/>
+          <p:cNvSpPr/>
+          <p:nvPr/>
+        </p:nvSpPr>
+        <p:spPr>
+          <a:xfrm>
+            <a:off x="9686240" y="384048"/>
+            <a:ext cx="2048255" cy="365760"/>
+          </a:xfrm>
+          <a:prstGeom prst="rect">
+            <a:avLst/>
+          </a:prstGeom>
+          <a:solidFill>
+            <a:srgbClr val="2CA02C"/>
+          </a:solidFill>
+          <a:ln>
+            <a:noFill/>
+          </a:ln>
+          <a:effectLst/>
+        </p:spPr>
+        <p:style>
+          <a:lnRef idx="1">
+            <a:schemeClr val="accent1"/>
+          </a:lnRef>
+          <a:fillRef idx="3">
+            <a:schemeClr val="accent1"/>
+          </a:fillRef>
+          <a:effectRef idx="2">
+            <a:schemeClr val="accent1"/>
+          </a:effectRef>
+          <a:fontRef idx="minor">
+            <a:schemeClr val="lt1"/>
+          </a:fontRef>
+        </p:style>
+        <p:txBody>
+          <a:bodyPr rtlCol="0" anchor="ctr" wrap="none" lIns="0" rIns="0" tIns="0" bIns="0"/>
+          <a:lstStyle/>
+          <a:p>
+            <a:pPr algn="ctr"/>
+            <a:r>
+              <a:rPr sz="1100" b="1">
+                <a:solidFill>
+                  <a:srgbClr val="FFFFFF"/>
+                </a:solidFill>
+                <a:latin typeface="Calibri"/>
+              </a:rPr>
+              <a:t>1 · THE IDEA</a:t>
+            </a:r>
+          </a:p>
+        </p:txBody>
+      </p:sp>
       <p:pic>
         <p:nvPicPr>
-          <p:cNvPr id="4" name="Picture 3" descr="grading.png"/>
+          <p:cNvPr id="6" name="Picture 5" descr="search_vs_map.png"/>
           <p:cNvPicPr>
             <a:picLocks noChangeAspect="1"/>
           </p:cNvPicPr>
@@ -4282,8 +4703,8 @@
         </p:blipFill>
         <p:spPr>
           <a:xfrm>
-            <a:off x="1830472" y="1691640"/>
-            <a:ext cx="8500576" cy="4754880"/>
+            <a:off x="3179121" y="1600200"/>
+            <a:ext cx="5803278" cy="3246120"/>
           </a:xfrm>
           <a:prstGeom prst="rect">
             <a:avLst/>
@@ -4292,272 +4713,26 @@
       </p:pic>
       <p:sp>
         <p:nvSpPr>
-          <p:cNvPr id="5" name="TextBox 4"/>
-          <p:cNvSpPr txBox="1"/>
-          <p:nvPr/>
-        </p:nvSpPr>
-        <p:spPr>
-          <a:xfrm>
-            <a:off x="502920" y="6473952"/>
-            <a:ext cx="8229600" cy="320040"/>
-          </a:xfrm>
-          <a:prstGeom prst="rect">
-            <a:avLst/>
-          </a:prstGeom>
-          <a:noFill/>
-        </p:spPr>
-        <p:txBody>
-          <a:bodyPr wrap="square" anchor="t">
-            <a:spAutoFit/>
-          </a:bodyPr>
-          <a:lstStyle/>
-          <a:p>
-            <a:pPr algn="l">
-              <a:lnSpc>
-                <a:spcPct val="115000"/>
-              </a:lnSpc>
-            </a:pPr>
-            <a:r>
-              <a:rPr sz="1050" b="0" i="0">
-                <a:solidFill>
-                  <a:srgbClr val="AAAAAA"/>
-                </a:solidFill>
-                <a:latin typeface="Calibri"/>
-              </a:rPr>
-              <a:t>Part 3 — Testing</a:t>
-            </a:r>
-          </a:p>
-        </p:txBody>
-      </p:sp>
-    </p:spTree>
-  </p:cSld>
-  <p:clrMapOvr>
-    <a:masterClrMapping/>
-  </p:clrMapOvr>
-</p:sld>
-</file>
-
-<file path=ppt/slides/slide15.xml><?xml version="1.0" encoding="utf-8"?>
-<p:sld xmlns:a="http://schemas.openxmlformats.org/drawingml/2006/main" xmlns:p="http://schemas.openxmlformats.org/presentationml/2006/main" xmlns:r="http://schemas.openxmlformats.org/officeDocument/2006/relationships">
-  <p:cSld>
-    <p:bg>
-      <p:bgPr>
-        <a:solidFill>
-          <a:srgbClr val="1A1A2E"/>
-        </a:solidFill>
-        <a:effectLst/>
-      </p:bgPr>
-    </p:bg>
-    <p:spTree>
-      <p:nvGrpSpPr>
-        <p:cNvPr id="1" name=""/>
-        <p:cNvGrpSpPr/>
-        <p:nvPr/>
-      </p:nvGrpSpPr>
-      <p:grpSpPr/>
-      <p:sp>
-        <p:nvSpPr>
-          <p:cNvPr id="2" name="TextBox 1"/>
-          <p:cNvSpPr txBox="1"/>
-          <p:nvPr/>
-        </p:nvSpPr>
-        <p:spPr>
-          <a:xfrm>
-            <a:off x="914400" y="2194560"/>
-            <a:ext cx="1828800" cy="1280160"/>
-          </a:xfrm>
-          <a:prstGeom prst="rect">
-            <a:avLst/>
-          </a:prstGeom>
-          <a:noFill/>
-        </p:spPr>
-        <p:txBody>
-          <a:bodyPr wrap="square" anchor="t">
-            <a:spAutoFit/>
-          </a:bodyPr>
-          <a:lstStyle/>
-          <a:p>
-            <a:pPr algn="l">
-              <a:lnSpc>
-                <a:spcPct val="115000"/>
-              </a:lnSpc>
-            </a:pPr>
-            <a:r>
-              <a:rPr sz="9000" b="1" i="0">
-                <a:solidFill>
-                  <a:srgbClr val="2CA02C"/>
-                </a:solidFill>
-                <a:latin typeface="Calibri"/>
-              </a:rPr>
-              <a:t>4</a:t>
-            </a:r>
-          </a:p>
-        </p:txBody>
-      </p:sp>
-      <p:sp>
-        <p:nvSpPr>
-          <p:cNvPr id="3" name="TextBox 2"/>
-          <p:cNvSpPr txBox="1"/>
-          <p:nvPr/>
-        </p:nvSpPr>
-        <p:spPr>
-          <a:xfrm>
-            <a:off x="3017520" y="2514600"/>
-            <a:ext cx="8229600" cy="914400"/>
-          </a:xfrm>
-          <a:prstGeom prst="rect">
-            <a:avLst/>
-          </a:prstGeom>
-          <a:noFill/>
-        </p:spPr>
-        <p:txBody>
-          <a:bodyPr wrap="square" anchor="t">
-            <a:spAutoFit/>
-          </a:bodyPr>
-          <a:lstStyle/>
-          <a:p>
-            <a:pPr algn="l">
-              <a:lnSpc>
-                <a:spcPct val="115000"/>
-              </a:lnSpc>
-            </a:pPr>
-            <a:r>
-              <a:rPr sz="3400" b="1" i="0">
-                <a:solidFill>
-                  <a:srgbClr val="FFFFFF"/>
-                </a:solidFill>
-                <a:latin typeface="Calibri"/>
-              </a:rPr>
-              <a:t>Results</a:t>
-            </a:r>
-          </a:p>
-        </p:txBody>
-      </p:sp>
-      <p:sp>
-        <p:nvSpPr>
-          <p:cNvPr id="4" name="TextBox 3"/>
-          <p:cNvSpPr txBox="1"/>
-          <p:nvPr/>
-        </p:nvSpPr>
-        <p:spPr>
-          <a:xfrm>
-            <a:off x="3017520" y="3429000"/>
-            <a:ext cx="8229600" cy="914400"/>
-          </a:xfrm>
-          <a:prstGeom prst="rect">
-            <a:avLst/>
-          </a:prstGeom>
-          <a:noFill/>
-        </p:spPr>
-        <p:txBody>
-          <a:bodyPr wrap="square" anchor="t">
-            <a:spAutoFit/>
-          </a:bodyPr>
-          <a:lstStyle/>
-          <a:p>
-            <a:pPr algn="l">
-              <a:lnSpc>
-                <a:spcPct val="115000"/>
-              </a:lnSpc>
-            </a:pPr>
-            <a:r>
-              <a:rPr sz="1700" b="0" i="1">
-                <a:solidFill>
-                  <a:srgbClr val="94A3B8"/>
-                </a:solidFill>
-                <a:latin typeface="Calibri"/>
-              </a:rPr>
-              <a:t>What actually happened</a:t>
-            </a:r>
-          </a:p>
-        </p:txBody>
-      </p:sp>
-    </p:spTree>
-  </p:cSld>
-  <p:clrMapOvr>
-    <a:masterClrMapping/>
-  </p:clrMapOvr>
-</p:sld>
-</file>
-
-<file path=ppt/slides/slide16.xml><?xml version="1.0" encoding="utf-8"?>
-<p:sld xmlns:a="http://schemas.openxmlformats.org/drawingml/2006/main" xmlns:p="http://schemas.openxmlformats.org/presentationml/2006/main" xmlns:r="http://schemas.openxmlformats.org/officeDocument/2006/relationships">
-  <p:cSld>
-    <p:bg>
-      <p:bgPr>
-        <a:solidFill>
-          <a:srgbClr val="FFFFFF"/>
-        </a:solidFill>
-        <a:effectLst/>
-      </p:bgPr>
-    </p:bg>
-    <p:spTree>
-      <p:nvGrpSpPr>
-        <p:cNvPr id="1" name=""/>
-        <p:cNvGrpSpPr/>
-        <p:nvPr/>
-      </p:nvGrpSpPr>
-      <p:grpSpPr/>
-      <p:sp>
-        <p:nvSpPr>
-          <p:cNvPr id="2" name="TextBox 1"/>
-          <p:cNvSpPr txBox="1"/>
-          <p:nvPr/>
-        </p:nvSpPr>
-        <p:spPr>
-          <a:xfrm>
-            <a:off x="502920" y="384048"/>
-            <a:ext cx="11155680" cy="822960"/>
-          </a:xfrm>
-          <a:prstGeom prst="rect">
-            <a:avLst/>
-          </a:prstGeom>
-          <a:noFill/>
-        </p:spPr>
-        <p:txBody>
-          <a:bodyPr wrap="square" anchor="t">
-            <a:spAutoFit/>
-          </a:bodyPr>
-          <a:lstStyle/>
-          <a:p>
-            <a:pPr algn="l">
-              <a:lnSpc>
-                <a:spcPct val="115000"/>
-              </a:lnSpc>
-            </a:pPr>
-            <a:r>
-              <a:rPr sz="3200" b="1" i="0">
-                <a:solidFill>
-                  <a:srgbClr val="1A1A2E"/>
-                </a:solidFill>
-                <a:latin typeface="Calibri"/>
-              </a:rPr>
-              <a:t>The headline result</a:t>
-            </a:r>
-          </a:p>
-        </p:txBody>
-      </p:sp>
-      <p:sp>
-        <p:nvSpPr>
-          <p:cNvPr id="3" name="Rectangle 2"/>
+          <p:cNvPr id="7" name="Rectangle 6"/>
           <p:cNvSpPr/>
           <p:nvPr/>
         </p:nvSpPr>
         <p:spPr>
           <a:xfrm>
-            <a:off x="502920" y="1170432"/>
-            <a:ext cx="2011680" cy="50800"/>
+            <a:off x="914400" y="5074920"/>
+            <a:ext cx="10332720" cy="1417320"/>
           </a:xfrm>
           <a:prstGeom prst="rect">
             <a:avLst/>
           </a:prstGeom>
           <a:solidFill>
-            <a:srgbClr val="2CA02C"/>
+            <a:srgbClr val="F7F8FA"/>
           </a:solidFill>
-          <a:ln>
-            <a:noFill/>
+          <a:ln w="28575">
+            <a:solidFill>
+              <a:srgbClr val="2CA02C"/>
+            </a:solidFill>
           </a:ln>
-          <a:effectLst/>
         </p:spPr>
         <p:style>
           <a:lnRef idx="1">
@@ -4574,2489 +4749,19 @@
           </a:fontRef>
         </p:style>
         <p:txBody>
-          <a:bodyPr rtlCol="0" anchor="ctr"/>
+          <a:bodyPr rtlCol="0" anchor="ctr" wrap="square"/>
           <a:lstStyle/>
           <a:p>
             <a:pPr algn="ctr"/>
-          </a:p>
-        </p:txBody>
-      </p:sp>
-      <p:pic>
-        <p:nvPicPr>
-          <p:cNvPr id="4" name="Picture 3" descr="chart_headline.png"/>
-          <p:cNvPicPr>
-            <a:picLocks noChangeAspect="1"/>
-          </p:cNvPicPr>
-          <p:nvPr/>
-        </p:nvPicPr>
-        <p:blipFill>
-          <a:blip r:embed="rId2"/>
-          <a:stretch>
-            <a:fillRect/>
-          </a:stretch>
-        </p:blipFill>
-        <p:spPr>
-          <a:xfrm>
-            <a:off x="548640" y="1807587"/>
-            <a:ext cx="6949440" cy="4340105"/>
-          </a:xfrm>
-          <a:prstGeom prst="rect">
-            <a:avLst/>
-          </a:prstGeom>
-        </p:spPr>
-      </p:pic>
-      <p:sp>
-        <p:nvSpPr>
-          <p:cNvPr id="5" name="TextBox 4"/>
-          <p:cNvSpPr txBox="1"/>
-          <p:nvPr/>
-        </p:nvSpPr>
-        <p:spPr>
-          <a:xfrm>
-            <a:off x="7772400" y="2103120"/>
-            <a:ext cx="3931920" cy="914400"/>
-          </a:xfrm>
-          <a:prstGeom prst="rect">
-            <a:avLst/>
-          </a:prstGeom>
-          <a:noFill/>
-        </p:spPr>
-        <p:txBody>
-          <a:bodyPr wrap="square" anchor="t">
-            <a:spAutoFit/>
-          </a:bodyPr>
-          <a:lstStyle/>
-          <a:p>
-            <a:pPr algn="l">
-              <a:lnSpc>
-                <a:spcPct val="115000"/>
-              </a:lnSpc>
-            </a:pPr>
-            <a:r>
-              <a:rPr sz="2400" b="1" i="0">
+            <a:r>
+              <a:rPr sz="1900" b="1">
                 <a:solidFill>
                   <a:srgbClr val="1A1A2E"/>
                 </a:solidFill>
                 <a:latin typeface="Calibri"/>
               </a:rPr>
-              <a:t>Roughly a coin flip.</a:t>
-            </a:r>
-          </a:p>
-        </p:txBody>
-      </p:sp>
-      <p:sp>
-        <p:nvSpPr>
-          <p:cNvPr id="6" name="TextBox 5"/>
-          <p:cNvSpPr txBox="1"/>
-          <p:nvPr/>
-        </p:nvSpPr>
-        <p:spPr>
-          <a:xfrm>
-            <a:off x="7772400" y="2926080"/>
-            <a:ext cx="3931920" cy="3200400"/>
-          </a:xfrm>
-          <a:prstGeom prst="rect">
-            <a:avLst/>
-          </a:prstGeom>
-          <a:noFill/>
-        </p:spPr>
-        <p:txBody>
-          <a:bodyPr wrap="square">
-            <a:spAutoFit/>
-          </a:bodyPr>
-          <a:lstStyle/>
-          <a:p>
-            <a:pPr>
-              <a:lnSpc>
-                <a:spcPct val="112000"/>
-              </a:lnSpc>
-              <a:spcAft>
-                <a:spcPts val="1000"/>
-              </a:spcAft>
-            </a:pPr>
-            <a:r>
-              <a:rPr sz="1550" b="1">
-                <a:solidFill>
-                  <a:srgbClr val="2CA02C"/>
-                </a:solidFill>
-                <a:latin typeface="Calibri"/>
-              </a:rPr>
-              <a:t>▸  </a:t>
-            </a:r>
-            <a:r>
-              <a:rPr sz="1550">
-                <a:solidFill>
-                  <a:srgbClr val="333333"/>
-                </a:solidFill>
-                <a:latin typeface="Calibri"/>
-              </a:rPr>
-              <a:t>No clear overall winner.</a:t>
-            </a:r>
-          </a:p>
-          <a:p>
-            <a:pPr>
-              <a:lnSpc>
-                <a:spcPct val="112000"/>
-              </a:lnSpc>
-              <a:spcAft>
-                <a:spcPts val="1000"/>
-              </a:spcAft>
-            </a:pPr>
-            <a:r>
-              <a:rPr sz="1550" b="1">
-                <a:solidFill>
-                  <a:srgbClr val="2CA02C"/>
-                </a:solidFill>
-                <a:latin typeface="Calibri"/>
-              </a:rPr>
-              <a:t>▸  </a:t>
-            </a:r>
-            <a:r>
-              <a:rPr sz="1550">
-                <a:solidFill>
-                  <a:srgbClr val="333333"/>
-                </a:solidFill>
-                <a:latin typeface="Calibri"/>
-              </a:rPr>
-              <a:t>The map-assisted answers were preferred slightly less often than the plain answers.</a:t>
-            </a:r>
-          </a:p>
-          <a:p>
-            <a:pPr>
-              <a:lnSpc>
-                <a:spcPct val="112000"/>
-              </a:lnSpc>
-              <a:spcAft>
-                <a:spcPts val="1000"/>
-              </a:spcAft>
-            </a:pPr>
-            <a:r>
-              <a:rPr sz="1550" b="1">
-                <a:solidFill>
-                  <a:srgbClr val="2CA02C"/>
-                </a:solidFill>
-                <a:latin typeface="Calibri"/>
-              </a:rPr>
-              <a:t>▸  </a:t>
-            </a:r>
-            <a:r>
-              <a:rPr sz="1550">
-                <a:solidFill>
-                  <a:srgbClr val="333333"/>
-                </a:solidFill>
-                <a:latin typeface="Calibri"/>
-              </a:rPr>
-              <a:t>288 total AI runs. Zero crashes.</a:t>
-            </a:r>
-          </a:p>
-        </p:txBody>
-      </p:sp>
-      <p:sp>
-        <p:nvSpPr>
-          <p:cNvPr id="7" name="TextBox 6"/>
-          <p:cNvSpPr txBox="1"/>
-          <p:nvPr/>
-        </p:nvSpPr>
-        <p:spPr>
-          <a:xfrm>
-            <a:off x="502920" y="6473952"/>
-            <a:ext cx="8229600" cy="320040"/>
-          </a:xfrm>
-          <a:prstGeom prst="rect">
-            <a:avLst/>
-          </a:prstGeom>
-          <a:noFill/>
-        </p:spPr>
-        <p:txBody>
-          <a:bodyPr wrap="square" anchor="t">
-            <a:spAutoFit/>
-          </a:bodyPr>
-          <a:lstStyle/>
-          <a:p>
-            <a:pPr algn="l">
-              <a:lnSpc>
-                <a:spcPct val="115000"/>
-              </a:lnSpc>
-            </a:pPr>
-            <a:r>
-              <a:rPr sz="1050" b="0" i="0">
-                <a:solidFill>
-                  <a:srgbClr val="AAAAAA"/>
-                </a:solidFill>
-                <a:latin typeface="Calibri"/>
-              </a:rPr>
-              <a:t>Part 4 — Results</a:t>
-            </a:r>
-          </a:p>
-        </p:txBody>
-      </p:sp>
-    </p:spTree>
-  </p:cSld>
-  <p:clrMapOvr>
-    <a:masterClrMapping/>
-  </p:clrMapOvr>
-</p:sld>
-</file>
-
-<file path=ppt/slides/slide17.xml><?xml version="1.0" encoding="utf-8"?>
-<p:sld xmlns:a="http://schemas.openxmlformats.org/drawingml/2006/main" xmlns:p="http://schemas.openxmlformats.org/presentationml/2006/main" xmlns:r="http://schemas.openxmlformats.org/officeDocument/2006/relationships">
-  <p:cSld>
-    <p:bg>
-      <p:bgPr>
-        <a:solidFill>
-          <a:srgbClr val="FFFFFF"/>
-        </a:solidFill>
-        <a:effectLst/>
-      </p:bgPr>
-    </p:bg>
-    <p:spTree>
-      <p:nvGrpSpPr>
-        <p:cNvPr id="1" name=""/>
-        <p:cNvGrpSpPr/>
-        <p:nvPr/>
-      </p:nvGrpSpPr>
-      <p:grpSpPr/>
-      <p:sp>
-        <p:nvSpPr>
-          <p:cNvPr id="2" name="TextBox 1"/>
-          <p:cNvSpPr txBox="1"/>
-          <p:nvPr/>
-        </p:nvSpPr>
-        <p:spPr>
-          <a:xfrm>
-            <a:off x="502920" y="384048"/>
-            <a:ext cx="11155680" cy="822960"/>
-          </a:xfrm>
-          <a:prstGeom prst="rect">
-            <a:avLst/>
-          </a:prstGeom>
-          <a:noFill/>
-        </p:spPr>
-        <p:txBody>
-          <a:bodyPr wrap="square" anchor="t">
-            <a:spAutoFit/>
-          </a:bodyPr>
-          <a:lstStyle/>
-          <a:p>
-            <a:pPr algn="l">
-              <a:lnSpc>
-                <a:spcPct val="115000"/>
-              </a:lnSpc>
-            </a:pPr>
-            <a:r>
-              <a:rPr sz="3200" b="1" i="0">
-                <a:solidFill>
-                  <a:srgbClr val="1A1A2E"/>
-                </a:solidFill>
-                <a:latin typeface="Calibri"/>
-              </a:rPr>
-              <a:t>Not one project favored the map</a:t>
-            </a:r>
-          </a:p>
-        </p:txBody>
-      </p:sp>
-      <p:sp>
-        <p:nvSpPr>
-          <p:cNvPr id="3" name="Rectangle 2"/>
-          <p:cNvSpPr/>
-          <p:nvPr/>
-        </p:nvSpPr>
-        <p:spPr>
-          <a:xfrm>
-            <a:off x="502920" y="1170432"/>
-            <a:ext cx="2011680" cy="50800"/>
-          </a:xfrm>
-          <a:prstGeom prst="rect">
-            <a:avLst/>
-          </a:prstGeom>
-          <a:solidFill>
-            <a:srgbClr val="2CA02C"/>
-          </a:solidFill>
-          <a:ln>
-            <a:noFill/>
-          </a:ln>
-          <a:effectLst/>
-        </p:spPr>
-        <p:style>
-          <a:lnRef idx="1">
-            <a:schemeClr val="accent1"/>
-          </a:lnRef>
-          <a:fillRef idx="3">
-            <a:schemeClr val="accent1"/>
-          </a:fillRef>
-          <a:effectRef idx="2">
-            <a:schemeClr val="accent1"/>
-          </a:effectRef>
-          <a:fontRef idx="minor">
-            <a:schemeClr val="lt1"/>
-          </a:fontRef>
-        </p:style>
-        <p:txBody>
-          <a:bodyPr rtlCol="0" anchor="ctr"/>
-          <a:lstStyle/>
-          <a:p>
-            <a:pPr algn="ctr"/>
-          </a:p>
-        </p:txBody>
-      </p:sp>
-      <p:pic>
-        <p:nvPicPr>
-          <p:cNvPr id="4" name="Picture 3" descr="chart_by_project.png"/>
-          <p:cNvPicPr>
-            <a:picLocks noChangeAspect="1"/>
-          </p:cNvPicPr>
-          <p:nvPr/>
-        </p:nvPicPr>
-        <p:blipFill>
-          <a:blip r:embed="rId2"/>
-          <a:stretch>
-            <a:fillRect/>
-          </a:stretch>
-        </p:blipFill>
-        <p:spPr>
-          <a:xfrm>
-            <a:off x="1691362" y="1600200"/>
-            <a:ext cx="8778795" cy="4663440"/>
-          </a:xfrm>
-          <a:prstGeom prst="rect">
-            <a:avLst/>
-          </a:prstGeom>
-        </p:spPr>
-      </p:pic>
-      <p:sp>
-        <p:nvSpPr>
-          <p:cNvPr id="5" name="TextBox 4"/>
-          <p:cNvSpPr txBox="1"/>
-          <p:nvPr/>
-        </p:nvSpPr>
-        <p:spPr>
-          <a:xfrm>
-            <a:off x="502920" y="6473952"/>
-            <a:ext cx="8229600" cy="320040"/>
-          </a:xfrm>
-          <a:prstGeom prst="rect">
-            <a:avLst/>
-          </a:prstGeom>
-          <a:noFill/>
-        </p:spPr>
-        <p:txBody>
-          <a:bodyPr wrap="square" anchor="t">
-            <a:spAutoFit/>
-          </a:bodyPr>
-          <a:lstStyle/>
-          <a:p>
-            <a:pPr algn="l">
-              <a:lnSpc>
-                <a:spcPct val="115000"/>
-              </a:lnSpc>
-            </a:pPr>
-            <a:r>
-              <a:rPr sz="1050" b="0" i="0">
-                <a:solidFill>
-                  <a:srgbClr val="AAAAAA"/>
-                </a:solidFill>
-                <a:latin typeface="Calibri"/>
-              </a:rPr>
-              <a:t>Part 4 — Results</a:t>
-            </a:r>
-          </a:p>
-        </p:txBody>
-      </p:sp>
-    </p:spTree>
-  </p:cSld>
-  <p:clrMapOvr>
-    <a:masterClrMapping/>
-  </p:clrMapOvr>
-</p:sld>
-</file>
-
-<file path=ppt/slides/slide18.xml><?xml version="1.0" encoding="utf-8"?>
-<p:sld xmlns:a="http://schemas.openxmlformats.org/drawingml/2006/main" xmlns:p="http://schemas.openxmlformats.org/presentationml/2006/main" xmlns:r="http://schemas.openxmlformats.org/officeDocument/2006/relationships">
-  <p:cSld>
-    <p:bg>
-      <p:bgPr>
-        <a:solidFill>
-          <a:srgbClr val="FFFFFF"/>
-        </a:solidFill>
-        <a:effectLst/>
-      </p:bgPr>
-    </p:bg>
-    <p:spTree>
-      <p:nvGrpSpPr>
-        <p:cNvPr id="1" name=""/>
-        <p:cNvGrpSpPr/>
-        <p:nvPr/>
-      </p:nvGrpSpPr>
-      <p:grpSpPr/>
-      <p:sp>
-        <p:nvSpPr>
-          <p:cNvPr id="2" name="TextBox 1"/>
-          <p:cNvSpPr txBox="1"/>
-          <p:nvPr/>
-        </p:nvSpPr>
-        <p:spPr>
-          <a:xfrm>
-            <a:off x="502920" y="384048"/>
-            <a:ext cx="11155680" cy="822960"/>
-          </a:xfrm>
-          <a:prstGeom prst="rect">
-            <a:avLst/>
-          </a:prstGeom>
-          <a:noFill/>
-        </p:spPr>
-        <p:txBody>
-          <a:bodyPr wrap="square" anchor="t">
-            <a:spAutoFit/>
-          </a:bodyPr>
-          <a:lstStyle/>
-          <a:p>
-            <a:pPr algn="l">
-              <a:lnSpc>
-                <a:spcPct val="115000"/>
-              </a:lnSpc>
-            </a:pPr>
-            <a:r>
-              <a:rPr sz="3200" b="1" i="0">
-                <a:solidFill>
-                  <a:srgbClr val="1A1A2E"/>
-                </a:solidFill>
-                <a:latin typeface="Calibri"/>
-              </a:rPr>
-              <a:t>The map wasn't free</a:t>
-            </a:r>
-          </a:p>
-        </p:txBody>
-      </p:sp>
-      <p:sp>
-        <p:nvSpPr>
-          <p:cNvPr id="3" name="Rectangle 2"/>
-          <p:cNvSpPr/>
-          <p:nvPr/>
-        </p:nvSpPr>
-        <p:spPr>
-          <a:xfrm>
-            <a:off x="502920" y="1170432"/>
-            <a:ext cx="2011680" cy="50800"/>
-          </a:xfrm>
-          <a:prstGeom prst="rect">
-            <a:avLst/>
-          </a:prstGeom>
-          <a:solidFill>
-            <a:srgbClr val="D97706"/>
-          </a:solidFill>
-          <a:ln>
-            <a:noFill/>
-          </a:ln>
-          <a:effectLst/>
-        </p:spPr>
-        <p:style>
-          <a:lnRef idx="1">
-            <a:schemeClr val="accent1"/>
-          </a:lnRef>
-          <a:fillRef idx="3">
-            <a:schemeClr val="accent1"/>
-          </a:fillRef>
-          <a:effectRef idx="2">
-            <a:schemeClr val="accent1"/>
-          </a:effectRef>
-          <a:fontRef idx="minor">
-            <a:schemeClr val="lt1"/>
-          </a:fontRef>
-        </p:style>
-        <p:txBody>
-          <a:bodyPr rtlCol="0" anchor="ctr"/>
-          <a:lstStyle/>
-          <a:p>
-            <a:pPr algn="ctr"/>
-          </a:p>
-        </p:txBody>
-      </p:sp>
-      <p:pic>
-        <p:nvPicPr>
-          <p:cNvPr id="4" name="Picture 3" descr="chart_cost.png"/>
-          <p:cNvPicPr>
-            <a:picLocks noChangeAspect="1"/>
-          </p:cNvPicPr>
-          <p:nvPr/>
-        </p:nvPicPr>
-        <p:blipFill>
-          <a:blip r:embed="rId2"/>
-          <a:stretch>
-            <a:fillRect/>
-          </a:stretch>
-        </p:blipFill>
-        <p:spPr>
-          <a:xfrm>
-            <a:off x="1627595" y="1600200"/>
-            <a:ext cx="8906330" cy="4206240"/>
-          </a:xfrm>
-          <a:prstGeom prst="rect">
-            <a:avLst/>
-          </a:prstGeom>
-        </p:spPr>
-      </p:pic>
-      <p:sp>
-        <p:nvSpPr>
-          <p:cNvPr id="5" name="TextBox 4"/>
-          <p:cNvSpPr txBox="1"/>
-          <p:nvPr/>
-        </p:nvSpPr>
-        <p:spPr>
-          <a:xfrm>
-            <a:off x="822960" y="5943600"/>
-            <a:ext cx="10515600" cy="640080"/>
-          </a:xfrm>
-          <a:prstGeom prst="rect">
-            <a:avLst/>
-          </a:prstGeom>
-          <a:noFill/>
-        </p:spPr>
-        <p:txBody>
-          <a:bodyPr wrap="square" anchor="t">
-            <a:spAutoFit/>
-          </a:bodyPr>
-          <a:lstStyle/>
-          <a:p>
-            <a:pPr algn="ctr">
-              <a:lnSpc>
-                <a:spcPct val="115000"/>
-              </a:lnSpc>
-            </a:pPr>
-            <a:r>
-              <a:rPr sz="1550" b="0" i="1">
-                <a:solidFill>
-                  <a:srgbClr val="666666"/>
-                </a:solidFill>
-                <a:latin typeface="Calibri"/>
-              </a:rPr>
-              <a:t>Same number of steps, but the AI had to “read” about 70% more material per question when the map was available.</a:t>
-            </a:r>
-          </a:p>
-        </p:txBody>
-      </p:sp>
-      <p:sp>
-        <p:nvSpPr>
-          <p:cNvPr id="6" name="TextBox 5"/>
-          <p:cNvSpPr txBox="1"/>
-          <p:nvPr/>
-        </p:nvSpPr>
-        <p:spPr>
-          <a:xfrm>
-            <a:off x="502920" y="6473952"/>
-            <a:ext cx="8229600" cy="320040"/>
-          </a:xfrm>
-          <a:prstGeom prst="rect">
-            <a:avLst/>
-          </a:prstGeom>
-          <a:noFill/>
-        </p:spPr>
-        <p:txBody>
-          <a:bodyPr wrap="square" anchor="t">
-            <a:spAutoFit/>
-          </a:bodyPr>
-          <a:lstStyle/>
-          <a:p>
-            <a:pPr algn="l">
-              <a:lnSpc>
-                <a:spcPct val="115000"/>
-              </a:lnSpc>
-            </a:pPr>
-            <a:r>
-              <a:rPr sz="1050" b="0" i="0">
-                <a:solidFill>
-                  <a:srgbClr val="AAAAAA"/>
-                </a:solidFill>
-                <a:latin typeface="Calibri"/>
-              </a:rPr>
-              <a:t>Part 4 — Results</a:t>
-            </a:r>
-          </a:p>
-        </p:txBody>
-      </p:sp>
-    </p:spTree>
-  </p:cSld>
-  <p:clrMapOvr>
-    <a:masterClrMapping/>
-  </p:clrMapOvr>
-</p:sld>
-</file>
-
-<file path=ppt/slides/slide19.xml><?xml version="1.0" encoding="utf-8"?>
-<p:sld xmlns:a="http://schemas.openxmlformats.org/drawingml/2006/main" xmlns:p="http://schemas.openxmlformats.org/presentationml/2006/main" xmlns:r="http://schemas.openxmlformats.org/officeDocument/2006/relationships">
-  <p:cSld>
-    <p:bg>
-      <p:bgPr>
-        <a:solidFill>
-          <a:srgbClr val="1A1A2E"/>
-        </a:solidFill>
-        <a:effectLst/>
-      </p:bgPr>
-    </p:bg>
-    <p:spTree>
-      <p:nvGrpSpPr>
-        <p:cNvPr id="1" name=""/>
-        <p:cNvGrpSpPr/>
-        <p:nvPr/>
-      </p:nvGrpSpPr>
-      <p:grpSpPr/>
-      <p:sp>
-        <p:nvSpPr>
-          <p:cNvPr id="2" name="TextBox 1"/>
-          <p:cNvSpPr txBox="1"/>
-          <p:nvPr/>
-        </p:nvSpPr>
-        <p:spPr>
-          <a:xfrm>
-            <a:off x="914400" y="2194560"/>
-            <a:ext cx="1828800" cy="1280160"/>
-          </a:xfrm>
-          <a:prstGeom prst="rect">
-            <a:avLst/>
-          </a:prstGeom>
-          <a:noFill/>
-        </p:spPr>
-        <p:txBody>
-          <a:bodyPr wrap="square" anchor="t">
-            <a:spAutoFit/>
-          </a:bodyPr>
-          <a:lstStyle/>
-          <a:p>
-            <a:pPr algn="l">
-              <a:lnSpc>
-                <a:spcPct val="115000"/>
-              </a:lnSpc>
-            </a:pPr>
-            <a:r>
-              <a:rPr sz="9000" b="1" i="0">
-                <a:solidFill>
-                  <a:srgbClr val="2CA02C"/>
-                </a:solidFill>
-                <a:latin typeface="Calibri"/>
-              </a:rPr>
-              <a:t>5</a:t>
-            </a:r>
-          </a:p>
-        </p:txBody>
-      </p:sp>
-      <p:sp>
-        <p:nvSpPr>
-          <p:cNvPr id="3" name="TextBox 2"/>
-          <p:cNvSpPr txBox="1"/>
-          <p:nvPr/>
-        </p:nvSpPr>
-        <p:spPr>
-          <a:xfrm>
-            <a:off x="3017520" y="2514600"/>
-            <a:ext cx="8229600" cy="914400"/>
-          </a:xfrm>
-          <a:prstGeom prst="rect">
-            <a:avLst/>
-          </a:prstGeom>
-          <a:noFill/>
-        </p:spPr>
-        <p:txBody>
-          <a:bodyPr wrap="square" anchor="t">
-            <a:spAutoFit/>
-          </a:bodyPr>
-          <a:lstStyle/>
-          <a:p>
-            <a:pPr algn="l">
-              <a:lnSpc>
-                <a:spcPct val="115000"/>
-              </a:lnSpc>
-            </a:pPr>
-            <a:r>
-              <a:rPr sz="3400" b="1" i="0">
-                <a:solidFill>
-                  <a:srgbClr val="FFFFFF"/>
-                </a:solidFill>
-                <a:latin typeface="Calibri"/>
-              </a:rPr>
-              <a:t>Why</a:t>
-            </a:r>
-          </a:p>
-        </p:txBody>
-      </p:sp>
-      <p:sp>
-        <p:nvSpPr>
-          <p:cNvPr id="4" name="TextBox 3"/>
-          <p:cNvSpPr txBox="1"/>
-          <p:nvPr/>
-        </p:nvSpPr>
-        <p:spPr>
-          <a:xfrm>
-            <a:off x="3017520" y="3429000"/>
-            <a:ext cx="8229600" cy="914400"/>
-          </a:xfrm>
-          <a:prstGeom prst="rect">
-            <a:avLst/>
-          </a:prstGeom>
-          <a:noFill/>
-        </p:spPr>
-        <p:txBody>
-          <a:bodyPr wrap="square" anchor="t">
-            <a:spAutoFit/>
-          </a:bodyPr>
-          <a:lstStyle/>
-          <a:p>
-            <a:pPr algn="l">
-              <a:lnSpc>
-                <a:spcPct val="115000"/>
-              </a:lnSpc>
-            </a:pPr>
-            <a:r>
-              <a:rPr sz="1700" b="0" i="1">
-                <a:solidFill>
-                  <a:srgbClr val="94A3B8"/>
-                </a:solidFill>
-                <a:latin typeface="Calibri"/>
-              </a:rPr>
-              <a:t>Why the results look this way</a:t>
-            </a:r>
-          </a:p>
-        </p:txBody>
-      </p:sp>
-    </p:spTree>
-  </p:cSld>
-  <p:clrMapOvr>
-    <a:masterClrMapping/>
-  </p:clrMapOvr>
-</p:sld>
-</file>
-
-<file path=ppt/slides/slide2.xml><?xml version="1.0" encoding="utf-8"?>
-<p:sld xmlns:a="http://schemas.openxmlformats.org/drawingml/2006/main" xmlns:p="http://schemas.openxmlformats.org/presentationml/2006/main" xmlns:r="http://schemas.openxmlformats.org/officeDocument/2006/relationships">
-  <p:cSld>
-    <p:bg>
-      <p:bgPr>
-        <a:solidFill>
-          <a:srgbClr val="1A1A2E"/>
-        </a:solidFill>
-        <a:effectLst/>
-      </p:bgPr>
-    </p:bg>
-    <p:spTree>
-      <p:nvGrpSpPr>
-        <p:cNvPr id="1" name=""/>
-        <p:cNvGrpSpPr/>
-        <p:nvPr/>
-      </p:nvGrpSpPr>
-      <p:grpSpPr/>
-      <p:sp>
-        <p:nvSpPr>
-          <p:cNvPr id="2" name="TextBox 1"/>
-          <p:cNvSpPr txBox="1"/>
-          <p:nvPr/>
-        </p:nvSpPr>
-        <p:spPr>
-          <a:xfrm>
-            <a:off x="914400" y="2194560"/>
-            <a:ext cx="1828800" cy="1280160"/>
-          </a:xfrm>
-          <a:prstGeom prst="rect">
-            <a:avLst/>
-          </a:prstGeom>
-          <a:noFill/>
-        </p:spPr>
-        <p:txBody>
-          <a:bodyPr wrap="square" anchor="t">
-            <a:spAutoFit/>
-          </a:bodyPr>
-          <a:lstStyle/>
-          <a:p>
-            <a:pPr algn="l">
-              <a:lnSpc>
-                <a:spcPct val="115000"/>
-              </a:lnSpc>
-            </a:pPr>
-            <a:r>
-              <a:rPr sz="9000" b="1" i="0">
-                <a:solidFill>
-                  <a:srgbClr val="2CA02C"/>
-                </a:solidFill>
-                <a:latin typeface="Calibri"/>
-              </a:rPr>
-              <a:t>1</a:t>
-            </a:r>
-          </a:p>
-        </p:txBody>
-      </p:sp>
-      <p:sp>
-        <p:nvSpPr>
-          <p:cNvPr id="3" name="TextBox 2"/>
-          <p:cNvSpPr txBox="1"/>
-          <p:nvPr/>
-        </p:nvSpPr>
-        <p:spPr>
-          <a:xfrm>
-            <a:off x="3017520" y="2514600"/>
-            <a:ext cx="8229600" cy="914400"/>
-          </a:xfrm>
-          <a:prstGeom prst="rect">
-            <a:avLst/>
-          </a:prstGeom>
-          <a:noFill/>
-        </p:spPr>
-        <p:txBody>
-          <a:bodyPr wrap="square" anchor="t">
-            <a:spAutoFit/>
-          </a:bodyPr>
-          <a:lstStyle/>
-          <a:p>
-            <a:pPr algn="l">
-              <a:lnSpc>
-                <a:spcPct val="115000"/>
-              </a:lnSpc>
-            </a:pPr>
-            <a:r>
-              <a:rPr sz="3400" b="1" i="0">
-                <a:solidFill>
-                  <a:srgbClr val="FFFFFF"/>
-                </a:solidFill>
-                <a:latin typeface="Calibri"/>
-              </a:rPr>
-              <a:t>The Idea</a:t>
-            </a:r>
-          </a:p>
-        </p:txBody>
-      </p:sp>
-      <p:sp>
-        <p:nvSpPr>
-          <p:cNvPr id="4" name="TextBox 3"/>
-          <p:cNvSpPr txBox="1"/>
-          <p:nvPr/>
-        </p:nvSpPr>
-        <p:spPr>
-          <a:xfrm>
-            <a:off x="3017520" y="3429000"/>
-            <a:ext cx="8229600" cy="914400"/>
-          </a:xfrm>
-          <a:prstGeom prst="rect">
-            <a:avLst/>
-          </a:prstGeom>
-          <a:noFill/>
-        </p:spPr>
-        <p:txBody>
-          <a:bodyPr wrap="square" anchor="t">
-            <a:spAutoFit/>
-          </a:bodyPr>
-          <a:lstStyle/>
-          <a:p>
-            <a:pPr algn="l">
-              <a:lnSpc>
-                <a:spcPct val="115000"/>
-              </a:lnSpc>
-            </a:pPr>
-            <a:r>
-              <a:rPr sz="1700" b="0" i="1">
-                <a:solidFill>
-                  <a:srgbClr val="94A3B8"/>
-                </a:solidFill>
-                <a:latin typeface="Calibri"/>
-              </a:rPr>
-              <a:t>What problem were we trying to solve?</a:t>
-            </a:r>
-          </a:p>
-        </p:txBody>
-      </p:sp>
-    </p:spTree>
-  </p:cSld>
-  <p:clrMapOvr>
-    <a:masterClrMapping/>
-  </p:clrMapOvr>
-</p:sld>
-</file>
-
-<file path=ppt/slides/slide20.xml><?xml version="1.0" encoding="utf-8"?>
-<p:sld xmlns:a="http://schemas.openxmlformats.org/drawingml/2006/main" xmlns:p="http://schemas.openxmlformats.org/presentationml/2006/main" xmlns:r="http://schemas.openxmlformats.org/officeDocument/2006/relationships">
-  <p:cSld>
-    <p:bg>
-      <p:bgPr>
-        <a:solidFill>
-          <a:srgbClr val="FFFFFF"/>
-        </a:solidFill>
-        <a:effectLst/>
-      </p:bgPr>
-    </p:bg>
-    <p:spTree>
-      <p:nvGrpSpPr>
-        <p:cNvPr id="1" name=""/>
-        <p:cNvGrpSpPr/>
-        <p:nvPr/>
-      </p:nvGrpSpPr>
-      <p:grpSpPr/>
-      <p:sp>
-        <p:nvSpPr>
-          <p:cNvPr id="2" name="TextBox 1"/>
-          <p:cNvSpPr txBox="1"/>
-          <p:nvPr/>
-        </p:nvSpPr>
-        <p:spPr>
-          <a:xfrm>
-            <a:off x="502920" y="384048"/>
-            <a:ext cx="11155680" cy="822960"/>
-          </a:xfrm>
-          <a:prstGeom prst="rect">
-            <a:avLst/>
-          </a:prstGeom>
-          <a:noFill/>
-        </p:spPr>
-        <p:txBody>
-          <a:bodyPr wrap="square" anchor="t">
-            <a:spAutoFit/>
-          </a:bodyPr>
-          <a:lstStyle/>
-          <a:p>
-            <a:pPr algn="l">
-              <a:lnSpc>
-                <a:spcPct val="115000"/>
-              </a:lnSpc>
-            </a:pPr>
-            <a:r>
-              <a:rPr sz="3200" b="1" i="0">
-                <a:solidFill>
-                  <a:srgbClr val="1A1A2E"/>
-                </a:solidFill>
-                <a:latin typeface="Calibri"/>
-              </a:rPr>
-              <a:t>Why didn't it help more? Reason #1</a:t>
-            </a:r>
-          </a:p>
-        </p:txBody>
-      </p:sp>
-      <p:sp>
-        <p:nvSpPr>
-          <p:cNvPr id="3" name="Rectangle 2"/>
-          <p:cNvSpPr/>
-          <p:nvPr/>
-        </p:nvSpPr>
-        <p:spPr>
-          <a:xfrm>
-            <a:off x="502920" y="1170432"/>
-            <a:ext cx="2011680" cy="50800"/>
-          </a:xfrm>
-          <a:prstGeom prst="rect">
-            <a:avLst/>
-          </a:prstGeom>
-          <a:solidFill>
-            <a:srgbClr val="2563EB"/>
-          </a:solidFill>
-          <a:ln>
-            <a:noFill/>
-          </a:ln>
-          <a:effectLst/>
-        </p:spPr>
-        <p:style>
-          <a:lnRef idx="1">
-            <a:schemeClr val="accent1"/>
-          </a:lnRef>
-          <a:fillRef idx="3">
-            <a:schemeClr val="accent1"/>
-          </a:fillRef>
-          <a:effectRef idx="2">
-            <a:schemeClr val="accent1"/>
-          </a:effectRef>
-          <a:fontRef idx="minor">
-            <a:schemeClr val="lt1"/>
-          </a:fontRef>
-        </p:style>
-        <p:txBody>
-          <a:bodyPr rtlCol="0" anchor="ctr"/>
-          <a:lstStyle/>
-          <a:p>
-            <a:pPr algn="ctr"/>
-          </a:p>
-        </p:txBody>
-      </p:sp>
-      <p:sp>
-        <p:nvSpPr>
-          <p:cNvPr id="4" name="TextBox 3"/>
-          <p:cNvSpPr txBox="1"/>
-          <p:nvPr/>
-        </p:nvSpPr>
-        <p:spPr>
-          <a:xfrm>
-            <a:off x="640080" y="1737360"/>
-            <a:ext cx="10789920" cy="548640"/>
-          </a:xfrm>
-          <a:prstGeom prst="rect">
-            <a:avLst/>
-          </a:prstGeom>
-          <a:noFill/>
-        </p:spPr>
-        <p:txBody>
-          <a:bodyPr wrap="square" anchor="t">
-            <a:spAutoFit/>
-          </a:bodyPr>
-          <a:lstStyle/>
-          <a:p>
-            <a:pPr algn="l">
-              <a:lnSpc>
-                <a:spcPct val="115000"/>
-              </a:lnSpc>
-            </a:pPr>
-            <a:r>
-              <a:rPr sz="2100" b="1" i="0">
-                <a:solidFill>
-                  <a:srgbClr val="2563EB"/>
-                </a:solidFill>
-                <a:latin typeface="Calibri"/>
-              </a:rPr>
-              <a:t>Sometimes, the referee itself got it wrong.</a:t>
-            </a:r>
-          </a:p>
-        </p:txBody>
-      </p:sp>
-      <p:sp>
-        <p:nvSpPr>
-          <p:cNvPr id="5" name="TextBox 4"/>
-          <p:cNvSpPr txBox="1"/>
-          <p:nvPr/>
-        </p:nvSpPr>
-        <p:spPr>
-          <a:xfrm>
-            <a:off x="640080" y="2468880"/>
-            <a:ext cx="10789920" cy="3291840"/>
-          </a:xfrm>
-          <a:prstGeom prst="rect">
-            <a:avLst/>
-          </a:prstGeom>
-          <a:noFill/>
-        </p:spPr>
-        <p:txBody>
-          <a:bodyPr wrap="square" anchor="t">
-            <a:spAutoFit/>
-          </a:bodyPr>
-          <a:lstStyle/>
-          <a:p>
-            <a:pPr algn="l">
-              <a:lnSpc>
-                <a:spcPct val="115000"/>
-              </a:lnSpc>
-            </a:pPr>
-            <a:r>
-              <a:rPr sz="1800" b="0" i="0">
-                <a:solidFill>
-                  <a:srgbClr val="333333"/>
-                </a:solidFill>
-                <a:latin typeface="Calibri"/>
-              </a:rPr>
-              <a:t>We double-checked one “loss” by hand: the map-assisted answer said a certain piece of memory was “shared per-thread” — and the AI judge marked this wrong.</a:t>
-            </a:r>
-          </a:p>
-          <a:p>
-            <a:pPr algn="l">
-              <a:lnSpc>
-                <a:spcPct val="115000"/>
-              </a:lnSpc>
-            </a:pPr>
-          </a:p>
-          <a:p>
-            <a:pPr algn="l">
-              <a:lnSpc>
-                <a:spcPct val="115000"/>
-              </a:lnSpc>
-            </a:pPr>
-            <a:r>
-              <a:rPr sz="1800" b="0" i="0">
-                <a:solidFill>
-                  <a:srgbClr val="333333"/>
-                </a:solidFill>
-                <a:latin typeface="Calibri"/>
-              </a:rPr>
-              <a:t>We went and read the actual source code ourselves. The map-assisted answer was correct. The judge made the mistake, not the AI being tested.</a:t>
-            </a:r>
-          </a:p>
-          <a:p>
-            <a:pPr algn="l">
-              <a:lnSpc>
-                <a:spcPct val="115000"/>
-              </a:lnSpc>
-            </a:pPr>
-          </a:p>
-          <a:p>
-            <a:pPr algn="l">
-              <a:lnSpc>
-                <a:spcPct val="115000"/>
-              </a:lnSpc>
-            </a:pPr>
-            <a:r>
-              <a:rPr sz="1800" b="0" i="0">
-                <a:solidFill>
-                  <a:srgbClr val="333333"/>
-                </a:solidFill>
-                <a:latin typeface="Calibri"/>
-              </a:rPr>
-              <a:t>This tells us the true gap between the two modes is probably even smaller than our headline number suggests — some of the “losses” aren't real losses.</a:t>
-            </a:r>
-          </a:p>
-        </p:txBody>
-      </p:sp>
-      <p:sp>
-        <p:nvSpPr>
-          <p:cNvPr id="6" name="TextBox 5"/>
-          <p:cNvSpPr txBox="1"/>
-          <p:nvPr/>
-        </p:nvSpPr>
-        <p:spPr>
-          <a:xfrm>
-            <a:off x="502920" y="6473952"/>
-            <a:ext cx="8229600" cy="320040"/>
-          </a:xfrm>
-          <a:prstGeom prst="rect">
-            <a:avLst/>
-          </a:prstGeom>
-          <a:noFill/>
-        </p:spPr>
-        <p:txBody>
-          <a:bodyPr wrap="square" anchor="t">
-            <a:spAutoFit/>
-          </a:bodyPr>
-          <a:lstStyle/>
-          <a:p>
-            <a:pPr algn="l">
-              <a:lnSpc>
-                <a:spcPct val="115000"/>
-              </a:lnSpc>
-            </a:pPr>
-            <a:r>
-              <a:rPr sz="1050" b="0" i="0">
-                <a:solidFill>
-                  <a:srgbClr val="AAAAAA"/>
-                </a:solidFill>
-                <a:latin typeface="Calibri"/>
-              </a:rPr>
-              <a:t>Part 5 — Why the Results Look This Way</a:t>
-            </a:r>
-          </a:p>
-        </p:txBody>
-      </p:sp>
-    </p:spTree>
-  </p:cSld>
-  <p:clrMapOvr>
-    <a:masterClrMapping/>
-  </p:clrMapOvr>
-</p:sld>
-</file>
-
-<file path=ppt/slides/slide21.xml><?xml version="1.0" encoding="utf-8"?>
-<p:sld xmlns:a="http://schemas.openxmlformats.org/drawingml/2006/main" xmlns:p="http://schemas.openxmlformats.org/presentationml/2006/main" xmlns:r="http://schemas.openxmlformats.org/officeDocument/2006/relationships">
-  <p:cSld>
-    <p:bg>
-      <p:bgPr>
-        <a:solidFill>
-          <a:srgbClr val="FFFFFF"/>
-        </a:solidFill>
-        <a:effectLst/>
-      </p:bgPr>
-    </p:bg>
-    <p:spTree>
-      <p:nvGrpSpPr>
-        <p:cNvPr id="1" name=""/>
-        <p:cNvGrpSpPr/>
-        <p:nvPr/>
-      </p:nvGrpSpPr>
-      <p:grpSpPr/>
-      <p:sp>
-        <p:nvSpPr>
-          <p:cNvPr id="2" name="TextBox 1"/>
-          <p:cNvSpPr txBox="1"/>
-          <p:nvPr/>
-        </p:nvSpPr>
-        <p:spPr>
-          <a:xfrm>
-            <a:off x="502920" y="384048"/>
-            <a:ext cx="11155680" cy="822960"/>
-          </a:xfrm>
-          <a:prstGeom prst="rect">
-            <a:avLst/>
-          </a:prstGeom>
-          <a:noFill/>
-        </p:spPr>
-        <p:txBody>
-          <a:bodyPr wrap="square" anchor="t">
-            <a:spAutoFit/>
-          </a:bodyPr>
-          <a:lstStyle/>
-          <a:p>
-            <a:pPr algn="l">
-              <a:lnSpc>
-                <a:spcPct val="115000"/>
-              </a:lnSpc>
-            </a:pPr>
-            <a:r>
-              <a:rPr sz="3200" b="1" i="0">
-                <a:solidFill>
-                  <a:srgbClr val="1A1A2E"/>
-                </a:solidFill>
-                <a:latin typeface="Calibri"/>
-              </a:rPr>
-              <a:t>Why didn't it help more? Reason #2</a:t>
-            </a:r>
-          </a:p>
-        </p:txBody>
-      </p:sp>
-      <p:sp>
-        <p:nvSpPr>
-          <p:cNvPr id="3" name="Rectangle 2"/>
-          <p:cNvSpPr/>
-          <p:nvPr/>
-        </p:nvSpPr>
-        <p:spPr>
-          <a:xfrm>
-            <a:off x="502920" y="1170432"/>
-            <a:ext cx="2011680" cy="50800"/>
-          </a:xfrm>
-          <a:prstGeom prst="rect">
-            <a:avLst/>
-          </a:prstGeom>
-          <a:solidFill>
-            <a:srgbClr val="D97706"/>
-          </a:solidFill>
-          <a:ln>
-            <a:noFill/>
-          </a:ln>
-          <a:effectLst/>
-        </p:spPr>
-        <p:style>
-          <a:lnRef idx="1">
-            <a:schemeClr val="accent1"/>
-          </a:lnRef>
-          <a:fillRef idx="3">
-            <a:schemeClr val="accent1"/>
-          </a:fillRef>
-          <a:effectRef idx="2">
-            <a:schemeClr val="accent1"/>
-          </a:effectRef>
-          <a:fontRef idx="minor">
-            <a:schemeClr val="lt1"/>
-          </a:fontRef>
-        </p:style>
-        <p:txBody>
-          <a:bodyPr rtlCol="0" anchor="ctr"/>
-          <a:lstStyle/>
-          <a:p>
-            <a:pPr algn="ctr"/>
-          </a:p>
-        </p:txBody>
-      </p:sp>
-      <p:pic>
-        <p:nvPicPr>
-          <p:cNvPr id="4" name="Picture 3" descr="chart_recall_gap.png"/>
-          <p:cNvPicPr>
-            <a:picLocks noChangeAspect="1"/>
-          </p:cNvPicPr>
-          <p:nvPr/>
-        </p:nvPicPr>
-        <p:blipFill>
-          <a:blip r:embed="rId2"/>
-          <a:stretch>
-            <a:fillRect/>
-          </a:stretch>
-        </p:blipFill>
-        <p:spPr>
-          <a:xfrm>
-            <a:off x="548640" y="1859877"/>
-            <a:ext cx="6766560" cy="3961206"/>
-          </a:xfrm>
-          <a:prstGeom prst="rect">
-            <a:avLst/>
-          </a:prstGeom>
-        </p:spPr>
-      </p:pic>
-      <p:sp>
-        <p:nvSpPr>
-          <p:cNvPr id="5" name="TextBox 4"/>
-          <p:cNvSpPr txBox="1"/>
-          <p:nvPr/>
-        </p:nvSpPr>
-        <p:spPr>
-          <a:xfrm>
-            <a:off x="7589520" y="1920240"/>
-            <a:ext cx="4114800" cy="914400"/>
-          </a:xfrm>
-          <a:prstGeom prst="rect">
-            <a:avLst/>
-          </a:prstGeom>
-          <a:noFill/>
-        </p:spPr>
-        <p:txBody>
-          <a:bodyPr wrap="square" anchor="t">
-            <a:spAutoFit/>
-          </a:bodyPr>
-          <a:lstStyle/>
-          <a:p>
-            <a:pPr algn="l">
-              <a:lnSpc>
-                <a:spcPct val="115000"/>
-              </a:lnSpc>
-            </a:pPr>
-            <a:r>
-              <a:rPr sz="2300" b="1" i="0">
-                <a:solidFill>
-                  <a:srgbClr val="D97706"/>
-                </a:solidFill>
-                <a:latin typeface="Calibri"/>
-              </a:rPr>
-              <a:t>Trusting the map</a:t>
-            </a:r>
-          </a:p>
-          <a:p>
-            <a:pPr algn="l">
-              <a:lnSpc>
-                <a:spcPct val="115000"/>
-              </a:lnSpc>
-            </a:pPr>
-            <a:r>
-              <a:rPr sz="2300" b="1" i="0">
-                <a:solidFill>
-                  <a:srgbClr val="D97706"/>
-                </a:solidFill>
-                <a:latin typeface="Calibri"/>
-              </a:rPr>
-              <a:t>too much.</a:t>
-            </a:r>
-          </a:p>
-        </p:txBody>
-      </p:sp>
-      <p:sp>
-        <p:nvSpPr>
-          <p:cNvPr id="6" name="TextBox 5"/>
-          <p:cNvSpPr txBox="1"/>
-          <p:nvPr/>
-        </p:nvSpPr>
-        <p:spPr>
-          <a:xfrm>
-            <a:off x="7589520" y="2926080"/>
-            <a:ext cx="4114800" cy="3291840"/>
-          </a:xfrm>
-          <a:prstGeom prst="rect">
-            <a:avLst/>
-          </a:prstGeom>
-          <a:noFill/>
-        </p:spPr>
-        <p:txBody>
-          <a:bodyPr wrap="square" anchor="t">
-            <a:spAutoFit/>
-          </a:bodyPr>
-          <a:lstStyle/>
-          <a:p>
-            <a:pPr algn="l">
-              <a:lnSpc>
-                <a:spcPct val="115000"/>
-              </a:lnSpc>
-            </a:pPr>
-            <a:r>
-              <a:rPr sz="1550" b="0" i="0">
-                <a:solidFill>
-                  <a:srgbClr val="333333"/>
-                </a:solidFill>
-                <a:latin typeface="Calibri"/>
-              </a:rPr>
-              <a:t>The map is honest about gaps in itself — it even flags things it couldn't fully resolve.</a:t>
-            </a:r>
-          </a:p>
-          <a:p>
-            <a:pPr algn="l">
-              <a:lnSpc>
-                <a:spcPct val="115000"/>
-              </a:lnSpc>
-            </a:pPr>
-          </a:p>
-          <a:p>
-            <a:pPr algn="l">
-              <a:lnSpc>
-                <a:spcPct val="115000"/>
-              </a:lnSpc>
-            </a:pPr>
-            <a:r>
-              <a:rPr sz="1550" b="0" i="0">
-                <a:solidFill>
-                  <a:srgbClr val="333333"/>
-                </a:solidFill>
-                <a:latin typeface="Calibri"/>
-              </a:rPr>
-              <a:t>But when the AI trusted the map's answer as “complete” instead of double-checking, it sometimes missed real connections that a plain text search would have caught.</a:t>
-            </a:r>
-          </a:p>
-        </p:txBody>
-      </p:sp>
-      <p:sp>
-        <p:nvSpPr>
-          <p:cNvPr id="7" name="TextBox 6"/>
-          <p:cNvSpPr txBox="1"/>
-          <p:nvPr/>
-        </p:nvSpPr>
-        <p:spPr>
-          <a:xfrm>
-            <a:off x="502920" y="6473952"/>
-            <a:ext cx="8229600" cy="320040"/>
-          </a:xfrm>
-          <a:prstGeom prst="rect">
-            <a:avLst/>
-          </a:prstGeom>
-          <a:noFill/>
-        </p:spPr>
-        <p:txBody>
-          <a:bodyPr wrap="square" anchor="t">
-            <a:spAutoFit/>
-          </a:bodyPr>
-          <a:lstStyle/>
-          <a:p>
-            <a:pPr algn="l">
-              <a:lnSpc>
-                <a:spcPct val="115000"/>
-              </a:lnSpc>
-            </a:pPr>
-            <a:r>
-              <a:rPr sz="1050" b="0" i="0">
-                <a:solidFill>
-                  <a:srgbClr val="AAAAAA"/>
-                </a:solidFill>
-                <a:latin typeface="Calibri"/>
-              </a:rPr>
-              <a:t>Part 5 — Why the Results Look This Way</a:t>
-            </a:r>
-          </a:p>
-        </p:txBody>
-      </p:sp>
-    </p:spTree>
-  </p:cSld>
-  <p:clrMapOvr>
-    <a:masterClrMapping/>
-  </p:clrMapOvr>
-</p:sld>
-</file>
-
-<file path=ppt/slides/slide22.xml><?xml version="1.0" encoding="utf-8"?>
-<p:sld xmlns:a="http://schemas.openxmlformats.org/drawingml/2006/main" xmlns:p="http://schemas.openxmlformats.org/presentationml/2006/main" xmlns:r="http://schemas.openxmlformats.org/officeDocument/2006/relationships">
-  <p:cSld>
-    <p:bg>
-      <p:bgPr>
-        <a:solidFill>
-          <a:srgbClr val="FFFFFF"/>
-        </a:solidFill>
-        <a:effectLst/>
-      </p:bgPr>
-    </p:bg>
-    <p:spTree>
-      <p:nvGrpSpPr>
-        <p:cNvPr id="1" name=""/>
-        <p:cNvGrpSpPr/>
-        <p:nvPr/>
-      </p:nvGrpSpPr>
-      <p:grpSpPr/>
-      <p:sp>
-        <p:nvSpPr>
-          <p:cNvPr id="2" name="TextBox 1"/>
-          <p:cNvSpPr txBox="1"/>
-          <p:nvPr/>
-        </p:nvSpPr>
-        <p:spPr>
-          <a:xfrm>
-            <a:off x="502920" y="384048"/>
-            <a:ext cx="11155680" cy="822960"/>
-          </a:xfrm>
-          <a:prstGeom prst="rect">
-            <a:avLst/>
-          </a:prstGeom>
-          <a:noFill/>
-        </p:spPr>
-        <p:txBody>
-          <a:bodyPr wrap="square" anchor="t">
-            <a:spAutoFit/>
-          </a:bodyPr>
-          <a:lstStyle/>
-          <a:p>
-            <a:pPr algn="l">
-              <a:lnSpc>
-                <a:spcPct val="115000"/>
-              </a:lnSpc>
-            </a:pPr>
-            <a:r>
-              <a:rPr sz="3200" b="1" i="0">
-                <a:solidFill>
-                  <a:srgbClr val="1A1A2E"/>
-                </a:solidFill>
-                <a:latin typeface="Calibri"/>
-              </a:rPr>
-              <a:t>Bottom line, in one sentence</a:t>
-            </a:r>
-          </a:p>
-        </p:txBody>
-      </p:sp>
-      <p:sp>
-        <p:nvSpPr>
-          <p:cNvPr id="3" name="Rectangle 2"/>
-          <p:cNvSpPr/>
-          <p:nvPr/>
-        </p:nvSpPr>
-        <p:spPr>
-          <a:xfrm>
-            <a:off x="502920" y="1170432"/>
-            <a:ext cx="2011680" cy="50800"/>
-          </a:xfrm>
-          <a:prstGeom prst="rect">
-            <a:avLst/>
-          </a:prstGeom>
-          <a:solidFill>
-            <a:srgbClr val="2CA02C"/>
-          </a:solidFill>
-          <a:ln>
-            <a:noFill/>
-          </a:ln>
-          <a:effectLst/>
-        </p:spPr>
-        <p:style>
-          <a:lnRef idx="1">
-            <a:schemeClr val="accent1"/>
-          </a:lnRef>
-          <a:fillRef idx="3">
-            <a:schemeClr val="accent1"/>
-          </a:fillRef>
-          <a:effectRef idx="2">
-            <a:schemeClr val="accent1"/>
-          </a:effectRef>
-          <a:fontRef idx="minor">
-            <a:schemeClr val="lt1"/>
-          </a:fontRef>
-        </p:style>
-        <p:txBody>
-          <a:bodyPr rtlCol="0" anchor="ctr"/>
-          <a:lstStyle/>
-          <a:p>
-            <a:pPr algn="ctr"/>
-          </a:p>
-        </p:txBody>
-      </p:sp>
-      <p:sp>
-        <p:nvSpPr>
-          <p:cNvPr id="4" name="Rectangle 3"/>
-          <p:cNvSpPr/>
-          <p:nvPr/>
-        </p:nvSpPr>
-        <p:spPr>
-          <a:xfrm>
-            <a:off x="822960" y="2286000"/>
-            <a:ext cx="10515600" cy="2468880"/>
-          </a:xfrm>
-          <a:prstGeom prst="rect">
-            <a:avLst/>
-          </a:prstGeom>
-          <a:solidFill>
-            <a:srgbClr val="EEF6EE"/>
-          </a:solidFill>
-          <a:ln w="31750">
-            <a:solidFill>
-              <a:srgbClr val="2CA02C"/>
-            </a:solidFill>
-          </a:ln>
-        </p:spPr>
-        <p:style>
-          <a:lnRef idx="1">
-            <a:schemeClr val="accent1"/>
-          </a:lnRef>
-          <a:fillRef idx="3">
-            <a:schemeClr val="accent1"/>
-          </a:fillRef>
-          <a:effectRef idx="2">
-            <a:schemeClr val="accent1"/>
-          </a:effectRef>
-          <a:fontRef idx="minor">
-            <a:schemeClr val="lt1"/>
-          </a:fontRef>
-        </p:style>
-        <p:txBody>
-          <a:bodyPr rtlCol="0" anchor="ctr" wrap="square"/>
-          <a:lstStyle/>
-          <a:p>
-            <a:pPr algn="ctr"/>
-            <a:r>
-              <a:rPr sz="2400" b="1">
-                <a:solidFill>
-                  <a:srgbClr val="1A1A2E"/>
-                </a:solidFill>
-                <a:latin typeface="Calibri"/>
-              </a:rPr>
-              <a:t>Giving today's AI coding agent an extra “code map” tool didn't clearly make it better at understanding code — it used the tool eagerly, but that didn't translate into better answers.</a:t>
-            </a:r>
-          </a:p>
-        </p:txBody>
-      </p:sp>
-      <p:sp>
-        <p:nvSpPr>
-          <p:cNvPr id="5" name="TextBox 4"/>
-          <p:cNvSpPr txBox="1"/>
-          <p:nvPr/>
-        </p:nvSpPr>
-        <p:spPr>
-          <a:xfrm>
-            <a:off x="502920" y="6473952"/>
-            <a:ext cx="8229600" cy="320040"/>
-          </a:xfrm>
-          <a:prstGeom prst="rect">
-            <a:avLst/>
-          </a:prstGeom>
-          <a:noFill/>
-        </p:spPr>
-        <p:txBody>
-          <a:bodyPr wrap="square" anchor="t">
-            <a:spAutoFit/>
-          </a:bodyPr>
-          <a:lstStyle/>
-          <a:p>
-            <a:pPr algn="l">
-              <a:lnSpc>
-                <a:spcPct val="115000"/>
-              </a:lnSpc>
-            </a:pPr>
-            <a:r>
-              <a:rPr sz="1050" b="0" i="0">
-                <a:solidFill>
-                  <a:srgbClr val="AAAAAA"/>
-                </a:solidFill>
-                <a:latin typeface="Calibri"/>
-              </a:rPr>
-              <a:t>Part 5 — Why the Results Look This Way</a:t>
-            </a:r>
-          </a:p>
-        </p:txBody>
-      </p:sp>
-    </p:spTree>
-  </p:cSld>
-  <p:clrMapOvr>
-    <a:masterClrMapping/>
-  </p:clrMapOvr>
-</p:sld>
-</file>
-
-<file path=ppt/slides/slide23.xml><?xml version="1.0" encoding="utf-8"?>
-<p:sld xmlns:a="http://schemas.openxmlformats.org/drawingml/2006/main" xmlns:p="http://schemas.openxmlformats.org/presentationml/2006/main" xmlns:r="http://schemas.openxmlformats.org/officeDocument/2006/relationships">
-  <p:cSld>
-    <p:bg>
-      <p:bgPr>
-        <a:solidFill>
-          <a:srgbClr val="1A1A2E"/>
-        </a:solidFill>
-        <a:effectLst/>
-      </p:bgPr>
-    </p:bg>
-    <p:spTree>
-      <p:nvGrpSpPr>
-        <p:cNvPr id="1" name=""/>
-        <p:cNvGrpSpPr/>
-        <p:nvPr/>
-      </p:nvGrpSpPr>
-      <p:grpSpPr/>
-      <p:sp>
-        <p:nvSpPr>
-          <p:cNvPr id="2" name="TextBox 1"/>
-          <p:cNvSpPr txBox="1"/>
-          <p:nvPr/>
-        </p:nvSpPr>
-        <p:spPr>
-          <a:xfrm>
-            <a:off x="914400" y="2194560"/>
-            <a:ext cx="1828800" cy="1280160"/>
-          </a:xfrm>
-          <a:prstGeom prst="rect">
-            <a:avLst/>
-          </a:prstGeom>
-          <a:noFill/>
-        </p:spPr>
-        <p:txBody>
-          <a:bodyPr wrap="square" anchor="t">
-            <a:spAutoFit/>
-          </a:bodyPr>
-          <a:lstStyle/>
-          <a:p>
-            <a:pPr algn="l">
-              <a:lnSpc>
-                <a:spcPct val="115000"/>
-              </a:lnSpc>
-            </a:pPr>
-            <a:r>
-              <a:rPr sz="9000" b="1" i="0">
-                <a:solidFill>
-                  <a:srgbClr val="2CA02C"/>
-                </a:solidFill>
-                <a:latin typeface="Calibri"/>
-              </a:rPr>
-              <a:t>6</a:t>
-            </a:r>
-          </a:p>
-        </p:txBody>
-      </p:sp>
-      <p:sp>
-        <p:nvSpPr>
-          <p:cNvPr id="3" name="TextBox 2"/>
-          <p:cNvSpPr txBox="1"/>
-          <p:nvPr/>
-        </p:nvSpPr>
-        <p:spPr>
-          <a:xfrm>
-            <a:off x="3017520" y="2514600"/>
-            <a:ext cx="8229600" cy="914400"/>
-          </a:xfrm>
-          <a:prstGeom prst="rect">
-            <a:avLst/>
-          </a:prstGeom>
-          <a:noFill/>
-        </p:spPr>
-        <p:txBody>
-          <a:bodyPr wrap="square" anchor="t">
-            <a:spAutoFit/>
-          </a:bodyPr>
-          <a:lstStyle/>
-          <a:p>
-            <a:pPr algn="l">
-              <a:lnSpc>
-                <a:spcPct val="115000"/>
-              </a:lnSpc>
-            </a:pPr>
-            <a:r>
-              <a:rPr sz="3400" b="1" i="0">
-                <a:solidFill>
-                  <a:srgbClr val="FFFFFF"/>
-                </a:solidFill>
-                <a:latin typeface="Calibri"/>
-              </a:rPr>
-              <a:t>Reflection</a:t>
-            </a:r>
-          </a:p>
-        </p:txBody>
-      </p:sp>
-      <p:sp>
-        <p:nvSpPr>
-          <p:cNvPr id="4" name="TextBox 3"/>
-          <p:cNvSpPr txBox="1"/>
-          <p:nvPr/>
-        </p:nvSpPr>
-        <p:spPr>
-          <a:xfrm>
-            <a:off x="3017520" y="3429000"/>
-            <a:ext cx="8229600" cy="914400"/>
-          </a:xfrm>
-          <a:prstGeom prst="rect">
-            <a:avLst/>
-          </a:prstGeom>
-          <a:noFill/>
-        </p:spPr>
-        <p:txBody>
-          <a:bodyPr wrap="square" anchor="t">
-            <a:spAutoFit/>
-          </a:bodyPr>
-          <a:lstStyle/>
-          <a:p>
-            <a:pPr algn="l">
-              <a:lnSpc>
-                <a:spcPct val="115000"/>
-              </a:lnSpc>
-            </a:pPr>
-            <a:r>
-              <a:rPr sz="1700" b="0" i="1">
-                <a:solidFill>
-                  <a:srgbClr val="94A3B8"/>
-                </a:solidFill>
-                <a:latin typeface="Calibri"/>
-              </a:rPr>
-              <a:t>Four months later</a:t>
-            </a:r>
-          </a:p>
-        </p:txBody>
-      </p:sp>
-    </p:spTree>
-  </p:cSld>
-  <p:clrMapOvr>
-    <a:masterClrMapping/>
-  </p:clrMapOvr>
-</p:sld>
-</file>
-
-<file path=ppt/slides/slide24.xml><?xml version="1.0" encoding="utf-8"?>
-<p:sld xmlns:a="http://schemas.openxmlformats.org/drawingml/2006/main" xmlns:p="http://schemas.openxmlformats.org/presentationml/2006/main" xmlns:r="http://schemas.openxmlformats.org/officeDocument/2006/relationships">
-  <p:cSld>
-    <p:bg>
-      <p:bgPr>
-        <a:solidFill>
-          <a:srgbClr val="1A1A2E"/>
-        </a:solidFill>
-        <a:effectLst/>
-      </p:bgPr>
-    </p:bg>
-    <p:spTree>
-      <p:nvGrpSpPr>
-        <p:cNvPr id="1" name=""/>
-        <p:cNvGrpSpPr/>
-        <p:nvPr/>
-      </p:nvGrpSpPr>
-      <p:grpSpPr/>
-      <p:sp>
-        <p:nvSpPr>
-          <p:cNvPr id="2" name="TextBox 1"/>
-          <p:cNvSpPr txBox="1"/>
-          <p:nvPr/>
-        </p:nvSpPr>
-        <p:spPr>
-          <a:xfrm>
-            <a:off x="822960" y="502920"/>
-            <a:ext cx="10515600" cy="822960"/>
-          </a:xfrm>
-          <a:prstGeom prst="rect">
-            <a:avLst/>
-          </a:prstGeom>
-          <a:noFill/>
-        </p:spPr>
-        <p:txBody>
-          <a:bodyPr wrap="square" anchor="t">
-            <a:spAutoFit/>
-          </a:bodyPr>
-          <a:lstStyle/>
-          <a:p>
-            <a:pPr algn="l">
-              <a:lnSpc>
-                <a:spcPct val="115000"/>
-              </a:lnSpc>
-            </a:pPr>
-            <a:r>
-              <a:rPr sz="3000" b="1" i="0">
-                <a:solidFill>
-                  <a:srgbClr val="FFFFFF"/>
-                </a:solidFill>
-                <a:latin typeface="Calibri"/>
-              </a:rPr>
-              <a:t>A personal note, 4 months later</a:t>
-            </a:r>
-          </a:p>
-        </p:txBody>
-      </p:sp>
-      <p:sp>
-        <p:nvSpPr>
-          <p:cNvPr id="3" name="Rectangle 2"/>
-          <p:cNvSpPr/>
-          <p:nvPr/>
-        </p:nvSpPr>
-        <p:spPr>
-          <a:xfrm>
-            <a:off x="502920" y="1280160"/>
-            <a:ext cx="2011680" cy="50800"/>
-          </a:xfrm>
-          <a:prstGeom prst="rect">
-            <a:avLst/>
-          </a:prstGeom>
-          <a:solidFill>
-            <a:srgbClr val="D97706"/>
-          </a:solidFill>
-          <a:ln>
-            <a:noFill/>
-          </a:ln>
-          <a:effectLst/>
-        </p:spPr>
-        <p:style>
-          <a:lnRef idx="1">
-            <a:schemeClr val="accent1"/>
-          </a:lnRef>
-          <a:fillRef idx="3">
-            <a:schemeClr val="accent1"/>
-          </a:fillRef>
-          <a:effectRef idx="2">
-            <a:schemeClr val="accent1"/>
-          </a:effectRef>
-          <a:fontRef idx="minor">
-            <a:schemeClr val="lt1"/>
-          </a:fontRef>
-        </p:style>
-        <p:txBody>
-          <a:bodyPr rtlCol="0" anchor="ctr"/>
-          <a:lstStyle/>
-          <a:p>
-            <a:pPr algn="ctr"/>
-          </a:p>
-        </p:txBody>
-      </p:sp>
-      <p:sp>
-        <p:nvSpPr>
-          <p:cNvPr id="4" name="TextBox 3"/>
-          <p:cNvSpPr txBox="1"/>
-          <p:nvPr/>
-        </p:nvSpPr>
-        <p:spPr>
-          <a:xfrm>
-            <a:off x="822960" y="1691640"/>
-            <a:ext cx="10515600" cy="1463040"/>
-          </a:xfrm>
-          <a:prstGeom prst="rect">
-            <a:avLst/>
-          </a:prstGeom>
-          <a:noFill/>
-        </p:spPr>
-        <p:txBody>
-          <a:bodyPr wrap="square" anchor="t">
-            <a:spAutoFit/>
-          </a:bodyPr>
-          <a:lstStyle/>
-          <a:p>
-            <a:pPr algn="l">
-              <a:lnSpc>
-                <a:spcPct val="115000"/>
-              </a:lnSpc>
-            </a:pPr>
-            <a:r>
-              <a:rPr sz="1900" b="0" i="0">
-                <a:solidFill>
-                  <a:srgbClr val="DDDDE5"/>
-                </a:solidFill>
-                <a:latin typeface="Calibri"/>
-              </a:rPr>
-              <a:t>When this problem first came up about 4 months ago, it felt urgent: AI models couldn't hold a big codebase “in their head,” so a pre-built map felt essential.</a:t>
-            </a:r>
-          </a:p>
-        </p:txBody>
-      </p:sp>
-      <p:sp>
-        <p:nvSpPr>
-          <p:cNvPr id="5" name="TextBox 4"/>
-          <p:cNvSpPr txBox="1"/>
-          <p:nvPr/>
-        </p:nvSpPr>
-        <p:spPr>
-          <a:xfrm>
-            <a:off x="822960" y="3246120"/>
-            <a:ext cx="10515600" cy="1737360"/>
-          </a:xfrm>
-          <a:prstGeom prst="rect">
-            <a:avLst/>
-          </a:prstGeom>
-          <a:noFill/>
-        </p:spPr>
-        <p:txBody>
-          <a:bodyPr wrap="square" anchor="t">
-            <a:spAutoFit/>
-          </a:bodyPr>
-          <a:lstStyle/>
-          <a:p>
-            <a:pPr algn="l">
-              <a:lnSpc>
-                <a:spcPct val="115000"/>
-              </a:lnSpc>
-            </a:pPr>
-            <a:r>
-              <a:rPr sz="1900" b="0" i="0">
-                <a:solidFill>
-                  <a:srgbClr val="DDDDE5"/>
-                </a:solidFill>
-                <a:latin typeface="Calibri"/>
-              </a:rPr>
-              <a:t>In just those few months, AI models have gotten dramatically better at holding and reasoning over much more code at once, and simply gotten smarter overall. That original problem — the one this tool was built to solve — has largely shrunk on its own, just from the base AI models improving.</a:t>
-            </a:r>
-          </a:p>
-        </p:txBody>
-      </p:sp>
-      <p:sp>
-        <p:nvSpPr>
-          <p:cNvPr id="6" name="TextBox 5"/>
-          <p:cNvSpPr txBox="1"/>
-          <p:nvPr/>
-        </p:nvSpPr>
-        <p:spPr>
-          <a:xfrm>
-            <a:off x="822960" y="5257800"/>
-            <a:ext cx="10515600" cy="1097280"/>
-          </a:xfrm>
-          <a:prstGeom prst="rect">
-            <a:avLst/>
-          </a:prstGeom>
-          <a:noFill/>
-        </p:spPr>
-        <p:txBody>
-          <a:bodyPr wrap="square" anchor="t">
-            <a:spAutoFit/>
-          </a:bodyPr>
-          <a:lstStyle/>
-          <a:p>
-            <a:pPr algn="l">
-              <a:lnSpc>
-                <a:spcPct val="115000"/>
-              </a:lnSpc>
-            </a:pPr>
-            <a:r>
-              <a:rPr sz="1800" b="1" i="0">
-                <a:solidFill>
-                  <a:srgbClr val="2CA02C"/>
-                </a:solidFill>
-                <a:latin typeface="Calibri"/>
-              </a:rPr>
-              <a:t>Our results fit that story: a modern, capable AI agent with just its ordinary tools already does a solid job — the extra map no longer clears as high a bar as it once would have.</a:t>
-            </a:r>
-          </a:p>
-        </p:txBody>
-      </p:sp>
-      <p:sp>
-        <p:nvSpPr>
-          <p:cNvPr id="7" name="TextBox 6"/>
-          <p:cNvSpPr txBox="1"/>
-          <p:nvPr/>
-        </p:nvSpPr>
-        <p:spPr>
-          <a:xfrm>
-            <a:off x="502920" y="6473952"/>
-            <a:ext cx="8229600" cy="320040"/>
-          </a:xfrm>
-          <a:prstGeom prst="rect">
-            <a:avLst/>
-          </a:prstGeom>
-          <a:noFill/>
-        </p:spPr>
-        <p:txBody>
-          <a:bodyPr wrap="square" anchor="t">
-            <a:spAutoFit/>
-          </a:bodyPr>
-          <a:lstStyle/>
-          <a:p>
-            <a:pPr algn="l">
-              <a:lnSpc>
-                <a:spcPct val="115000"/>
-              </a:lnSpc>
-            </a:pPr>
-            <a:r>
-              <a:rPr sz="1050" b="0" i="0">
-                <a:solidFill>
-                  <a:srgbClr val="AAAAAA"/>
-                </a:solidFill>
-                <a:latin typeface="Calibri"/>
-              </a:rPr>
-              <a:t>Part 6 — Reflection</a:t>
-            </a:r>
-          </a:p>
-        </p:txBody>
-      </p:sp>
-    </p:spTree>
-  </p:cSld>
-  <p:clrMapOvr>
-    <a:masterClrMapping/>
-  </p:clrMapOvr>
-</p:sld>
-</file>
-
-<file path=ppt/slides/slide25.xml><?xml version="1.0" encoding="utf-8"?>
-<p:sld xmlns:a="http://schemas.openxmlformats.org/drawingml/2006/main" xmlns:p="http://schemas.openxmlformats.org/presentationml/2006/main" xmlns:r="http://schemas.openxmlformats.org/officeDocument/2006/relationships">
-  <p:cSld>
-    <p:bg>
-      <p:bgPr>
-        <a:solidFill>
-          <a:srgbClr val="FFFFFF"/>
-        </a:solidFill>
-        <a:effectLst/>
-      </p:bgPr>
-    </p:bg>
-    <p:spTree>
-      <p:nvGrpSpPr>
-        <p:cNvPr id="1" name=""/>
-        <p:cNvGrpSpPr/>
-        <p:nvPr/>
-      </p:nvGrpSpPr>
-      <p:grpSpPr/>
-      <p:sp>
-        <p:nvSpPr>
-          <p:cNvPr id="2" name="TextBox 1"/>
-          <p:cNvSpPr txBox="1"/>
-          <p:nvPr/>
-        </p:nvSpPr>
-        <p:spPr>
-          <a:xfrm>
-            <a:off x="502920" y="384048"/>
-            <a:ext cx="11155680" cy="822960"/>
-          </a:xfrm>
-          <a:prstGeom prst="rect">
-            <a:avLst/>
-          </a:prstGeom>
-          <a:noFill/>
-        </p:spPr>
-        <p:txBody>
-          <a:bodyPr wrap="square" anchor="t">
-            <a:spAutoFit/>
-          </a:bodyPr>
-          <a:lstStyle/>
-          <a:p>
-            <a:pPr algn="l">
-              <a:lnSpc>
-                <a:spcPct val="115000"/>
-              </a:lnSpc>
-            </a:pPr>
-            <a:r>
-              <a:rPr sz="3200" b="1" i="0">
-                <a:solidFill>
-                  <a:srgbClr val="1A1A2E"/>
-                </a:solidFill>
-                <a:latin typeface="Calibri"/>
-              </a:rPr>
-              <a:t>What this means going forward</a:t>
-            </a:r>
-          </a:p>
-        </p:txBody>
-      </p:sp>
-      <p:sp>
-        <p:nvSpPr>
-          <p:cNvPr id="3" name="Rectangle 2"/>
-          <p:cNvSpPr/>
-          <p:nvPr/>
-        </p:nvSpPr>
-        <p:spPr>
-          <a:xfrm>
-            <a:off x="502920" y="1170432"/>
-            <a:ext cx="2011680" cy="50800"/>
-          </a:xfrm>
-          <a:prstGeom prst="rect">
-            <a:avLst/>
-          </a:prstGeom>
-          <a:solidFill>
-            <a:srgbClr val="2CA02C"/>
-          </a:solidFill>
-          <a:ln>
-            <a:noFill/>
-          </a:ln>
-          <a:effectLst/>
-        </p:spPr>
-        <p:style>
-          <a:lnRef idx="1">
-            <a:schemeClr val="accent1"/>
-          </a:lnRef>
-          <a:fillRef idx="3">
-            <a:schemeClr val="accent1"/>
-          </a:fillRef>
-          <a:effectRef idx="2">
-            <a:schemeClr val="accent1"/>
-          </a:effectRef>
-          <a:fontRef idx="minor">
-            <a:schemeClr val="lt1"/>
-          </a:fontRef>
-        </p:style>
-        <p:txBody>
-          <a:bodyPr rtlCol="0" anchor="ctr"/>
-          <a:lstStyle/>
-          <a:p>
-            <a:pPr algn="ctr"/>
-          </a:p>
-        </p:txBody>
-      </p:sp>
-      <p:sp>
-        <p:nvSpPr>
-          <p:cNvPr id="4" name="TextBox 3"/>
-          <p:cNvSpPr txBox="1"/>
-          <p:nvPr/>
-        </p:nvSpPr>
-        <p:spPr>
-          <a:xfrm>
-            <a:off x="640080" y="1828800"/>
-            <a:ext cx="10972800" cy="4206240"/>
-          </a:xfrm>
-          <a:prstGeom prst="rect">
-            <a:avLst/>
-          </a:prstGeom>
-          <a:noFill/>
-        </p:spPr>
-        <p:txBody>
-          <a:bodyPr wrap="square">
-            <a:spAutoFit/>
-          </a:bodyPr>
-          <a:lstStyle/>
-          <a:p>
-            <a:pPr>
-              <a:lnSpc>
-                <a:spcPct val="112000"/>
-              </a:lnSpc>
-              <a:spcAft>
-                <a:spcPts val="1600"/>
-              </a:spcAft>
-            </a:pPr>
-            <a:r>
-              <a:rPr sz="1950" b="1">
-                <a:solidFill>
-                  <a:srgbClr val="2CA02C"/>
-                </a:solidFill>
-                <a:latin typeface="Calibri"/>
-              </a:rPr>
-              <a:t>▸  </a:t>
-            </a:r>
-            <a:r>
-              <a:rPr sz="1950">
-                <a:solidFill>
-                  <a:srgbClr val="333333"/>
-                </a:solidFill>
-                <a:latin typeface="Calibri"/>
-              </a:rPr>
-              <a:t>Tools like this still have a place — but the bar for “worth adding” keeps rising as base AI models improve.</a:t>
-            </a:r>
-          </a:p>
-          <a:p>
-            <a:pPr>
-              <a:lnSpc>
-                <a:spcPct val="112000"/>
-              </a:lnSpc>
-              <a:spcAft>
-                <a:spcPts val="1600"/>
-              </a:spcAft>
-            </a:pPr>
-            <a:r>
-              <a:rPr sz="1950" b="1">
-                <a:solidFill>
-                  <a:srgbClr val="2CA02C"/>
-                </a:solidFill>
-                <a:latin typeface="Calibri"/>
-              </a:rPr>
-              <a:t>▸  </a:t>
-            </a:r>
-            <a:r>
-              <a:rPr sz="1950">
-                <a:solidFill>
-                  <a:srgbClr val="333333"/>
-                </a:solidFill>
-                <a:latin typeface="Calibri"/>
-              </a:rPr>
-              <a:t>If a tool like this is used, the AI should be encouraged to double-check the map's answer, not just trust it outright — especially for “list everything” style questions.</a:t>
-            </a:r>
-          </a:p>
-          <a:p>
-            <a:pPr>
-              <a:lnSpc>
-                <a:spcPct val="112000"/>
-              </a:lnSpc>
-              <a:spcAft>
-                <a:spcPts val="1600"/>
-              </a:spcAft>
-            </a:pPr>
-            <a:r>
-              <a:rPr sz="1950" b="1">
-                <a:solidFill>
-                  <a:srgbClr val="2CA02C"/>
-                </a:solidFill>
-                <a:latin typeface="Calibri"/>
-              </a:rPr>
-              <a:t>▸  </a:t>
-            </a:r>
-            <a:r>
-              <a:rPr sz="1950">
-                <a:solidFill>
-                  <a:srgbClr val="333333"/>
-                </a:solidFill>
-                <a:latin typeface="Calibri"/>
-              </a:rPr>
-              <a:t>The token/reading cost of using extra tools is real and should be weighed against the (currently unclear) benefit.</a:t>
-            </a:r>
-          </a:p>
-          <a:p>
-            <a:pPr>
-              <a:lnSpc>
-                <a:spcPct val="112000"/>
-              </a:lnSpc>
-              <a:spcAft>
-                <a:spcPts val="1600"/>
-              </a:spcAft>
-            </a:pPr>
-            <a:r>
-              <a:rPr sz="1950" b="1">
-                <a:solidFill>
-                  <a:srgbClr val="2CA02C"/>
-                </a:solidFill>
-                <a:latin typeface="Calibri"/>
-              </a:rPr>
-              <a:t>▸  </a:t>
-            </a:r>
-            <a:r>
-              <a:rPr sz="1950">
-                <a:solidFill>
-                  <a:srgbClr val="333333"/>
-                </a:solidFill>
-                <a:latin typeface="Calibri"/>
-              </a:rPr>
-              <a:t>This kind of test is worth re-running periodically — as models keep improving, the answer to “does this tool help” can keep changing.</a:t>
-            </a:r>
-          </a:p>
-        </p:txBody>
-      </p:sp>
-      <p:sp>
-        <p:nvSpPr>
-          <p:cNvPr id="5" name="TextBox 4"/>
-          <p:cNvSpPr txBox="1"/>
-          <p:nvPr/>
-        </p:nvSpPr>
-        <p:spPr>
-          <a:xfrm>
-            <a:off x="502920" y="6473952"/>
-            <a:ext cx="8229600" cy="320040"/>
-          </a:xfrm>
-          <a:prstGeom prst="rect">
-            <a:avLst/>
-          </a:prstGeom>
-          <a:noFill/>
-        </p:spPr>
-        <p:txBody>
-          <a:bodyPr wrap="square" anchor="t">
-            <a:spAutoFit/>
-          </a:bodyPr>
-          <a:lstStyle/>
-          <a:p>
-            <a:pPr algn="l">
-              <a:lnSpc>
-                <a:spcPct val="115000"/>
-              </a:lnSpc>
-            </a:pPr>
-            <a:r>
-              <a:rPr sz="1050" b="0" i="0">
-                <a:solidFill>
-                  <a:srgbClr val="AAAAAA"/>
-                </a:solidFill>
-                <a:latin typeface="Calibri"/>
-              </a:rPr>
-              <a:t>Part 6 — Reflection</a:t>
-            </a:r>
-          </a:p>
-        </p:txBody>
-      </p:sp>
-    </p:spTree>
-  </p:cSld>
-  <p:clrMapOvr>
-    <a:masterClrMapping/>
-  </p:clrMapOvr>
-</p:sld>
-</file>
-
-<file path=ppt/slides/slide26.xml><?xml version="1.0" encoding="utf-8"?>
-<p:sld xmlns:a="http://schemas.openxmlformats.org/drawingml/2006/main" xmlns:p="http://schemas.openxmlformats.org/presentationml/2006/main" xmlns:r="http://schemas.openxmlformats.org/officeDocument/2006/relationships">
-  <p:cSld>
-    <p:bg>
-      <p:bgPr>
-        <a:solidFill>
-          <a:srgbClr val="1A1A2E"/>
-        </a:solidFill>
-        <a:effectLst/>
-      </p:bgPr>
-    </p:bg>
-    <p:spTree>
-      <p:nvGrpSpPr>
-        <p:cNvPr id="1" name=""/>
-        <p:cNvGrpSpPr/>
-        <p:nvPr/>
-      </p:nvGrpSpPr>
-      <p:grpSpPr/>
-      <p:sp>
-        <p:nvSpPr>
-          <p:cNvPr id="2" name="TextBox 1"/>
-          <p:cNvSpPr txBox="1"/>
-          <p:nvPr/>
-        </p:nvSpPr>
-        <p:spPr>
-          <a:xfrm>
-            <a:off x="914400" y="2743200"/>
-            <a:ext cx="10332720" cy="914400"/>
-          </a:xfrm>
-          <a:prstGeom prst="rect">
-            <a:avLst/>
-          </a:prstGeom>
-          <a:noFill/>
-        </p:spPr>
-        <p:txBody>
-          <a:bodyPr wrap="square" anchor="t">
-            <a:spAutoFit/>
-          </a:bodyPr>
-          <a:lstStyle/>
-          <a:p>
-            <a:pPr algn="ctr">
-              <a:lnSpc>
-                <a:spcPct val="115000"/>
-              </a:lnSpc>
-            </a:pPr>
-            <a:r>
-              <a:rPr sz="4400" b="1" i="0">
-                <a:solidFill>
-                  <a:srgbClr val="FFFFFF"/>
-                </a:solidFill>
-                <a:latin typeface="Calibri"/>
-              </a:rPr>
-              <a:t>Thank you</a:t>
-            </a:r>
-          </a:p>
-        </p:txBody>
-      </p:sp>
-      <p:sp>
-        <p:nvSpPr>
-          <p:cNvPr id="3" name="TextBox 2"/>
-          <p:cNvSpPr txBox="1"/>
-          <p:nvPr/>
-        </p:nvSpPr>
-        <p:spPr>
-          <a:xfrm>
-            <a:off x="914400" y="3657600"/>
-            <a:ext cx="10332720" cy="548640"/>
-          </a:xfrm>
-          <a:prstGeom prst="rect">
-            <a:avLst/>
-          </a:prstGeom>
-          <a:noFill/>
-        </p:spPr>
-        <p:txBody>
-          <a:bodyPr wrap="square" anchor="t">
-            <a:spAutoFit/>
-          </a:bodyPr>
-          <a:lstStyle/>
-          <a:p>
-            <a:pPr algn="ctr">
-              <a:lnSpc>
-                <a:spcPct val="115000"/>
-              </a:lnSpc>
-            </a:pPr>
-            <a:r>
-              <a:rPr sz="1600" b="0" i="1">
-                <a:solidFill>
-                  <a:srgbClr val="94A3B8"/>
-                </a:solidFill>
-                <a:latin typeface="Calibri"/>
-              </a:rPr>
-              <a:t>Full write-up, charts, and raw data: eval/report/REPORT.md</a:t>
-            </a:r>
-          </a:p>
-        </p:txBody>
-      </p:sp>
-      <p:sp>
-        <p:nvSpPr>
-          <p:cNvPr id="4" name="Rectangle 3"/>
-          <p:cNvSpPr/>
-          <p:nvPr/>
-        </p:nvSpPr>
-        <p:spPr>
-          <a:xfrm>
-            <a:off x="5029200" y="2377440"/>
-            <a:ext cx="2103120" cy="54864"/>
-          </a:xfrm>
-          <a:prstGeom prst="rect">
-            <a:avLst/>
-          </a:prstGeom>
-          <a:solidFill>
-            <a:srgbClr val="2CA02C"/>
-          </a:solidFill>
-          <a:ln>
-            <a:noFill/>
-          </a:ln>
-        </p:spPr>
-        <p:style>
-          <a:lnRef idx="1">
-            <a:schemeClr val="accent1"/>
-          </a:lnRef>
-          <a:fillRef idx="3">
-            <a:schemeClr val="accent1"/>
-          </a:fillRef>
-          <a:effectRef idx="2">
-            <a:schemeClr val="accent1"/>
-          </a:effectRef>
-          <a:fontRef idx="minor">
-            <a:schemeClr val="lt1"/>
-          </a:fontRef>
-        </p:style>
-        <p:txBody>
-          <a:bodyPr rtlCol="0" anchor="ctr"/>
-          <a:lstStyle/>
-          <a:p>
-            <a:pPr algn="ctr"/>
+              <a:t>“Does a real AI coding assistant answer code questions better with a pre-built map of the code — compared to using only its normal tools?”</a:t>
+            </a:r>
           </a:p>
         </p:txBody>
       </p:sp>
@@ -7094,8 +4799,8 @@
         </p:nvSpPr>
         <p:spPr>
           <a:xfrm>
-            <a:off x="502920" y="384048"/>
-            <a:ext cx="11155680" cy="822960"/>
+            <a:off x="502920" y="274320"/>
+            <a:ext cx="9875520" cy="640080"/>
           </a:xfrm>
           <a:prstGeom prst="rect">
             <a:avLst/>
@@ -7110,17 +4815,17 @@
           <a:p>
             <a:pPr algn="l">
               <a:lnSpc>
-                <a:spcPct val="115000"/>
+                <a:spcPct val="112000"/>
               </a:lnSpc>
             </a:pPr>
             <a:r>
-              <a:rPr sz="3200" b="1" i="0">
+              <a:rPr sz="2800" b="1" i="0">
                 <a:solidFill>
                   <a:srgbClr val="1A1A2E"/>
                 </a:solidFill>
                 <a:latin typeface="Calibri"/>
               </a:rPr>
-              <a:t>The everyday problem</a:t>
+              <a:t>Three connected projects, one pipeline</a:t>
             </a:r>
           </a:p>
         </p:txBody>
@@ -7133,7 +4838,7 @@
         </p:nvSpPr>
         <p:spPr>
           <a:xfrm>
-            <a:off x="502920" y="1170432"/>
+            <a:off x="502920" y="896112"/>
             <a:ext cx="2011680" cy="50800"/>
           </a:xfrm>
           <a:prstGeom prst="rect">
@@ -7177,8 +4882,8 @@
         </p:nvSpPr>
         <p:spPr>
           <a:xfrm>
-            <a:off x="502920" y="1298448"/>
-            <a:ext cx="11155680" cy="457200"/>
+            <a:off x="502920" y="987552"/>
+            <a:ext cx="10058400" cy="365760"/>
           </a:xfrm>
           <a:prstGeom prst="rect">
             <a:avLst/>
@@ -7193,131 +4898,77 @@
           <a:p>
             <a:pPr algn="l">
               <a:lnSpc>
-                <a:spcPct val="115000"/>
+                <a:spcPct val="112000"/>
               </a:lnSpc>
             </a:pPr>
             <a:r>
-              <a:rPr sz="1550" b="0" i="1">
+              <a:rPr sz="1350" b="0" i="1">
                 <a:solidFill>
                   <a:srgbClr val="666666"/>
                 </a:solidFill>
                 <a:latin typeface="Calibri"/>
               </a:rPr>
-              <a:t>Why understanding a big codebase is hard</a:t>
-            </a:r>
-          </a:p>
-        </p:txBody>
-      </p:sp>
-      <p:sp>
-        <p:nvSpPr>
-          <p:cNvPr id="5" name="TextBox 4"/>
-          <p:cNvSpPr txBox="1"/>
-          <p:nvPr/>
-        </p:nvSpPr>
-        <p:spPr>
-          <a:xfrm>
-            <a:off x="640080" y="1828800"/>
-            <a:ext cx="5852160" cy="4114800"/>
-          </a:xfrm>
-          <a:prstGeom prst="rect">
-            <a:avLst/>
-          </a:prstGeom>
-          <a:noFill/>
-        </p:spPr>
-        <p:txBody>
-          <a:bodyPr wrap="square">
-            <a:spAutoFit/>
-          </a:bodyPr>
-          <a:lstStyle/>
-          <a:p>
-            <a:pPr>
-              <a:lnSpc>
-                <a:spcPct val="112000"/>
-              </a:lnSpc>
-              <a:spcAft>
-                <a:spcPts val="1000"/>
-              </a:spcAft>
-            </a:pPr>
-            <a:r>
-              <a:rPr sz="1850" b="1">
-                <a:solidFill>
-                  <a:srgbClr val="2CA02C"/>
+              <a:t>This isn't one repo — it's a small stack, and this deck covers all of it</a:t>
+            </a:r>
+          </a:p>
+        </p:txBody>
+      </p:sp>
+      <p:sp>
+        <p:nvSpPr>
+          <p:cNvPr id="5" name="Rectangle 4"/>
+          <p:cNvSpPr/>
+          <p:nvPr/>
+        </p:nvSpPr>
+        <p:spPr>
+          <a:xfrm>
+            <a:off x="9686240" y="384048"/>
+            <a:ext cx="2048255" cy="365760"/>
+          </a:xfrm>
+          <a:prstGeom prst="rect">
+            <a:avLst/>
+          </a:prstGeom>
+          <a:solidFill>
+            <a:srgbClr val="2CA02C"/>
+          </a:solidFill>
+          <a:ln>
+            <a:noFill/>
+          </a:ln>
+          <a:effectLst/>
+        </p:spPr>
+        <p:style>
+          <a:lnRef idx="1">
+            <a:schemeClr val="accent1"/>
+          </a:lnRef>
+          <a:fillRef idx="3">
+            <a:schemeClr val="accent1"/>
+          </a:fillRef>
+          <a:effectRef idx="2">
+            <a:schemeClr val="accent1"/>
+          </a:effectRef>
+          <a:fontRef idx="minor">
+            <a:schemeClr val="lt1"/>
+          </a:fontRef>
+        </p:style>
+        <p:txBody>
+          <a:bodyPr rtlCol="0" anchor="ctr" wrap="none" lIns="0" rIns="0" tIns="0" bIns="0"/>
+          <a:lstStyle/>
+          <a:p>
+            <a:pPr algn="ctr"/>
+            <a:r>
+              <a:rPr sz="1100" b="1">
+                <a:solidFill>
+                  <a:srgbClr val="FFFFFF"/>
                 </a:solidFill>
                 <a:latin typeface="Calibri"/>
               </a:rPr>
-              <a:t>▸  </a:t>
-            </a:r>
-            <a:r>
-              <a:rPr sz="1850">
-                <a:solidFill>
-                  <a:srgbClr val="333333"/>
-                </a:solidFill>
-                <a:latin typeface="Calibri"/>
-              </a:rPr>
-              <a:t>Real software projects are huge — tens of thousands of lines, spread across hundreds of files.</a:t>
-            </a:r>
-          </a:p>
-          <a:p>
-            <a:pPr>
-              <a:lnSpc>
-                <a:spcPct val="112000"/>
-              </a:lnSpc>
-              <a:spcAft>
-                <a:spcPts val="1000"/>
-              </a:spcAft>
-            </a:pPr>
-            <a:r>
-              <a:rPr sz="1850" b="1">
-                <a:solidFill>
-                  <a:srgbClr val="2CA02C"/>
-                </a:solidFill>
-                <a:latin typeface="Calibri"/>
-              </a:rPr>
-              <a:t>▸  </a:t>
-            </a:r>
-            <a:r>
-              <a:rPr sz="1850">
-                <a:solidFill>
-                  <a:srgbClr val="333333"/>
-                </a:solidFill>
-                <a:latin typeface="Calibri"/>
-              </a:rPr>
-              <a:t>When you ask an AI assistant a question like “who calls this function?”, it usually has to search for text and open files one at a time — like a very fast game of Ctrl+F.</a:t>
-            </a:r>
-          </a:p>
-          <a:p>
-            <a:pPr>
-              <a:lnSpc>
-                <a:spcPct val="112000"/>
-              </a:lnSpc>
-              <a:spcAft>
-                <a:spcPts val="1000"/>
-              </a:spcAft>
-            </a:pPr>
-            <a:r>
-              <a:rPr sz="1850" b="1">
-                <a:solidFill>
-                  <a:srgbClr val="2CA02C"/>
-                </a:solidFill>
-                <a:latin typeface="Calibri"/>
-              </a:rPr>
-              <a:t>▸  </a:t>
-            </a:r>
-            <a:r>
-              <a:rPr sz="1850">
-                <a:solidFill>
-                  <a:srgbClr val="333333"/>
-                </a:solidFill>
-                <a:latin typeface="Calibri"/>
-              </a:rPr>
-              <a:t>That works, but it's slow, and it's easy to miss something hiding in a file that never got opened.</a:t>
+              <a:t>1 · THE IDEA</a:t>
             </a:r>
           </a:p>
         </p:txBody>
       </p:sp>
       <p:pic>
         <p:nvPicPr>
-          <p:cNvPr id="6" name="Picture 5" descr="search_vs_map.png"/>
+          <p:cNvPr id="6" name="Picture 5" descr="three_repos.png"/>
           <p:cNvPicPr>
             <a:picLocks noChangeAspect="1"/>
           </p:cNvPicPr>
@@ -7331,53 +4982,14 @@
         </p:blipFill>
         <p:spPr>
           <a:xfrm>
-            <a:off x="6537960" y="2545500"/>
-            <a:ext cx="5120640" cy="2864279"/>
+            <a:off x="1666999" y="1554480"/>
+            <a:ext cx="8827521" cy="4937760"/>
           </a:xfrm>
           <a:prstGeom prst="rect">
             <a:avLst/>
           </a:prstGeom>
         </p:spPr>
       </p:pic>
-      <p:sp>
-        <p:nvSpPr>
-          <p:cNvPr id="7" name="TextBox 6"/>
-          <p:cNvSpPr txBox="1"/>
-          <p:nvPr/>
-        </p:nvSpPr>
-        <p:spPr>
-          <a:xfrm>
-            <a:off x="502920" y="6473952"/>
-            <a:ext cx="8229600" cy="320040"/>
-          </a:xfrm>
-          <a:prstGeom prst="rect">
-            <a:avLst/>
-          </a:prstGeom>
-          <a:noFill/>
-        </p:spPr>
-        <p:txBody>
-          <a:bodyPr wrap="square" anchor="t">
-            <a:spAutoFit/>
-          </a:bodyPr>
-          <a:lstStyle/>
-          <a:p>
-            <a:pPr algn="l">
-              <a:lnSpc>
-                <a:spcPct val="115000"/>
-              </a:lnSpc>
-            </a:pPr>
-            <a:r>
-              <a:rPr sz="1050" b="0" i="0">
-                <a:solidFill>
-                  <a:srgbClr val="AAAAAA"/>
-                </a:solidFill>
-                <a:latin typeface="Calibri"/>
-              </a:rPr>
-              <a:t>Part 1 — The Idea</a:t>
-            </a:r>
-          </a:p>
-        </p:txBody>
-      </p:sp>
     </p:spTree>
   </p:cSld>
   <p:clrMapOvr>
@@ -7412,8 +5024,8 @@
         </p:nvSpPr>
         <p:spPr>
           <a:xfrm>
-            <a:off x="502920" y="384048"/>
-            <a:ext cx="11155680" cy="822960"/>
+            <a:off x="502920" y="274320"/>
+            <a:ext cx="9875520" cy="640080"/>
           </a:xfrm>
           <a:prstGeom prst="rect">
             <a:avLst/>
@@ -7428,17 +5040,17 @@
           <a:p>
             <a:pPr algn="l">
               <a:lnSpc>
-                <a:spcPct val="115000"/>
+                <a:spcPct val="112000"/>
               </a:lnSpc>
             </a:pPr>
             <a:r>
-              <a:rPr sz="3200" b="1" i="0">
+              <a:rPr sz="2800" b="1" i="0">
                 <a:solidFill>
                   <a:srgbClr val="1A1A2E"/>
                 </a:solidFill>
                 <a:latin typeface="Calibri"/>
               </a:rPr>
-              <a:t>The idea: give the AI a map first</a:t>
+              <a:t>Project 1: ContextAI — the engine</a:t>
             </a:r>
           </a:p>
         </p:txBody>
@@ -7451,7 +5063,7 @@
         </p:nvSpPr>
         <p:spPr>
           <a:xfrm>
-            <a:off x="502920" y="1170432"/>
+            <a:off x="502920" y="896112"/>
             <a:ext cx="2011680" cy="50800"/>
           </a:xfrm>
           <a:prstGeom prst="rect">
@@ -7489,14 +5101,91 @@
       </p:sp>
       <p:sp>
         <p:nvSpPr>
-          <p:cNvPr id="4" name="TextBox 3"/>
+          <p:cNvPr id="4" name="Rectangle 3"/>
+          <p:cNvSpPr/>
+          <p:nvPr/>
+        </p:nvSpPr>
+        <p:spPr>
+          <a:xfrm>
+            <a:off x="8360359" y="384048"/>
+            <a:ext cx="3374136" cy="365760"/>
+          </a:xfrm>
+          <a:prstGeom prst="rect">
+            <a:avLst/>
+          </a:prstGeom>
+          <a:solidFill>
+            <a:srgbClr val="2CA02C"/>
+          </a:solidFill>
+          <a:ln>
+            <a:noFill/>
+          </a:ln>
+          <a:effectLst/>
+        </p:spPr>
+        <p:style>
+          <a:lnRef idx="1">
+            <a:schemeClr val="accent1"/>
+          </a:lnRef>
+          <a:fillRef idx="3">
+            <a:schemeClr val="accent1"/>
+          </a:fillRef>
+          <a:effectRef idx="2">
+            <a:schemeClr val="accent1"/>
+          </a:effectRef>
+          <a:fontRef idx="minor">
+            <a:schemeClr val="lt1"/>
+          </a:fontRef>
+        </p:style>
+        <p:txBody>
+          <a:bodyPr rtlCol="0" anchor="ctr" wrap="none" lIns="0" rIns="0" tIns="0" bIns="0"/>
+          <a:lstStyle/>
+          <a:p>
+            <a:pPr algn="ctr"/>
+            <a:r>
+              <a:rPr sz="1100" b="1">
+                <a:solidFill>
+                  <a:srgbClr val="FFFFFF"/>
+                </a:solidFill>
+                <a:latin typeface="Calibri"/>
+              </a:rPr>
+              <a:t>2 · THE THREE PROJECTS</a:t>
+            </a:r>
+          </a:p>
+        </p:txBody>
+      </p:sp>
+      <p:pic>
+        <p:nvPicPr>
+          <p:cNvPr id="5" name="Picture 4" descr="graph_pipeline.png"/>
+          <p:cNvPicPr>
+            <a:picLocks noChangeAspect="1"/>
+          </p:cNvPicPr>
+          <p:nvPr/>
+        </p:nvPicPr>
+        <p:blipFill>
+          <a:blip r:embed="rId2"/>
+          <a:stretch>
+            <a:fillRect/>
+          </a:stretch>
+        </p:blipFill>
+        <p:spPr>
+          <a:xfrm>
+            <a:off x="365760" y="1886006"/>
+            <a:ext cx="7315200" cy="4091828"/>
+          </a:xfrm>
+          <a:prstGeom prst="rect">
+            <a:avLst/>
+          </a:prstGeom>
+        </p:spPr>
+      </p:pic>
+      <p:sp>
+        <p:nvSpPr>
+          <p:cNvPr id="6" name="TextBox 5"/>
           <p:cNvSpPr txBox="1"/>
           <p:nvPr/>
         </p:nvSpPr>
         <p:spPr>
           <a:xfrm>
-            <a:off x="640080" y="1828800"/>
-            <a:ext cx="10789920" cy="1188720"/>
+            <a:off x="7863840" y="1691640"/>
+            <a:ext cx="4023360" cy="4572000"/>
           </a:xfrm>
           <a:prstGeom prst="rect">
             <a:avLst/>
@@ -7504,125 +5193,92 @@
           <a:noFill/>
         </p:spPr>
         <p:txBody>
-          <a:bodyPr wrap="square" anchor="t">
+          <a:bodyPr wrap="square">
             <a:spAutoFit/>
           </a:bodyPr>
           <a:lstStyle/>
           <a:p>
-            <a:pPr algn="l">
+            <a:pPr>
               <a:lnSpc>
-                <a:spcPct val="115000"/>
+                <a:spcPct val="108000"/>
               </a:lnSpc>
+              <a:spcAft>
+                <a:spcPts val="1000"/>
+              </a:spcAft>
             </a:pPr>
             <a:r>
-              <a:rPr sz="2400" b="1" i="0">
-                <a:solidFill>
-                  <a:srgbClr val="1A1A2E"/>
+              <a:rPr sz="1450" b="1">
+                <a:solidFill>
+                  <a:srgbClr val="2CA02C"/>
                 </a:solidFill>
                 <a:latin typeface="Calibri"/>
               </a:rPr>
-              <a:t>What if, instead of re-reading the whole codebase every time, the AI could look up a pre-built “map” that already shows which functions connect to which?</a:t>
-            </a:r>
-          </a:p>
-        </p:txBody>
-      </p:sp>
-      <p:sp>
-        <p:nvSpPr>
-          <p:cNvPr id="5" name="TextBox 4"/>
-          <p:cNvSpPr txBox="1"/>
-          <p:nvPr/>
-        </p:nvSpPr>
-        <p:spPr>
-          <a:xfrm>
-            <a:off x="640080" y="3749039"/>
-            <a:ext cx="10515600" cy="2011680"/>
-          </a:xfrm>
-          <a:prstGeom prst="rect">
-            <a:avLst/>
-          </a:prstGeom>
-          <a:noFill/>
-        </p:spPr>
-        <p:txBody>
-          <a:bodyPr wrap="square" anchor="t">
-            <a:spAutoFit/>
-          </a:bodyPr>
-          <a:lstStyle/>
-          <a:p>
-            <a:pPr algn="l">
-              <a:lnSpc>
-                <a:spcPct val="115000"/>
-              </a:lnSpc>
-            </a:pPr>
-            <a:r>
-              <a:rPr sz="1850" b="0" i="0">
+              <a:t>▸  </a:t>
+            </a:r>
+            <a:r>
+              <a:rPr sz="1450">
                 <a:solidFill>
                   <a:srgbClr val="333333"/>
                 </a:solidFill>
                 <a:latin typeface="Calibri"/>
               </a:rPr>
-              <a:t>That's what ContextAI's code-graph tool promises to do.</a:t>
-            </a:r>
-          </a:p>
-          <a:p>
-            <a:pPr algn="l">
+              <a:t>Each function/class becomes a rich node: its code, inputs/outputs, error handling, complexity, even test coverage &amp; git history.</a:t>
+            </a:r>
+          </a:p>
+          <a:p>
+            <a:pPr>
               <a:lnSpc>
-                <a:spcPct val="115000"/>
+                <a:spcPct val="108000"/>
               </a:lnSpc>
+              <a:spcAft>
+                <a:spcPts val="1000"/>
+              </a:spcAft>
             </a:pPr>
-          </a:p>
-          <a:p>
-            <a:pPr algn="l">
-              <a:lnSpc>
-                <a:spcPct val="115000"/>
-              </a:lnSpc>
-            </a:pPr>
-            <a:r>
-              <a:rPr sz="1850" b="0" i="0">
-                <a:solidFill>
-                  <a:srgbClr val="333333"/>
+            <a:r>
+              <a:rPr sz="1450" b="1">
+                <a:solidFill>
+                  <a:srgbClr val="2CA02C"/>
                 </a:solidFill>
                 <a:latin typeface="Calibri"/>
               </a:rPr>
-              <a:t>This is exactly the kind of tool people believed, a few months ago, that AI coding assistants would badly need — codebases are big, and AI “attention” was limited. We built a rigorous, real-world test to find out if it actually helps.</a:t>
-            </a:r>
-          </a:p>
-        </p:txBody>
-      </p:sp>
-      <p:sp>
-        <p:nvSpPr>
-          <p:cNvPr id="6" name="TextBox 5"/>
-          <p:cNvSpPr txBox="1"/>
-          <p:nvPr/>
-        </p:nvSpPr>
-        <p:spPr>
-          <a:xfrm>
-            <a:off x="502920" y="6473952"/>
-            <a:ext cx="8229600" cy="320040"/>
-          </a:xfrm>
-          <a:prstGeom prst="rect">
-            <a:avLst/>
-          </a:prstGeom>
-          <a:noFill/>
-        </p:spPr>
-        <p:txBody>
-          <a:bodyPr wrap="square" anchor="t">
-            <a:spAutoFit/>
-          </a:bodyPr>
-          <a:lstStyle/>
-          <a:p>
-            <a:pPr algn="l">
-              <a:lnSpc>
-                <a:spcPct val="115000"/>
-              </a:lnSpc>
-            </a:pPr>
-            <a:r>
-              <a:rPr sz="1050" b="0" i="0">
-                <a:solidFill>
-                  <a:srgbClr val="AAAAAA"/>
+              <a:t>▸  </a:t>
+            </a:r>
+            <a:r>
+              <a:rPr sz="1450">
+                <a:solidFill>
+                  <a:srgbClr val="333333"/>
                 </a:solidFill>
                 <a:latin typeface="Calibri"/>
               </a:rPr>
-              <a:t>Part 1 — The Idea</a:t>
+              <a:t>Each connection becomes a typed edge (calls, imports, reads/writes data, and more), with how critical and how likely-to-fail it is.</a:t>
+            </a:r>
+          </a:p>
+          <a:p>
+            <a:pPr>
+              <a:lnSpc>
+                <a:spcPct val="108000"/>
+              </a:lnSpc>
+              <a:spcAft>
+                <a:spcPts val="1000"/>
+              </a:spcAft>
+            </a:pPr>
+            <a:r>
+              <a:rPr sz="1450" b="1">
+                <a:solidFill>
+                  <a:srgbClr val="2CA02C"/>
+                </a:solidFill>
+                <a:latin typeface="Calibri"/>
+              </a:rPr>
+              <a:t>▸  </a:t>
+            </a:r>
+            <a:r>
+              <a:rPr sz="1450">
+                <a:solidFill>
+                  <a:srgbClr val="333333"/>
+                </a:solidFill>
+                <a:latin typeface="Calibri"/>
+              </a:rPr>
+              <a:t>Alpha stage, but backed by 150+ automated tests.</a:t>
             </a:r>
           </a:p>
         </p:txBody>
@@ -7661,8 +5317,8 @@
         </p:nvSpPr>
         <p:spPr>
           <a:xfrm>
-            <a:off x="502920" y="384048"/>
-            <a:ext cx="11155680" cy="822960"/>
+            <a:off x="502920" y="274320"/>
+            <a:ext cx="9875520" cy="640080"/>
           </a:xfrm>
           <a:prstGeom prst="rect">
             <a:avLst/>
@@ -7677,17 +5333,17 @@
           <a:p>
             <a:pPr algn="l">
               <a:lnSpc>
-                <a:spcPct val="115000"/>
+                <a:spcPct val="112000"/>
               </a:lnSpc>
             </a:pPr>
             <a:r>
-              <a:rPr sz="3200" b="1" i="0">
+              <a:rPr sz="2800" b="1" i="0">
                 <a:solidFill>
                   <a:srgbClr val="1A1A2E"/>
                 </a:solidFill>
                 <a:latin typeface="Calibri"/>
               </a:rPr>
-              <a:t>What is a “code graph,” really?</a:t>
+              <a:t>Project 2: ConnectContext — the bridge</a:t>
             </a:r>
           </a:p>
         </p:txBody>
@@ -7700,14 +5356,14 @@
         </p:nvSpPr>
         <p:spPr>
           <a:xfrm>
-            <a:off x="502920" y="1170432"/>
+            <a:off x="502920" y="896112"/>
             <a:ext cx="2011680" cy="50800"/>
           </a:xfrm>
           <a:prstGeom prst="rect">
             <a:avLst/>
           </a:prstGeom>
           <a:solidFill>
-            <a:srgbClr val="2CA02C"/>
+            <a:srgbClr val="2563EB"/>
           </a:solidFill>
           <a:ln>
             <a:noFill/>
@@ -7738,46 +5394,60 @@
       </p:sp>
       <p:sp>
         <p:nvSpPr>
-          <p:cNvPr id="4" name="TextBox 3"/>
-          <p:cNvSpPr txBox="1"/>
-          <p:nvPr/>
-        </p:nvSpPr>
-        <p:spPr>
-          <a:xfrm>
-            <a:off x="640080" y="1691640"/>
-            <a:ext cx="10881360" cy="1371600"/>
-          </a:xfrm>
-          <a:prstGeom prst="rect">
-            <a:avLst/>
-          </a:prstGeom>
-          <a:noFill/>
-        </p:spPr>
-        <p:txBody>
-          <a:bodyPr wrap="square" anchor="t">
-            <a:spAutoFit/>
-          </a:bodyPr>
-          <a:lstStyle/>
-          <a:p>
-            <a:pPr algn="l">
-              <a:lnSpc>
-                <a:spcPct val="115000"/>
-              </a:lnSpc>
-            </a:pPr>
-            <a:r>
-              <a:rPr sz="1900" b="0" i="1">
-                <a:solidFill>
-                  <a:srgbClr val="1A1A2E"/>
+          <p:cNvPr id="4" name="Rectangle 3"/>
+          <p:cNvSpPr/>
+          <p:nvPr/>
+        </p:nvSpPr>
+        <p:spPr>
+          <a:xfrm>
+            <a:off x="8360359" y="384048"/>
+            <a:ext cx="3374136" cy="365760"/>
+          </a:xfrm>
+          <a:prstGeom prst="rect">
+            <a:avLst/>
+          </a:prstGeom>
+          <a:solidFill>
+            <a:srgbClr val="2563EB"/>
+          </a:solidFill>
+          <a:ln>
+            <a:noFill/>
+          </a:ln>
+          <a:effectLst/>
+        </p:spPr>
+        <p:style>
+          <a:lnRef idx="1">
+            <a:schemeClr val="accent1"/>
+          </a:lnRef>
+          <a:fillRef idx="3">
+            <a:schemeClr val="accent1"/>
+          </a:fillRef>
+          <a:effectRef idx="2">
+            <a:schemeClr val="accent1"/>
+          </a:effectRef>
+          <a:fontRef idx="minor">
+            <a:schemeClr val="lt1"/>
+          </a:fontRef>
+        </p:style>
+        <p:txBody>
+          <a:bodyPr rtlCol="0" anchor="ctr" wrap="none" lIns="0" rIns="0" tIns="0" bIns="0"/>
+          <a:lstStyle/>
+          <a:p>
+            <a:pPr algn="ctr"/>
+            <a:r>
+              <a:rPr sz="1100" b="1">
+                <a:solidFill>
+                  <a:srgbClr val="FFFFFF"/>
                 </a:solidFill>
                 <a:latin typeface="Calibri"/>
               </a:rPr>
-              <a:t>Think of it like a subway map for your code. Instead of a list of station names, it shows every station (function) and every line connecting them (which function calls which) — so you can trace a route instantly.</a:t>
+              <a:t>2 · THE THREE PROJECTS</a:t>
             </a:r>
           </a:p>
         </p:txBody>
       </p:sp>
       <p:pic>
         <p:nvPicPr>
-          <p:cNvPr id="5" name="Picture 4" descr="graph_capabilities.png"/>
+          <p:cNvPr id="5" name="Picture 4" descr="tool_tiers.png"/>
           <p:cNvPicPr>
             <a:picLocks noChangeAspect="1"/>
           </p:cNvPicPr>
@@ -7791,53 +5461,14 @@
         </p:blipFill>
         <p:spPr>
           <a:xfrm>
-            <a:off x="2893044" y="2880360"/>
-            <a:ext cx="6375432" cy="3566160"/>
+            <a:off x="1585263" y="1417320"/>
+            <a:ext cx="8990994" cy="5029200"/>
           </a:xfrm>
           <a:prstGeom prst="rect">
             <a:avLst/>
           </a:prstGeom>
         </p:spPr>
       </p:pic>
-      <p:sp>
-        <p:nvSpPr>
-          <p:cNvPr id="6" name="TextBox 5"/>
-          <p:cNvSpPr txBox="1"/>
-          <p:nvPr/>
-        </p:nvSpPr>
-        <p:spPr>
-          <a:xfrm>
-            <a:off x="502920" y="6473952"/>
-            <a:ext cx="8229600" cy="320040"/>
-          </a:xfrm>
-          <a:prstGeom prst="rect">
-            <a:avLst/>
-          </a:prstGeom>
-          <a:noFill/>
-        </p:spPr>
-        <p:txBody>
-          <a:bodyPr wrap="square" anchor="t">
-            <a:spAutoFit/>
-          </a:bodyPr>
-          <a:lstStyle/>
-          <a:p>
-            <a:pPr algn="l">
-              <a:lnSpc>
-                <a:spcPct val="115000"/>
-              </a:lnSpc>
-            </a:pPr>
-            <a:r>
-              <a:rPr sz="1050" b="0" i="0">
-                <a:solidFill>
-                  <a:srgbClr val="AAAAAA"/>
-                </a:solidFill>
-                <a:latin typeface="Calibri"/>
-              </a:rPr>
-              <a:t>Part 1 — The Idea</a:t>
-            </a:r>
-          </a:p>
-        </p:txBody>
-      </p:sp>
     </p:spTree>
   </p:cSld>
   <p:clrMapOvr>
@@ -7872,8 +5503,8 @@
         </p:nvSpPr>
         <p:spPr>
           <a:xfrm>
-            <a:off x="502920" y="384048"/>
-            <a:ext cx="11155680" cy="822960"/>
+            <a:off x="502920" y="274320"/>
+            <a:ext cx="9875520" cy="640080"/>
           </a:xfrm>
           <a:prstGeom prst="rect">
             <a:avLst/>
@@ -7888,17 +5519,17 @@
           <a:p>
             <a:pPr algn="l">
               <a:lnSpc>
-                <a:spcPct val="115000"/>
+                <a:spcPct val="112000"/>
               </a:lnSpc>
             </a:pPr>
             <a:r>
-              <a:rPr sz="3200" b="1" i="0">
+              <a:rPr sz="2600" b="1" i="0">
                 <a:solidFill>
                   <a:srgbClr val="1A1A2E"/>
                 </a:solidFill>
                 <a:latin typeface="Calibri"/>
               </a:rPr>
-              <a:t>The question we set out to answer</a:t>
+              <a:t>Project 3: this evaluation — what we built</a:t>
             </a:r>
           </a:p>
         </p:txBody>
@@ -7911,14 +5542,14 @@
         </p:nvSpPr>
         <p:spPr>
           <a:xfrm>
-            <a:off x="502920" y="1170432"/>
+            <a:off x="502920" y="896112"/>
             <a:ext cx="2011680" cy="50800"/>
           </a:xfrm>
           <a:prstGeom prst="rect">
             <a:avLst/>
           </a:prstGeom>
           <a:solidFill>
-            <a:srgbClr val="2CA02C"/>
+            <a:srgbClr val="D97706"/>
           </a:solidFill>
           <a:ln>
             <a:noFill/>
@@ -7955,20 +5586,19 @@
         </p:nvSpPr>
         <p:spPr>
           <a:xfrm>
-            <a:off x="1188720" y="2286000"/>
-            <a:ext cx="9784080" cy="2377440"/>
+            <a:off x="8360359" y="384048"/>
+            <a:ext cx="3374136" cy="365760"/>
           </a:xfrm>
           <a:prstGeom prst="rect">
             <a:avLst/>
           </a:prstGeom>
           <a:solidFill>
-            <a:srgbClr val="F7F8FA"/>
+            <a:srgbClr val="D97706"/>
           </a:solidFill>
-          <a:ln w="31750">
-            <a:solidFill>
-              <a:srgbClr val="2CA02C"/>
-            </a:solidFill>
+          <a:ln>
+            <a:noFill/>
           </a:ln>
+          <a:effectLst/>
         </p:spPr>
         <p:style>
           <a:lnRef idx="1">
@@ -7985,32 +5615,191 @@
           </a:fontRef>
         </p:style>
         <p:txBody>
-          <a:bodyPr rtlCol="0" anchor="ctr" wrap="square"/>
+          <a:bodyPr rtlCol="0" anchor="ctr" wrap="none" lIns="0" rIns="0" tIns="0" bIns="0"/>
           <a:lstStyle/>
           <a:p>
             <a:pPr algn="ctr"/>
             <a:r>
-              <a:rPr sz="2500" b="1">
-                <a:solidFill>
-                  <a:srgbClr val="1A1A2E"/>
+              <a:rPr sz="1100" b="1">
+                <a:solidFill>
+                  <a:srgbClr val="FFFFFF"/>
                 </a:solidFill>
                 <a:latin typeface="Calibri"/>
               </a:rPr>
-              <a:t>“Does a real AI coding assistant answer code questions better when it also has ContextAI's map — compared to using only its normal tools?”</a:t>
-            </a:r>
-          </a:p>
-        </p:txBody>
-      </p:sp>
-      <p:sp>
-        <p:nvSpPr>
-          <p:cNvPr id="5" name="TextBox 4"/>
+              <a:t>2 · THE THREE PROJECTS</a:t>
+            </a:r>
+          </a:p>
+        </p:txBody>
+      </p:sp>
+      <p:pic>
+        <p:nvPicPr>
+          <p:cNvPr id="5" name="Picture 4" descr="two_modes.png"/>
+          <p:cNvPicPr>
+            <a:picLocks noChangeAspect="1"/>
+          </p:cNvPicPr>
+          <p:nvPr/>
+        </p:nvPicPr>
+        <p:blipFill>
+          <a:blip r:embed="rId2"/>
+          <a:stretch>
+            <a:fillRect/>
+          </a:stretch>
+        </p:blipFill>
+        <p:spPr>
+          <a:xfrm>
+            <a:off x="433868" y="1417320"/>
+            <a:ext cx="6538904" cy="3657600"/>
+          </a:xfrm>
+          <a:prstGeom prst="rect">
+            <a:avLst/>
+          </a:prstGeom>
+        </p:spPr>
+      </p:pic>
+      <p:sp>
+        <p:nvSpPr>
+          <p:cNvPr id="6" name="TextBox 5"/>
           <p:cNvSpPr txBox="1"/>
           <p:nvPr/>
         </p:nvSpPr>
         <p:spPr>
           <a:xfrm>
-            <a:off x="1188720" y="5029200"/>
-            <a:ext cx="9784080" cy="914400"/>
+            <a:off x="7315200" y="1600200"/>
+            <a:ext cx="4572000" cy="4389120"/>
+          </a:xfrm>
+          <a:prstGeom prst="rect">
+            <a:avLst/>
+          </a:prstGeom>
+          <a:noFill/>
+        </p:spPr>
+        <p:txBody>
+          <a:bodyPr wrap="square">
+            <a:spAutoFit/>
+          </a:bodyPr>
+          <a:lstStyle/>
+          <a:p>
+            <a:pPr>
+              <a:lnSpc>
+                <a:spcPct val="108000"/>
+              </a:lnSpc>
+              <a:spcAft>
+                <a:spcPts val="900"/>
+              </a:spcAft>
+            </a:pPr>
+            <a:r>
+              <a:rPr sz="1500" b="1">
+                <a:solidFill>
+                  <a:srgbClr val="2CA02C"/>
+                </a:solidFill>
+                <a:latin typeface="Calibri"/>
+              </a:rPr>
+              <a:t>▸  </a:t>
+            </a:r>
+            <a:r>
+              <a:rPr sz="1500">
+                <a:solidFill>
+                  <a:srgbClr val="333333"/>
+                </a:solidFill>
+                <a:latin typeface="Calibri"/>
+              </a:rPr>
+              <a:t>4 real open-source projects (Flask, Click, HTTPX, Rich), 9k–26k lines each.</a:t>
+            </a:r>
+          </a:p>
+          <a:p>
+            <a:pPr>
+              <a:lnSpc>
+                <a:spcPct val="108000"/>
+              </a:lnSpc>
+              <a:spcAft>
+                <a:spcPts val="900"/>
+              </a:spcAft>
+            </a:pPr>
+            <a:r>
+              <a:rPr sz="1500" b="1">
+                <a:solidFill>
+                  <a:srgbClr val="2CA02C"/>
+                </a:solidFill>
+                <a:latin typeface="Calibri"/>
+              </a:rPr>
+              <a:t>▸  </a:t>
+            </a:r>
+            <a:r>
+              <a:rPr sz="1500">
+                <a:solidFill>
+                  <a:srgbClr val="333333"/>
+                </a:solidFill>
+                <a:latin typeface="Calibri"/>
+              </a:rPr>
+              <a:t>48 realistic questions (“who calls this,” “what breaks if I change this,” and more).</a:t>
+            </a:r>
+          </a:p>
+          <a:p>
+            <a:pPr>
+              <a:lnSpc>
+                <a:spcPct val="108000"/>
+              </a:lnSpc>
+              <a:spcAft>
+                <a:spcPts val="900"/>
+              </a:spcAft>
+            </a:pPr>
+            <a:r>
+              <a:rPr sz="1500" b="1">
+                <a:solidFill>
+                  <a:srgbClr val="2CA02C"/>
+                </a:solidFill>
+                <a:latin typeface="Calibri"/>
+              </a:rPr>
+              <a:t>▸  </a:t>
+            </a:r>
+            <a:r>
+              <a:rPr sz="1500">
+                <a:solidFill>
+                  <a:srgbClr val="333333"/>
+                </a:solidFill>
+                <a:latin typeface="Calibri"/>
+              </a:rPr>
+              <a:t>A real AI coding agent (OpenAI's Codex) — not a toy stand-in.</a:t>
+            </a:r>
+          </a:p>
+          <a:p>
+            <a:pPr>
+              <a:lnSpc>
+                <a:spcPct val="108000"/>
+              </a:lnSpc>
+              <a:spcAft>
+                <a:spcPts val="900"/>
+              </a:spcAft>
+            </a:pPr>
+            <a:r>
+              <a:rPr sz="1500" b="1">
+                <a:solidFill>
+                  <a:srgbClr val="2CA02C"/>
+                </a:solidFill>
+                <a:latin typeface="Calibri"/>
+              </a:rPr>
+              <a:t>▸  </a:t>
+            </a:r>
+            <a:r>
+              <a:rPr sz="1500">
+                <a:solidFill>
+                  <a:srgbClr val="333333"/>
+                </a:solidFill>
+                <a:latin typeface="Calibri"/>
+              </a:rPr>
+              <a:t>ConnectContext plugged in exactly the way a real developer would.</a:t>
+            </a:r>
+          </a:p>
+        </p:txBody>
+      </p:sp>
+      <p:sp>
+        <p:nvSpPr>
+          <p:cNvPr id="7" name="TextBox 6"/>
+          <p:cNvSpPr txBox="1"/>
+          <p:nvPr/>
+        </p:nvSpPr>
+        <p:spPr>
+          <a:xfrm>
+            <a:off x="365760" y="5257800"/>
+            <a:ext cx="6675120" cy="640080"/>
           </a:xfrm>
           <a:prstGeom prst="rect">
             <a:avLst/>
@@ -8025,56 +5814,17 @@
           <a:p>
             <a:pPr algn="ctr">
               <a:lnSpc>
-                <a:spcPct val="115000"/>
+                <a:spcPct val="112000"/>
               </a:lnSpc>
             </a:pPr>
             <a:r>
-              <a:rPr sz="1700" b="0" i="1">
+              <a:rPr sz="1300" b="0" i="1">
                 <a:solidFill>
                   <a:srgbClr val="666666"/>
                 </a:solidFill>
                 <a:latin typeface="Calibri"/>
               </a:rPr>
-              <a:t>We answered this with real runs of a real AI agent — not a guess.</a:t>
-            </a:r>
-          </a:p>
-        </p:txBody>
-      </p:sp>
-      <p:sp>
-        <p:nvSpPr>
-          <p:cNvPr id="6" name="TextBox 5"/>
-          <p:cNvSpPr txBox="1"/>
-          <p:nvPr/>
-        </p:nvSpPr>
-        <p:spPr>
-          <a:xfrm>
-            <a:off x="502920" y="6473952"/>
-            <a:ext cx="8229600" cy="320040"/>
-          </a:xfrm>
-          <a:prstGeom prst="rect">
-            <a:avLst/>
-          </a:prstGeom>
-          <a:noFill/>
-        </p:spPr>
-        <p:txBody>
-          <a:bodyPr wrap="square" anchor="t">
-            <a:spAutoFit/>
-          </a:bodyPr>
-          <a:lstStyle/>
-          <a:p>
-            <a:pPr algn="l">
-              <a:lnSpc>
-                <a:spcPct val="115000"/>
-              </a:lnSpc>
-            </a:pPr>
-            <a:r>
-              <a:rPr sz="1050" b="0" i="0">
-                <a:solidFill>
-                  <a:srgbClr val="AAAAAA"/>
-                </a:solidFill>
-                <a:latin typeface="Calibri"/>
-              </a:rPr>
-              <a:t>Part 1 — The Idea</a:t>
+              <a:t>Same questions. Same AI. Same rules. The map is the only thing that's different.</a:t>
             </a:r>
           </a:p>
         </p:txBody>
@@ -8093,7 +5843,7 @@
     <p:bg>
       <p:bgPr>
         <a:solidFill>
-          <a:srgbClr val="1A1A2E"/>
+          <a:srgbClr val="FFFFFF"/>
         </a:solidFill>
         <a:effectLst/>
       </p:bgPr>
@@ -8113,8 +5863,8 @@
         </p:nvSpPr>
         <p:spPr>
           <a:xfrm>
-            <a:off x="914400" y="2194560"/>
-            <a:ext cx="1828800" cy="1280160"/>
+            <a:off x="502920" y="274320"/>
+            <a:ext cx="9875520" cy="640080"/>
           </a:xfrm>
           <a:prstGeom prst="rect">
             <a:avLst/>
@@ -8129,31 +5879,152 @@
           <a:p>
             <a:pPr algn="l">
               <a:lnSpc>
-                <a:spcPct val="115000"/>
+                <a:spcPct val="112000"/>
               </a:lnSpc>
             </a:pPr>
             <a:r>
-              <a:rPr sz="9000" b="1" i="0">
-                <a:solidFill>
-                  <a:srgbClr val="2CA02C"/>
+              <a:rPr sz="2800" b="1" i="0">
+                <a:solidFill>
+                  <a:srgbClr val="1A1A2E"/>
                 </a:solidFill>
                 <a:latin typeface="Calibri"/>
               </a:rPr>
-              <a:t>2</a:t>
-            </a:r>
-          </a:p>
-        </p:txBody>
-      </p:sp>
-      <p:sp>
-        <p:nvSpPr>
-          <p:cNvPr id="3" name="TextBox 2"/>
+              <a:t>Wiring it up — and two real hiccups</a:t>
+            </a:r>
+          </a:p>
+        </p:txBody>
+      </p:sp>
+      <p:sp>
+        <p:nvSpPr>
+          <p:cNvPr id="3" name="Rectangle 2"/>
+          <p:cNvSpPr/>
+          <p:nvPr/>
+        </p:nvSpPr>
+        <p:spPr>
+          <a:xfrm>
+            <a:off x="502920" y="896112"/>
+            <a:ext cx="2011680" cy="50800"/>
+          </a:xfrm>
+          <a:prstGeom prst="rect">
+            <a:avLst/>
+          </a:prstGeom>
+          <a:solidFill>
+            <a:srgbClr val="2563EB"/>
+          </a:solidFill>
+          <a:ln>
+            <a:noFill/>
+          </a:ln>
+          <a:effectLst/>
+        </p:spPr>
+        <p:style>
+          <a:lnRef idx="1">
+            <a:schemeClr val="accent1"/>
+          </a:lnRef>
+          <a:fillRef idx="3">
+            <a:schemeClr val="accent1"/>
+          </a:fillRef>
+          <a:effectRef idx="2">
+            <a:schemeClr val="accent1"/>
+          </a:effectRef>
+          <a:fontRef idx="minor">
+            <a:schemeClr val="lt1"/>
+          </a:fontRef>
+        </p:style>
+        <p:txBody>
+          <a:bodyPr rtlCol="0" anchor="ctr"/>
+          <a:lstStyle/>
+          <a:p>
+            <a:pPr algn="ctr"/>
+          </a:p>
+        </p:txBody>
+      </p:sp>
+      <p:sp>
+        <p:nvSpPr>
+          <p:cNvPr id="4" name="Rectangle 3"/>
+          <p:cNvSpPr/>
+          <p:nvPr/>
+        </p:nvSpPr>
+        <p:spPr>
+          <a:xfrm>
+            <a:off x="9818828" y="384048"/>
+            <a:ext cx="1915667" cy="365760"/>
+          </a:xfrm>
+          <a:prstGeom prst="rect">
+            <a:avLst/>
+          </a:prstGeom>
+          <a:solidFill>
+            <a:srgbClr val="2563EB"/>
+          </a:solidFill>
+          <a:ln>
+            <a:noFill/>
+          </a:ln>
+          <a:effectLst/>
+        </p:spPr>
+        <p:style>
+          <a:lnRef idx="1">
+            <a:schemeClr val="accent1"/>
+          </a:lnRef>
+          <a:fillRef idx="3">
+            <a:schemeClr val="accent1"/>
+          </a:fillRef>
+          <a:effectRef idx="2">
+            <a:schemeClr val="accent1"/>
+          </a:effectRef>
+          <a:fontRef idx="minor">
+            <a:schemeClr val="lt1"/>
+          </a:fontRef>
+        </p:style>
+        <p:txBody>
+          <a:bodyPr rtlCol="0" anchor="ctr" wrap="none" lIns="0" rIns="0" tIns="0" bIns="0"/>
+          <a:lstStyle/>
+          <a:p>
+            <a:pPr algn="ctr"/>
+            <a:r>
+              <a:rPr sz="1100" b="1">
+                <a:solidFill>
+                  <a:srgbClr val="FFFFFF"/>
+                </a:solidFill>
+                <a:latin typeface="Calibri"/>
+              </a:rPr>
+              <a:t>3 · TESTING</a:t>
+            </a:r>
+          </a:p>
+        </p:txBody>
+      </p:sp>
+      <p:pic>
+        <p:nvPicPr>
+          <p:cNvPr id="5" name="Picture 4" descr="mcp_connection.png"/>
+          <p:cNvPicPr>
+            <a:picLocks noChangeAspect="1"/>
+          </p:cNvPicPr>
+          <p:nvPr/>
+        </p:nvPicPr>
+        <p:blipFill>
+          <a:blip r:embed="rId2"/>
+          <a:stretch>
+            <a:fillRect/>
+          </a:stretch>
+        </p:blipFill>
+        <p:spPr>
+          <a:xfrm>
+            <a:off x="365760" y="1465236"/>
+            <a:ext cx="6857999" cy="3836088"/>
+          </a:xfrm>
+          <a:prstGeom prst="rect">
+            <a:avLst/>
+          </a:prstGeom>
+        </p:spPr>
+      </p:pic>
+      <p:sp>
+        <p:nvSpPr>
+          <p:cNvPr id="6" name="TextBox 5"/>
           <p:cNvSpPr txBox="1"/>
           <p:nvPr/>
         </p:nvSpPr>
         <p:spPr>
           <a:xfrm>
-            <a:off x="3017520" y="2514600"/>
-            <a:ext cx="8229600" cy="914400"/>
+            <a:off x="7406640" y="1508760"/>
+            <a:ext cx="4480560" cy="365760"/>
           </a:xfrm>
           <a:prstGeom prst="rect">
             <a:avLst/>
@@ -8168,31 +6039,31 @@
           <a:p>
             <a:pPr algn="l">
               <a:lnSpc>
-                <a:spcPct val="115000"/>
+                <a:spcPct val="112000"/>
               </a:lnSpc>
             </a:pPr>
             <a:r>
-              <a:rPr sz="3400" b="1" i="0">
-                <a:solidFill>
-                  <a:srgbClr val="FFFFFF"/>
+              <a:rPr sz="1500" b="1" i="0">
+                <a:solidFill>
+                  <a:srgbClr val="D97706"/>
                 </a:solidFill>
                 <a:latin typeface="Calibri"/>
               </a:rPr>
-              <a:t>What We Built</a:t>
-            </a:r>
-          </a:p>
-        </p:txBody>
-      </p:sp>
-      <p:sp>
-        <p:nvSpPr>
-          <p:cNvPr id="4" name="TextBox 3"/>
+              <a:t>🐛 Hidden naming clash</a:t>
+            </a:r>
+          </a:p>
+        </p:txBody>
+      </p:sp>
+      <p:sp>
+        <p:nvSpPr>
+          <p:cNvPr id="7" name="TextBox 6"/>
           <p:cNvSpPr txBox="1"/>
           <p:nvPr/>
         </p:nvSpPr>
         <p:spPr>
           <a:xfrm>
-            <a:off x="3017520" y="3429000"/>
-            <a:ext cx="8229600" cy="914400"/>
+            <a:off x="7406640" y="1920240"/>
+            <a:ext cx="4480560" cy="1371600"/>
           </a:xfrm>
           <a:prstGeom prst="rect">
             <a:avLst/>
@@ -8207,17 +6078,95 @@
           <a:p>
             <a:pPr algn="l">
               <a:lnSpc>
-                <a:spcPct val="115000"/>
+                <a:spcPct val="112000"/>
               </a:lnSpc>
             </a:pPr>
             <a:r>
-              <a:rPr sz="1700" b="0" i="1">
-                <a:solidFill>
-                  <a:srgbClr val="94A3B8"/>
+              <a:rPr sz="1300" b="0" i="0">
+                <a:solidFill>
+                  <a:srgbClr val="333333"/>
                 </a:solidFill>
                 <a:latin typeface="Calibri"/>
               </a:rPr>
-              <a:t>Reproducing a real, fair test</a:t>
+              <a:t>Flask ships a file with the same name as a core Python module, which silently broke the map-builder when run inside it. Fixed by keeping it in its own safe folder.</a:t>
+            </a:r>
+          </a:p>
+        </p:txBody>
+      </p:sp>
+      <p:sp>
+        <p:nvSpPr>
+          <p:cNvPr id="8" name="TextBox 7"/>
+          <p:cNvSpPr txBox="1"/>
+          <p:nvPr/>
+        </p:nvSpPr>
+        <p:spPr>
+          <a:xfrm>
+            <a:off x="7406640" y="3429000"/>
+            <a:ext cx="4480560" cy="365760"/>
+          </a:xfrm>
+          <a:prstGeom prst="rect">
+            <a:avLst/>
+          </a:prstGeom>
+          <a:noFill/>
+        </p:spPr>
+        <p:txBody>
+          <a:bodyPr wrap="square" anchor="t">
+            <a:spAutoFit/>
+          </a:bodyPr>
+          <a:lstStyle/>
+          <a:p>
+            <a:pPr algn="l">
+              <a:lnSpc>
+                <a:spcPct val="112000"/>
+              </a:lnSpc>
+            </a:pPr>
+            <a:r>
+              <a:rPr sz="1500" b="1" i="0">
+                <a:solidFill>
+                  <a:srgbClr val="D97706"/>
+                </a:solidFill>
+                <a:latin typeface="Calibri"/>
+              </a:rPr>
+              <a:t>⏱️ Permissions limitation</a:t>
+            </a:r>
+          </a:p>
+        </p:txBody>
+      </p:sp>
+      <p:sp>
+        <p:nvSpPr>
+          <p:cNvPr id="9" name="TextBox 8"/>
+          <p:cNvSpPr txBox="1"/>
+          <p:nvPr/>
+        </p:nvSpPr>
+        <p:spPr>
+          <a:xfrm>
+            <a:off x="7406640" y="3840480"/>
+            <a:ext cx="4480560" cy="1371600"/>
+          </a:xfrm>
+          <a:prstGeom prst="rect">
+            <a:avLst/>
+          </a:prstGeom>
+          <a:noFill/>
+        </p:spPr>
+        <p:txBody>
+          <a:bodyPr wrap="square" anchor="t">
+            <a:spAutoFit/>
+          </a:bodyPr>
+          <a:lstStyle/>
+          <a:p>
+            <a:pPr algn="l">
+              <a:lnSpc>
+                <a:spcPct val="112000"/>
+              </a:lnSpc>
+            </a:pPr>
+            <a:r>
+              <a:rPr sz="1300" b="0" i="0">
+                <a:solidFill>
+                  <a:srgbClr val="333333"/>
+                </a:solidFill>
+                <a:latin typeface="Calibri"/>
+              </a:rPr>
+              <a:t>Run unattended, the AI tool wouldn't let the map get used at all — it waited for a permission click that could never come. Fixed with a setting, applied identically to both modes.</a:t>
             </a:r>
           </a:p>
         </p:txBody>
@@ -8256,8 +6205,8 @@
         </p:nvSpPr>
         <p:spPr>
           <a:xfrm>
-            <a:off x="502920" y="384048"/>
-            <a:ext cx="11155680" cy="822960"/>
+            <a:off x="502920" y="274320"/>
+            <a:ext cx="9875520" cy="640080"/>
           </a:xfrm>
           <a:prstGeom prst="rect">
             <a:avLst/>
@@ -8272,17 +6221,17 @@
           <a:p>
             <a:pPr algn="l">
               <a:lnSpc>
-                <a:spcPct val="115000"/>
+                <a:spcPct val="112000"/>
               </a:lnSpc>
             </a:pPr>
             <a:r>
-              <a:rPr sz="3200" b="1" i="0">
+              <a:rPr sz="2800" b="1" i="0">
                 <a:solidFill>
                   <a:srgbClr val="1A1A2E"/>
                 </a:solidFill>
                 <a:latin typeface="Calibri"/>
               </a:rPr>
-              <a:t>What we actually built &amp; reproduced</a:t>
+              <a:t>How we ran it, and how we graded it</a:t>
             </a:r>
           </a:p>
         </p:txBody>
@@ -8295,7 +6244,7 @@
         </p:nvSpPr>
         <p:spPr>
           <a:xfrm>
-            <a:off x="502920" y="1170432"/>
+            <a:off x="502920" y="896112"/>
             <a:ext cx="2011680" cy="50800"/>
           </a:xfrm>
           <a:prstGeom prst="rect">
@@ -8333,206 +6282,105 @@
       </p:sp>
       <p:sp>
         <p:nvSpPr>
-          <p:cNvPr id="4" name="TextBox 3"/>
-          <p:cNvSpPr txBox="1"/>
-          <p:nvPr/>
-        </p:nvSpPr>
-        <p:spPr>
-          <a:xfrm>
-            <a:off x="640080" y="1828800"/>
-            <a:ext cx="10972800" cy="4114800"/>
-          </a:xfrm>
-          <a:prstGeom prst="rect">
-            <a:avLst/>
-          </a:prstGeom>
-          <a:noFill/>
-        </p:spPr>
-        <p:txBody>
-          <a:bodyPr wrap="square">
-            <a:spAutoFit/>
-          </a:bodyPr>
-          <a:lstStyle/>
-          <a:p>
-            <a:pPr>
-              <a:lnSpc>
-                <a:spcPct val="112000"/>
-              </a:lnSpc>
-              <a:spcAft>
-                <a:spcPts val="1400"/>
-              </a:spcAft>
-            </a:pPr>
-            <a:r>
-              <a:rPr sz="1950" b="1">
-                <a:solidFill>
-                  <a:srgbClr val="2CA02C"/>
+          <p:cNvPr id="4" name="Rectangle 3"/>
+          <p:cNvSpPr/>
+          <p:nvPr/>
+        </p:nvSpPr>
+        <p:spPr>
+          <a:xfrm>
+            <a:off x="9818828" y="384048"/>
+            <a:ext cx="1915667" cy="365760"/>
+          </a:xfrm>
+          <a:prstGeom prst="rect">
+            <a:avLst/>
+          </a:prstGeom>
+          <a:solidFill>
+            <a:srgbClr val="2CA02C"/>
+          </a:solidFill>
+          <a:ln>
+            <a:noFill/>
+          </a:ln>
+          <a:effectLst/>
+        </p:spPr>
+        <p:style>
+          <a:lnRef idx="1">
+            <a:schemeClr val="accent1"/>
+          </a:lnRef>
+          <a:fillRef idx="3">
+            <a:schemeClr val="accent1"/>
+          </a:fillRef>
+          <a:effectRef idx="2">
+            <a:schemeClr val="accent1"/>
+          </a:effectRef>
+          <a:fontRef idx="minor">
+            <a:schemeClr val="lt1"/>
+          </a:fontRef>
+        </p:style>
+        <p:txBody>
+          <a:bodyPr rtlCol="0" anchor="ctr" wrap="none" lIns="0" rIns="0" tIns="0" bIns="0"/>
+          <a:lstStyle/>
+          <a:p>
+            <a:pPr algn="ctr"/>
+            <a:r>
+              <a:rPr sz="1100" b="1">
+                <a:solidFill>
+                  <a:srgbClr val="FFFFFF"/>
                 </a:solidFill>
                 <a:latin typeface="Calibri"/>
               </a:rPr>
-              <a:t>▸  </a:t>
-            </a:r>
-            <a:r>
-              <a:rPr sz="1950">
-                <a:solidFill>
-                  <a:srgbClr val="333333"/>
-                </a:solidFill>
-                <a:latin typeface="Calibri"/>
-              </a:rPr>
-              <a:t>4 real, well-known open-source projects (Flask, Click, HTTPX, Rich) — the same code real developers use every day, 9,000 to 26,000 lines each.</a:t>
-            </a:r>
-          </a:p>
-          <a:p>
-            <a:pPr>
-              <a:lnSpc>
-                <a:spcPct val="112000"/>
-              </a:lnSpc>
-              <a:spcAft>
-                <a:spcPts val="1400"/>
-              </a:spcAft>
-            </a:pPr>
-            <a:r>
-              <a:rPr sz="1950" b="1">
-                <a:solidFill>
-                  <a:srgbClr val="2CA02C"/>
-                </a:solidFill>
-                <a:latin typeface="Calibri"/>
-              </a:rPr>
-              <a:t>▸  </a:t>
-            </a:r>
-            <a:r>
-              <a:rPr sz="1950">
-                <a:solidFill>
-                  <a:srgbClr val="333333"/>
-                </a:solidFill>
-                <a:latin typeface="Calibri"/>
-              </a:rPr>
-              <a:t>48 hand-written, realistic questions about that code (“who calls this,” “what breaks if I change this,” “trace this request end-to-end,” and more).</a:t>
-            </a:r>
-          </a:p>
-          <a:p>
-            <a:pPr>
-              <a:lnSpc>
-                <a:spcPct val="112000"/>
-              </a:lnSpc>
-              <a:spcAft>
-                <a:spcPts val="1400"/>
-              </a:spcAft>
-            </a:pPr>
-            <a:r>
-              <a:rPr sz="1950" b="1">
-                <a:solidFill>
-                  <a:srgbClr val="2CA02C"/>
-                </a:solidFill>
-                <a:latin typeface="Calibri"/>
-              </a:rPr>
-              <a:t>▸  </a:t>
-            </a:r>
-            <a:r>
-              <a:rPr sz="1950">
-                <a:solidFill>
-                  <a:srgbClr val="333333"/>
-                </a:solidFill>
-                <a:latin typeface="Calibri"/>
-              </a:rPr>
-              <a:t>A real AI coding agent (OpenAI's Codex) to answer them — not a toy stand-in.</a:t>
-            </a:r>
-          </a:p>
-          <a:p>
-            <a:pPr>
-              <a:lnSpc>
-                <a:spcPct val="112000"/>
-              </a:lnSpc>
-              <a:spcAft>
-                <a:spcPts val="1400"/>
-              </a:spcAft>
-            </a:pPr>
-            <a:r>
-              <a:rPr sz="1950" b="1">
-                <a:solidFill>
-                  <a:srgbClr val="2CA02C"/>
-                </a:solidFill>
-                <a:latin typeface="Calibri"/>
-              </a:rPr>
-              <a:t>▸  </a:t>
-            </a:r>
-            <a:r>
-              <a:rPr sz="1950">
-                <a:solidFill>
-                  <a:srgbClr val="333333"/>
-                </a:solidFill>
-                <a:latin typeface="Calibri"/>
-              </a:rPr>
-              <a:t>The actual ContextAI code-map tool, connected the same way a real developer would connect it — as a plug-in tool for the AI, not hard-wired into our test scripts.</a:t>
-            </a:r>
-          </a:p>
-          <a:p>
-            <a:pPr>
-              <a:lnSpc>
-                <a:spcPct val="112000"/>
-              </a:lnSpc>
-              <a:spcAft>
-                <a:spcPts val="1400"/>
-              </a:spcAft>
-            </a:pPr>
-            <a:r>
-              <a:rPr sz="1950" b="1">
-                <a:solidFill>
-                  <a:srgbClr val="2CA02C"/>
-                </a:solidFill>
-                <a:latin typeface="Calibri"/>
-              </a:rPr>
-              <a:t>▸  </a:t>
-            </a:r>
-            <a:r>
-              <a:rPr sz="1950">
-                <a:solidFill>
-                  <a:srgbClr val="333333"/>
-                </a:solidFill>
-                <a:latin typeface="Calibri"/>
-              </a:rPr>
-              <a:t>An automatic scoring system, so results are measured, not eyeballed.</a:t>
-            </a:r>
-          </a:p>
-        </p:txBody>
-      </p:sp>
-      <p:sp>
-        <p:nvSpPr>
-          <p:cNvPr id="5" name="TextBox 4"/>
-          <p:cNvSpPr txBox="1"/>
-          <p:nvPr/>
-        </p:nvSpPr>
-        <p:spPr>
-          <a:xfrm>
-            <a:off x="502920" y="6473952"/>
-            <a:ext cx="8229600" cy="320040"/>
-          </a:xfrm>
-          <a:prstGeom prst="rect">
-            <a:avLst/>
-          </a:prstGeom>
-          <a:noFill/>
-        </p:spPr>
-        <p:txBody>
-          <a:bodyPr wrap="square" anchor="t">
-            <a:spAutoFit/>
-          </a:bodyPr>
-          <a:lstStyle/>
-          <a:p>
-            <a:pPr algn="l">
-              <a:lnSpc>
-                <a:spcPct val="115000"/>
-              </a:lnSpc>
-            </a:pPr>
-            <a:r>
-              <a:rPr sz="1050" b="0" i="0">
-                <a:solidFill>
-                  <a:srgbClr val="AAAAAA"/>
-                </a:solidFill>
-                <a:latin typeface="Calibri"/>
-              </a:rPr>
-              <a:t>Part 2 — What We Built</a:t>
-            </a:r>
-          </a:p>
-        </p:txBody>
-      </p:sp>
+              <a:t>3 · TESTING</a:t>
+            </a:r>
+          </a:p>
+        </p:txBody>
+      </p:sp>
+      <p:pic>
+        <p:nvPicPr>
+          <p:cNvPr id="5" name="Picture 4" descr="pipeline.png"/>
+          <p:cNvPicPr>
+            <a:picLocks noChangeAspect="1"/>
+          </p:cNvPicPr>
+          <p:nvPr/>
+        </p:nvPicPr>
+        <p:blipFill>
+          <a:blip r:embed="rId2"/>
+          <a:stretch>
+            <a:fillRect/>
+          </a:stretch>
+        </p:blipFill>
+        <p:spPr>
+          <a:xfrm>
+            <a:off x="3751275" y="1371600"/>
+            <a:ext cx="4658969" cy="2606040"/>
+          </a:xfrm>
+          <a:prstGeom prst="rect">
+            <a:avLst/>
+          </a:prstGeom>
+        </p:spPr>
+      </p:pic>
+      <p:pic>
+        <p:nvPicPr>
+          <p:cNvPr id="6" name="Picture 5" descr="grading.png"/>
+          <p:cNvPicPr>
+            <a:picLocks noChangeAspect="1"/>
+          </p:cNvPicPr>
+          <p:nvPr/>
+        </p:nvPicPr>
+        <p:blipFill>
+          <a:blip r:embed="rId3"/>
+          <a:stretch>
+            <a:fillRect/>
+          </a:stretch>
+        </p:blipFill>
+        <p:spPr>
+          <a:xfrm>
+            <a:off x="3751275" y="3977639"/>
+            <a:ext cx="4658969" cy="2606040"/>
+          </a:xfrm>
+          <a:prstGeom prst="rect">
+            <a:avLst/>
+          </a:prstGeom>
+        </p:spPr>
+      </p:pic>
     </p:spTree>
   </p:cSld>
   <p:clrMapOvr>
@@ -8567,8 +6415,8 @@
         </p:nvSpPr>
         <p:spPr>
           <a:xfrm>
-            <a:off x="502920" y="384048"/>
-            <a:ext cx="11155680" cy="822960"/>
+            <a:off x="502920" y="274320"/>
+            <a:ext cx="9875520" cy="640080"/>
           </a:xfrm>
           <a:prstGeom prst="rect">
             <a:avLst/>
@@ -8583,17 +6431,17 @@
           <a:p>
             <a:pPr algn="l">
               <a:lnSpc>
-                <a:spcPct val="115000"/>
+                <a:spcPct val="112000"/>
               </a:lnSpc>
             </a:pPr>
             <a:r>
-              <a:rPr sz="3200" b="1" i="0">
+              <a:rPr sz="2800" b="1" i="0">
                 <a:solidFill>
                   <a:srgbClr val="1A1A2E"/>
                 </a:solidFill>
                 <a:latin typeface="Calibri"/>
               </a:rPr>
-              <a:t>Two modes, one fair comparison</a:t>
+              <a:t>The results: roughly a coin flip</a:t>
             </a:r>
           </a:p>
         </p:txBody>
@@ -8606,7 +6454,7 @@
         </p:nvSpPr>
         <p:spPr>
           <a:xfrm>
-            <a:off x="502920" y="1170432"/>
+            <a:off x="502920" y="896112"/>
             <a:ext cx="2011680" cy="50800"/>
           </a:xfrm>
           <a:prstGeom prst="rect">
@@ -8642,9 +6490,62 @@
           </a:p>
         </p:txBody>
       </p:sp>
+      <p:sp>
+        <p:nvSpPr>
+          <p:cNvPr id="4" name="Rectangle 3"/>
+          <p:cNvSpPr/>
+          <p:nvPr/>
+        </p:nvSpPr>
+        <p:spPr>
+          <a:xfrm>
+            <a:off x="9818828" y="384048"/>
+            <a:ext cx="1915667" cy="365760"/>
+          </a:xfrm>
+          <a:prstGeom prst="rect">
+            <a:avLst/>
+          </a:prstGeom>
+          <a:solidFill>
+            <a:srgbClr val="2CA02C"/>
+          </a:solidFill>
+          <a:ln>
+            <a:noFill/>
+          </a:ln>
+          <a:effectLst/>
+        </p:spPr>
+        <p:style>
+          <a:lnRef idx="1">
+            <a:schemeClr val="accent1"/>
+          </a:lnRef>
+          <a:fillRef idx="3">
+            <a:schemeClr val="accent1"/>
+          </a:fillRef>
+          <a:effectRef idx="2">
+            <a:schemeClr val="accent1"/>
+          </a:effectRef>
+          <a:fontRef idx="minor">
+            <a:schemeClr val="lt1"/>
+          </a:fontRef>
+        </p:style>
+        <p:txBody>
+          <a:bodyPr rtlCol="0" anchor="ctr" wrap="none" lIns="0" rIns="0" tIns="0" bIns="0"/>
+          <a:lstStyle/>
+          <a:p>
+            <a:pPr algn="ctr"/>
+            <a:r>
+              <a:rPr sz="1100" b="1">
+                <a:solidFill>
+                  <a:srgbClr val="FFFFFF"/>
+                </a:solidFill>
+                <a:latin typeface="Calibri"/>
+              </a:rPr>
+              <a:t>4 · RESULTS</a:t>
+            </a:r>
+          </a:p>
+        </p:txBody>
+      </p:sp>
       <p:pic>
         <p:nvPicPr>
-          <p:cNvPr id="4" name="Picture 3" descr="two_modes.png"/>
+          <p:cNvPr id="5" name="Picture 4" descr="chart_headline.png"/>
           <p:cNvPicPr>
             <a:picLocks noChangeAspect="1"/>
           </p:cNvPicPr>
@@ -8658,53 +6559,38 @@
         </p:blipFill>
         <p:spPr>
           <a:xfrm>
-            <a:off x="1830472" y="1691640"/>
-            <a:ext cx="8500576" cy="4754880"/>
+            <a:off x="274320" y="2058787"/>
+            <a:ext cx="5852160" cy="3654825"/>
           </a:xfrm>
           <a:prstGeom prst="rect">
             <a:avLst/>
           </a:prstGeom>
         </p:spPr>
       </p:pic>
-      <p:sp>
-        <p:nvSpPr>
-          <p:cNvPr id="5" name="TextBox 4"/>
-          <p:cNvSpPr txBox="1"/>
-          <p:nvPr/>
-        </p:nvSpPr>
-        <p:spPr>
-          <a:xfrm>
-            <a:off x="502920" y="6473952"/>
-            <a:ext cx="8229600" cy="320040"/>
-          </a:xfrm>
-          <a:prstGeom prst="rect">
-            <a:avLst/>
-          </a:prstGeom>
-          <a:noFill/>
-        </p:spPr>
-        <p:txBody>
-          <a:bodyPr wrap="square" anchor="t">
-            <a:spAutoFit/>
-          </a:bodyPr>
-          <a:lstStyle/>
-          <a:p>
-            <a:pPr algn="l">
-              <a:lnSpc>
-                <a:spcPct val="115000"/>
-              </a:lnSpc>
-            </a:pPr>
-            <a:r>
-              <a:rPr sz="1050" b="0" i="0">
-                <a:solidFill>
-                  <a:srgbClr val="AAAAAA"/>
-                </a:solidFill>
-                <a:latin typeface="Calibri"/>
-              </a:rPr>
-              <a:t>Part 2 — What We Built</a:t>
-            </a:r>
-          </a:p>
-        </p:txBody>
-      </p:sp>
+      <p:pic>
+        <p:nvPicPr>
+          <p:cNvPr id="6" name="Picture 5" descr="chart_by_project.png"/>
+          <p:cNvPicPr>
+            <a:picLocks noChangeAspect="1"/>
+          </p:cNvPicPr>
+          <p:nvPr/>
+        </p:nvPicPr>
+        <p:blipFill>
+          <a:blip r:embed="rId3"/>
+          <a:stretch>
+            <a:fillRect/>
+          </a:stretch>
+        </p:blipFill>
+        <p:spPr>
+          <a:xfrm>
+            <a:off x="6172200" y="2356106"/>
+            <a:ext cx="5760720" cy="3060188"/>
+          </a:xfrm>
+          <a:prstGeom prst="rect">
+            <a:avLst/>
+          </a:prstGeom>
+        </p:spPr>
+      </p:pic>
     </p:spTree>
   </p:cSld>
   <p:clrMapOvr>

--- a/presentation/ContextAI_Evaluation.pptx
+++ b/presentation/ContextAI_Evaluation.pptx
@@ -18,6 +18,8 @@
     <p:sldId id="266" r:id="rId17"/>
     <p:sldId id="267" r:id="rId18"/>
     <p:sldId id="268" r:id="rId19"/>
+    <p:sldId id="269" r:id="rId20"/>
+    <p:sldId id="270" r:id="rId21"/>
   </p:sldIdLst>
   <p:sldSz cx="12191695" cy="6858000" type="screen4x3"/>
   <p:notesSz cx="6858000" cy="9144000"/>
@@ -3344,7 +3346,7 @@
                 </a:solidFill>
                 <a:latin typeface="Calibri"/>
               </a:rPr>
-              <a:t>The map wasn't free</a:t>
+              <a:t>How we graded every answer</a:t>
             </a:r>
           </a:p>
         </p:txBody>
@@ -3364,7 +3366,7 @@
             <a:avLst/>
           </a:prstGeom>
           <a:solidFill>
-            <a:srgbClr val="D97706"/>
+            <a:srgbClr val="2CA02C"/>
           </a:solidFill>
           <a:ln>
             <a:noFill/>
@@ -3408,7 +3410,7 @@
             <a:avLst/>
           </a:prstGeom>
           <a:solidFill>
-            <a:srgbClr val="D97706"/>
+            <a:srgbClr val="2CA02C"/>
           </a:solidFill>
           <a:ln>
             <a:noFill/>
@@ -3441,14 +3443,14 @@
                 </a:solidFill>
                 <a:latin typeface="Calibri"/>
               </a:rPr>
-              <a:t>4 · RESULTS</a:t>
+              <a:t>3 · TESTING</a:t>
             </a:r>
           </a:p>
         </p:txBody>
       </p:sp>
       <p:pic>
         <p:nvPicPr>
-          <p:cNvPr id="5" name="Picture 4" descr="chart_cost.png"/>
+          <p:cNvPr id="5" name="Picture 4" descr="grading.png"/>
           <p:cNvPicPr>
             <a:picLocks noChangeAspect="1"/>
           </p:cNvPicPr>
@@ -3462,53 +3464,14 @@
         </p:blipFill>
         <p:spPr>
           <a:xfrm>
-            <a:off x="1724403" y="1463040"/>
-            <a:ext cx="8712714" cy="4114799"/>
+            <a:off x="1380922" y="1371600"/>
+            <a:ext cx="9399675" cy="5257800"/>
           </a:xfrm>
           <a:prstGeom prst="rect">
             <a:avLst/>
           </a:prstGeom>
         </p:spPr>
       </p:pic>
-      <p:sp>
-        <p:nvSpPr>
-          <p:cNvPr id="6" name="TextBox 5"/>
-          <p:cNvSpPr txBox="1"/>
-          <p:nvPr/>
-        </p:nvSpPr>
-        <p:spPr>
-          <a:xfrm>
-            <a:off x="1005840" y="5806440"/>
-            <a:ext cx="10149840" cy="640080"/>
-          </a:xfrm>
-          <a:prstGeom prst="rect">
-            <a:avLst/>
-          </a:prstGeom>
-          <a:noFill/>
-        </p:spPr>
-        <p:txBody>
-          <a:bodyPr wrap="square" anchor="t">
-            <a:spAutoFit/>
-          </a:bodyPr>
-          <a:lstStyle/>
-          <a:p>
-            <a:pPr algn="ctr">
-              <a:lnSpc>
-                <a:spcPct val="112000"/>
-              </a:lnSpc>
-            </a:pPr>
-            <a:r>
-              <a:rPr sz="1500" b="0" i="1">
-                <a:solidFill>
-                  <a:srgbClr val="666666"/>
-                </a:solidFill>
-                <a:latin typeface="Calibri"/>
-              </a:rPr>
-              <a:t>Same number of steps, but ~70% more material “read” per question when the map was available.</a:t>
-            </a:r>
-          </a:p>
-        </p:txBody>
-      </p:sp>
     </p:spTree>
   </p:cSld>
   <p:clrMapOvr>
@@ -3563,13 +3526,13 @@
               </a:lnSpc>
             </a:pPr>
             <a:r>
-              <a:rPr sz="2600" b="1" i="0">
+              <a:rPr sz="2800" b="1" i="0">
                 <a:solidFill>
                   <a:srgbClr val="1A1A2E"/>
                 </a:solidFill>
                 <a:latin typeface="Calibri"/>
               </a:rPr>
-              <a:t>Why didn't it help more? Two real reasons</a:t>
+              <a:t>The results: roughly a coin flip</a:t>
             </a:r>
           </a:p>
         </p:txBody>
@@ -3589,7 +3552,7 @@
             <a:avLst/>
           </a:prstGeom>
           <a:solidFill>
-            <a:srgbClr val="9333EA"/>
+            <a:srgbClr val="2CA02C"/>
           </a:solidFill>
           <a:ln>
             <a:noFill/>
@@ -3626,14 +3589,14 @@
         </p:nvSpPr>
         <p:spPr>
           <a:xfrm>
-            <a:off x="10349179" y="384048"/>
-            <a:ext cx="1385316" cy="365760"/>
+            <a:off x="9818828" y="384048"/>
+            <a:ext cx="1915667" cy="365760"/>
           </a:xfrm>
           <a:prstGeom prst="rect">
             <a:avLst/>
           </a:prstGeom>
           <a:solidFill>
-            <a:srgbClr val="9333EA"/>
+            <a:srgbClr val="2CA02C"/>
           </a:solidFill>
           <a:ln>
             <a:noFill/>
@@ -3666,131 +3629,14 @@
                 </a:solidFill>
                 <a:latin typeface="Calibri"/>
               </a:rPr>
-              <a:t>5 · WHY</a:t>
-            </a:r>
-          </a:p>
-        </p:txBody>
-      </p:sp>
-      <p:sp>
-        <p:nvSpPr>
-          <p:cNvPr id="5" name="TextBox 4"/>
-          <p:cNvSpPr txBox="1"/>
-          <p:nvPr/>
-        </p:nvSpPr>
-        <p:spPr>
-          <a:xfrm>
-            <a:off x="502920" y="1463040"/>
-            <a:ext cx="5486400" cy="365760"/>
-          </a:xfrm>
-          <a:prstGeom prst="rect">
-            <a:avLst/>
-          </a:prstGeom>
-          <a:noFill/>
-        </p:spPr>
-        <p:txBody>
-          <a:bodyPr wrap="square" anchor="t">
-            <a:spAutoFit/>
-          </a:bodyPr>
-          <a:lstStyle/>
-          <a:p>
-            <a:pPr algn="l">
-              <a:lnSpc>
-                <a:spcPct val="112000"/>
-              </a:lnSpc>
-            </a:pPr>
-            <a:r>
-              <a:rPr sz="1600" b="1" i="0">
-                <a:solidFill>
-                  <a:srgbClr val="2563EB"/>
-                </a:solidFill>
-                <a:latin typeface="Calibri"/>
-              </a:rPr>
-              <a:t>1. The referee itself was sometimes wrong</a:t>
-            </a:r>
-          </a:p>
-        </p:txBody>
-      </p:sp>
-      <p:sp>
-        <p:nvSpPr>
-          <p:cNvPr id="6" name="TextBox 5"/>
-          <p:cNvSpPr txBox="1"/>
-          <p:nvPr/>
-        </p:nvSpPr>
-        <p:spPr>
-          <a:xfrm>
-            <a:off x="502920" y="1874519"/>
-            <a:ext cx="5486400" cy="1737360"/>
-          </a:xfrm>
-          <a:prstGeom prst="rect">
-            <a:avLst/>
-          </a:prstGeom>
-          <a:noFill/>
-        </p:spPr>
-        <p:txBody>
-          <a:bodyPr wrap="square" anchor="t">
-            <a:spAutoFit/>
-          </a:bodyPr>
-          <a:lstStyle/>
-          <a:p>
-            <a:pPr algn="l">
-              <a:lnSpc>
-                <a:spcPct val="112000"/>
-              </a:lnSpc>
-            </a:pPr>
-            <a:r>
-              <a:rPr sz="1350" b="0" i="0">
-                <a:solidFill>
-                  <a:srgbClr val="333333"/>
-                </a:solidFill>
-                <a:latin typeface="Calibri"/>
-              </a:rPr>
-              <a:t>We hand-checked one “loss”: the map-assisted answer was actually correct (verified against the real source code) — the AI judge simply made a mistake. The true gap is probably smaller than the headline number suggests.</a:t>
-            </a:r>
-          </a:p>
-        </p:txBody>
-      </p:sp>
-      <p:sp>
-        <p:nvSpPr>
-          <p:cNvPr id="7" name="TextBox 6"/>
-          <p:cNvSpPr txBox="1"/>
-          <p:nvPr/>
-        </p:nvSpPr>
-        <p:spPr>
-          <a:xfrm>
-            <a:off x="6263640" y="1463040"/>
-            <a:ext cx="5486400" cy="365760"/>
-          </a:xfrm>
-          <a:prstGeom prst="rect">
-            <a:avLst/>
-          </a:prstGeom>
-          <a:noFill/>
-        </p:spPr>
-        <p:txBody>
-          <a:bodyPr wrap="square" anchor="t">
-            <a:spAutoFit/>
-          </a:bodyPr>
-          <a:lstStyle/>
-          <a:p>
-            <a:pPr algn="l">
-              <a:lnSpc>
-                <a:spcPct val="112000"/>
-              </a:lnSpc>
-            </a:pPr>
-            <a:r>
-              <a:rPr sz="1600" b="1" i="0">
-                <a:solidFill>
-                  <a:srgbClr val="D97706"/>
-                </a:solidFill>
-                <a:latin typeface="Calibri"/>
-              </a:rPr>
-              <a:t>2. Trusting the map too much</a:t>
+              <a:t>4 · RESULTS</a:t>
             </a:r>
           </a:p>
         </p:txBody>
       </p:sp>
       <p:pic>
         <p:nvPicPr>
-          <p:cNvPr id="8" name="Picture 7" descr="chart_recall_gap.png"/>
+          <p:cNvPr id="5" name="Picture 4" descr="chart_headline.png"/>
           <p:cNvPicPr>
             <a:picLocks noChangeAspect="1"/>
           </p:cNvPicPr>
@@ -3804,68 +3650,38 @@
         </p:blipFill>
         <p:spPr>
           <a:xfrm>
-            <a:off x="6546715" y="1874519"/>
-            <a:ext cx="4920250" cy="2880360"/>
+            <a:off x="274320" y="2058787"/>
+            <a:ext cx="5852160" cy="3654825"/>
           </a:xfrm>
           <a:prstGeom prst="rect">
             <a:avLst/>
           </a:prstGeom>
         </p:spPr>
       </p:pic>
-      <p:sp>
-        <p:nvSpPr>
-          <p:cNvPr id="9" name="Rectangle 8"/>
-          <p:cNvSpPr/>
-          <p:nvPr/>
-        </p:nvSpPr>
-        <p:spPr>
-          <a:xfrm>
-            <a:off x="502920" y="5029200"/>
-            <a:ext cx="11247120" cy="1417320"/>
-          </a:xfrm>
-          <a:prstGeom prst="rect">
-            <a:avLst/>
-          </a:prstGeom>
-          <a:solidFill>
-            <a:srgbClr val="F3ECFB"/>
-          </a:solidFill>
-          <a:ln w="28575">
-            <a:solidFill>
-              <a:srgbClr val="9333EA"/>
-            </a:solidFill>
-          </a:ln>
-        </p:spPr>
-        <p:style>
-          <a:lnRef idx="1">
-            <a:schemeClr val="accent1"/>
-          </a:lnRef>
-          <a:fillRef idx="3">
-            <a:schemeClr val="accent1"/>
-          </a:fillRef>
-          <a:effectRef idx="2">
-            <a:schemeClr val="accent1"/>
-          </a:effectRef>
-          <a:fontRef idx="minor">
-            <a:schemeClr val="lt1"/>
-          </a:fontRef>
-        </p:style>
-        <p:txBody>
-          <a:bodyPr rtlCol="0" anchor="ctr" wrap="square"/>
-          <a:lstStyle/>
-          <a:p>
-            <a:pPr algn="ctr"/>
-            <a:r>
-              <a:rPr sz="1700" b="1">
-                <a:solidFill>
-                  <a:srgbClr val="1A1A2E"/>
-                </a:solidFill>
-                <a:latin typeface="Calibri"/>
-              </a:rPr>
-              <a:t>Bottom line: the extra map didn't clearly make the AI better at understanding code — it used the tool eagerly, but that didn't translate into better answers.</a:t>
-            </a:r>
-          </a:p>
-        </p:txBody>
-      </p:sp>
+      <p:pic>
+        <p:nvPicPr>
+          <p:cNvPr id="6" name="Picture 5" descr="chart_by_project.png"/>
+          <p:cNvPicPr>
+            <a:picLocks noChangeAspect="1"/>
+          </p:cNvPicPr>
+          <p:nvPr/>
+        </p:nvPicPr>
+        <p:blipFill>
+          <a:blip r:embed="rId3"/>
+          <a:stretch>
+            <a:fillRect/>
+          </a:stretch>
+        </p:blipFill>
+        <p:spPr>
+          <a:xfrm>
+            <a:off x="6172200" y="2356106"/>
+            <a:ext cx="5760720" cy="3060188"/>
+          </a:xfrm>
+          <a:prstGeom prst="rect">
+            <a:avLst/>
+          </a:prstGeom>
+        </p:spPr>
+      </p:pic>
     </p:spTree>
   </p:cSld>
   <p:clrMapOvr>
@@ -3875,6 +3691,588 @@
 </file>
 
 <file path=ppt/slides/slide12.xml><?xml version="1.0" encoding="utf-8"?>
+<p:sld xmlns:a="http://schemas.openxmlformats.org/drawingml/2006/main" xmlns:p="http://schemas.openxmlformats.org/presentationml/2006/main" xmlns:r="http://schemas.openxmlformats.org/officeDocument/2006/relationships">
+  <p:cSld>
+    <p:bg>
+      <p:bgPr>
+        <a:solidFill>
+          <a:srgbClr val="FFFFFF"/>
+        </a:solidFill>
+        <a:effectLst/>
+      </p:bgPr>
+    </p:bg>
+    <p:spTree>
+      <p:nvGrpSpPr>
+        <p:cNvPr id="1" name=""/>
+        <p:cNvGrpSpPr/>
+        <p:nvPr/>
+      </p:nvGrpSpPr>
+      <p:grpSpPr/>
+      <p:sp>
+        <p:nvSpPr>
+          <p:cNvPr id="2" name="TextBox 1"/>
+          <p:cNvSpPr txBox="1"/>
+          <p:nvPr/>
+        </p:nvSpPr>
+        <p:spPr>
+          <a:xfrm>
+            <a:off x="502920" y="274320"/>
+            <a:ext cx="9875520" cy="640080"/>
+          </a:xfrm>
+          <a:prstGeom prst="rect">
+            <a:avLst/>
+          </a:prstGeom>
+          <a:noFill/>
+        </p:spPr>
+        <p:txBody>
+          <a:bodyPr wrap="square" anchor="t">
+            <a:spAutoFit/>
+          </a:bodyPr>
+          <a:lstStyle/>
+          <a:p>
+            <a:pPr algn="l">
+              <a:lnSpc>
+                <a:spcPct val="112000"/>
+              </a:lnSpc>
+            </a:pPr>
+            <a:r>
+              <a:rPr sz="2800" b="1" i="0">
+                <a:solidFill>
+                  <a:srgbClr val="1A1A2E"/>
+                </a:solidFill>
+                <a:latin typeface="Calibri"/>
+              </a:rPr>
+              <a:t>The map wasn't free</a:t>
+            </a:r>
+          </a:p>
+        </p:txBody>
+      </p:sp>
+      <p:sp>
+        <p:nvSpPr>
+          <p:cNvPr id="3" name="Rectangle 2"/>
+          <p:cNvSpPr/>
+          <p:nvPr/>
+        </p:nvSpPr>
+        <p:spPr>
+          <a:xfrm>
+            <a:off x="502920" y="896112"/>
+            <a:ext cx="2011680" cy="50800"/>
+          </a:xfrm>
+          <a:prstGeom prst="rect">
+            <a:avLst/>
+          </a:prstGeom>
+          <a:solidFill>
+            <a:srgbClr val="D97706"/>
+          </a:solidFill>
+          <a:ln>
+            <a:noFill/>
+          </a:ln>
+          <a:effectLst/>
+        </p:spPr>
+        <p:style>
+          <a:lnRef idx="1">
+            <a:schemeClr val="accent1"/>
+          </a:lnRef>
+          <a:fillRef idx="3">
+            <a:schemeClr val="accent1"/>
+          </a:fillRef>
+          <a:effectRef idx="2">
+            <a:schemeClr val="accent1"/>
+          </a:effectRef>
+          <a:fontRef idx="minor">
+            <a:schemeClr val="lt1"/>
+          </a:fontRef>
+        </p:style>
+        <p:txBody>
+          <a:bodyPr rtlCol="0" anchor="ctr"/>
+          <a:lstStyle/>
+          <a:p>
+            <a:pPr algn="ctr"/>
+          </a:p>
+        </p:txBody>
+      </p:sp>
+      <p:sp>
+        <p:nvSpPr>
+          <p:cNvPr id="4" name="Rectangle 3"/>
+          <p:cNvSpPr/>
+          <p:nvPr/>
+        </p:nvSpPr>
+        <p:spPr>
+          <a:xfrm>
+            <a:off x="9818828" y="384048"/>
+            <a:ext cx="1915667" cy="365760"/>
+          </a:xfrm>
+          <a:prstGeom prst="rect">
+            <a:avLst/>
+          </a:prstGeom>
+          <a:solidFill>
+            <a:srgbClr val="D97706"/>
+          </a:solidFill>
+          <a:ln>
+            <a:noFill/>
+          </a:ln>
+          <a:effectLst/>
+        </p:spPr>
+        <p:style>
+          <a:lnRef idx="1">
+            <a:schemeClr val="accent1"/>
+          </a:lnRef>
+          <a:fillRef idx="3">
+            <a:schemeClr val="accent1"/>
+          </a:fillRef>
+          <a:effectRef idx="2">
+            <a:schemeClr val="accent1"/>
+          </a:effectRef>
+          <a:fontRef idx="minor">
+            <a:schemeClr val="lt1"/>
+          </a:fontRef>
+        </p:style>
+        <p:txBody>
+          <a:bodyPr rtlCol="0" anchor="ctr" wrap="none" lIns="0" rIns="0" tIns="0" bIns="0"/>
+          <a:lstStyle/>
+          <a:p>
+            <a:pPr algn="ctr"/>
+            <a:r>
+              <a:rPr sz="1100" b="1">
+                <a:solidFill>
+                  <a:srgbClr val="FFFFFF"/>
+                </a:solidFill>
+                <a:latin typeface="Calibri"/>
+              </a:rPr>
+              <a:t>4 · RESULTS</a:t>
+            </a:r>
+          </a:p>
+        </p:txBody>
+      </p:sp>
+      <p:pic>
+        <p:nvPicPr>
+          <p:cNvPr id="5" name="Picture 4" descr="chart_cost.png"/>
+          <p:cNvPicPr>
+            <a:picLocks noChangeAspect="1"/>
+          </p:cNvPicPr>
+          <p:nvPr/>
+        </p:nvPicPr>
+        <p:blipFill>
+          <a:blip r:embed="rId2"/>
+          <a:stretch>
+            <a:fillRect/>
+          </a:stretch>
+        </p:blipFill>
+        <p:spPr>
+          <a:xfrm>
+            <a:off x="1724403" y="1463040"/>
+            <a:ext cx="8712714" cy="4114799"/>
+          </a:xfrm>
+          <a:prstGeom prst="rect">
+            <a:avLst/>
+          </a:prstGeom>
+        </p:spPr>
+      </p:pic>
+      <p:sp>
+        <p:nvSpPr>
+          <p:cNvPr id="6" name="TextBox 5"/>
+          <p:cNvSpPr txBox="1"/>
+          <p:nvPr/>
+        </p:nvSpPr>
+        <p:spPr>
+          <a:xfrm>
+            <a:off x="1005840" y="5806440"/>
+            <a:ext cx="10149840" cy="640080"/>
+          </a:xfrm>
+          <a:prstGeom prst="rect">
+            <a:avLst/>
+          </a:prstGeom>
+          <a:noFill/>
+        </p:spPr>
+        <p:txBody>
+          <a:bodyPr wrap="square" anchor="t">
+            <a:spAutoFit/>
+          </a:bodyPr>
+          <a:lstStyle/>
+          <a:p>
+            <a:pPr algn="ctr">
+              <a:lnSpc>
+                <a:spcPct val="112000"/>
+              </a:lnSpc>
+            </a:pPr>
+            <a:r>
+              <a:rPr sz="1500" b="0" i="1">
+                <a:solidFill>
+                  <a:srgbClr val="666666"/>
+                </a:solidFill>
+                <a:latin typeface="Calibri"/>
+              </a:rPr>
+              <a:t>Same number of steps, but ~70% more material “read” per question when the map was available.</a:t>
+            </a:r>
+          </a:p>
+        </p:txBody>
+      </p:sp>
+    </p:spTree>
+  </p:cSld>
+  <p:clrMapOvr>
+    <a:masterClrMapping/>
+  </p:clrMapOvr>
+</p:sld>
+</file>
+
+<file path=ppt/slides/slide13.xml><?xml version="1.0" encoding="utf-8"?>
+<p:sld xmlns:a="http://schemas.openxmlformats.org/drawingml/2006/main" xmlns:p="http://schemas.openxmlformats.org/presentationml/2006/main" xmlns:r="http://schemas.openxmlformats.org/officeDocument/2006/relationships">
+  <p:cSld>
+    <p:bg>
+      <p:bgPr>
+        <a:solidFill>
+          <a:srgbClr val="FFFFFF"/>
+        </a:solidFill>
+        <a:effectLst/>
+      </p:bgPr>
+    </p:bg>
+    <p:spTree>
+      <p:nvGrpSpPr>
+        <p:cNvPr id="1" name=""/>
+        <p:cNvGrpSpPr/>
+        <p:nvPr/>
+      </p:nvGrpSpPr>
+      <p:grpSpPr/>
+      <p:sp>
+        <p:nvSpPr>
+          <p:cNvPr id="2" name="TextBox 1"/>
+          <p:cNvSpPr txBox="1"/>
+          <p:nvPr/>
+        </p:nvSpPr>
+        <p:spPr>
+          <a:xfrm>
+            <a:off x="502920" y="274320"/>
+            <a:ext cx="9875520" cy="640080"/>
+          </a:xfrm>
+          <a:prstGeom prst="rect">
+            <a:avLst/>
+          </a:prstGeom>
+          <a:noFill/>
+        </p:spPr>
+        <p:txBody>
+          <a:bodyPr wrap="square" anchor="t">
+            <a:spAutoFit/>
+          </a:bodyPr>
+          <a:lstStyle/>
+          <a:p>
+            <a:pPr algn="l">
+              <a:lnSpc>
+                <a:spcPct val="112000"/>
+              </a:lnSpc>
+            </a:pPr>
+            <a:r>
+              <a:rPr sz="2600" b="1" i="0">
+                <a:solidFill>
+                  <a:srgbClr val="1A1A2E"/>
+                </a:solidFill>
+                <a:latin typeface="Calibri"/>
+              </a:rPr>
+              <a:t>Why didn't it help more? Two real reasons</a:t>
+            </a:r>
+          </a:p>
+        </p:txBody>
+      </p:sp>
+      <p:sp>
+        <p:nvSpPr>
+          <p:cNvPr id="3" name="Rectangle 2"/>
+          <p:cNvSpPr/>
+          <p:nvPr/>
+        </p:nvSpPr>
+        <p:spPr>
+          <a:xfrm>
+            <a:off x="502920" y="896112"/>
+            <a:ext cx="2011680" cy="50800"/>
+          </a:xfrm>
+          <a:prstGeom prst="rect">
+            <a:avLst/>
+          </a:prstGeom>
+          <a:solidFill>
+            <a:srgbClr val="9333EA"/>
+          </a:solidFill>
+          <a:ln>
+            <a:noFill/>
+          </a:ln>
+          <a:effectLst/>
+        </p:spPr>
+        <p:style>
+          <a:lnRef idx="1">
+            <a:schemeClr val="accent1"/>
+          </a:lnRef>
+          <a:fillRef idx="3">
+            <a:schemeClr val="accent1"/>
+          </a:fillRef>
+          <a:effectRef idx="2">
+            <a:schemeClr val="accent1"/>
+          </a:effectRef>
+          <a:fontRef idx="minor">
+            <a:schemeClr val="lt1"/>
+          </a:fontRef>
+        </p:style>
+        <p:txBody>
+          <a:bodyPr rtlCol="0" anchor="ctr"/>
+          <a:lstStyle/>
+          <a:p>
+            <a:pPr algn="ctr"/>
+          </a:p>
+        </p:txBody>
+      </p:sp>
+      <p:sp>
+        <p:nvSpPr>
+          <p:cNvPr id="4" name="Rectangle 3"/>
+          <p:cNvSpPr/>
+          <p:nvPr/>
+        </p:nvSpPr>
+        <p:spPr>
+          <a:xfrm>
+            <a:off x="10349179" y="384048"/>
+            <a:ext cx="1385316" cy="365760"/>
+          </a:xfrm>
+          <a:prstGeom prst="rect">
+            <a:avLst/>
+          </a:prstGeom>
+          <a:solidFill>
+            <a:srgbClr val="9333EA"/>
+          </a:solidFill>
+          <a:ln>
+            <a:noFill/>
+          </a:ln>
+          <a:effectLst/>
+        </p:spPr>
+        <p:style>
+          <a:lnRef idx="1">
+            <a:schemeClr val="accent1"/>
+          </a:lnRef>
+          <a:fillRef idx="3">
+            <a:schemeClr val="accent1"/>
+          </a:fillRef>
+          <a:effectRef idx="2">
+            <a:schemeClr val="accent1"/>
+          </a:effectRef>
+          <a:fontRef idx="minor">
+            <a:schemeClr val="lt1"/>
+          </a:fontRef>
+        </p:style>
+        <p:txBody>
+          <a:bodyPr rtlCol="0" anchor="ctr" wrap="none" lIns="0" rIns="0" tIns="0" bIns="0"/>
+          <a:lstStyle/>
+          <a:p>
+            <a:pPr algn="ctr"/>
+            <a:r>
+              <a:rPr sz="1100" b="1">
+                <a:solidFill>
+                  <a:srgbClr val="FFFFFF"/>
+                </a:solidFill>
+                <a:latin typeface="Calibri"/>
+              </a:rPr>
+              <a:t>5 · WHY</a:t>
+            </a:r>
+          </a:p>
+        </p:txBody>
+      </p:sp>
+      <p:sp>
+        <p:nvSpPr>
+          <p:cNvPr id="5" name="TextBox 4"/>
+          <p:cNvSpPr txBox="1"/>
+          <p:nvPr/>
+        </p:nvSpPr>
+        <p:spPr>
+          <a:xfrm>
+            <a:off x="502920" y="1463040"/>
+            <a:ext cx="5486400" cy="365760"/>
+          </a:xfrm>
+          <a:prstGeom prst="rect">
+            <a:avLst/>
+          </a:prstGeom>
+          <a:noFill/>
+        </p:spPr>
+        <p:txBody>
+          <a:bodyPr wrap="square" anchor="t">
+            <a:spAutoFit/>
+          </a:bodyPr>
+          <a:lstStyle/>
+          <a:p>
+            <a:pPr algn="l">
+              <a:lnSpc>
+                <a:spcPct val="112000"/>
+              </a:lnSpc>
+            </a:pPr>
+            <a:r>
+              <a:rPr sz="1600" b="1" i="0">
+                <a:solidFill>
+                  <a:srgbClr val="2563EB"/>
+                </a:solidFill>
+                <a:latin typeface="Calibri"/>
+              </a:rPr>
+              <a:t>1. The referee itself was sometimes wrong</a:t>
+            </a:r>
+          </a:p>
+        </p:txBody>
+      </p:sp>
+      <p:sp>
+        <p:nvSpPr>
+          <p:cNvPr id="6" name="TextBox 5"/>
+          <p:cNvSpPr txBox="1"/>
+          <p:nvPr/>
+        </p:nvSpPr>
+        <p:spPr>
+          <a:xfrm>
+            <a:off x="502920" y="1874519"/>
+            <a:ext cx="5486400" cy="1737360"/>
+          </a:xfrm>
+          <a:prstGeom prst="rect">
+            <a:avLst/>
+          </a:prstGeom>
+          <a:noFill/>
+        </p:spPr>
+        <p:txBody>
+          <a:bodyPr wrap="square" anchor="t">
+            <a:spAutoFit/>
+          </a:bodyPr>
+          <a:lstStyle/>
+          <a:p>
+            <a:pPr algn="l">
+              <a:lnSpc>
+                <a:spcPct val="112000"/>
+              </a:lnSpc>
+            </a:pPr>
+            <a:r>
+              <a:rPr sz="1350" b="0" i="0">
+                <a:solidFill>
+                  <a:srgbClr val="333333"/>
+                </a:solidFill>
+                <a:latin typeface="Calibri"/>
+              </a:rPr>
+              <a:t>We hand-checked one “loss”: the map-assisted answer was actually correct (verified against the real source code) — the AI judge simply made a mistake. The true gap is probably smaller than the headline number suggests.</a:t>
+            </a:r>
+          </a:p>
+        </p:txBody>
+      </p:sp>
+      <p:sp>
+        <p:nvSpPr>
+          <p:cNvPr id="7" name="TextBox 6"/>
+          <p:cNvSpPr txBox="1"/>
+          <p:nvPr/>
+        </p:nvSpPr>
+        <p:spPr>
+          <a:xfrm>
+            <a:off x="6263640" y="1463040"/>
+            <a:ext cx="5486400" cy="365760"/>
+          </a:xfrm>
+          <a:prstGeom prst="rect">
+            <a:avLst/>
+          </a:prstGeom>
+          <a:noFill/>
+        </p:spPr>
+        <p:txBody>
+          <a:bodyPr wrap="square" anchor="t">
+            <a:spAutoFit/>
+          </a:bodyPr>
+          <a:lstStyle/>
+          <a:p>
+            <a:pPr algn="l">
+              <a:lnSpc>
+                <a:spcPct val="112000"/>
+              </a:lnSpc>
+            </a:pPr>
+            <a:r>
+              <a:rPr sz="1600" b="1" i="0">
+                <a:solidFill>
+                  <a:srgbClr val="D97706"/>
+                </a:solidFill>
+                <a:latin typeface="Calibri"/>
+              </a:rPr>
+              <a:t>2. Trusting the map too much</a:t>
+            </a:r>
+          </a:p>
+        </p:txBody>
+      </p:sp>
+      <p:pic>
+        <p:nvPicPr>
+          <p:cNvPr id="8" name="Picture 7" descr="chart_recall_gap.png"/>
+          <p:cNvPicPr>
+            <a:picLocks noChangeAspect="1"/>
+          </p:cNvPicPr>
+          <p:nvPr/>
+        </p:nvPicPr>
+        <p:blipFill>
+          <a:blip r:embed="rId2"/>
+          <a:stretch>
+            <a:fillRect/>
+          </a:stretch>
+        </p:blipFill>
+        <p:spPr>
+          <a:xfrm>
+            <a:off x="6546715" y="1874519"/>
+            <a:ext cx="4920250" cy="2880360"/>
+          </a:xfrm>
+          <a:prstGeom prst="rect">
+            <a:avLst/>
+          </a:prstGeom>
+        </p:spPr>
+      </p:pic>
+      <p:sp>
+        <p:nvSpPr>
+          <p:cNvPr id="9" name="Rectangle 8"/>
+          <p:cNvSpPr/>
+          <p:nvPr/>
+        </p:nvSpPr>
+        <p:spPr>
+          <a:xfrm>
+            <a:off x="502920" y="5029200"/>
+            <a:ext cx="11247120" cy="1417320"/>
+          </a:xfrm>
+          <a:prstGeom prst="rect">
+            <a:avLst/>
+          </a:prstGeom>
+          <a:solidFill>
+            <a:srgbClr val="F3ECFB"/>
+          </a:solidFill>
+          <a:ln w="28575">
+            <a:solidFill>
+              <a:srgbClr val="9333EA"/>
+            </a:solidFill>
+          </a:ln>
+        </p:spPr>
+        <p:style>
+          <a:lnRef idx="1">
+            <a:schemeClr val="accent1"/>
+          </a:lnRef>
+          <a:fillRef idx="3">
+            <a:schemeClr val="accent1"/>
+          </a:fillRef>
+          <a:effectRef idx="2">
+            <a:schemeClr val="accent1"/>
+          </a:effectRef>
+          <a:fontRef idx="minor">
+            <a:schemeClr val="lt1"/>
+          </a:fontRef>
+        </p:style>
+        <p:txBody>
+          <a:bodyPr rtlCol="0" anchor="ctr" wrap="square"/>
+          <a:lstStyle/>
+          <a:p>
+            <a:pPr algn="ctr"/>
+            <a:r>
+              <a:rPr sz="1700" b="1">
+                <a:solidFill>
+                  <a:srgbClr val="1A1A2E"/>
+                </a:solidFill>
+                <a:latin typeface="Calibri"/>
+              </a:rPr>
+              <a:t>Bottom line: the extra map didn't clearly make the AI better at understanding code — it used the tool eagerly, but that didn't translate into better answers.</a:t>
+            </a:r>
+          </a:p>
+        </p:txBody>
+      </p:sp>
+    </p:spTree>
+  </p:cSld>
+  <p:clrMapOvr>
+    <a:masterClrMapping/>
+  </p:clrMapOvr>
+</p:sld>
+</file>
+
+<file path=ppt/slides/slide14.xml><?xml version="1.0" encoding="utf-8"?>
 <p:sld xmlns:a="http://schemas.openxmlformats.org/drawingml/2006/main" xmlns:p="http://schemas.openxmlformats.org/presentationml/2006/main" xmlns:r="http://schemas.openxmlformats.org/officeDocument/2006/relationships">
   <p:cSld>
     <p:bg>
@@ -4115,7 +4513,7 @@
 </p:sld>
 </file>
 
-<file path=ppt/slides/slide13.xml><?xml version="1.0" encoding="utf-8"?>
+<file path=ppt/slides/slide15.xml><?xml version="1.0" encoding="utf-8"?>
 <p:sld xmlns:a="http://schemas.openxmlformats.org/drawingml/2006/main" xmlns:p="http://schemas.openxmlformats.org/presentationml/2006/main" xmlns:r="http://schemas.openxmlformats.org/officeDocument/2006/relationships">
   <p:cSld>
     <p:bg>
@@ -5168,8 +5566,8 @@
         </p:blipFill>
         <p:spPr>
           <a:xfrm>
-            <a:off x="365760" y="1886006"/>
-            <a:ext cx="7315200" cy="4091828"/>
+            <a:off x="274320" y="1730827"/>
+            <a:ext cx="8549640" cy="4447905"/>
           </a:xfrm>
           <a:prstGeom prst="rect">
             <a:avLst/>
@@ -5184,8 +5582,8 @@
         </p:nvSpPr>
         <p:spPr>
           <a:xfrm>
-            <a:off x="7863840" y="1691640"/>
-            <a:ext cx="4023360" cy="4572000"/>
+            <a:off x="8915400" y="1691640"/>
+            <a:ext cx="2926080" cy="4572000"/>
           </a:xfrm>
           <a:prstGeom prst="rect">
             <a:avLst/>
@@ -5203,11 +5601,11 @@
                 <a:spcPct val="108000"/>
               </a:lnSpc>
               <a:spcAft>
-                <a:spcPts val="1000"/>
+                <a:spcPts val="1400"/>
               </a:spcAft>
             </a:pPr>
             <a:r>
-              <a:rPr sz="1450" b="1">
+              <a:rPr sz="1550" b="1">
                 <a:solidFill>
                   <a:srgbClr val="2CA02C"/>
                 </a:solidFill>
@@ -5216,13 +5614,13 @@
               <a:t>▸  </a:t>
             </a:r>
             <a:r>
-              <a:rPr sz="1450">
+              <a:rPr sz="1550">
                 <a:solidFill>
                   <a:srgbClr val="333333"/>
                 </a:solidFill>
                 <a:latin typeface="Calibri"/>
               </a:rPr>
-              <a:t>Each function/class becomes a rich node: its code, inputs/outputs, error handling, complexity, even test coverage &amp; git history.</a:t>
+              <a:t>Each function becomes a rich node: code, signature, error handling, complexity, test coverage, git history.</a:t>
             </a:r>
           </a:p>
           <a:p>
@@ -5231,11 +5629,11 @@
                 <a:spcPct val="108000"/>
               </a:lnSpc>
               <a:spcAft>
-                <a:spcPts val="1000"/>
+                <a:spcPts val="1400"/>
               </a:spcAft>
             </a:pPr>
             <a:r>
-              <a:rPr sz="1450" b="1">
+              <a:rPr sz="1550" b="1">
                 <a:solidFill>
                   <a:srgbClr val="2CA02C"/>
                 </a:solidFill>
@@ -5244,13 +5642,13 @@
               <a:t>▸  </a:t>
             </a:r>
             <a:r>
-              <a:rPr sz="1450">
+              <a:rPr sz="1550">
                 <a:solidFill>
                   <a:srgbClr val="333333"/>
                 </a:solidFill>
                 <a:latin typeface="Calibri"/>
               </a:rPr>
-              <a:t>Each connection becomes a typed edge (calls, imports, reads/writes data, and more), with how critical and how likely-to-fail it is.</a:t>
+              <a:t>Each connection becomes a typed edge, with how critical and how likely-to-fail it is.</a:t>
             </a:r>
           </a:p>
           <a:p>
@@ -5259,11 +5657,11 @@
                 <a:spcPct val="108000"/>
               </a:lnSpc>
               <a:spcAft>
-                <a:spcPts val="1000"/>
+                <a:spcPts val="1400"/>
               </a:spcAft>
             </a:pPr>
             <a:r>
-              <a:rPr sz="1450" b="1">
+              <a:rPr sz="1550" b="1">
                 <a:solidFill>
                   <a:srgbClr val="2CA02C"/>
                 </a:solidFill>
@@ -5272,13 +5670,13 @@
               <a:t>▸  </a:t>
             </a:r>
             <a:r>
-              <a:rPr sz="1450">
+              <a:rPr sz="1550">
                 <a:solidFill>
                   <a:srgbClr val="333333"/>
                 </a:solidFill>
                 <a:latin typeface="Calibri"/>
               </a:rPr>
-              <a:t>Alpha stage, but backed by 150+ automated tests.</a:t>
+              <a:t>Alpha stage; backed by 150+ automated tests.</a:t>
             </a:r>
           </a:p>
         </p:txBody>
@@ -5461,8 +5859,8 @@
         </p:blipFill>
         <p:spPr>
           <a:xfrm>
-            <a:off x="1585263" y="1417320"/>
-            <a:ext cx="8990994" cy="5029200"/>
+            <a:off x="508122" y="1371600"/>
+            <a:ext cx="11145276" cy="5257800"/>
           </a:xfrm>
           <a:prstGeom prst="rect">
             <a:avLst/>
@@ -5529,7 +5927,7 @@
                 </a:solidFill>
                 <a:latin typeface="Calibri"/>
               </a:rPr>
-              <a:t>Project 3: this evaluation — what we built</a:t>
+              <a:t>The functions ContextAI actually exposes</a:t>
             </a:r>
           </a:p>
         </p:txBody>
@@ -5549,7 +5947,7 @@
             <a:avLst/>
           </a:prstGeom>
           <a:solidFill>
-            <a:srgbClr val="D97706"/>
+            <a:srgbClr val="2CA02C"/>
           </a:solidFill>
           <a:ln>
             <a:noFill/>
@@ -5593,7 +5991,7 @@
             <a:avLst/>
           </a:prstGeom>
           <a:solidFill>
-            <a:srgbClr val="D97706"/>
+            <a:srgbClr val="2CA02C"/>
           </a:solidFill>
           <a:ln>
             <a:noFill/>
@@ -5633,7 +6031,7 @@
       </p:sp>
       <p:pic>
         <p:nvPicPr>
-          <p:cNvPr id="5" name="Picture 4" descr="two_modes.png"/>
+          <p:cNvPr id="5" name="Picture 4" descr="functions_exposed.png"/>
           <p:cNvPicPr>
             <a:picLocks noChangeAspect="1"/>
           </p:cNvPicPr>
@@ -5647,188 +6045,14 @@
         </p:blipFill>
         <p:spPr>
           <a:xfrm>
-            <a:off x="433868" y="1417320"/>
-            <a:ext cx="6538904" cy="3657600"/>
+            <a:off x="1156637" y="1371600"/>
+            <a:ext cx="9848245" cy="5257800"/>
           </a:xfrm>
           <a:prstGeom prst="rect">
             <a:avLst/>
           </a:prstGeom>
         </p:spPr>
       </p:pic>
-      <p:sp>
-        <p:nvSpPr>
-          <p:cNvPr id="6" name="TextBox 5"/>
-          <p:cNvSpPr txBox="1"/>
-          <p:nvPr/>
-        </p:nvSpPr>
-        <p:spPr>
-          <a:xfrm>
-            <a:off x="7315200" y="1600200"/>
-            <a:ext cx="4572000" cy="4389120"/>
-          </a:xfrm>
-          <a:prstGeom prst="rect">
-            <a:avLst/>
-          </a:prstGeom>
-          <a:noFill/>
-        </p:spPr>
-        <p:txBody>
-          <a:bodyPr wrap="square">
-            <a:spAutoFit/>
-          </a:bodyPr>
-          <a:lstStyle/>
-          <a:p>
-            <a:pPr>
-              <a:lnSpc>
-                <a:spcPct val="108000"/>
-              </a:lnSpc>
-              <a:spcAft>
-                <a:spcPts val="900"/>
-              </a:spcAft>
-            </a:pPr>
-            <a:r>
-              <a:rPr sz="1500" b="1">
-                <a:solidFill>
-                  <a:srgbClr val="2CA02C"/>
-                </a:solidFill>
-                <a:latin typeface="Calibri"/>
-              </a:rPr>
-              <a:t>▸  </a:t>
-            </a:r>
-            <a:r>
-              <a:rPr sz="1500">
-                <a:solidFill>
-                  <a:srgbClr val="333333"/>
-                </a:solidFill>
-                <a:latin typeface="Calibri"/>
-              </a:rPr>
-              <a:t>4 real open-source projects (Flask, Click, HTTPX, Rich), 9k–26k lines each.</a:t>
-            </a:r>
-          </a:p>
-          <a:p>
-            <a:pPr>
-              <a:lnSpc>
-                <a:spcPct val="108000"/>
-              </a:lnSpc>
-              <a:spcAft>
-                <a:spcPts val="900"/>
-              </a:spcAft>
-            </a:pPr>
-            <a:r>
-              <a:rPr sz="1500" b="1">
-                <a:solidFill>
-                  <a:srgbClr val="2CA02C"/>
-                </a:solidFill>
-                <a:latin typeface="Calibri"/>
-              </a:rPr>
-              <a:t>▸  </a:t>
-            </a:r>
-            <a:r>
-              <a:rPr sz="1500">
-                <a:solidFill>
-                  <a:srgbClr val="333333"/>
-                </a:solidFill>
-                <a:latin typeface="Calibri"/>
-              </a:rPr>
-              <a:t>48 realistic questions (“who calls this,” “what breaks if I change this,” and more).</a:t>
-            </a:r>
-          </a:p>
-          <a:p>
-            <a:pPr>
-              <a:lnSpc>
-                <a:spcPct val="108000"/>
-              </a:lnSpc>
-              <a:spcAft>
-                <a:spcPts val="900"/>
-              </a:spcAft>
-            </a:pPr>
-            <a:r>
-              <a:rPr sz="1500" b="1">
-                <a:solidFill>
-                  <a:srgbClr val="2CA02C"/>
-                </a:solidFill>
-                <a:latin typeface="Calibri"/>
-              </a:rPr>
-              <a:t>▸  </a:t>
-            </a:r>
-            <a:r>
-              <a:rPr sz="1500">
-                <a:solidFill>
-                  <a:srgbClr val="333333"/>
-                </a:solidFill>
-                <a:latin typeface="Calibri"/>
-              </a:rPr>
-              <a:t>A real AI coding agent (OpenAI's Codex) — not a toy stand-in.</a:t>
-            </a:r>
-          </a:p>
-          <a:p>
-            <a:pPr>
-              <a:lnSpc>
-                <a:spcPct val="108000"/>
-              </a:lnSpc>
-              <a:spcAft>
-                <a:spcPts val="900"/>
-              </a:spcAft>
-            </a:pPr>
-            <a:r>
-              <a:rPr sz="1500" b="1">
-                <a:solidFill>
-                  <a:srgbClr val="2CA02C"/>
-                </a:solidFill>
-                <a:latin typeface="Calibri"/>
-              </a:rPr>
-              <a:t>▸  </a:t>
-            </a:r>
-            <a:r>
-              <a:rPr sz="1500">
-                <a:solidFill>
-                  <a:srgbClr val="333333"/>
-                </a:solidFill>
-                <a:latin typeface="Calibri"/>
-              </a:rPr>
-              <a:t>ConnectContext plugged in exactly the way a real developer would.</a:t>
-            </a:r>
-          </a:p>
-        </p:txBody>
-      </p:sp>
-      <p:sp>
-        <p:nvSpPr>
-          <p:cNvPr id="7" name="TextBox 6"/>
-          <p:cNvSpPr txBox="1"/>
-          <p:nvPr/>
-        </p:nvSpPr>
-        <p:spPr>
-          <a:xfrm>
-            <a:off x="365760" y="5257800"/>
-            <a:ext cx="6675120" cy="640080"/>
-          </a:xfrm>
-          <a:prstGeom prst="rect">
-            <a:avLst/>
-          </a:prstGeom>
-          <a:noFill/>
-        </p:spPr>
-        <p:txBody>
-          <a:bodyPr wrap="square" anchor="t">
-            <a:spAutoFit/>
-          </a:bodyPr>
-          <a:lstStyle/>
-          <a:p>
-            <a:pPr algn="ctr">
-              <a:lnSpc>
-                <a:spcPct val="112000"/>
-              </a:lnSpc>
-            </a:pPr>
-            <a:r>
-              <a:rPr sz="1300" b="0" i="1">
-                <a:solidFill>
-                  <a:srgbClr val="666666"/>
-                </a:solidFill>
-                <a:latin typeface="Calibri"/>
-              </a:rPr>
-              <a:t>Same questions. Same AI. Same rules. The map is the only thing that's different.</a:t>
-            </a:r>
-          </a:p>
-        </p:txBody>
-      </p:sp>
     </p:spTree>
   </p:cSld>
   <p:clrMapOvr>
@@ -5883,13 +6107,13 @@
               </a:lnSpc>
             </a:pPr>
             <a:r>
-              <a:rPr sz="2800" b="1" i="0">
+              <a:rPr sz="2600" b="1" i="0">
                 <a:solidFill>
                   <a:srgbClr val="1A1A2E"/>
                 </a:solidFill>
                 <a:latin typeface="Calibri"/>
               </a:rPr>
-              <a:t>Wiring it up — and two real hiccups</a:t>
+              <a:t>Project 3: this evaluation — what we built</a:t>
             </a:r>
           </a:p>
         </p:txBody>
@@ -5909,7 +6133,7 @@
             <a:avLst/>
           </a:prstGeom>
           <a:solidFill>
-            <a:srgbClr val="2563EB"/>
+            <a:srgbClr val="D97706"/>
           </a:solidFill>
           <a:ln>
             <a:noFill/>
@@ -5946,14 +6170,14 @@
         </p:nvSpPr>
         <p:spPr>
           <a:xfrm>
-            <a:off x="9818828" y="384048"/>
-            <a:ext cx="1915667" cy="365760"/>
+            <a:off x="8360359" y="384048"/>
+            <a:ext cx="3374136" cy="365760"/>
           </a:xfrm>
           <a:prstGeom prst="rect">
             <a:avLst/>
           </a:prstGeom>
           <a:solidFill>
-            <a:srgbClr val="2563EB"/>
+            <a:srgbClr val="D97706"/>
           </a:solidFill>
           <a:ln>
             <a:noFill/>
@@ -5986,14 +6210,14 @@
                 </a:solidFill>
                 <a:latin typeface="Calibri"/>
               </a:rPr>
-              <a:t>3 · TESTING</a:t>
+              <a:t>2 · THE THREE PROJECTS</a:t>
             </a:r>
           </a:p>
         </p:txBody>
       </p:sp>
       <p:pic>
         <p:nvPicPr>
-          <p:cNvPr id="5" name="Picture 4" descr="mcp_connection.png"/>
+          <p:cNvPr id="5" name="Picture 4" descr="two_modes.png"/>
           <p:cNvPicPr>
             <a:picLocks noChangeAspect="1"/>
           </p:cNvPicPr>
@@ -6007,8 +6231,8 @@
         </p:blipFill>
         <p:spPr>
           <a:xfrm>
-            <a:off x="365760" y="1465236"/>
-            <a:ext cx="6857999" cy="3836088"/>
+            <a:off x="433868" y="1417320"/>
+            <a:ext cx="6538904" cy="3657600"/>
           </a:xfrm>
           <a:prstGeom prst="rect">
             <a:avLst/>
@@ -6023,8 +6247,143 @@
         </p:nvSpPr>
         <p:spPr>
           <a:xfrm>
-            <a:off x="7406640" y="1508760"/>
-            <a:ext cx="4480560" cy="365760"/>
+            <a:off x="7315200" y="1600200"/>
+            <a:ext cx="4572000" cy="4389120"/>
+          </a:xfrm>
+          <a:prstGeom prst="rect">
+            <a:avLst/>
+          </a:prstGeom>
+          <a:noFill/>
+        </p:spPr>
+        <p:txBody>
+          <a:bodyPr wrap="square">
+            <a:spAutoFit/>
+          </a:bodyPr>
+          <a:lstStyle/>
+          <a:p>
+            <a:pPr>
+              <a:lnSpc>
+                <a:spcPct val="108000"/>
+              </a:lnSpc>
+              <a:spcAft>
+                <a:spcPts val="900"/>
+              </a:spcAft>
+            </a:pPr>
+            <a:r>
+              <a:rPr sz="1500" b="1">
+                <a:solidFill>
+                  <a:srgbClr val="2CA02C"/>
+                </a:solidFill>
+                <a:latin typeface="Calibri"/>
+              </a:rPr>
+              <a:t>▸  </a:t>
+            </a:r>
+            <a:r>
+              <a:rPr sz="1500">
+                <a:solidFill>
+                  <a:srgbClr val="333333"/>
+                </a:solidFill>
+                <a:latin typeface="Calibri"/>
+              </a:rPr>
+              <a:t>4 real open-source projects (Flask, Click, HTTPX, Rich), 9k–26k lines each.</a:t>
+            </a:r>
+          </a:p>
+          <a:p>
+            <a:pPr>
+              <a:lnSpc>
+                <a:spcPct val="108000"/>
+              </a:lnSpc>
+              <a:spcAft>
+                <a:spcPts val="900"/>
+              </a:spcAft>
+            </a:pPr>
+            <a:r>
+              <a:rPr sz="1500" b="1">
+                <a:solidFill>
+                  <a:srgbClr val="2CA02C"/>
+                </a:solidFill>
+                <a:latin typeface="Calibri"/>
+              </a:rPr>
+              <a:t>▸  </a:t>
+            </a:r>
+            <a:r>
+              <a:rPr sz="1500">
+                <a:solidFill>
+                  <a:srgbClr val="333333"/>
+                </a:solidFill>
+                <a:latin typeface="Calibri"/>
+              </a:rPr>
+              <a:t>48 realistic questions (“who calls this,” “what breaks if I change this,” and more).</a:t>
+            </a:r>
+          </a:p>
+          <a:p>
+            <a:pPr>
+              <a:lnSpc>
+                <a:spcPct val="108000"/>
+              </a:lnSpc>
+              <a:spcAft>
+                <a:spcPts val="900"/>
+              </a:spcAft>
+            </a:pPr>
+            <a:r>
+              <a:rPr sz="1500" b="1">
+                <a:solidFill>
+                  <a:srgbClr val="2CA02C"/>
+                </a:solidFill>
+                <a:latin typeface="Calibri"/>
+              </a:rPr>
+              <a:t>▸  </a:t>
+            </a:r>
+            <a:r>
+              <a:rPr sz="1500">
+                <a:solidFill>
+                  <a:srgbClr val="333333"/>
+                </a:solidFill>
+                <a:latin typeface="Calibri"/>
+              </a:rPr>
+              <a:t>A real AI coding agent (OpenAI's Codex) — not a toy stand-in.</a:t>
+            </a:r>
+          </a:p>
+          <a:p>
+            <a:pPr>
+              <a:lnSpc>
+                <a:spcPct val="108000"/>
+              </a:lnSpc>
+              <a:spcAft>
+                <a:spcPts val="900"/>
+              </a:spcAft>
+            </a:pPr>
+            <a:r>
+              <a:rPr sz="1500" b="1">
+                <a:solidFill>
+                  <a:srgbClr val="2CA02C"/>
+                </a:solidFill>
+                <a:latin typeface="Calibri"/>
+              </a:rPr>
+              <a:t>▸  </a:t>
+            </a:r>
+            <a:r>
+              <a:rPr sz="1500">
+                <a:solidFill>
+                  <a:srgbClr val="333333"/>
+                </a:solidFill>
+                <a:latin typeface="Calibri"/>
+              </a:rPr>
+              <a:t>ConnectContext plugged in exactly the way a real developer would.</a:t>
+            </a:r>
+          </a:p>
+        </p:txBody>
+      </p:sp>
+      <p:sp>
+        <p:nvSpPr>
+          <p:cNvPr id="7" name="TextBox 6"/>
+          <p:cNvSpPr txBox="1"/>
+          <p:nvPr/>
+        </p:nvSpPr>
+        <p:spPr>
+          <a:xfrm>
+            <a:off x="365760" y="5257800"/>
+            <a:ext cx="6675120" cy="640080"/>
           </a:xfrm>
           <a:prstGeom prst="rect">
             <a:avLst/>
@@ -6037,136 +6396,19 @@
           </a:bodyPr>
           <a:lstStyle/>
           <a:p>
-            <a:pPr algn="l">
+            <a:pPr algn="ctr">
               <a:lnSpc>
                 <a:spcPct val="112000"/>
               </a:lnSpc>
             </a:pPr>
             <a:r>
-              <a:rPr sz="1500" b="1" i="0">
-                <a:solidFill>
-                  <a:srgbClr val="D97706"/>
+              <a:rPr sz="1300" b="0" i="1">
+                <a:solidFill>
+                  <a:srgbClr val="666666"/>
                 </a:solidFill>
                 <a:latin typeface="Calibri"/>
               </a:rPr>
-              <a:t>🐛 Hidden naming clash</a:t>
-            </a:r>
-          </a:p>
-        </p:txBody>
-      </p:sp>
-      <p:sp>
-        <p:nvSpPr>
-          <p:cNvPr id="7" name="TextBox 6"/>
-          <p:cNvSpPr txBox="1"/>
-          <p:nvPr/>
-        </p:nvSpPr>
-        <p:spPr>
-          <a:xfrm>
-            <a:off x="7406640" y="1920240"/>
-            <a:ext cx="4480560" cy="1371600"/>
-          </a:xfrm>
-          <a:prstGeom prst="rect">
-            <a:avLst/>
-          </a:prstGeom>
-          <a:noFill/>
-        </p:spPr>
-        <p:txBody>
-          <a:bodyPr wrap="square" anchor="t">
-            <a:spAutoFit/>
-          </a:bodyPr>
-          <a:lstStyle/>
-          <a:p>
-            <a:pPr algn="l">
-              <a:lnSpc>
-                <a:spcPct val="112000"/>
-              </a:lnSpc>
-            </a:pPr>
-            <a:r>
-              <a:rPr sz="1300" b="0" i="0">
-                <a:solidFill>
-                  <a:srgbClr val="333333"/>
-                </a:solidFill>
-                <a:latin typeface="Calibri"/>
-              </a:rPr>
-              <a:t>Flask ships a file with the same name as a core Python module, which silently broke the map-builder when run inside it. Fixed by keeping it in its own safe folder.</a:t>
-            </a:r>
-          </a:p>
-        </p:txBody>
-      </p:sp>
-      <p:sp>
-        <p:nvSpPr>
-          <p:cNvPr id="8" name="TextBox 7"/>
-          <p:cNvSpPr txBox="1"/>
-          <p:nvPr/>
-        </p:nvSpPr>
-        <p:spPr>
-          <a:xfrm>
-            <a:off x="7406640" y="3429000"/>
-            <a:ext cx="4480560" cy="365760"/>
-          </a:xfrm>
-          <a:prstGeom prst="rect">
-            <a:avLst/>
-          </a:prstGeom>
-          <a:noFill/>
-        </p:spPr>
-        <p:txBody>
-          <a:bodyPr wrap="square" anchor="t">
-            <a:spAutoFit/>
-          </a:bodyPr>
-          <a:lstStyle/>
-          <a:p>
-            <a:pPr algn="l">
-              <a:lnSpc>
-                <a:spcPct val="112000"/>
-              </a:lnSpc>
-            </a:pPr>
-            <a:r>
-              <a:rPr sz="1500" b="1" i="0">
-                <a:solidFill>
-                  <a:srgbClr val="D97706"/>
-                </a:solidFill>
-                <a:latin typeface="Calibri"/>
-              </a:rPr>
-              <a:t>⏱️ Permissions limitation</a:t>
-            </a:r>
-          </a:p>
-        </p:txBody>
-      </p:sp>
-      <p:sp>
-        <p:nvSpPr>
-          <p:cNvPr id="9" name="TextBox 8"/>
-          <p:cNvSpPr txBox="1"/>
-          <p:nvPr/>
-        </p:nvSpPr>
-        <p:spPr>
-          <a:xfrm>
-            <a:off x="7406640" y="3840480"/>
-            <a:ext cx="4480560" cy="1371600"/>
-          </a:xfrm>
-          <a:prstGeom prst="rect">
-            <a:avLst/>
-          </a:prstGeom>
-          <a:noFill/>
-        </p:spPr>
-        <p:txBody>
-          <a:bodyPr wrap="square" anchor="t">
-            <a:spAutoFit/>
-          </a:bodyPr>
-          <a:lstStyle/>
-          <a:p>
-            <a:pPr algn="l">
-              <a:lnSpc>
-                <a:spcPct val="112000"/>
-              </a:lnSpc>
-            </a:pPr>
-            <a:r>
-              <a:rPr sz="1300" b="0" i="0">
-                <a:solidFill>
-                  <a:srgbClr val="333333"/>
-                </a:solidFill>
-                <a:latin typeface="Calibri"/>
-              </a:rPr>
-              <a:t>Run unattended, the AI tool wouldn't let the map get used at all — it waited for a permission click that could never come. Fixed with a setting, applied identically to both modes.</a:t>
+              <a:t>Same questions. Same AI. Same rules. The map is the only thing that's different.</a:t>
             </a:r>
           </a:p>
         </p:txBody>
@@ -6231,7 +6473,7 @@
                 </a:solidFill>
                 <a:latin typeface="Calibri"/>
               </a:rPr>
-              <a:t>How we ran it, and how we graded it</a:t>
+              <a:t>Wiring it up — and two real hiccups</a:t>
             </a:r>
           </a:p>
         </p:txBody>
@@ -6251,7 +6493,7 @@
             <a:avLst/>
           </a:prstGeom>
           <a:solidFill>
-            <a:srgbClr val="2CA02C"/>
+            <a:srgbClr val="2563EB"/>
           </a:solidFill>
           <a:ln>
             <a:noFill/>
@@ -6295,7 +6537,7 @@
             <a:avLst/>
           </a:prstGeom>
           <a:solidFill>
-            <a:srgbClr val="2CA02C"/>
+            <a:srgbClr val="2563EB"/>
           </a:solidFill>
           <a:ln>
             <a:noFill/>
@@ -6335,7 +6577,7 @@
       </p:sp>
       <p:pic>
         <p:nvPicPr>
-          <p:cNvPr id="5" name="Picture 4" descr="pipeline.png"/>
+          <p:cNvPr id="5" name="Picture 4" descr="mcp_connection.png"/>
           <p:cNvPicPr>
             <a:picLocks noChangeAspect="1"/>
           </p:cNvPicPr>
@@ -6349,38 +6591,170 @@
         </p:blipFill>
         <p:spPr>
           <a:xfrm>
-            <a:off x="3751275" y="1371600"/>
-            <a:ext cx="4658969" cy="2606040"/>
+            <a:off x="365760" y="1465236"/>
+            <a:ext cx="6857999" cy="3836088"/>
           </a:xfrm>
           <a:prstGeom prst="rect">
             <a:avLst/>
           </a:prstGeom>
         </p:spPr>
       </p:pic>
-      <p:pic>
-        <p:nvPicPr>
-          <p:cNvPr id="6" name="Picture 5" descr="grading.png"/>
-          <p:cNvPicPr>
-            <a:picLocks noChangeAspect="1"/>
-          </p:cNvPicPr>
-          <p:nvPr/>
-        </p:nvPicPr>
-        <p:blipFill>
-          <a:blip r:embed="rId3"/>
-          <a:stretch>
-            <a:fillRect/>
-          </a:stretch>
-        </p:blipFill>
-        <p:spPr>
-          <a:xfrm>
-            <a:off x="3751275" y="3977639"/>
-            <a:ext cx="4658969" cy="2606040"/>
-          </a:xfrm>
-          <a:prstGeom prst="rect">
-            <a:avLst/>
-          </a:prstGeom>
-        </p:spPr>
-      </p:pic>
+      <p:sp>
+        <p:nvSpPr>
+          <p:cNvPr id="6" name="TextBox 5"/>
+          <p:cNvSpPr txBox="1"/>
+          <p:nvPr/>
+        </p:nvSpPr>
+        <p:spPr>
+          <a:xfrm>
+            <a:off x="7406640" y="1508760"/>
+            <a:ext cx="4480560" cy="365760"/>
+          </a:xfrm>
+          <a:prstGeom prst="rect">
+            <a:avLst/>
+          </a:prstGeom>
+          <a:noFill/>
+        </p:spPr>
+        <p:txBody>
+          <a:bodyPr wrap="square" anchor="t">
+            <a:spAutoFit/>
+          </a:bodyPr>
+          <a:lstStyle/>
+          <a:p>
+            <a:pPr algn="l">
+              <a:lnSpc>
+                <a:spcPct val="112000"/>
+              </a:lnSpc>
+            </a:pPr>
+            <a:r>
+              <a:rPr sz="1500" b="1" i="0">
+                <a:solidFill>
+                  <a:srgbClr val="D97706"/>
+                </a:solidFill>
+                <a:latin typeface="Calibri"/>
+              </a:rPr>
+              <a:t>🐛 Hidden naming clash</a:t>
+            </a:r>
+          </a:p>
+        </p:txBody>
+      </p:sp>
+      <p:sp>
+        <p:nvSpPr>
+          <p:cNvPr id="7" name="TextBox 6"/>
+          <p:cNvSpPr txBox="1"/>
+          <p:nvPr/>
+        </p:nvSpPr>
+        <p:spPr>
+          <a:xfrm>
+            <a:off x="7406640" y="1920240"/>
+            <a:ext cx="4480560" cy="1371600"/>
+          </a:xfrm>
+          <a:prstGeom prst="rect">
+            <a:avLst/>
+          </a:prstGeom>
+          <a:noFill/>
+        </p:spPr>
+        <p:txBody>
+          <a:bodyPr wrap="square" anchor="t">
+            <a:spAutoFit/>
+          </a:bodyPr>
+          <a:lstStyle/>
+          <a:p>
+            <a:pPr algn="l">
+              <a:lnSpc>
+                <a:spcPct val="112000"/>
+              </a:lnSpc>
+            </a:pPr>
+            <a:r>
+              <a:rPr sz="1300" b="0" i="0">
+                <a:solidFill>
+                  <a:srgbClr val="333333"/>
+                </a:solidFill>
+                <a:latin typeface="Calibri"/>
+              </a:rPr>
+              <a:t>Flask ships a file with the same name as a core Python module, which silently broke the map-builder when run inside it. Fixed by keeping it in its own safe folder.</a:t>
+            </a:r>
+          </a:p>
+        </p:txBody>
+      </p:sp>
+      <p:sp>
+        <p:nvSpPr>
+          <p:cNvPr id="8" name="TextBox 7"/>
+          <p:cNvSpPr txBox="1"/>
+          <p:nvPr/>
+        </p:nvSpPr>
+        <p:spPr>
+          <a:xfrm>
+            <a:off x="7406640" y="3429000"/>
+            <a:ext cx="4480560" cy="365760"/>
+          </a:xfrm>
+          <a:prstGeom prst="rect">
+            <a:avLst/>
+          </a:prstGeom>
+          <a:noFill/>
+        </p:spPr>
+        <p:txBody>
+          <a:bodyPr wrap="square" anchor="t">
+            <a:spAutoFit/>
+          </a:bodyPr>
+          <a:lstStyle/>
+          <a:p>
+            <a:pPr algn="l">
+              <a:lnSpc>
+                <a:spcPct val="112000"/>
+              </a:lnSpc>
+            </a:pPr>
+            <a:r>
+              <a:rPr sz="1500" b="1" i="0">
+                <a:solidFill>
+                  <a:srgbClr val="D97706"/>
+                </a:solidFill>
+                <a:latin typeface="Calibri"/>
+              </a:rPr>
+              <a:t>⏱️ Permissions limitation</a:t>
+            </a:r>
+          </a:p>
+        </p:txBody>
+      </p:sp>
+      <p:sp>
+        <p:nvSpPr>
+          <p:cNvPr id="9" name="TextBox 8"/>
+          <p:cNvSpPr txBox="1"/>
+          <p:nvPr/>
+        </p:nvSpPr>
+        <p:spPr>
+          <a:xfrm>
+            <a:off x="7406640" y="3840480"/>
+            <a:ext cx="4480560" cy="1371600"/>
+          </a:xfrm>
+          <a:prstGeom prst="rect">
+            <a:avLst/>
+          </a:prstGeom>
+          <a:noFill/>
+        </p:spPr>
+        <p:txBody>
+          <a:bodyPr wrap="square" anchor="t">
+            <a:spAutoFit/>
+          </a:bodyPr>
+          <a:lstStyle/>
+          <a:p>
+            <a:pPr algn="l">
+              <a:lnSpc>
+                <a:spcPct val="112000"/>
+              </a:lnSpc>
+            </a:pPr>
+            <a:r>
+              <a:rPr sz="1300" b="0" i="0">
+                <a:solidFill>
+                  <a:srgbClr val="333333"/>
+                </a:solidFill>
+                <a:latin typeface="Calibri"/>
+              </a:rPr>
+              <a:t>Run unattended, the AI tool wouldn't let the map get used at all — it waited for a permission click that could never come. Fixed with a setting, applied identically to both modes.</a:t>
+            </a:r>
+          </a:p>
+        </p:txBody>
+      </p:sp>
     </p:spTree>
   </p:cSld>
   <p:clrMapOvr>
@@ -6441,7 +6815,7 @@
                 </a:solidFill>
                 <a:latin typeface="Calibri"/>
               </a:rPr>
-              <a:t>The results: roughly a coin flip</a:t>
+              <a:t>How we ran it, end to end</a:t>
             </a:r>
           </a:p>
         </p:txBody>
@@ -6538,14 +6912,14 @@
                 </a:solidFill>
                 <a:latin typeface="Calibri"/>
               </a:rPr>
-              <a:t>4 · RESULTS</a:t>
+              <a:t>3 · TESTING</a:t>
             </a:r>
           </a:p>
         </p:txBody>
       </p:sp>
       <p:pic>
         <p:nvPicPr>
-          <p:cNvPr id="5" name="Picture 4" descr="chart_headline.png"/>
+          <p:cNvPr id="5" name="Picture 4" descr="pipeline.png"/>
           <p:cNvPicPr>
             <a:picLocks noChangeAspect="1"/>
           </p:cNvPicPr>
@@ -6559,32 +6933,8 @@
         </p:blipFill>
         <p:spPr>
           <a:xfrm>
-            <a:off x="274320" y="2058787"/>
-            <a:ext cx="5852160" cy="3654825"/>
-          </a:xfrm>
-          <a:prstGeom prst="rect">
-            <a:avLst/>
-          </a:prstGeom>
-        </p:spPr>
-      </p:pic>
-      <p:pic>
-        <p:nvPicPr>
-          <p:cNvPr id="6" name="Picture 5" descr="chart_by_project.png"/>
-          <p:cNvPicPr>
-            <a:picLocks noChangeAspect="1"/>
-          </p:cNvPicPr>
-          <p:nvPr/>
-        </p:nvPicPr>
-        <p:blipFill>
-          <a:blip r:embed="rId3"/>
-          <a:stretch>
-            <a:fillRect/>
-          </a:stretch>
-        </p:blipFill>
-        <p:spPr>
-          <a:xfrm>
-            <a:off x="6172200" y="2356106"/>
-            <a:ext cx="5760720" cy="3060188"/>
+            <a:off x="1763346" y="1371600"/>
+            <a:ext cx="8634828" cy="5257800"/>
           </a:xfrm>
           <a:prstGeom prst="rect">
             <a:avLst/>
